--- a/lessons/lineynaya_regressiya/presentation.pptx
+++ b/lessons/lineynaya_regressiya/presentation.pptx
@@ -5866,7 +5866,23 @@
                   <a:srgbClr val="000000"/>
                 </a:solidFill>
               </a:rPr>
-              <a:t>Data leakage: impute/scale **до** split — статистики теста попадают в train</a:t>
+              <a:t xml:space="preserve">Data leakage: impute/scale </a:t>
+            </a:r>
+            <a:r>
+              <a:rPr lang="ru-RU" dirty="0" sz="2000" b="1">
+                <a:solidFill>
+                  <a:srgbClr val="000000"/>
+                </a:solidFill>
+              </a:rPr>
+              <a:t>до</a:t>
+            </a:r>
+            <a:r>
+              <a:rPr lang="ru-RU" dirty="0" sz="2000">
+                <a:solidFill>
+                  <a:srgbClr val="000000"/>
+                </a:solidFill>
+              </a:rPr>
+              <a:t xml:space="preserve"> split — статистики теста попадают в train</a:t>
             </a:r>
           </a:p>
           <a:p>
@@ -6565,7 +6581,23 @@
                   <a:srgbClr val="000000"/>
                 </a:solidFill>
               </a:rPr>
-              <a:t>Минимизируем **вертикальные** расстояния от точек до линии (не перпендикуляры к прямой)</a:t>
+              <a:t xml:space="preserve">Минимизируем </a:t>
+            </a:r>
+            <a:r>
+              <a:rPr lang="ru-RU" dirty="0" sz="2000" b="1">
+                <a:solidFill>
+                  <a:srgbClr val="000000"/>
+                </a:solidFill>
+              </a:rPr>
+              <a:t>вертикальные</a:t>
+            </a:r>
+            <a:r>
+              <a:rPr lang="ru-RU" dirty="0" sz="2000">
+                <a:solidFill>
+                  <a:srgbClr val="000000"/>
+                </a:solidFill>
+              </a:rPr>
+              <a:t xml:space="preserve"> расстояния от точек до линии (не перпендикуляры к прямой)</a:t>
             </a:r>
           </a:p>
           <a:p>
@@ -7649,7 +7681,23 @@
                   <a:srgbClr val="000000"/>
                 </a:solidFill>
               </a:rPr>
-              <a:t>Масштабирование нужно для **интерпретации весов** (сравнивать влияние признаков)</a:t>
+              <a:t xml:space="preserve">Масштабирование нужно для </a:t>
+            </a:r>
+            <a:r>
+              <a:rPr lang="ru-RU" dirty="0" sz="2000" b="1">
+                <a:solidFill>
+                  <a:srgbClr val="000000"/>
+                </a:solidFill>
+              </a:rPr>
+              <a:t>интерпретации весов</a:t>
+            </a:r>
+            <a:r>
+              <a:rPr lang="ru-RU" dirty="0" sz="2000">
+                <a:solidFill>
+                  <a:srgbClr val="000000"/>
+                </a:solidFill>
+              </a:rPr>
+              <a:t xml:space="preserve"> (сравнивать влияние признаков)</a:t>
             </a:r>
           </a:p>
           <a:p>
@@ -7664,7 +7712,23 @@
                   <a:srgbClr val="000000"/>
                 </a:solidFill>
               </a:rPr>
-              <a:t>Для градиентного спуска и регуляризации масштабирование **обязательно** — иначе медленная или неверная сходимость</a:t>
+              <a:t xml:space="preserve">Для градиентного спуска и регуляризации масштабирование </a:t>
+            </a:r>
+            <a:r>
+              <a:rPr lang="ru-RU" dirty="0" sz="2000" b="1">
+                <a:solidFill>
+                  <a:srgbClr val="000000"/>
+                </a:solidFill>
+              </a:rPr>
+              <a:t>обязательно</a:t>
+            </a:r>
+            <a:r>
+              <a:rPr lang="ru-RU" dirty="0" sz="2000">
+                <a:solidFill>
+                  <a:srgbClr val="000000"/>
+                </a:solidFill>
+              </a:rPr>
+              <a:t xml:space="preserve"> — иначе медленная или неверная сходимость</a:t>
             </a:r>
           </a:p>
         </p:txBody>

--- a/lessons/lineynaya_regressiya/presentation.pptx
+++ b/lessons/lineynaya_regressiya/presentation.pptx
@@ -4774,7 +4774,7 @@
         <p:spPr>
           <a:xfrm>
             <a:off x="640080" y="1371600"/>
-            <a:ext cx="11247120" cy="5029200"/>
+            <a:ext cx="6858000" cy="5029200"/>
           </a:xfrm>
           <a:prstGeom prst="rect">
             <a:avLst/>
@@ -4848,6 +4848,30 @@
           </a:p>
         </p:txBody>
       </p:sp>
+      <p:pic>
+        <p:nvPicPr>
+          <p:cNvPr id="4" name="Picture 3" descr="train_test_split.png"/>
+          <p:cNvPicPr>
+            <a:picLocks noChangeAspect="1"/>
+          </p:cNvPicPr>
+          <p:nvPr/>
+        </p:nvPicPr>
+        <p:blipFill>
+          <a:blip r:embed="rId2"/>
+          <a:stretch>
+            <a:fillRect/>
+          </a:stretch>
+        </p:blipFill>
+        <p:spPr>
+          <a:xfrm>
+            <a:off x="7635240" y="2728376"/>
+            <a:ext cx="4343400" cy="1675566"/>
+          </a:xfrm>
+          <a:prstGeom prst="rect">
+            <a:avLst/>
+          </a:prstGeom>
+        </p:spPr>
+      </p:pic>
     </p:spTree>
   </p:cSld>
   <p:clrMapOvr>
@@ -5112,8 +5136,8 @@
         </p:blipFill>
         <p:spPr>
           <a:xfrm>
-            <a:off x="7772400" y="1371600"/>
-            <a:ext cx="4114800" cy="2057400"/>
+            <a:off x="7635240" y="2569642"/>
+            <a:ext cx="4343400" cy="1993035"/>
           </a:xfrm>
           <a:prstGeom prst="rect">
             <a:avLst/>
@@ -5180,7 +5204,7 @@
         <p:spPr>
           <a:xfrm>
             <a:off x="640080" y="1371600"/>
-            <a:ext cx="11247120" cy="5029200"/>
+            <a:ext cx="6858000" cy="5029200"/>
           </a:xfrm>
           <a:prstGeom prst="rect">
             <a:avLst/>
@@ -5357,6 +5381,30 @@
           </a:p>
         </p:txBody>
       </p:sp>
+      <p:pic>
+        <p:nvPicPr>
+          <p:cNvPr id="4" name="Picture 3" descr="regression_metrics_bar.png"/>
+          <p:cNvPicPr>
+            <a:picLocks noChangeAspect="1"/>
+          </p:cNvPicPr>
+          <p:nvPr/>
+        </p:nvPicPr>
+        <p:blipFill>
+          <a:blip r:embed="rId2"/>
+          <a:stretch>
+            <a:fillRect/>
+          </a:stretch>
+        </p:blipFill>
+        <p:spPr>
+          <a:xfrm>
+            <a:off x="7635240" y="2069048"/>
+            <a:ext cx="4343400" cy="2994224"/>
+          </a:xfrm>
+          <a:prstGeom prst="rect">
+            <a:avLst/>
+          </a:prstGeom>
+        </p:spPr>
+      </p:pic>
     </p:spTree>
   </p:cSld>
   <p:clrMapOvr>
@@ -5561,8 +5609,8 @@
         </p:blipFill>
         <p:spPr>
           <a:xfrm>
-            <a:off x="7772400" y="1371600"/>
-            <a:ext cx="4114800" cy="1645920"/>
+            <a:off x="7635240" y="2697479"/>
+            <a:ext cx="4343400" cy="1737360"/>
           </a:xfrm>
           <a:prstGeom prst="rect">
             <a:avLst/>
@@ -5629,7 +5677,7 @@
         <p:spPr>
           <a:xfrm>
             <a:off x="640080" y="1371600"/>
-            <a:ext cx="11247120" cy="5029200"/>
+            <a:ext cx="6858000" cy="5029200"/>
           </a:xfrm>
           <a:prstGeom prst="rect">
             <a:avLst/>
@@ -5767,6 +5815,30 @@
           </a:p>
         </p:txBody>
       </p:sp>
+      <p:pic>
+        <p:nvPicPr>
+          <p:cNvPr id="4" name="Picture 3" descr="standardized_weights.png"/>
+          <p:cNvPicPr>
+            <a:picLocks noChangeAspect="1"/>
+          </p:cNvPicPr>
+          <p:nvPr/>
+        </p:nvPicPr>
+        <p:blipFill>
+          <a:blip r:embed="rId2"/>
+          <a:stretch>
+            <a:fillRect/>
+          </a:stretch>
+        </p:blipFill>
+        <p:spPr>
+          <a:xfrm>
+            <a:off x="7635240" y="2069048"/>
+            <a:ext cx="4343400" cy="2994224"/>
+          </a:xfrm>
+          <a:prstGeom prst="rect">
+            <a:avLst/>
+          </a:prstGeom>
+        </p:spPr>
+      </p:pic>
     </p:spTree>
   </p:cSld>
   <p:clrMapOvr>
@@ -5827,7 +5899,7 @@
         <p:spPr>
           <a:xfrm>
             <a:off x="640080" y="1371600"/>
-            <a:ext cx="11247120" cy="5029200"/>
+            <a:ext cx="6858000" cy="5029200"/>
           </a:xfrm>
           <a:prstGeom prst="rect">
             <a:avLst/>
@@ -5917,6 +5989,30 @@
           </a:p>
         </p:txBody>
       </p:sp>
+      <p:pic>
+        <p:nvPicPr>
+          <p:cNvPr id="4" name="Picture 3" descr="pipeline_leakage.png"/>
+          <p:cNvPicPr>
+            <a:picLocks noChangeAspect="1"/>
+          </p:cNvPicPr>
+          <p:nvPr/>
+        </p:nvPicPr>
+        <p:blipFill>
+          <a:blip r:embed="rId2"/>
+          <a:stretch>
+            <a:fillRect/>
+          </a:stretch>
+        </p:blipFill>
+        <p:spPr>
+          <a:xfrm>
+            <a:off x="7635240" y="2868583"/>
+            <a:ext cx="4343400" cy="1395153"/>
+          </a:xfrm>
+          <a:prstGeom prst="rect">
+            <a:avLst/>
+          </a:prstGeom>
+        </p:spPr>
+      </p:pic>
     </p:spTree>
   </p:cSld>
   <p:clrMapOvr>
@@ -6121,8 +6217,8 @@
         </p:blipFill>
         <p:spPr>
           <a:xfrm>
-            <a:off x="7772400" y="1371600"/>
-            <a:ext cx="4114800" cy="2571750"/>
+            <a:off x="7635240" y="2208847"/>
+            <a:ext cx="4343400" cy="2714625"/>
           </a:xfrm>
           <a:prstGeom prst="rect">
             <a:avLst/>
@@ -6489,8 +6585,8 @@
         </p:blipFill>
         <p:spPr>
           <a:xfrm>
-            <a:off x="7772400" y="1371600"/>
-            <a:ext cx="4114800" cy="2571750"/>
+            <a:off x="7635240" y="2208847"/>
+            <a:ext cx="4343400" cy="2714625"/>
           </a:xfrm>
           <a:prstGeom prst="rect">
             <a:avLst/>
@@ -6724,8 +6820,32 @@
         </p:blipFill>
         <p:spPr>
           <a:xfrm>
-            <a:off x="7772400" y="1371600"/>
-            <a:ext cx="4114800" cy="2571750"/>
+            <a:off x="8043976" y="1325880"/>
+            <a:ext cx="3525926" cy="2203704"/>
+          </a:xfrm>
+          <a:prstGeom prst="rect">
+            <a:avLst/>
+          </a:prstGeom>
+        </p:spPr>
+      </p:pic>
+      <p:pic>
+        <p:nvPicPr>
+          <p:cNvPr id="5" name="Picture 4" descr="residuals_histogram.png"/>
+          <p:cNvPicPr>
+            <a:picLocks noChangeAspect="1"/>
+          </p:cNvPicPr>
+          <p:nvPr/>
+        </p:nvPicPr>
+        <p:blipFill>
+          <a:blip r:embed="rId3"/>
+          <a:stretch>
+            <a:fillRect/>
+          </a:stretch>
+        </p:blipFill>
+        <p:spPr>
+          <a:xfrm>
+            <a:off x="8208601" y="3602735"/>
+            <a:ext cx="3196677" cy="2203704"/>
           </a:xfrm>
           <a:prstGeom prst="rect">
             <a:avLst/>
@@ -6792,7 +6912,7 @@
         <p:spPr>
           <a:xfrm>
             <a:off x="640080" y="1371600"/>
-            <a:ext cx="11247120" cy="5029200"/>
+            <a:ext cx="6858000" cy="5029200"/>
           </a:xfrm>
           <a:prstGeom prst="rect">
             <a:avLst/>
@@ -7056,6 +7176,30 @@
           </a:p>
         </p:txBody>
       </p:sp>
+      <p:pic>
+        <p:nvPicPr>
+          <p:cNvPr id="4" name="Picture 3" descr="mse_vs_mae_loss.png"/>
+          <p:cNvPicPr>
+            <a:picLocks noChangeAspect="1"/>
+          </p:cNvPicPr>
+          <p:nvPr/>
+        </p:nvPicPr>
+        <p:blipFill>
+          <a:blip r:embed="rId2"/>
+          <a:stretch>
+            <a:fillRect/>
+          </a:stretch>
+        </p:blipFill>
+        <p:spPr>
+          <a:xfrm>
+            <a:off x="7635240" y="2074965"/>
+            <a:ext cx="4343400" cy="2982389"/>
+          </a:xfrm>
+          <a:prstGeom prst="rect">
+            <a:avLst/>
+          </a:prstGeom>
+        </p:spPr>
+      </p:pic>
     </p:spTree>
   </p:cSld>
   <p:clrMapOvr>
@@ -7116,7 +7260,7 @@
         <p:spPr>
           <a:xfrm>
             <a:off x="640080" y="1371600"/>
-            <a:ext cx="11247120" cy="5029200"/>
+            <a:ext cx="6858000" cy="5029200"/>
           </a:xfrm>
           <a:prstGeom prst="rect">
             <a:avLst/>
@@ -7279,6 +7423,30 @@
           </a:p>
         </p:txBody>
       </p:sp>
+      <p:pic>
+        <p:nvPicPr>
+          <p:cNvPr id="4" name="Picture 3" descr="gradient_descent_contour.png"/>
+          <p:cNvPicPr>
+            <a:picLocks noChangeAspect="1"/>
+          </p:cNvPicPr>
+          <p:nvPr/>
+        </p:nvPicPr>
+        <p:blipFill>
+          <a:blip r:embed="rId2"/>
+          <a:stretch>
+            <a:fillRect/>
+          </a:stretch>
+        </p:blipFill>
+        <p:spPr>
+          <a:xfrm>
+            <a:off x="7635240" y="2069968"/>
+            <a:ext cx="4343400" cy="2992383"/>
+          </a:xfrm>
+          <a:prstGeom prst="rect">
+            <a:avLst/>
+          </a:prstGeom>
+        </p:spPr>
+      </p:pic>
     </p:spTree>
   </p:cSld>
   <p:clrMapOvr>
@@ -7339,7 +7507,7 @@
         <p:spPr>
           <a:xfrm>
             <a:off x="640080" y="1371600"/>
-            <a:ext cx="11247120" cy="5029200"/>
+            <a:ext cx="6858000" cy="5029200"/>
           </a:xfrm>
           <a:prstGeom prst="rect">
             <a:avLst/>
@@ -7552,6 +7720,30 @@
           </a:p>
         </p:txBody>
       </p:sp>
+      <p:pic>
+        <p:nvPicPr>
+          <p:cNvPr id="4" name="Picture 3" descr="hyperplane_3d.png"/>
+          <p:cNvPicPr>
+            <a:picLocks noChangeAspect="1"/>
+          </p:cNvPicPr>
+          <p:nvPr/>
+        </p:nvPicPr>
+        <p:blipFill>
+          <a:blip r:embed="rId2"/>
+          <a:stretch>
+            <a:fillRect/>
+          </a:stretch>
+        </p:blipFill>
+        <p:spPr>
+          <a:xfrm>
+            <a:off x="7661153" y="1325880"/>
+            <a:ext cx="4291573" cy="4480560"/>
+          </a:xfrm>
+          <a:prstGeom prst="rect">
+            <a:avLst/>
+          </a:prstGeom>
+        </p:spPr>
+      </p:pic>
     </p:spTree>
   </p:cSld>
   <p:clrMapOvr>
@@ -7612,7 +7804,7 @@
         <p:spPr>
           <a:xfrm>
             <a:off x="640080" y="1371600"/>
-            <a:ext cx="11247120" cy="5029200"/>
+            <a:ext cx="6858000" cy="5029200"/>
           </a:xfrm>
           <a:prstGeom prst="rect">
             <a:avLst/>
@@ -7733,6 +7925,30 @@
           </a:p>
         </p:txBody>
       </p:sp>
+      <p:pic>
+        <p:nvPicPr>
+          <p:cNvPr id="4" name="Picture 3" descr="scaling_weights_compare.png"/>
+          <p:cNvPicPr>
+            <a:picLocks noChangeAspect="1"/>
+          </p:cNvPicPr>
+          <p:nvPr/>
+        </p:nvPicPr>
+        <p:blipFill>
+          <a:blip r:embed="rId2"/>
+          <a:stretch>
+            <a:fillRect/>
+          </a:stretch>
+        </p:blipFill>
+        <p:spPr>
+          <a:xfrm>
+            <a:off x="7635240" y="2739333"/>
+            <a:ext cx="4343400" cy="1653653"/>
+          </a:xfrm>
+          <a:prstGeom prst="rect">
+            <a:avLst/>
+          </a:prstGeom>
+        </p:spPr>
+      </p:pic>
     </p:spTree>
   </p:cSld>
   <p:clrMapOvr>
@@ -7935,8 +8151,32 @@
         </p:blipFill>
         <p:spPr>
           <a:xfrm>
-            <a:off x="7772400" y="1371600"/>
-            <a:ext cx="4114800" cy="1645920"/>
+            <a:off x="7635240" y="1559051"/>
+            <a:ext cx="4343400" cy="1737360"/>
+          </a:xfrm>
+          <a:prstGeom prst="rect">
+            <a:avLst/>
+          </a:prstGeom>
+        </p:spPr>
+      </p:pic>
+      <p:pic>
+        <p:nvPicPr>
+          <p:cNvPr id="5" name="Picture 4" descr="outlier_leverage_x.png"/>
+          <p:cNvPicPr>
+            <a:picLocks noChangeAspect="1"/>
+          </p:cNvPicPr>
+          <p:nvPr/>
+        </p:nvPicPr>
+        <p:blipFill>
+          <a:blip r:embed="rId3"/>
+          <a:stretch>
+            <a:fillRect/>
+          </a:stretch>
+        </p:blipFill>
+        <p:spPr>
+          <a:xfrm>
+            <a:off x="7635240" y="3878111"/>
+            <a:ext cx="4343400" cy="1652954"/>
           </a:xfrm>
           <a:prstGeom prst="rect">
             <a:avLst/>
@@ -8003,7 +8243,7 @@
         <p:spPr>
           <a:xfrm>
             <a:off x="640080" y="1371600"/>
-            <a:ext cx="11247120" cy="5029200"/>
+            <a:ext cx="6858000" cy="5029200"/>
           </a:xfrm>
           <a:prstGeom prst="rect">
             <a:avLst/>
@@ -8101,6 +8341,30 @@
           </a:p>
         </p:txBody>
       </p:sp>
+      <p:pic>
+        <p:nvPicPr>
+          <p:cNvPr id="4" name="Picture 3" descr="multicollinearity.png"/>
+          <p:cNvPicPr>
+            <a:picLocks noChangeAspect="1"/>
+          </p:cNvPicPr>
+          <p:nvPr/>
+        </p:nvPicPr>
+        <p:blipFill>
+          <a:blip r:embed="rId2"/>
+          <a:stretch>
+            <a:fillRect/>
+          </a:stretch>
+        </p:blipFill>
+        <p:spPr>
+          <a:xfrm>
+            <a:off x="7635240" y="2652101"/>
+            <a:ext cx="4343400" cy="1828118"/>
+          </a:xfrm>
+          <a:prstGeom prst="rect">
+            <a:avLst/>
+          </a:prstGeom>
+        </p:spPr>
+      </p:pic>
     </p:spTree>
   </p:cSld>
   <p:clrMapOvr>

--- a/lessons/lineynaya_regressiya/presentation.pptx
+++ b/lessons/lineynaya_regressiya/presentation.pptx
@@ -22,6 +22,7 @@
     <p:sldId id="270" r:id="rId22"/>
     <p:sldId id="271" r:id="rId23"/>
     <p:sldId id="272" r:id="rId24"/>
+    <p:sldId id="273" r:id="rId25"/>
   </p:sldIdLst>
   <p:sldSz cx="12191695" cy="6858000" type="screen4x3"/>
   <p:notesSz cx="6858000" cy="9144000"/>
@@ -1009,6 +1010,76 @@
           <a:p>
             <a:r>
               <a:t>Можно раздать чек-лист одним слайдом в конце.</a:t>
+            </a:r>
+          </a:p>
+        </p:txBody>
+      </p:sp>
+      <p:sp>
+        <p:nvSpPr>
+          <p:cNvPr id="4" name="Slide Number Placeholder 3"/>
+          <p:cNvSpPr>
+            <a:spLocks noGrp="1"/>
+          </p:cNvSpPr>
+          <p:nvPr>
+            <p:ph type="sldNum" idx="5" sz="quarter"/>
+          </p:nvPr>
+        </p:nvSpPr>
+        <p:spPr/>
+      </p:sp>
+    </p:spTree>
+  </p:cSld>
+  <p:clrMapOvr>
+    <a:masterClrMapping/>
+  </p:clrMapOvr>
+</p:notes>
+</file>
+
+<file path=ppt/notesSlides/notesSlide17.xml><?xml version="1.0" encoding="utf-8"?>
+<p:notes xmlns:a="http://schemas.openxmlformats.org/drawingml/2006/main" xmlns:p="http://schemas.openxmlformats.org/presentationml/2006/main" xmlns:r="http://schemas.openxmlformats.org/officeDocument/2006/relationships">
+  <p:cSld>
+    <p:spTree>
+      <p:nvGrpSpPr>
+        <p:cNvPr id="1" name=""/>
+        <p:cNvGrpSpPr/>
+        <p:nvPr/>
+      </p:nvGrpSpPr>
+      <p:grpSpPr>
+        <a:xfrm>
+          <a:off x="0" y="0"/>
+          <a:ext cx="0" cy="0"/>
+          <a:chOff x="0" y="0"/>
+          <a:chExt cx="0" cy="0"/>
+        </a:xfrm>
+      </p:grpSpPr>
+      <p:sp>
+        <p:nvSpPr>
+          <p:cNvPr id="2" name="Slide Image Placeholder 1"/>
+          <p:cNvSpPr>
+            <a:spLocks noGrp="1"/>
+          </p:cNvSpPr>
+          <p:nvPr>
+            <p:ph type="sldImg" idx="2"/>
+          </p:nvPr>
+        </p:nvSpPr>
+        <p:spPr/>
+      </p:sp>
+      <p:sp>
+        <p:nvSpPr>
+          <p:cNvPr id="3" name="Notes Placeholder 2"/>
+          <p:cNvSpPr>
+            <a:spLocks noGrp="1"/>
+          </p:cNvSpPr>
+          <p:nvPr>
+            <p:ph type="body" idx="3" sz="quarter"/>
+          </p:nvPr>
+        </p:nvSpPr>
+        <p:spPr/>
+        <p:txBody>
+          <a:bodyPr/>
+          <a:lstStyle/>
+          <a:p>
+            <a:r>
+              <a:t>Colab-ссылки обновляются агентом при --apply.</a:t>
             </a:r>
           </a:p>
         </p:txBody>
@@ -4864,8 +4935,8 @@
         </p:blipFill>
         <p:spPr>
           <a:xfrm>
-            <a:off x="7635240" y="2728376"/>
-            <a:ext cx="4343400" cy="1675566"/>
+            <a:off x="7635240" y="2743231"/>
+            <a:ext cx="4343400" cy="1645857"/>
           </a:xfrm>
           <a:prstGeom prst="rect">
             <a:avLst/>
@@ -5136,8 +5207,8 @@
         </p:blipFill>
         <p:spPr>
           <a:xfrm>
-            <a:off x="7635240" y="2569642"/>
-            <a:ext cx="4343400" cy="1993035"/>
+            <a:off x="7635240" y="2585197"/>
+            <a:ext cx="4343400" cy="1961925"/>
           </a:xfrm>
           <a:prstGeom prst="rect">
             <a:avLst/>
@@ -5397,8 +5468,8 @@
         </p:blipFill>
         <p:spPr>
           <a:xfrm>
-            <a:off x="7635240" y="2069048"/>
-            <a:ext cx="4343400" cy="2994224"/>
+            <a:off x="7635240" y="2073874"/>
+            <a:ext cx="4343400" cy="2984571"/>
           </a:xfrm>
           <a:prstGeom prst="rect">
             <a:avLst/>
@@ -5609,8 +5680,8 @@
         </p:blipFill>
         <p:spPr>
           <a:xfrm>
-            <a:off x="7635240" y="2697479"/>
-            <a:ext cx="4343400" cy="1737360"/>
+            <a:off x="7635240" y="2758695"/>
+            <a:ext cx="4343400" cy="1614929"/>
           </a:xfrm>
           <a:prstGeom prst="rect">
             <a:avLst/>
@@ -5831,8 +5902,8 @@
         </p:blipFill>
         <p:spPr>
           <a:xfrm>
-            <a:off x="7635240" y="2069048"/>
-            <a:ext cx="4343400" cy="2994224"/>
+            <a:off x="7635240" y="2073874"/>
+            <a:ext cx="4343400" cy="2984571"/>
           </a:xfrm>
           <a:prstGeom prst="rect">
             <a:avLst/>
@@ -6005,8 +6076,8 @@
         </p:blipFill>
         <p:spPr>
           <a:xfrm>
-            <a:off x="7635240" y="2868583"/>
-            <a:ext cx="4343400" cy="1395153"/>
+            <a:off x="7635240" y="2857963"/>
+            <a:ext cx="4343400" cy="1416392"/>
           </a:xfrm>
           <a:prstGeom prst="rect">
             <a:avLst/>
@@ -6217,8 +6288,8 @@
         </p:blipFill>
         <p:spPr>
           <a:xfrm>
-            <a:off x="7635240" y="2208847"/>
-            <a:ext cx="4343400" cy="2714625"/>
+            <a:off x="7635240" y="2739840"/>
+            <a:ext cx="4343400" cy="1652640"/>
           </a:xfrm>
           <a:prstGeom prst="rect">
             <a:avLst/>
@@ -6398,6 +6469,470 @@
 </p:sld>
 </file>
 
+<file path=ppt/slides/slide18.xml><?xml version="1.0" encoding="utf-8"?>
+<p:sld xmlns:a="http://schemas.openxmlformats.org/drawingml/2006/main" xmlns:p="http://schemas.openxmlformats.org/presentationml/2006/main" xmlns:r="http://schemas.openxmlformats.org/officeDocument/2006/relationships">
+  <p:cSld>
+    <p:spTree>
+      <p:nvGrpSpPr>
+        <p:cNvPr id="1" name=""/>
+        <p:cNvGrpSpPr/>
+        <p:nvPr/>
+      </p:nvGrpSpPr>
+      <p:grpSpPr/>
+      <p:sp>
+        <p:nvSpPr>
+          <p:cNvPr id="2" name="TextBox 1"/>
+          <p:cNvSpPr txBox="1"/>
+          <p:nvPr/>
+        </p:nvSpPr>
+        <p:spPr>
+          <a:xfrm>
+            <a:off x="457200" y="274320"/>
+            <a:ext cx="11247120" cy="914400"/>
+          </a:xfrm>
+          <a:prstGeom prst="rect">
+            <a:avLst/>
+          </a:prstGeom>
+          <a:noFill/>
+        </p:spPr>
+        <p:txBody>
+          <a:bodyPr wrap="square">
+            <a:spAutoFit/>
+          </a:bodyPr>
+          <a:lstStyle/>
+          <a:p>
+            <a:r>
+              <a:rPr lang="ru-RU" dirty="0" sz="3200" b="1">
+                <a:solidFill>
+                  <a:srgbClr val="1A1A2E"/>
+                </a:solidFill>
+              </a:rPr>
+              <a:t>Источники и практика</a:t>
+            </a:r>
+          </a:p>
+        </p:txBody>
+      </p:sp>
+      <p:sp>
+        <p:nvSpPr>
+          <p:cNvPr id="3" name="TextBox 2"/>
+          <p:cNvSpPr txBox="1"/>
+          <p:nvPr/>
+        </p:nvSpPr>
+        <p:spPr>
+          <a:xfrm>
+            <a:off x="640080" y="1325880"/>
+            <a:ext cx="6583680" cy="320040"/>
+          </a:xfrm>
+          <a:prstGeom prst="rect">
+            <a:avLst/>
+          </a:prstGeom>
+          <a:noFill/>
+        </p:spPr>
+        <p:txBody>
+          <a:bodyPr wrap="none">
+            <a:spAutoFit/>
+          </a:bodyPr>
+          <a:lstStyle/>
+          <a:p>
+            <a:pPr>
+              <a:defRPr sz="1800" b="1">
+                <a:solidFill>
+                  <a:srgbClr val="000000"/>
+                </a:solidFill>
+              </a:defRPr>
+            </a:pPr>
+            <a:r>
+              <a:t>Литература</a:t>
+            </a:r>
+          </a:p>
+        </p:txBody>
+      </p:sp>
+      <p:sp>
+        <p:nvSpPr>
+          <p:cNvPr id="4" name="TextBox 3"/>
+          <p:cNvSpPr txBox="1"/>
+          <p:nvPr/>
+        </p:nvSpPr>
+        <p:spPr>
+          <a:xfrm>
+            <a:off x="640080" y="1673352"/>
+            <a:ext cx="6583680" cy="566928"/>
+          </a:xfrm>
+          <a:prstGeom prst="rect">
+            <a:avLst/>
+          </a:prstGeom>
+          <a:noFill/>
+        </p:spPr>
+        <p:txBody>
+          <a:bodyPr wrap="square">
+            <a:spAutoFit/>
+          </a:bodyPr>
+          <a:lstStyle/>
+          <a:p>
+            <a:pPr>
+              <a:spcAft>
+                <a:spcPts val="400"/>
+              </a:spcAft>
+            </a:pPr>
+            <a:r>
+              <a:rPr lang="ru-RU" dirty="0" sz="1600">
+                <a:solidFill>
+                  <a:srgbClr val="000000"/>
+                </a:solidFill>
+              </a:rPr>
+              <a:t xml:space="preserve">• </a:t>
+            </a:r>
+            <a:r>
+              <a:rPr sz="1600">
+                <a:solidFill>
+                  <a:srgbClr val="3366CC"/>
+                </a:solidFill>
+                <a:hlinkClick r:id="rId2"/>
+              </a:rPr>
+              <a:t>Hoerl A.E., Kennard R.W. (1970). Ridge Regression: Biased Estimation for Nonorthogonal Problems</a:t>
+            </a:r>
+          </a:p>
+        </p:txBody>
+      </p:sp>
+      <p:sp>
+        <p:nvSpPr>
+          <p:cNvPr id="5" name="TextBox 4"/>
+          <p:cNvSpPr txBox="1"/>
+          <p:nvPr/>
+        </p:nvSpPr>
+        <p:spPr>
+          <a:xfrm>
+            <a:off x="640080" y="2240280"/>
+            <a:ext cx="6583680" cy="566928"/>
+          </a:xfrm>
+          <a:prstGeom prst="rect">
+            <a:avLst/>
+          </a:prstGeom>
+          <a:noFill/>
+        </p:spPr>
+        <p:txBody>
+          <a:bodyPr wrap="square">
+            <a:spAutoFit/>
+          </a:bodyPr>
+          <a:lstStyle/>
+          <a:p>
+            <a:pPr>
+              <a:spcAft>
+                <a:spcPts val="400"/>
+              </a:spcAft>
+            </a:pPr>
+            <a:r>
+              <a:rPr lang="ru-RU" dirty="0" sz="1600">
+                <a:solidFill>
+                  <a:srgbClr val="000000"/>
+                </a:solidFill>
+              </a:rPr>
+              <a:t xml:space="preserve">• </a:t>
+            </a:r>
+            <a:r>
+              <a:rPr sz="1600">
+                <a:solidFill>
+                  <a:srgbClr val="3366CC"/>
+                </a:solidFill>
+                <a:hlinkClick r:id="rId3"/>
+              </a:rPr>
+              <a:t>Tibshirani R. (1996). Regression Shrinkage and Selection via the Lasso</a:t>
+            </a:r>
+          </a:p>
+        </p:txBody>
+      </p:sp>
+      <p:sp>
+        <p:nvSpPr>
+          <p:cNvPr id="6" name="TextBox 5"/>
+          <p:cNvSpPr txBox="1"/>
+          <p:nvPr/>
+        </p:nvSpPr>
+        <p:spPr>
+          <a:xfrm>
+            <a:off x="640080" y="2807208"/>
+            <a:ext cx="6583680" cy="566928"/>
+          </a:xfrm>
+          <a:prstGeom prst="rect">
+            <a:avLst/>
+          </a:prstGeom>
+          <a:noFill/>
+        </p:spPr>
+        <p:txBody>
+          <a:bodyPr wrap="square">
+            <a:spAutoFit/>
+          </a:bodyPr>
+          <a:lstStyle/>
+          <a:p>
+            <a:pPr>
+              <a:spcAft>
+                <a:spcPts val="400"/>
+              </a:spcAft>
+            </a:pPr>
+            <a:r>
+              <a:rPr lang="ru-RU" dirty="0" sz="1600">
+                <a:solidFill>
+                  <a:srgbClr val="000000"/>
+                </a:solidFill>
+              </a:rPr>
+              <a:t xml:space="preserve">• </a:t>
+            </a:r>
+            <a:r>
+              <a:rPr sz="1600">
+                <a:solidFill>
+                  <a:srgbClr val="3366CC"/>
+                </a:solidFill>
+                <a:hlinkClick r:id="rId4"/>
+              </a:rPr>
+              <a:t>Markov A.A. (1900). Least Squares Estimation of Linear Models</a:t>
+            </a:r>
+          </a:p>
+        </p:txBody>
+      </p:sp>
+      <p:sp>
+        <p:nvSpPr>
+          <p:cNvPr id="7" name="TextBox 6"/>
+          <p:cNvSpPr txBox="1"/>
+          <p:nvPr/>
+        </p:nvSpPr>
+        <p:spPr>
+          <a:xfrm>
+            <a:off x="640080" y="3374136"/>
+            <a:ext cx="6583680" cy="320040"/>
+          </a:xfrm>
+          <a:prstGeom prst="rect">
+            <a:avLst/>
+          </a:prstGeom>
+          <a:noFill/>
+        </p:spPr>
+        <p:txBody>
+          <a:bodyPr wrap="none">
+            <a:spAutoFit/>
+          </a:bodyPr>
+          <a:lstStyle/>
+          <a:p>
+            <a:pPr>
+              <a:defRPr sz="1800" b="1">
+                <a:solidFill>
+                  <a:srgbClr val="000000"/>
+                </a:solidFill>
+              </a:defRPr>
+            </a:pPr>
+            <a:r>
+              <a:t>Практика в Colab</a:t>
+            </a:r>
+          </a:p>
+        </p:txBody>
+      </p:sp>
+      <p:sp>
+        <p:nvSpPr>
+          <p:cNvPr id="8" name="TextBox 7"/>
+          <p:cNvSpPr txBox="1"/>
+          <p:nvPr/>
+        </p:nvSpPr>
+        <p:spPr>
+          <a:xfrm>
+            <a:off x="640080" y="3721608"/>
+            <a:ext cx="6583680" cy="457200"/>
+          </a:xfrm>
+          <a:prstGeom prst="rect">
+            <a:avLst/>
+          </a:prstGeom>
+          <a:noFill/>
+        </p:spPr>
+        <p:txBody>
+          <a:bodyPr wrap="square">
+            <a:spAutoFit/>
+          </a:bodyPr>
+          <a:lstStyle/>
+          <a:p>
+            <a:r>
+              <a:rPr lang="ru-RU" dirty="0" sz="1500">
+                <a:solidFill>
+                  <a:srgbClr val="000000"/>
+                </a:solidFill>
+              </a:rPr>
+              <a:t xml:space="preserve">• Примеры по слайдам: </a:t>
+            </a:r>
+            <a:r>
+              <a:rPr sz="1400">
+                <a:solidFill>
+                  <a:srgbClr val="3366CC"/>
+                </a:solidFill>
+                <a:hlinkClick r:id="rId5"/>
+              </a:rPr>
+              <a:t>https://colab.research.google.com/github/gurovic/ml-lessons/blob/pandas-lesson-rebuild/lessons/lineynaya_regressiya/code.ipynb</a:t>
+            </a:r>
+          </a:p>
+        </p:txBody>
+      </p:sp>
+      <p:sp>
+        <p:nvSpPr>
+          <p:cNvPr id="9" name="TextBox 8"/>
+          <p:cNvSpPr txBox="1"/>
+          <p:nvPr/>
+        </p:nvSpPr>
+        <p:spPr>
+          <a:xfrm>
+            <a:off x="640080" y="4178808"/>
+            <a:ext cx="6583680" cy="457200"/>
+          </a:xfrm>
+          <a:prstGeom prst="rect">
+            <a:avLst/>
+          </a:prstGeom>
+          <a:noFill/>
+        </p:spPr>
+        <p:txBody>
+          <a:bodyPr wrap="square">
+            <a:spAutoFit/>
+          </a:bodyPr>
+          <a:lstStyle/>
+          <a:p>
+            <a:r>
+              <a:rPr lang="ru-RU" dirty="0" sz="1500">
+                <a:solidFill>
+                  <a:srgbClr val="000000"/>
+                </a:solidFill>
+              </a:rPr>
+              <a:t xml:space="preserve">• Мини-проект: </a:t>
+            </a:r>
+            <a:r>
+              <a:rPr sz="1400">
+                <a:solidFill>
+                  <a:srgbClr val="3366CC"/>
+                </a:solidFill>
+                <a:hlinkClick r:id="rId6"/>
+              </a:rPr>
+              <a:t>https://colab.research.google.com/github/gurovic/ml-lessons/blob/pandas-lesson-rebuild/lessons/lineynaya_regressiya/project.ipynb</a:t>
+            </a:r>
+          </a:p>
+        </p:txBody>
+      </p:sp>
+      <p:pic>
+        <p:nvPicPr>
+          <p:cNvPr id="10" name="Picture 9" descr="_qr_ref_17_0.png"/>
+          <p:cNvPicPr>
+            <a:picLocks noChangeAspect="1"/>
+          </p:cNvPicPr>
+          <p:nvPr/>
+        </p:nvPicPr>
+        <p:blipFill>
+          <a:blip r:embed="rId7"/>
+          <a:stretch>
+            <a:fillRect/>
+          </a:stretch>
+        </p:blipFill>
+        <p:spPr>
+          <a:xfrm>
+            <a:off x="8229600" y="1463040"/>
+            <a:ext cx="1051560" cy="1051560"/>
+          </a:xfrm>
+          <a:prstGeom prst="rect">
+            <a:avLst/>
+          </a:prstGeom>
+        </p:spPr>
+      </p:pic>
+      <p:sp>
+        <p:nvSpPr>
+          <p:cNvPr id="11" name="TextBox 10"/>
+          <p:cNvSpPr txBox="1"/>
+          <p:nvPr/>
+        </p:nvSpPr>
+        <p:spPr>
+          <a:xfrm>
+            <a:off x="8138160" y="2532888"/>
+            <a:ext cx="1417319" cy="274320"/>
+          </a:xfrm>
+          <a:prstGeom prst="rect">
+            <a:avLst/>
+          </a:prstGeom>
+          <a:noFill/>
+        </p:spPr>
+        <p:txBody>
+          <a:bodyPr wrap="none">
+            <a:spAutoFit/>
+          </a:bodyPr>
+          <a:lstStyle/>
+          <a:p>
+            <a:pPr algn="ctr">
+              <a:defRPr sz="1000">
+                <a:solidFill>
+                  <a:srgbClr val="555555"/>
+                </a:solidFill>
+              </a:defRPr>
+            </a:pPr>
+            <a:r>
+              <a:t>Примеры по слайдам</a:t>
+            </a:r>
+          </a:p>
+        </p:txBody>
+      </p:sp>
+      <p:pic>
+        <p:nvPicPr>
+          <p:cNvPr id="12" name="Picture 11" descr="_qr_ref_17_1.png"/>
+          <p:cNvPicPr>
+            <a:picLocks noChangeAspect="1"/>
+          </p:cNvPicPr>
+          <p:nvPr/>
+        </p:nvPicPr>
+        <p:blipFill>
+          <a:blip r:embed="rId8"/>
+          <a:stretch>
+            <a:fillRect/>
+          </a:stretch>
+        </p:blipFill>
+        <p:spPr>
+          <a:xfrm>
+            <a:off x="8229600" y="3063240"/>
+            <a:ext cx="1051560" cy="1051560"/>
+          </a:xfrm>
+          <a:prstGeom prst="rect">
+            <a:avLst/>
+          </a:prstGeom>
+        </p:spPr>
+      </p:pic>
+      <p:sp>
+        <p:nvSpPr>
+          <p:cNvPr id="13" name="TextBox 12"/>
+          <p:cNvSpPr txBox="1"/>
+          <p:nvPr/>
+        </p:nvSpPr>
+        <p:spPr>
+          <a:xfrm>
+            <a:off x="8138160" y="4133087"/>
+            <a:ext cx="1417319" cy="274320"/>
+          </a:xfrm>
+          <a:prstGeom prst="rect">
+            <a:avLst/>
+          </a:prstGeom>
+          <a:noFill/>
+        </p:spPr>
+        <p:txBody>
+          <a:bodyPr wrap="none">
+            <a:spAutoFit/>
+          </a:bodyPr>
+          <a:lstStyle/>
+          <a:p>
+            <a:pPr algn="ctr">
+              <a:defRPr sz="1000">
+                <a:solidFill>
+                  <a:srgbClr val="555555"/>
+                </a:solidFill>
+              </a:defRPr>
+            </a:pPr>
+            <a:r>
+              <a:t>Мини-проект</a:t>
+            </a:r>
+          </a:p>
+        </p:txBody>
+      </p:sp>
+    </p:spTree>
+  </p:cSld>
+  <p:clrMapOvr>
+    <a:masterClrMapping/>
+  </p:clrMapOvr>
+</p:sld>
+</file>
+
 <file path=ppt/slides/slide2.xml><?xml version="1.0" encoding="utf-8"?>
 <p:sld xmlns:a="http://schemas.openxmlformats.org/drawingml/2006/main" xmlns:p="http://schemas.openxmlformats.org/presentationml/2006/main" xmlns:r="http://schemas.openxmlformats.org/officeDocument/2006/relationships">
   <p:cSld>
@@ -6585,8 +7120,8 @@
         </p:blipFill>
         <p:spPr>
           <a:xfrm>
-            <a:off x="7635240" y="2208847"/>
-            <a:ext cx="4343400" cy="2714625"/>
+            <a:off x="7635240" y="2075955"/>
+            <a:ext cx="4343400" cy="2980408"/>
           </a:xfrm>
           <a:prstGeom prst="rect">
             <a:avLst/>
@@ -6820,8 +7355,8 @@
         </p:blipFill>
         <p:spPr>
           <a:xfrm>
-            <a:off x="8043976" y="1325880"/>
-            <a:ext cx="3525926" cy="2203704"/>
+            <a:off x="8201192" y="1325880"/>
+            <a:ext cx="3211495" cy="2203704"/>
           </a:xfrm>
           <a:prstGeom prst="rect">
             <a:avLst/>
@@ -6844,8 +7379,8 @@
         </p:blipFill>
         <p:spPr>
           <a:xfrm>
-            <a:off x="8208601" y="3602735"/>
-            <a:ext cx="3196677" cy="2203704"/>
+            <a:off x="8203431" y="3602735"/>
+            <a:ext cx="3207016" cy="2203704"/>
           </a:xfrm>
           <a:prstGeom prst="rect">
             <a:avLst/>
@@ -7192,8 +7727,8 @@
         </p:blipFill>
         <p:spPr>
           <a:xfrm>
-            <a:off x="7635240" y="2074965"/>
-            <a:ext cx="4343400" cy="2982389"/>
+            <a:off x="7635240" y="2076907"/>
+            <a:ext cx="4343400" cy="2978505"/>
           </a:xfrm>
           <a:prstGeom prst="rect">
             <a:avLst/>
@@ -7439,8 +7974,8 @@
         </p:blipFill>
         <p:spPr>
           <a:xfrm>
-            <a:off x="7635240" y="2069968"/>
-            <a:ext cx="4343400" cy="2992383"/>
+            <a:off x="7635240" y="2073874"/>
+            <a:ext cx="4343400" cy="2984571"/>
           </a:xfrm>
           <a:prstGeom prst="rect">
             <a:avLst/>
@@ -7736,8 +8271,8 @@
         </p:blipFill>
         <p:spPr>
           <a:xfrm>
-            <a:off x="7661153" y="1325880"/>
-            <a:ext cx="4291573" cy="4480560"/>
+            <a:off x="7668306" y="1325880"/>
+            <a:ext cx="4277267" cy="4480559"/>
           </a:xfrm>
           <a:prstGeom prst="rect">
             <a:avLst/>
@@ -7941,8 +8476,8 @@
         </p:blipFill>
         <p:spPr>
           <a:xfrm>
-            <a:off x="7635240" y="2739333"/>
-            <a:ext cx="4343400" cy="1653653"/>
+            <a:off x="7635240" y="2727162"/>
+            <a:ext cx="4343400" cy="1677994"/>
           </a:xfrm>
           <a:prstGeom prst="rect">
             <a:avLst/>
@@ -8151,8 +8686,8 @@
         </p:blipFill>
         <p:spPr>
           <a:xfrm>
-            <a:off x="7635240" y="1559051"/>
-            <a:ext cx="4343400" cy="1737360"/>
+            <a:off x="7635240" y="1604240"/>
+            <a:ext cx="4343400" cy="1646984"/>
           </a:xfrm>
           <a:prstGeom prst="rect">
             <a:avLst/>
@@ -8175,8 +8710,8 @@
         </p:blipFill>
         <p:spPr>
           <a:xfrm>
-            <a:off x="7635240" y="3878111"/>
-            <a:ext cx="4343400" cy="1652954"/>
+            <a:off x="7635240" y="3881659"/>
+            <a:ext cx="4343400" cy="1645857"/>
           </a:xfrm>
           <a:prstGeom prst="rect">
             <a:avLst/>
@@ -8357,8 +8892,8 @@
         </p:blipFill>
         <p:spPr>
           <a:xfrm>
-            <a:off x="7635240" y="2652101"/>
-            <a:ext cx="4343400" cy="1828118"/>
+            <a:off x="7635240" y="2629149"/>
+            <a:ext cx="4343400" cy="1874021"/>
           </a:xfrm>
           <a:prstGeom prst="rect">
             <a:avLst/>

--- a/lessons/lineynaya_regressiya/presentation.pptx
+++ b/lessons/lineynaya_regressiya/presentation.pptx
@@ -6760,7 +6760,7 @@
                 </a:solidFill>
                 <a:hlinkClick r:id="rId5"/>
               </a:rPr>
-              <a:t>https://colab.research.google.com/github/gurovic/ml-lessons/blob/pandas-lesson-rebuild/lessons/lineynaya_regressiya/code.ipynb</a:t>
+              <a:t>https://colab.research.google.com/github/gurovic/ml-lessons/blob/feature/references-and-slide-code/lessons/lineynaya_regressiya/code.ipynb</a:t>
             </a:r>
           </a:p>
         </p:txBody>
@@ -6802,7 +6802,7 @@
                 </a:solidFill>
                 <a:hlinkClick r:id="rId6"/>
               </a:rPr>
-              <a:t>https://colab.research.google.com/github/gurovic/ml-lessons/blob/pandas-lesson-rebuild/lessons/lineynaya_regressiya/project.ipynb</a:t>
+              <a:t>https://colab.research.google.com/github/gurovic/ml-lessons/blob/feature/references-and-slide-code/lessons/lineynaya_regressiya/project.ipynb</a:t>
             </a:r>
           </a:p>
         </p:txBody>

--- a/lessons/lineynaya_regressiya/presentation.pptx
+++ b/lessons/lineynaya_regressiya/presentation.pptx
@@ -4845,7 +4845,7 @@
         <p:spPr>
           <a:xfrm>
             <a:off x="640080" y="1371600"/>
-            <a:ext cx="6858000" cy="5029200"/>
+            <a:ext cx="6858000" cy="1810512"/>
           </a:xfrm>
           <a:prstGeom prst="rect">
             <a:avLst/>
@@ -4919,9 +4919,192 @@
           </a:p>
         </p:txBody>
       </p:sp>
+      <p:sp>
+        <p:nvSpPr>
+          <p:cNvPr id="4" name="Rectangle 3"/>
+          <p:cNvSpPr/>
+          <p:nvPr/>
+        </p:nvSpPr>
+        <p:spPr>
+          <a:xfrm>
+            <a:off x="640080" y="3291840"/>
+            <a:ext cx="6766560" cy="978407"/>
+          </a:xfrm>
+          <a:prstGeom prst="rect">
+            <a:avLst/>
+          </a:prstGeom>
+          <a:solidFill>
+            <a:srgbClr val="F5F5F5"/>
+          </a:solidFill>
+          <a:ln>
+            <a:solidFill>
+              <a:srgbClr val="DDDDDD"/>
+            </a:solidFill>
+          </a:ln>
+        </p:spPr>
+        <p:style>
+          <a:lnRef idx="1">
+            <a:schemeClr val="accent1"/>
+          </a:lnRef>
+          <a:fillRef idx="3">
+            <a:schemeClr val="accent1"/>
+          </a:fillRef>
+          <a:effectRef idx="2">
+            <a:schemeClr val="accent1"/>
+          </a:effectRef>
+          <a:fontRef idx="minor">
+            <a:schemeClr val="lt1"/>
+          </a:fontRef>
+        </p:style>
+        <p:txBody>
+          <a:bodyPr rtlCol="0" anchor="ctr"/>
+          <a:lstStyle/>
+          <a:p>
+            <a:pPr algn="ctr"/>
+          </a:p>
+        </p:txBody>
+      </p:sp>
+      <p:sp>
+        <p:nvSpPr>
+          <p:cNvPr id="5" name="TextBox 4"/>
+          <p:cNvSpPr txBox="1"/>
+          <p:nvPr/>
+        </p:nvSpPr>
+        <p:spPr>
+          <a:xfrm>
+            <a:off x="713231" y="3328416"/>
+            <a:ext cx="6620256" cy="905255"/>
+          </a:xfrm>
+          <a:prstGeom prst="rect">
+            <a:avLst/>
+          </a:prstGeom>
+          <a:noFill/>
+        </p:spPr>
+        <p:txBody>
+          <a:bodyPr wrap="square">
+            <a:noAutofit/>
+          </a:bodyPr>
+          <a:lstStyle/>
+          <a:p>
+            <a:pPr>
+              <a:spcAft>
+                <a:spcPts val="0"/>
+              </a:spcAft>
+              <a:defRPr sz="1100">
+                <a:solidFill>
+                  <a:srgbClr val="000000"/>
+                </a:solidFill>
+                <a:latin typeface="Consolas"/>
+              </a:defRPr>
+            </a:pPr>
+            <a:r>
+              <a:t>from sklearn.model_selection import train_test_split</a:t>
+            </a:r>
+          </a:p>
+          <a:p>
+            <a:pPr>
+              <a:spcAft>
+                <a:spcPts val="0"/>
+              </a:spcAft>
+              <a:defRPr sz="1100">
+                <a:solidFill>
+                  <a:srgbClr val="000000"/>
+                </a:solidFill>
+                <a:latin typeface="Consolas"/>
+              </a:defRPr>
+            </a:pPr>
+            <a:r>
+              <a:t>X_tr, X_te, y_tr, y_te = train_test_split(</a:t>
+            </a:r>
+          </a:p>
+          <a:p>
+            <a:pPr>
+              <a:spcAft>
+                <a:spcPts val="0"/>
+              </a:spcAft>
+              <a:defRPr sz="1100">
+                <a:solidFill>
+                  <a:srgbClr val="000000"/>
+                </a:solidFill>
+                <a:latin typeface="Consolas"/>
+              </a:defRPr>
+            </a:pPr>
+            <a:r>
+              <a:t>    X, y, test_size=0.2, random_state=42</a:t>
+            </a:r>
+          </a:p>
+          <a:p>
+            <a:pPr>
+              <a:spcAft>
+                <a:spcPts val="0"/>
+              </a:spcAft>
+              <a:defRPr sz="1100">
+                <a:solidFill>
+                  <a:srgbClr val="000000"/>
+                </a:solidFill>
+                <a:latin typeface="Consolas"/>
+              </a:defRPr>
+            </a:pPr>
+            <a:r>
+              <a:t>)</a:t>
+            </a:r>
+          </a:p>
+          <a:p>
+            <a:pPr>
+              <a:spcAft>
+                <a:spcPts val="0"/>
+              </a:spcAft>
+              <a:defRPr sz="1100">
+                <a:solidFill>
+                  <a:srgbClr val="000000"/>
+                </a:solidFill>
+                <a:latin typeface="Consolas"/>
+              </a:defRPr>
+            </a:pPr>
+            <a:r>
+              <a:t>model.fit(X_tr, y_tr)  # метрики только на X_te</a:t>
+            </a:r>
+          </a:p>
+        </p:txBody>
+      </p:sp>
+      <p:sp>
+        <p:nvSpPr>
+          <p:cNvPr id="6" name="TextBox 5"/>
+          <p:cNvSpPr txBox="1"/>
+          <p:nvPr/>
+        </p:nvSpPr>
+        <p:spPr>
+          <a:xfrm>
+            <a:off x="640080" y="4325112"/>
+            <a:ext cx="6766560" cy="201168"/>
+          </a:xfrm>
+          <a:prstGeom prst="rect">
+            <a:avLst/>
+          </a:prstGeom>
+          <a:noFill/>
+        </p:spPr>
+        <p:txBody>
+          <a:bodyPr wrap="none">
+            <a:spAutoFit/>
+          </a:bodyPr>
+          <a:lstStyle/>
+          <a:p>
+            <a:pPr algn="l">
+              <a:defRPr sz="1000" i="1">
+                <a:solidFill>
+                  <a:srgbClr val="555555"/>
+                </a:solidFill>
+              </a:defRPr>
+            </a:pPr>
+            <a:r>
+              <a:t>Отложенная выборка</a:t>
+            </a:r>
+          </a:p>
+        </p:txBody>
+      </p:sp>
       <p:pic>
         <p:nvPicPr>
-          <p:cNvPr id="4" name="Picture 3" descr="train_test_split.png"/>
+          <p:cNvPr id="7" name="Picture 6" descr="train_test_split.png"/>
           <p:cNvPicPr>
             <a:picLocks noChangeAspect="1"/>
           </p:cNvPicPr>
@@ -5003,7 +5186,7 @@
         <p:spPr>
           <a:xfrm>
             <a:off x="640080" y="1371600"/>
-            <a:ext cx="6858000" cy="5029200"/>
+            <a:ext cx="6858000" cy="1810512"/>
           </a:xfrm>
           <a:prstGeom prst="rect">
             <a:avLst/>
@@ -5275,7 +5458,7 @@
         <p:spPr>
           <a:xfrm>
             <a:off x="640080" y="1371600"/>
-            <a:ext cx="6858000" cy="5029200"/>
+            <a:ext cx="6858000" cy="1810512"/>
           </a:xfrm>
           <a:prstGeom prst="rect">
             <a:avLst/>
@@ -5452,9 +5635,176 @@
           </a:p>
         </p:txBody>
       </p:sp>
+      <p:sp>
+        <p:nvSpPr>
+          <p:cNvPr id="4" name="Rectangle 3"/>
+          <p:cNvSpPr/>
+          <p:nvPr/>
+        </p:nvSpPr>
+        <p:spPr>
+          <a:xfrm>
+            <a:off x="640080" y="3291840"/>
+            <a:ext cx="6766560" cy="804672"/>
+          </a:xfrm>
+          <a:prstGeom prst="rect">
+            <a:avLst/>
+          </a:prstGeom>
+          <a:solidFill>
+            <a:srgbClr val="F5F5F5"/>
+          </a:solidFill>
+          <a:ln>
+            <a:solidFill>
+              <a:srgbClr val="DDDDDD"/>
+            </a:solidFill>
+          </a:ln>
+        </p:spPr>
+        <p:style>
+          <a:lnRef idx="1">
+            <a:schemeClr val="accent1"/>
+          </a:lnRef>
+          <a:fillRef idx="3">
+            <a:schemeClr val="accent1"/>
+          </a:fillRef>
+          <a:effectRef idx="2">
+            <a:schemeClr val="accent1"/>
+          </a:effectRef>
+          <a:fontRef idx="minor">
+            <a:schemeClr val="lt1"/>
+          </a:fontRef>
+        </p:style>
+        <p:txBody>
+          <a:bodyPr rtlCol="0" anchor="ctr"/>
+          <a:lstStyle/>
+          <a:p>
+            <a:pPr algn="ctr"/>
+          </a:p>
+        </p:txBody>
+      </p:sp>
+      <p:sp>
+        <p:nvSpPr>
+          <p:cNvPr id="5" name="TextBox 4"/>
+          <p:cNvSpPr txBox="1"/>
+          <p:nvPr/>
+        </p:nvSpPr>
+        <p:spPr>
+          <a:xfrm>
+            <a:off x="713231" y="3328416"/>
+            <a:ext cx="6620256" cy="731520"/>
+          </a:xfrm>
+          <a:prstGeom prst="rect">
+            <a:avLst/>
+          </a:prstGeom>
+          <a:noFill/>
+        </p:spPr>
+        <p:txBody>
+          <a:bodyPr wrap="square">
+            <a:noAutofit/>
+          </a:bodyPr>
+          <a:lstStyle/>
+          <a:p>
+            <a:pPr>
+              <a:spcAft>
+                <a:spcPts val="0"/>
+              </a:spcAft>
+              <a:defRPr sz="1100">
+                <a:solidFill>
+                  <a:srgbClr val="000000"/>
+                </a:solidFill>
+                <a:latin typeface="Consolas"/>
+              </a:defRPr>
+            </a:pPr>
+            <a:r>
+              <a:t>from sklearn.metrics import mean_absolute_error, r2_score</a:t>
+            </a:r>
+          </a:p>
+          <a:p>
+            <a:pPr>
+              <a:spcAft>
+                <a:spcPts val="0"/>
+              </a:spcAft>
+              <a:defRPr sz="1100">
+                <a:solidFill>
+                  <a:srgbClr val="000000"/>
+                </a:solidFill>
+                <a:latin typeface="Consolas"/>
+              </a:defRPr>
+            </a:pPr>
+            <a:r>
+              <a:t>mae = mean_absolute_error(y_te, y_pred)</a:t>
+            </a:r>
+          </a:p>
+          <a:p>
+            <a:pPr>
+              <a:spcAft>
+                <a:spcPts val="0"/>
+              </a:spcAft>
+              <a:defRPr sz="1100">
+                <a:solidFill>
+                  <a:srgbClr val="000000"/>
+                </a:solidFill>
+                <a:latin typeface="Consolas"/>
+              </a:defRPr>
+            </a:pPr>
+            <a:r>
+              <a:t>r2 = r2_score(y_te, y_pred)</a:t>
+            </a:r>
+          </a:p>
+          <a:p>
+            <a:pPr>
+              <a:spcAft>
+                <a:spcPts val="0"/>
+              </a:spcAft>
+              <a:defRPr sz="1100">
+                <a:solidFill>
+                  <a:srgbClr val="000000"/>
+                </a:solidFill>
+                <a:latin typeface="Consolas"/>
+              </a:defRPr>
+            </a:pPr>
+            <a:r>
+              <a:t>print(f'MAE={mae:.2f}, R²={r2:.3f}')</a:t>
+            </a:r>
+          </a:p>
+        </p:txBody>
+      </p:sp>
+      <p:sp>
+        <p:nvSpPr>
+          <p:cNvPr id="6" name="TextBox 5"/>
+          <p:cNvSpPr txBox="1"/>
+          <p:nvPr/>
+        </p:nvSpPr>
+        <p:spPr>
+          <a:xfrm>
+            <a:off x="640080" y="4151376"/>
+            <a:ext cx="6766560" cy="201168"/>
+          </a:xfrm>
+          <a:prstGeom prst="rect">
+            <a:avLst/>
+          </a:prstGeom>
+          <a:noFill/>
+        </p:spPr>
+        <p:txBody>
+          <a:bodyPr wrap="none">
+            <a:spAutoFit/>
+          </a:bodyPr>
+          <a:lstStyle/>
+          <a:p>
+            <a:pPr algn="l">
+              <a:defRPr sz="1000" i="1">
+                <a:solidFill>
+                  <a:srgbClr val="555555"/>
+                </a:solidFill>
+              </a:defRPr>
+            </a:pPr>
+            <a:r>
+              <a:t>MAE и R²</a:t>
+            </a:r>
+          </a:p>
+        </p:txBody>
+      </p:sp>
       <p:pic>
         <p:nvPicPr>
-          <p:cNvPr id="4" name="Picture 3" descr="regression_metrics_bar.png"/>
+          <p:cNvPr id="7" name="Picture 6" descr="regression_metrics_bar.png"/>
           <p:cNvPicPr>
             <a:picLocks noChangeAspect="1"/>
           </p:cNvPicPr>
@@ -5536,7 +5886,7 @@
         <p:spPr>
           <a:xfrm>
             <a:off x="640080" y="1371600"/>
-            <a:ext cx="6858000" cy="5029200"/>
+            <a:ext cx="6858000" cy="1810512"/>
           </a:xfrm>
           <a:prstGeom prst="rect">
             <a:avLst/>
@@ -5748,7 +6098,7 @@
         <p:spPr>
           <a:xfrm>
             <a:off x="640080" y="1371600"/>
-            <a:ext cx="6858000" cy="5029200"/>
+            <a:ext cx="6858000" cy="1810512"/>
           </a:xfrm>
           <a:prstGeom prst="rect">
             <a:avLst/>
@@ -5970,7 +6320,7 @@
         <p:spPr>
           <a:xfrm>
             <a:off x="640080" y="1371600"/>
-            <a:ext cx="6858000" cy="5029200"/>
+            <a:ext cx="6858000" cy="1810512"/>
           </a:xfrm>
           <a:prstGeom prst="rect">
             <a:avLst/>
@@ -6060,9 +6410,240 @@
           </a:p>
         </p:txBody>
       </p:sp>
+      <p:sp>
+        <p:nvSpPr>
+          <p:cNvPr id="4" name="Rectangle 3"/>
+          <p:cNvSpPr/>
+          <p:nvPr/>
+        </p:nvSpPr>
+        <p:spPr>
+          <a:xfrm>
+            <a:off x="640080" y="3291840"/>
+            <a:ext cx="6766560" cy="1499616"/>
+          </a:xfrm>
+          <a:prstGeom prst="rect">
+            <a:avLst/>
+          </a:prstGeom>
+          <a:solidFill>
+            <a:srgbClr val="F5F5F5"/>
+          </a:solidFill>
+          <a:ln>
+            <a:solidFill>
+              <a:srgbClr val="DDDDDD"/>
+            </a:solidFill>
+          </a:ln>
+        </p:spPr>
+        <p:style>
+          <a:lnRef idx="1">
+            <a:schemeClr val="accent1"/>
+          </a:lnRef>
+          <a:fillRef idx="3">
+            <a:schemeClr val="accent1"/>
+          </a:fillRef>
+          <a:effectRef idx="2">
+            <a:schemeClr val="accent1"/>
+          </a:effectRef>
+          <a:fontRef idx="minor">
+            <a:schemeClr val="lt1"/>
+          </a:fontRef>
+        </p:style>
+        <p:txBody>
+          <a:bodyPr rtlCol="0" anchor="ctr"/>
+          <a:lstStyle/>
+          <a:p>
+            <a:pPr algn="ctr"/>
+          </a:p>
+        </p:txBody>
+      </p:sp>
+      <p:sp>
+        <p:nvSpPr>
+          <p:cNvPr id="5" name="TextBox 4"/>
+          <p:cNvSpPr txBox="1"/>
+          <p:nvPr/>
+        </p:nvSpPr>
+        <p:spPr>
+          <a:xfrm>
+            <a:off x="713231" y="3328416"/>
+            <a:ext cx="6620256" cy="1426464"/>
+          </a:xfrm>
+          <a:prstGeom prst="rect">
+            <a:avLst/>
+          </a:prstGeom>
+          <a:noFill/>
+        </p:spPr>
+        <p:txBody>
+          <a:bodyPr wrap="square">
+            <a:noAutofit/>
+          </a:bodyPr>
+          <a:lstStyle/>
+          <a:p>
+            <a:pPr>
+              <a:spcAft>
+                <a:spcPts val="0"/>
+              </a:spcAft>
+              <a:defRPr sz="1100">
+                <a:solidFill>
+                  <a:srgbClr val="000000"/>
+                </a:solidFill>
+                <a:latin typeface="Consolas"/>
+              </a:defRPr>
+            </a:pPr>
+            <a:r>
+              <a:t>from sklearn.pipeline import Pipeline</a:t>
+            </a:r>
+          </a:p>
+          <a:p>
+            <a:pPr>
+              <a:spcAft>
+                <a:spcPts val="0"/>
+              </a:spcAft>
+              <a:defRPr sz="1100">
+                <a:solidFill>
+                  <a:srgbClr val="000000"/>
+                </a:solidFill>
+                <a:latin typeface="Consolas"/>
+              </a:defRPr>
+            </a:pPr>
+            <a:r>
+              <a:t>from sklearn.preprocessing import StandardScaler</a:t>
+            </a:r>
+          </a:p>
+          <a:p>
+            <a:pPr>
+              <a:spcAft>
+                <a:spcPts val="0"/>
+              </a:spcAft>
+              <a:defRPr sz="1100">
+                <a:solidFill>
+                  <a:srgbClr val="000000"/>
+                </a:solidFill>
+                <a:latin typeface="Consolas"/>
+              </a:defRPr>
+            </a:pPr>
+            <a:r>
+              <a:t>from sklearn.linear_model import LinearRegression</a:t>
+            </a:r>
+          </a:p>
+          <a:p>
+            <a:pPr>
+              <a:spcAft>
+                <a:spcPts val="0"/>
+              </a:spcAft>
+              <a:defRPr sz="1100">
+                <a:solidFill>
+                  <a:srgbClr val="000000"/>
+                </a:solidFill>
+                <a:latin typeface="Consolas"/>
+              </a:defRPr>
+            </a:pPr>
+            <a:r>
+              <a:t>pipe = Pipeline([</a:t>
+            </a:r>
+          </a:p>
+          <a:p>
+            <a:pPr>
+              <a:spcAft>
+                <a:spcPts val="0"/>
+              </a:spcAft>
+              <a:defRPr sz="1100">
+                <a:solidFill>
+                  <a:srgbClr val="000000"/>
+                </a:solidFill>
+                <a:latin typeface="Consolas"/>
+              </a:defRPr>
+            </a:pPr>
+            <a:r>
+              <a:t>    ('scaler', StandardScaler()),</a:t>
+            </a:r>
+          </a:p>
+          <a:p>
+            <a:pPr>
+              <a:spcAft>
+                <a:spcPts val="0"/>
+              </a:spcAft>
+              <a:defRPr sz="1100">
+                <a:solidFill>
+                  <a:srgbClr val="000000"/>
+                </a:solidFill>
+                <a:latin typeface="Consolas"/>
+              </a:defRPr>
+            </a:pPr>
+            <a:r>
+              <a:t>    ('reg', LinearRegression()),</a:t>
+            </a:r>
+          </a:p>
+          <a:p>
+            <a:pPr>
+              <a:spcAft>
+                <a:spcPts val="0"/>
+              </a:spcAft>
+              <a:defRPr sz="1100">
+                <a:solidFill>
+                  <a:srgbClr val="000000"/>
+                </a:solidFill>
+                <a:latin typeface="Consolas"/>
+              </a:defRPr>
+            </a:pPr>
+            <a:r>
+              <a:t>])</a:t>
+            </a:r>
+          </a:p>
+          <a:p>
+            <a:pPr>
+              <a:spcAft>
+                <a:spcPts val="0"/>
+              </a:spcAft>
+              <a:defRPr sz="1100">
+                <a:solidFill>
+                  <a:srgbClr val="000000"/>
+                </a:solidFill>
+                <a:latin typeface="Consolas"/>
+              </a:defRPr>
+            </a:pPr>
+            <a:r>
+              <a:t>pipe.fit(X_train, y_train)</a:t>
+            </a:r>
+          </a:p>
+        </p:txBody>
+      </p:sp>
+      <p:sp>
+        <p:nvSpPr>
+          <p:cNvPr id="6" name="TextBox 5"/>
+          <p:cNvSpPr txBox="1"/>
+          <p:nvPr/>
+        </p:nvSpPr>
+        <p:spPr>
+          <a:xfrm>
+            <a:off x="640080" y="4846320"/>
+            <a:ext cx="6766560" cy="201168"/>
+          </a:xfrm>
+          <a:prstGeom prst="rect">
+            <a:avLst/>
+          </a:prstGeom>
+          <a:noFill/>
+        </p:spPr>
+        <p:txBody>
+          <a:bodyPr wrap="none">
+            <a:spAutoFit/>
+          </a:bodyPr>
+          <a:lstStyle/>
+          <a:p>
+            <a:pPr algn="l">
+              <a:defRPr sz="1000" i="1">
+                <a:solidFill>
+                  <a:srgbClr val="555555"/>
+                </a:solidFill>
+              </a:defRPr>
+            </a:pPr>
+            <a:r>
+              <a:t>Pipeline без утечки</a:t>
+            </a:r>
+          </a:p>
+        </p:txBody>
+      </p:sp>
       <p:pic>
         <p:nvPicPr>
-          <p:cNvPr id="4" name="Picture 3" descr="pipeline_leakage.png"/>
+          <p:cNvPr id="7" name="Picture 6" descr="pipeline_leakage.png"/>
           <p:cNvPicPr>
             <a:picLocks noChangeAspect="1"/>
           </p:cNvPicPr>
@@ -6144,7 +6725,7 @@
         <p:spPr>
           <a:xfrm>
             <a:off x="640080" y="1371600"/>
-            <a:ext cx="6858000" cy="5029200"/>
+            <a:ext cx="6858000" cy="1810512"/>
           </a:xfrm>
           <a:prstGeom prst="rect">
             <a:avLst/>
@@ -6356,7 +6937,7 @@
         <p:spPr>
           <a:xfrm>
             <a:off x="640080" y="1371600"/>
-            <a:ext cx="11247120" cy="5029200"/>
+            <a:ext cx="11247120" cy="2194560"/>
           </a:xfrm>
           <a:prstGeom prst="rect">
             <a:avLst/>
@@ -6985,7 +7566,7 @@
         <p:spPr>
           <a:xfrm>
             <a:off x="640080" y="1371600"/>
-            <a:ext cx="6858000" cy="5029200"/>
+            <a:ext cx="6858000" cy="1810512"/>
           </a:xfrm>
           <a:prstGeom prst="rect">
             <a:avLst/>
@@ -7188,7 +7769,7 @@
         <p:spPr>
           <a:xfrm>
             <a:off x="640080" y="1371600"/>
-            <a:ext cx="6858000" cy="5029200"/>
+            <a:ext cx="6858000" cy="1810512"/>
           </a:xfrm>
           <a:prstGeom prst="rect">
             <a:avLst/>
@@ -7447,7 +8028,7 @@
         <p:spPr>
           <a:xfrm>
             <a:off x="640080" y="1371600"/>
-            <a:ext cx="6858000" cy="5029200"/>
+            <a:ext cx="6858000" cy="2194560"/>
           </a:xfrm>
           <a:prstGeom prst="rect">
             <a:avLst/>
@@ -7795,7 +8376,7 @@
         <p:spPr>
           <a:xfrm>
             <a:off x="640080" y="1371600"/>
-            <a:ext cx="6858000" cy="5029200"/>
+            <a:ext cx="6858000" cy="2194560"/>
           </a:xfrm>
           <a:prstGeom prst="rect">
             <a:avLst/>
@@ -7958,9 +8539,176 @@
           </a:p>
         </p:txBody>
       </p:sp>
+      <p:sp>
+        <p:nvSpPr>
+          <p:cNvPr id="4" name="Rectangle 3"/>
+          <p:cNvSpPr/>
+          <p:nvPr/>
+        </p:nvSpPr>
+        <p:spPr>
+          <a:xfrm>
+            <a:off x="640080" y="3675887"/>
+            <a:ext cx="6766560" cy="804672"/>
+          </a:xfrm>
+          <a:prstGeom prst="rect">
+            <a:avLst/>
+          </a:prstGeom>
+          <a:solidFill>
+            <a:srgbClr val="F5F5F5"/>
+          </a:solidFill>
+          <a:ln>
+            <a:solidFill>
+              <a:srgbClr val="DDDDDD"/>
+            </a:solidFill>
+          </a:ln>
+        </p:spPr>
+        <p:style>
+          <a:lnRef idx="1">
+            <a:schemeClr val="accent1"/>
+          </a:lnRef>
+          <a:fillRef idx="3">
+            <a:schemeClr val="accent1"/>
+          </a:fillRef>
+          <a:effectRef idx="2">
+            <a:schemeClr val="accent1"/>
+          </a:effectRef>
+          <a:fontRef idx="minor">
+            <a:schemeClr val="lt1"/>
+          </a:fontRef>
+        </p:style>
+        <p:txBody>
+          <a:bodyPr rtlCol="0" anchor="ctr"/>
+          <a:lstStyle/>
+          <a:p>
+            <a:pPr algn="ctr"/>
+          </a:p>
+        </p:txBody>
+      </p:sp>
+      <p:sp>
+        <p:nvSpPr>
+          <p:cNvPr id="5" name="TextBox 4"/>
+          <p:cNvSpPr txBox="1"/>
+          <p:nvPr/>
+        </p:nvSpPr>
+        <p:spPr>
+          <a:xfrm>
+            <a:off x="713231" y="3712463"/>
+            <a:ext cx="6620256" cy="731520"/>
+          </a:xfrm>
+          <a:prstGeom prst="rect">
+            <a:avLst/>
+          </a:prstGeom>
+          <a:noFill/>
+        </p:spPr>
+        <p:txBody>
+          <a:bodyPr wrap="square">
+            <a:noAutofit/>
+          </a:bodyPr>
+          <a:lstStyle/>
+          <a:p>
+            <a:pPr>
+              <a:spcAft>
+                <a:spcPts val="0"/>
+              </a:spcAft>
+              <a:defRPr sz="1100">
+                <a:solidFill>
+                  <a:srgbClr val="000000"/>
+                </a:solidFill>
+                <a:latin typeface="Consolas"/>
+              </a:defRPr>
+            </a:pPr>
+            <a:r>
+              <a:t>from sklearn.linear_model import LinearRegression</a:t>
+            </a:r>
+          </a:p>
+          <a:p>
+            <a:pPr>
+              <a:spcAft>
+                <a:spcPts val="0"/>
+              </a:spcAft>
+              <a:defRPr sz="1100">
+                <a:solidFill>
+                  <a:srgbClr val="000000"/>
+                </a:solidFill>
+                <a:latin typeface="Consolas"/>
+              </a:defRPr>
+            </a:pPr>
+            <a:r>
+              <a:t>model = LinearRegression()  # solver='linalg' по умолчанию</a:t>
+            </a:r>
+          </a:p>
+          <a:p>
+            <a:pPr>
+              <a:spcAft>
+                <a:spcPts val="0"/>
+              </a:spcAft>
+              <a:defRPr sz="1100">
+                <a:solidFill>
+                  <a:srgbClr val="000000"/>
+                </a:solidFill>
+                <a:latin typeface="Consolas"/>
+              </a:defRPr>
+            </a:pPr>
+            <a:r>
+              <a:t>model.fit(X_train, y_train)</a:t>
+            </a:r>
+          </a:p>
+          <a:p>
+            <a:pPr>
+              <a:spcAft>
+                <a:spcPts val="0"/>
+              </a:spcAft>
+              <a:defRPr sz="1100">
+                <a:solidFill>
+                  <a:srgbClr val="000000"/>
+                </a:solidFill>
+                <a:latin typeface="Consolas"/>
+              </a:defRPr>
+            </a:pPr>
+            <a:r>
+              <a:t>y_pred = model.predict(X_test)</a:t>
+            </a:r>
+          </a:p>
+        </p:txBody>
+      </p:sp>
+      <p:sp>
+        <p:nvSpPr>
+          <p:cNvPr id="6" name="TextBox 5"/>
+          <p:cNvSpPr txBox="1"/>
+          <p:nvPr/>
+        </p:nvSpPr>
+        <p:spPr>
+          <a:xfrm>
+            <a:off x="640080" y="4535423"/>
+            <a:ext cx="6766560" cy="201168"/>
+          </a:xfrm>
+          <a:prstGeom prst="rect">
+            <a:avLst/>
+          </a:prstGeom>
+          <a:noFill/>
+        </p:spPr>
+        <p:txBody>
+          <a:bodyPr wrap="none">
+            <a:spAutoFit/>
+          </a:bodyPr>
+          <a:lstStyle/>
+          <a:p>
+            <a:pPr algn="l">
+              <a:defRPr sz="1000" i="1">
+                <a:solidFill>
+                  <a:srgbClr val="555555"/>
+                </a:solidFill>
+              </a:defRPr>
+            </a:pPr>
+            <a:r>
+              <a:t>МНК через LinearRegression</a:t>
+            </a:r>
+          </a:p>
+        </p:txBody>
+      </p:sp>
       <p:pic>
         <p:nvPicPr>
-          <p:cNvPr id="4" name="Picture 3" descr="gradient_descent_contour.png"/>
+          <p:cNvPr id="7" name="Picture 6" descr="gradient_descent_contour.png"/>
           <p:cNvPicPr>
             <a:picLocks noChangeAspect="1"/>
           </p:cNvPicPr>
@@ -8042,7 +8790,7 @@
         <p:spPr>
           <a:xfrm>
             <a:off x="640080" y="1371600"/>
-            <a:ext cx="6858000" cy="5029200"/>
+            <a:ext cx="6858000" cy="1810512"/>
           </a:xfrm>
           <a:prstGeom prst="rect">
             <a:avLst/>
@@ -8339,7 +9087,7 @@
         <p:spPr>
           <a:xfrm>
             <a:off x="640080" y="1371600"/>
-            <a:ext cx="6858000" cy="5029200"/>
+            <a:ext cx="6858000" cy="1810512"/>
           </a:xfrm>
           <a:prstGeom prst="rect">
             <a:avLst/>
@@ -8460,9 +9208,224 @@
           </a:p>
         </p:txBody>
       </p:sp>
+      <p:sp>
+        <p:nvSpPr>
+          <p:cNvPr id="4" name="Rectangle 3"/>
+          <p:cNvSpPr/>
+          <p:nvPr/>
+        </p:nvSpPr>
+        <p:spPr>
+          <a:xfrm>
+            <a:off x="640080" y="3291840"/>
+            <a:ext cx="6766560" cy="1325880"/>
+          </a:xfrm>
+          <a:prstGeom prst="rect">
+            <a:avLst/>
+          </a:prstGeom>
+          <a:solidFill>
+            <a:srgbClr val="F5F5F5"/>
+          </a:solidFill>
+          <a:ln>
+            <a:solidFill>
+              <a:srgbClr val="DDDDDD"/>
+            </a:solidFill>
+          </a:ln>
+        </p:spPr>
+        <p:style>
+          <a:lnRef idx="1">
+            <a:schemeClr val="accent1"/>
+          </a:lnRef>
+          <a:fillRef idx="3">
+            <a:schemeClr val="accent1"/>
+          </a:fillRef>
+          <a:effectRef idx="2">
+            <a:schemeClr val="accent1"/>
+          </a:effectRef>
+          <a:fontRef idx="minor">
+            <a:schemeClr val="lt1"/>
+          </a:fontRef>
+        </p:style>
+        <p:txBody>
+          <a:bodyPr rtlCol="0" anchor="ctr"/>
+          <a:lstStyle/>
+          <a:p>
+            <a:pPr algn="ctr"/>
+          </a:p>
+        </p:txBody>
+      </p:sp>
+      <p:sp>
+        <p:nvSpPr>
+          <p:cNvPr id="5" name="TextBox 4"/>
+          <p:cNvSpPr txBox="1"/>
+          <p:nvPr/>
+        </p:nvSpPr>
+        <p:spPr>
+          <a:xfrm>
+            <a:off x="713231" y="3328416"/>
+            <a:ext cx="6620256" cy="1252728"/>
+          </a:xfrm>
+          <a:prstGeom prst="rect">
+            <a:avLst/>
+          </a:prstGeom>
+          <a:noFill/>
+        </p:spPr>
+        <p:txBody>
+          <a:bodyPr wrap="square">
+            <a:noAutofit/>
+          </a:bodyPr>
+          <a:lstStyle/>
+          <a:p>
+            <a:pPr>
+              <a:spcAft>
+                <a:spcPts val="0"/>
+              </a:spcAft>
+              <a:defRPr sz="1100">
+                <a:solidFill>
+                  <a:srgbClr val="000000"/>
+                </a:solidFill>
+                <a:latin typeface="Consolas"/>
+              </a:defRPr>
+            </a:pPr>
+            <a:r>
+              <a:t>from sklearn.preprocessing import StandardScaler, OneHotEncoder</a:t>
+            </a:r>
+          </a:p>
+          <a:p>
+            <a:pPr>
+              <a:spcAft>
+                <a:spcPts val="0"/>
+              </a:spcAft>
+              <a:defRPr sz="1100">
+                <a:solidFill>
+                  <a:srgbClr val="000000"/>
+                </a:solidFill>
+                <a:latin typeface="Consolas"/>
+              </a:defRPr>
+            </a:pPr>
+            <a:r>
+              <a:t>from sklearn.compose import ColumnTransformer</a:t>
+            </a:r>
+          </a:p>
+          <a:p>
+            <a:pPr>
+              <a:spcAft>
+                <a:spcPts val="0"/>
+              </a:spcAft>
+              <a:defRPr sz="1100">
+                <a:solidFill>
+                  <a:srgbClr val="000000"/>
+                </a:solidFill>
+                <a:latin typeface="Consolas"/>
+              </a:defRPr>
+            </a:pPr>
+            <a:r>
+              <a:t>prep = ColumnTransformer([</a:t>
+            </a:r>
+          </a:p>
+          <a:p>
+            <a:pPr>
+              <a:spcAft>
+                <a:spcPts val="0"/>
+              </a:spcAft>
+              <a:defRPr sz="1100">
+                <a:solidFill>
+                  <a:srgbClr val="000000"/>
+                </a:solidFill>
+                <a:latin typeface="Consolas"/>
+              </a:defRPr>
+            </a:pPr>
+            <a:r>
+              <a:t>    ('num', StandardScaler(), num_cols),</a:t>
+            </a:r>
+          </a:p>
+          <a:p>
+            <a:pPr>
+              <a:spcAft>
+                <a:spcPts val="0"/>
+              </a:spcAft>
+              <a:defRPr sz="1100">
+                <a:solidFill>
+                  <a:srgbClr val="000000"/>
+                </a:solidFill>
+                <a:latin typeface="Consolas"/>
+              </a:defRPr>
+            </a:pPr>
+            <a:r>
+              <a:t>    ('cat', OneHotEncoder(), cat_cols),</a:t>
+            </a:r>
+          </a:p>
+          <a:p>
+            <a:pPr>
+              <a:spcAft>
+                <a:spcPts val="0"/>
+              </a:spcAft>
+              <a:defRPr sz="1100">
+                <a:solidFill>
+                  <a:srgbClr val="000000"/>
+                </a:solidFill>
+                <a:latin typeface="Consolas"/>
+              </a:defRPr>
+            </a:pPr>
+            <a:r>
+              <a:t>])</a:t>
+            </a:r>
+          </a:p>
+          <a:p>
+            <a:pPr>
+              <a:spcAft>
+                <a:spcPts val="0"/>
+              </a:spcAft>
+              <a:defRPr sz="1100">
+                <a:solidFill>
+                  <a:srgbClr val="000000"/>
+                </a:solidFill>
+                <a:latin typeface="Consolas"/>
+              </a:defRPr>
+            </a:pPr>
+            <a:r>
+              <a:t>X_scaled = prep.fit_transform(X_train)</a:t>
+            </a:r>
+          </a:p>
+        </p:txBody>
+      </p:sp>
+      <p:sp>
+        <p:nvSpPr>
+          <p:cNvPr id="6" name="TextBox 5"/>
+          <p:cNvSpPr txBox="1"/>
+          <p:nvPr/>
+        </p:nvSpPr>
+        <p:spPr>
+          <a:xfrm>
+            <a:off x="640080" y="4672584"/>
+            <a:ext cx="6766560" cy="201168"/>
+          </a:xfrm>
+          <a:prstGeom prst="rect">
+            <a:avLst/>
+          </a:prstGeom>
+          <a:noFill/>
+        </p:spPr>
+        <p:txBody>
+          <a:bodyPr wrap="none">
+            <a:spAutoFit/>
+          </a:bodyPr>
+          <a:lstStyle/>
+          <a:p>
+            <a:pPr algn="l">
+              <a:defRPr sz="1000" i="1">
+                <a:solidFill>
+                  <a:srgbClr val="555555"/>
+                </a:solidFill>
+              </a:defRPr>
+            </a:pPr>
+            <a:r>
+              <a:t>Числа + категории</a:t>
+            </a:r>
+          </a:p>
+        </p:txBody>
+      </p:sp>
       <p:pic>
         <p:nvPicPr>
-          <p:cNvPr id="4" name="Picture 3" descr="scaling_weights_compare.png"/>
+          <p:cNvPr id="7" name="Picture 6" descr="scaling_weights_compare.png"/>
           <p:cNvPicPr>
             <a:picLocks noChangeAspect="1"/>
           </p:cNvPicPr>
@@ -8544,7 +9507,7 @@
         <p:spPr>
           <a:xfrm>
             <a:off x="640080" y="1371600"/>
-            <a:ext cx="6858000" cy="5029200"/>
+            <a:ext cx="6858000" cy="1810512"/>
           </a:xfrm>
           <a:prstGeom prst="rect">
             <a:avLst/>
@@ -8778,7 +9741,7 @@
         <p:spPr>
           <a:xfrm>
             <a:off x="640080" y="1371600"/>
-            <a:ext cx="6858000" cy="5029200"/>
+            <a:ext cx="6858000" cy="1810512"/>
           </a:xfrm>
           <a:prstGeom prst="rect">
             <a:avLst/>

--- a/lessons/lineynaya_regressiya/presentation.pptx
+++ b/lessons/lineynaya_regressiya/presentation.pptx
@@ -7341,7 +7341,7 @@
                 </a:solidFill>
                 <a:hlinkClick r:id="rId5"/>
               </a:rPr>
-              <a:t>https://colab.research.google.com/github/gurovic/ml-lessons/blob/feature/references-and-slide-code/lessons/lineynaya_regressiya/code.ipynb</a:t>
+              <a:t>https://colab.research.google.com/github/gurovic/ml-lessons/blob/main/lessons/lineynaya_regressiya/code.ipynb</a:t>
             </a:r>
           </a:p>
         </p:txBody>
@@ -7383,7 +7383,7 @@
                 </a:solidFill>
                 <a:hlinkClick r:id="rId6"/>
               </a:rPr>
-              <a:t>https://colab.research.google.com/github/gurovic/ml-lessons/blob/feature/references-and-slide-code/lessons/lineynaya_regressiya/project.ipynb</a:t>
+              <a:t>https://colab.research.google.com/github/gurovic/ml-lessons/blob/main/lessons/lineynaya_regressiya/project.ipynb</a:t>
             </a:r>
           </a:p>
         </p:txBody>

--- a/lessons/lineynaya_regressiya/presentation.pptx
+++ b/lessons/lineynaya_regressiya/presentation.pptx
@@ -4845,7 +4845,7 @@
         <p:spPr>
           <a:xfrm>
             <a:off x="640080" y="1371600"/>
-            <a:ext cx="6858000" cy="1810512"/>
+            <a:ext cx="6858000" cy="3035807"/>
           </a:xfrm>
           <a:prstGeom prst="rect">
             <a:avLst/>
@@ -4854,7 +4854,7 @@
         </p:spPr>
         <p:txBody>
           <a:bodyPr wrap="square">
-            <a:spAutoFit/>
+            <a:normAutofit/>
           </a:bodyPr>
           <a:lstStyle/>
           <a:p>
@@ -4927,7 +4927,7 @@
         </p:nvSpPr>
         <p:spPr>
           <a:xfrm>
-            <a:off x="640080" y="3291840"/>
+            <a:off x="640080" y="4517136"/>
             <a:ext cx="6766560" cy="978407"/>
           </a:xfrm>
           <a:prstGeom prst="rect">
@@ -4972,7 +4972,7 @@
         </p:nvSpPr>
         <p:spPr>
           <a:xfrm>
-            <a:off x="713231" y="3328416"/>
+            <a:off x="713231" y="4553712"/>
             <a:ext cx="6620256" cy="905255"/>
           </a:xfrm>
           <a:prstGeom prst="rect">
@@ -4981,7 +4981,7 @@
           <a:noFill/>
         </p:spPr>
         <p:txBody>
-          <a:bodyPr wrap="square">
+          <a:bodyPr wrap="none">
             <a:noAutofit/>
           </a:bodyPr>
           <a:lstStyle/>
@@ -4990,14 +4990,14 @@
               <a:spcAft>
                 <a:spcPts val="0"/>
               </a:spcAft>
-              <a:defRPr sz="1100">
+            </a:pPr>
+            <a:r>
+              <a:rPr sz="1100">
                 <a:solidFill>
                   <a:srgbClr val="000000"/>
                 </a:solidFill>
                 <a:latin typeface="Consolas"/>
-              </a:defRPr>
-            </a:pPr>
-            <a:r>
+              </a:rPr>
               <a:t>from sklearn.model_selection import train_test_split</a:t>
             </a:r>
           </a:p>
@@ -5006,14 +5006,14 @@
               <a:spcAft>
                 <a:spcPts val="0"/>
               </a:spcAft>
-              <a:defRPr sz="1100">
+            </a:pPr>
+            <a:r>
+              <a:rPr sz="1100">
                 <a:solidFill>
                   <a:srgbClr val="000000"/>
                 </a:solidFill>
                 <a:latin typeface="Consolas"/>
-              </a:defRPr>
-            </a:pPr>
-            <a:r>
+              </a:rPr>
               <a:t>X_tr, X_te, y_tr, y_te = train_test_split(</a:t>
             </a:r>
           </a:p>
@@ -5022,14 +5022,14 @@
               <a:spcAft>
                 <a:spcPts val="0"/>
               </a:spcAft>
-              <a:defRPr sz="1100">
+            </a:pPr>
+            <a:r>
+              <a:rPr sz="1100">
                 <a:solidFill>
                   <a:srgbClr val="000000"/>
                 </a:solidFill>
                 <a:latin typeface="Consolas"/>
-              </a:defRPr>
-            </a:pPr>
-            <a:r>
+              </a:rPr>
               <a:t>    X, y, test_size=0.2, random_state=42</a:t>
             </a:r>
           </a:p>
@@ -5038,14 +5038,14 @@
               <a:spcAft>
                 <a:spcPts val="0"/>
               </a:spcAft>
-              <a:defRPr sz="1100">
+            </a:pPr>
+            <a:r>
+              <a:rPr sz="1100">
                 <a:solidFill>
                   <a:srgbClr val="000000"/>
                 </a:solidFill>
                 <a:latin typeface="Consolas"/>
-              </a:defRPr>
-            </a:pPr>
-            <a:r>
+              </a:rPr>
               <a:t>)</a:t>
             </a:r>
           </a:p>
@@ -5054,14 +5054,14 @@
               <a:spcAft>
                 <a:spcPts val="0"/>
               </a:spcAft>
-              <a:defRPr sz="1100">
+            </a:pPr>
+            <a:r>
+              <a:rPr sz="1100">
                 <a:solidFill>
                   <a:srgbClr val="000000"/>
                 </a:solidFill>
                 <a:latin typeface="Consolas"/>
-              </a:defRPr>
-            </a:pPr>
-            <a:r>
+              </a:rPr>
               <a:t>model.fit(X_tr, y_tr)  # метрики только на X_te</a:t>
             </a:r>
           </a:p>
@@ -5075,7 +5075,7 @@
         </p:nvSpPr>
         <p:spPr>
           <a:xfrm>
-            <a:off x="640080" y="4325112"/>
+            <a:off x="640080" y="5550407"/>
             <a:ext cx="6766560" cy="201168"/>
           </a:xfrm>
           <a:prstGeom prst="rect">
@@ -5458,7 +5458,7 @@
         <p:spPr>
           <a:xfrm>
             <a:off x="640080" y="1371600"/>
-            <a:ext cx="6858000" cy="1810512"/>
+            <a:ext cx="6858000" cy="3209544"/>
           </a:xfrm>
           <a:prstGeom prst="rect">
             <a:avLst/>
@@ -5467,7 +5467,7 @@
         </p:spPr>
         <p:txBody>
           <a:bodyPr wrap="square">
-            <a:spAutoFit/>
+            <a:normAutofit/>
           </a:bodyPr>
           <a:lstStyle/>
           <a:p>
@@ -5643,7 +5643,7 @@
         </p:nvSpPr>
         <p:spPr>
           <a:xfrm>
-            <a:off x="640080" y="3291840"/>
+            <a:off x="640080" y="4690872"/>
             <a:ext cx="6766560" cy="804672"/>
           </a:xfrm>
           <a:prstGeom prst="rect">
@@ -5688,7 +5688,7 @@
         </p:nvSpPr>
         <p:spPr>
           <a:xfrm>
-            <a:off x="713231" y="3328416"/>
+            <a:off x="713231" y="4727448"/>
             <a:ext cx="6620256" cy="731520"/>
           </a:xfrm>
           <a:prstGeom prst="rect">
@@ -5697,7 +5697,7 @@
           <a:noFill/>
         </p:spPr>
         <p:txBody>
-          <a:bodyPr wrap="square">
+          <a:bodyPr wrap="none">
             <a:noAutofit/>
           </a:bodyPr>
           <a:lstStyle/>
@@ -5706,14 +5706,14 @@
               <a:spcAft>
                 <a:spcPts val="0"/>
               </a:spcAft>
-              <a:defRPr sz="1100">
+            </a:pPr>
+            <a:r>
+              <a:rPr sz="1100">
                 <a:solidFill>
                   <a:srgbClr val="000000"/>
                 </a:solidFill>
                 <a:latin typeface="Consolas"/>
-              </a:defRPr>
-            </a:pPr>
-            <a:r>
+              </a:rPr>
               <a:t>from sklearn.metrics import mean_absolute_error, r2_score</a:t>
             </a:r>
           </a:p>
@@ -5722,14 +5722,14 @@
               <a:spcAft>
                 <a:spcPts val="0"/>
               </a:spcAft>
-              <a:defRPr sz="1100">
+            </a:pPr>
+            <a:r>
+              <a:rPr sz="1100">
                 <a:solidFill>
                   <a:srgbClr val="000000"/>
                 </a:solidFill>
                 <a:latin typeface="Consolas"/>
-              </a:defRPr>
-            </a:pPr>
-            <a:r>
+              </a:rPr>
               <a:t>mae = mean_absolute_error(y_te, y_pred)</a:t>
             </a:r>
           </a:p>
@@ -5738,14 +5738,14 @@
               <a:spcAft>
                 <a:spcPts val="0"/>
               </a:spcAft>
-              <a:defRPr sz="1100">
+            </a:pPr>
+            <a:r>
+              <a:rPr sz="1100">
                 <a:solidFill>
                   <a:srgbClr val="000000"/>
                 </a:solidFill>
                 <a:latin typeface="Consolas"/>
-              </a:defRPr>
-            </a:pPr>
-            <a:r>
+              </a:rPr>
               <a:t>r2 = r2_score(y_te, y_pred)</a:t>
             </a:r>
           </a:p>
@@ -5754,14 +5754,14 @@
               <a:spcAft>
                 <a:spcPts val="0"/>
               </a:spcAft>
-              <a:defRPr sz="1100">
+            </a:pPr>
+            <a:r>
+              <a:rPr sz="1100">
                 <a:solidFill>
                   <a:srgbClr val="000000"/>
                 </a:solidFill>
                 <a:latin typeface="Consolas"/>
-              </a:defRPr>
-            </a:pPr>
-            <a:r>
+              </a:rPr>
               <a:t>print(f'MAE={mae:.2f}, R²={r2:.3f}')</a:t>
             </a:r>
           </a:p>
@@ -5775,7 +5775,7 @@
         </p:nvSpPr>
         <p:spPr>
           <a:xfrm>
-            <a:off x="640080" y="4151376"/>
+            <a:off x="640080" y="5550408"/>
             <a:ext cx="6766560" cy="201168"/>
           </a:xfrm>
           <a:prstGeom prst="rect">
@@ -6320,7 +6320,7 @@
         <p:spPr>
           <a:xfrm>
             <a:off x="640080" y="1371600"/>
-            <a:ext cx="6858000" cy="1810512"/>
+            <a:ext cx="6858000" cy="2514599"/>
           </a:xfrm>
           <a:prstGeom prst="rect">
             <a:avLst/>
@@ -6329,7 +6329,7 @@
         </p:spPr>
         <p:txBody>
           <a:bodyPr wrap="square">
-            <a:spAutoFit/>
+            <a:normAutofit/>
           </a:bodyPr>
           <a:lstStyle/>
           <a:p>
@@ -6418,7 +6418,7 @@
         </p:nvSpPr>
         <p:spPr>
           <a:xfrm>
-            <a:off x="640080" y="3291840"/>
+            <a:off x="640080" y="3995927"/>
             <a:ext cx="6766560" cy="1499616"/>
           </a:xfrm>
           <a:prstGeom prst="rect">
@@ -6463,7 +6463,7 @@
         </p:nvSpPr>
         <p:spPr>
           <a:xfrm>
-            <a:off x="713231" y="3328416"/>
+            <a:off x="713231" y="4032503"/>
             <a:ext cx="6620256" cy="1426464"/>
           </a:xfrm>
           <a:prstGeom prst="rect">
@@ -6472,7 +6472,7 @@
           <a:noFill/>
         </p:spPr>
         <p:txBody>
-          <a:bodyPr wrap="square">
+          <a:bodyPr wrap="none">
             <a:noAutofit/>
           </a:bodyPr>
           <a:lstStyle/>
@@ -6481,14 +6481,14 @@
               <a:spcAft>
                 <a:spcPts val="0"/>
               </a:spcAft>
-              <a:defRPr sz="1100">
+            </a:pPr>
+            <a:r>
+              <a:rPr sz="1100">
                 <a:solidFill>
                   <a:srgbClr val="000000"/>
                 </a:solidFill>
                 <a:latin typeface="Consolas"/>
-              </a:defRPr>
-            </a:pPr>
-            <a:r>
+              </a:rPr>
               <a:t>from sklearn.pipeline import Pipeline</a:t>
             </a:r>
           </a:p>
@@ -6497,14 +6497,14 @@
               <a:spcAft>
                 <a:spcPts val="0"/>
               </a:spcAft>
-              <a:defRPr sz="1100">
+            </a:pPr>
+            <a:r>
+              <a:rPr sz="1100">
                 <a:solidFill>
                   <a:srgbClr val="000000"/>
                 </a:solidFill>
                 <a:latin typeface="Consolas"/>
-              </a:defRPr>
-            </a:pPr>
-            <a:r>
+              </a:rPr>
               <a:t>from sklearn.preprocessing import StandardScaler</a:t>
             </a:r>
           </a:p>
@@ -6513,14 +6513,14 @@
               <a:spcAft>
                 <a:spcPts val="0"/>
               </a:spcAft>
-              <a:defRPr sz="1100">
+            </a:pPr>
+            <a:r>
+              <a:rPr sz="1100">
                 <a:solidFill>
                   <a:srgbClr val="000000"/>
                 </a:solidFill>
                 <a:latin typeface="Consolas"/>
-              </a:defRPr>
-            </a:pPr>
-            <a:r>
+              </a:rPr>
               <a:t>from sklearn.linear_model import LinearRegression</a:t>
             </a:r>
           </a:p>
@@ -6529,14 +6529,14 @@
               <a:spcAft>
                 <a:spcPts val="0"/>
               </a:spcAft>
-              <a:defRPr sz="1100">
+            </a:pPr>
+            <a:r>
+              <a:rPr sz="1100">
                 <a:solidFill>
                   <a:srgbClr val="000000"/>
                 </a:solidFill>
                 <a:latin typeface="Consolas"/>
-              </a:defRPr>
-            </a:pPr>
-            <a:r>
+              </a:rPr>
               <a:t>pipe = Pipeline([</a:t>
             </a:r>
           </a:p>
@@ -6545,14 +6545,14 @@
               <a:spcAft>
                 <a:spcPts val="0"/>
               </a:spcAft>
-              <a:defRPr sz="1100">
+            </a:pPr>
+            <a:r>
+              <a:rPr sz="1100">
                 <a:solidFill>
                   <a:srgbClr val="000000"/>
                 </a:solidFill>
                 <a:latin typeface="Consolas"/>
-              </a:defRPr>
-            </a:pPr>
-            <a:r>
+              </a:rPr>
               <a:t>    ('scaler', StandardScaler()),</a:t>
             </a:r>
           </a:p>
@@ -6561,14 +6561,14 @@
               <a:spcAft>
                 <a:spcPts val="0"/>
               </a:spcAft>
-              <a:defRPr sz="1100">
+            </a:pPr>
+            <a:r>
+              <a:rPr sz="1100">
                 <a:solidFill>
                   <a:srgbClr val="000000"/>
                 </a:solidFill>
                 <a:latin typeface="Consolas"/>
-              </a:defRPr>
-            </a:pPr>
-            <a:r>
+              </a:rPr>
               <a:t>    ('reg', LinearRegression()),</a:t>
             </a:r>
           </a:p>
@@ -6577,14 +6577,14 @@
               <a:spcAft>
                 <a:spcPts val="0"/>
               </a:spcAft>
-              <a:defRPr sz="1100">
+            </a:pPr>
+            <a:r>
+              <a:rPr sz="1100">
                 <a:solidFill>
                   <a:srgbClr val="000000"/>
                 </a:solidFill>
                 <a:latin typeface="Consolas"/>
-              </a:defRPr>
-            </a:pPr>
-            <a:r>
+              </a:rPr>
               <a:t>])</a:t>
             </a:r>
           </a:p>
@@ -6593,14 +6593,14 @@
               <a:spcAft>
                 <a:spcPts val="0"/>
               </a:spcAft>
-              <a:defRPr sz="1100">
+            </a:pPr>
+            <a:r>
+              <a:rPr sz="1100">
                 <a:solidFill>
                   <a:srgbClr val="000000"/>
                 </a:solidFill>
                 <a:latin typeface="Consolas"/>
-              </a:defRPr>
-            </a:pPr>
-            <a:r>
+              </a:rPr>
               <a:t>pipe.fit(X_train, y_train)</a:t>
             </a:r>
           </a:p>
@@ -6614,7 +6614,7 @@
         </p:nvSpPr>
         <p:spPr>
           <a:xfrm>
-            <a:off x="640080" y="4846320"/>
+            <a:off x="640080" y="5550407"/>
             <a:ext cx="6766560" cy="201168"/>
           </a:xfrm>
           <a:prstGeom prst="rect">
@@ -8376,7 +8376,7 @@
         <p:spPr>
           <a:xfrm>
             <a:off x="640080" y="1371600"/>
-            <a:ext cx="6858000" cy="2194560"/>
+            <a:ext cx="6858000" cy="3209544"/>
           </a:xfrm>
           <a:prstGeom prst="rect">
             <a:avLst/>
@@ -8385,7 +8385,7 @@
         </p:spPr>
         <p:txBody>
           <a:bodyPr wrap="square">
-            <a:spAutoFit/>
+            <a:normAutofit/>
           </a:bodyPr>
           <a:lstStyle/>
           <a:p>
@@ -8547,7 +8547,7 @@
         </p:nvSpPr>
         <p:spPr>
           <a:xfrm>
-            <a:off x="640080" y="3675887"/>
+            <a:off x="640080" y="4690872"/>
             <a:ext cx="6766560" cy="804672"/>
           </a:xfrm>
           <a:prstGeom prst="rect">
@@ -8592,7 +8592,7 @@
         </p:nvSpPr>
         <p:spPr>
           <a:xfrm>
-            <a:off x="713231" y="3712463"/>
+            <a:off x="713231" y="4727448"/>
             <a:ext cx="6620256" cy="731520"/>
           </a:xfrm>
           <a:prstGeom prst="rect">
@@ -8601,7 +8601,7 @@
           <a:noFill/>
         </p:spPr>
         <p:txBody>
-          <a:bodyPr wrap="square">
+          <a:bodyPr wrap="none">
             <a:noAutofit/>
           </a:bodyPr>
           <a:lstStyle/>
@@ -8610,14 +8610,14 @@
               <a:spcAft>
                 <a:spcPts val="0"/>
               </a:spcAft>
-              <a:defRPr sz="1100">
+            </a:pPr>
+            <a:r>
+              <a:rPr sz="1100">
                 <a:solidFill>
                   <a:srgbClr val="000000"/>
                 </a:solidFill>
                 <a:latin typeface="Consolas"/>
-              </a:defRPr>
-            </a:pPr>
-            <a:r>
+              </a:rPr>
               <a:t>from sklearn.linear_model import LinearRegression</a:t>
             </a:r>
           </a:p>
@@ -8626,14 +8626,14 @@
               <a:spcAft>
                 <a:spcPts val="0"/>
               </a:spcAft>
-              <a:defRPr sz="1100">
+            </a:pPr>
+            <a:r>
+              <a:rPr sz="1100">
                 <a:solidFill>
                   <a:srgbClr val="000000"/>
                 </a:solidFill>
                 <a:latin typeface="Consolas"/>
-              </a:defRPr>
-            </a:pPr>
-            <a:r>
+              </a:rPr>
               <a:t>model = LinearRegression()  # solver='linalg' по умолчанию</a:t>
             </a:r>
           </a:p>
@@ -8642,14 +8642,14 @@
               <a:spcAft>
                 <a:spcPts val="0"/>
               </a:spcAft>
-              <a:defRPr sz="1100">
+            </a:pPr>
+            <a:r>
+              <a:rPr sz="1100">
                 <a:solidFill>
                   <a:srgbClr val="000000"/>
                 </a:solidFill>
                 <a:latin typeface="Consolas"/>
-              </a:defRPr>
-            </a:pPr>
-            <a:r>
+              </a:rPr>
               <a:t>model.fit(X_train, y_train)</a:t>
             </a:r>
           </a:p>
@@ -8658,14 +8658,14 @@
               <a:spcAft>
                 <a:spcPts val="0"/>
               </a:spcAft>
-              <a:defRPr sz="1100">
+            </a:pPr>
+            <a:r>
+              <a:rPr sz="1100">
                 <a:solidFill>
                   <a:srgbClr val="000000"/>
                 </a:solidFill>
                 <a:latin typeface="Consolas"/>
-              </a:defRPr>
-            </a:pPr>
-            <a:r>
+              </a:rPr>
               <a:t>y_pred = model.predict(X_test)</a:t>
             </a:r>
           </a:p>
@@ -8679,7 +8679,7 @@
         </p:nvSpPr>
         <p:spPr>
           <a:xfrm>
-            <a:off x="640080" y="4535423"/>
+            <a:off x="640080" y="5550408"/>
             <a:ext cx="6766560" cy="201168"/>
           </a:xfrm>
           <a:prstGeom prst="rect">
@@ -9087,7 +9087,7 @@
         <p:spPr>
           <a:xfrm>
             <a:off x="640080" y="1371600"/>
-            <a:ext cx="6858000" cy="1810512"/>
+            <a:ext cx="6858000" cy="2688335"/>
           </a:xfrm>
           <a:prstGeom prst="rect">
             <a:avLst/>
@@ -9096,7 +9096,7 @@
         </p:spPr>
         <p:txBody>
           <a:bodyPr wrap="square">
-            <a:spAutoFit/>
+            <a:normAutofit/>
           </a:bodyPr>
           <a:lstStyle/>
           <a:p>
@@ -9216,7 +9216,7 @@
         </p:nvSpPr>
         <p:spPr>
           <a:xfrm>
-            <a:off x="640080" y="3291840"/>
+            <a:off x="640080" y="4169663"/>
             <a:ext cx="6766560" cy="1325880"/>
           </a:xfrm>
           <a:prstGeom prst="rect">
@@ -9261,7 +9261,7 @@
         </p:nvSpPr>
         <p:spPr>
           <a:xfrm>
-            <a:off x="713231" y="3328416"/>
+            <a:off x="713231" y="4206240"/>
             <a:ext cx="6620256" cy="1252728"/>
           </a:xfrm>
           <a:prstGeom prst="rect">
@@ -9270,7 +9270,7 @@
           <a:noFill/>
         </p:spPr>
         <p:txBody>
-          <a:bodyPr wrap="square">
+          <a:bodyPr wrap="none">
             <a:noAutofit/>
           </a:bodyPr>
           <a:lstStyle/>
@@ -9279,14 +9279,14 @@
               <a:spcAft>
                 <a:spcPts val="0"/>
               </a:spcAft>
-              <a:defRPr sz="1100">
+            </a:pPr>
+            <a:r>
+              <a:rPr sz="1100">
                 <a:solidFill>
                   <a:srgbClr val="000000"/>
                 </a:solidFill>
                 <a:latin typeface="Consolas"/>
-              </a:defRPr>
-            </a:pPr>
-            <a:r>
+              </a:rPr>
               <a:t>from sklearn.preprocessing import StandardScaler, OneHotEncoder</a:t>
             </a:r>
           </a:p>
@@ -9295,14 +9295,14 @@
               <a:spcAft>
                 <a:spcPts val="0"/>
               </a:spcAft>
-              <a:defRPr sz="1100">
+            </a:pPr>
+            <a:r>
+              <a:rPr sz="1100">
                 <a:solidFill>
                   <a:srgbClr val="000000"/>
                 </a:solidFill>
                 <a:latin typeface="Consolas"/>
-              </a:defRPr>
-            </a:pPr>
-            <a:r>
+              </a:rPr>
               <a:t>from sklearn.compose import ColumnTransformer</a:t>
             </a:r>
           </a:p>
@@ -9311,14 +9311,14 @@
               <a:spcAft>
                 <a:spcPts val="0"/>
               </a:spcAft>
-              <a:defRPr sz="1100">
+            </a:pPr>
+            <a:r>
+              <a:rPr sz="1100">
                 <a:solidFill>
                   <a:srgbClr val="000000"/>
                 </a:solidFill>
                 <a:latin typeface="Consolas"/>
-              </a:defRPr>
-            </a:pPr>
-            <a:r>
+              </a:rPr>
               <a:t>prep = ColumnTransformer([</a:t>
             </a:r>
           </a:p>
@@ -9327,14 +9327,14 @@
               <a:spcAft>
                 <a:spcPts val="0"/>
               </a:spcAft>
-              <a:defRPr sz="1100">
+            </a:pPr>
+            <a:r>
+              <a:rPr sz="1100">
                 <a:solidFill>
                   <a:srgbClr val="000000"/>
                 </a:solidFill>
                 <a:latin typeface="Consolas"/>
-              </a:defRPr>
-            </a:pPr>
-            <a:r>
+              </a:rPr>
               <a:t>    ('num', StandardScaler(), num_cols),</a:t>
             </a:r>
           </a:p>
@@ -9343,14 +9343,14 @@
               <a:spcAft>
                 <a:spcPts val="0"/>
               </a:spcAft>
-              <a:defRPr sz="1100">
+            </a:pPr>
+            <a:r>
+              <a:rPr sz="1100">
                 <a:solidFill>
                   <a:srgbClr val="000000"/>
                 </a:solidFill>
                 <a:latin typeface="Consolas"/>
-              </a:defRPr>
-            </a:pPr>
-            <a:r>
+              </a:rPr>
               <a:t>    ('cat', OneHotEncoder(), cat_cols),</a:t>
             </a:r>
           </a:p>
@@ -9359,14 +9359,14 @@
               <a:spcAft>
                 <a:spcPts val="0"/>
               </a:spcAft>
-              <a:defRPr sz="1100">
+            </a:pPr>
+            <a:r>
+              <a:rPr sz="1100">
                 <a:solidFill>
                   <a:srgbClr val="000000"/>
                 </a:solidFill>
                 <a:latin typeface="Consolas"/>
-              </a:defRPr>
-            </a:pPr>
-            <a:r>
+              </a:rPr>
               <a:t>])</a:t>
             </a:r>
           </a:p>
@@ -9375,14 +9375,14 @@
               <a:spcAft>
                 <a:spcPts val="0"/>
               </a:spcAft>
-              <a:defRPr sz="1100">
+            </a:pPr>
+            <a:r>
+              <a:rPr sz="1100">
                 <a:solidFill>
                   <a:srgbClr val="000000"/>
                 </a:solidFill>
                 <a:latin typeface="Consolas"/>
-              </a:defRPr>
-            </a:pPr>
-            <a:r>
+              </a:rPr>
               <a:t>X_scaled = prep.fit_transform(X_train)</a:t>
             </a:r>
           </a:p>
@@ -9396,7 +9396,7 @@
         </p:nvSpPr>
         <p:spPr>
           <a:xfrm>
-            <a:off x="640080" y="4672584"/>
+            <a:off x="640080" y="5550408"/>
             <a:ext cx="6766560" cy="201168"/>
           </a:xfrm>
           <a:prstGeom prst="rect">

--- a/lessons/lineynaya_regressiya/presentation.pptx
+++ b/lessons/lineynaya_regressiya/presentation.pptx
@@ -4780,7 +4780,7 @@
               </a:defRPr>
             </a:pPr>
             <a:r>
-              <a:t>28.06.2026</a:t>
+              <a:t>29.06.2026</a:t>
             </a:r>
           </a:p>
         </p:txBody>

--- a/lessons/lineynaya_regressiya/presentation.pptx
+++ b/lessons/lineynaya_regressiya/presentation.pptx
@@ -4845,7 +4845,7 @@
         <p:spPr>
           <a:xfrm>
             <a:off x="640080" y="1371600"/>
-            <a:ext cx="6858000" cy="3035807"/>
+            <a:ext cx="6583680" cy="3035807"/>
           </a:xfrm>
           <a:prstGeom prst="rect">
             <a:avLst/>
@@ -4928,7 +4928,7 @@
         <p:spPr>
           <a:xfrm>
             <a:off x="640080" y="4517136"/>
-            <a:ext cx="6766560" cy="978407"/>
+            <a:ext cx="6492240" cy="978407"/>
           </a:xfrm>
           <a:prstGeom prst="rect">
             <a:avLst/>
@@ -4973,7 +4973,7 @@
         <p:spPr>
           <a:xfrm>
             <a:off x="713231" y="4553712"/>
-            <a:ext cx="6620256" cy="905255"/>
+            <a:ext cx="6345936" cy="905255"/>
           </a:xfrm>
           <a:prstGeom prst="rect">
             <a:avLst/>
@@ -5076,7 +5076,7 @@
         <p:spPr>
           <a:xfrm>
             <a:off x="640080" y="5550407"/>
-            <a:ext cx="6766560" cy="201168"/>
+            <a:ext cx="6492240" cy="201168"/>
           </a:xfrm>
           <a:prstGeom prst="rect">
             <a:avLst/>
@@ -5118,8 +5118,8 @@
         </p:blipFill>
         <p:spPr>
           <a:xfrm>
-            <a:off x="7635240" y="2743231"/>
-            <a:ext cx="4343400" cy="1645857"/>
+            <a:off x="5037749" y="3703320"/>
+            <a:ext cx="6292261" cy="2560320"/>
           </a:xfrm>
           <a:prstGeom prst="rect">
             <a:avLst/>
@@ -5186,7 +5186,7 @@
         <p:spPr>
           <a:xfrm>
             <a:off x="640080" y="1371600"/>
-            <a:ext cx="6858000" cy="1810512"/>
+            <a:ext cx="6583680" cy="2194560"/>
           </a:xfrm>
           <a:prstGeom prst="rect">
             <a:avLst/>
@@ -5274,7 +5274,23 @@
                   <a:srgbClr val="000000"/>
                 </a:solidFill>
               </a:rPr>
-              <a:t xml:space="preserve"> — сжимает веса, помогает при мультиколлинеарности</a:t>
+              <a:t xml:space="preserve"> — сжимает веса </a:t>
+            </a:r>
+            <a:r>
+              <a:rPr lang="ru-RU" dirty="0" sz="2000" b="1">
+                <a:solidFill>
+                  <a:srgbClr val="000000"/>
+                </a:solidFill>
+              </a:rPr>
+              <a:t>вместе</a:t>
+            </a:r>
+            <a:r>
+              <a:rPr lang="ru-RU" dirty="0" sz="2000">
+                <a:solidFill>
+                  <a:srgbClr val="000000"/>
+                </a:solidFill>
+              </a:rPr>
+              <a:t>, не обнуляя; стабилизирует при мультиколлинеарности</a:t>
             </a:r>
           </a:p>
           <a:p>
@@ -5339,7 +5355,38 @@
                   <a:srgbClr val="000000"/>
                 </a:solidFill>
               </a:rPr>
-              <a:t xml:space="preserve"> — может обнулять веса → отбор признаков</a:t>
+              <a:t xml:space="preserve"> — обнуляет слабые признаки → отбор фич, но не лечит дублирующие столбцы</a:t>
+            </a:r>
+          </a:p>
+          <a:p>
+            <a:pPr>
+              <a:spcAft>
+                <a:spcPts val="800"/>
+              </a:spcAft>
+            </a:pPr>
+            <a:r>
+              <a:rPr lang="ru-RU" dirty="0" sz="2000">
+                <a:solidFill>
+                  <a:srgbClr val="000000"/>
+                </a:solidFill>
+              </a:rPr>
+              <a:t xml:space="preserve">При коррелированных признаках предпочтите </a:t>
+            </a:r>
+            <a:r>
+              <a:rPr lang="ru-RU" dirty="0" sz="2000" b="1">
+                <a:solidFill>
+                  <a:srgbClr val="000000"/>
+                </a:solidFill>
+              </a:rPr>
+              <a:t>Ridge</a:t>
+            </a:r>
+            <a:r>
+              <a:rPr lang="ru-RU" dirty="0" sz="2000">
+                <a:solidFill>
+                  <a:srgbClr val="000000"/>
+                </a:solidFill>
+              </a:rPr>
+              <a:t>; Lasso выберет один из дублей случайно</a:t>
             </a:r>
           </a:p>
           <a:p>
@@ -5369,7 +5416,7 @@
                   <a:srgbClr val="000000"/>
                 </a:solidFill>
               </a:rPr>
-              <a:t xml:space="preserve"> подбирают по validation / cross-validation</a:t>
+              <a:t xml:space="preserve"> подбирают по validation / cross-validation (см. график)</a:t>
             </a:r>
           </a:p>
         </p:txBody>
@@ -5390,8 +5437,32 @@
         </p:blipFill>
         <p:spPr>
           <a:xfrm>
-            <a:off x="7635240" y="2585197"/>
-            <a:ext cx="4343400" cy="1961925"/>
+            <a:off x="7269480" y="1359615"/>
+            <a:ext cx="5029200" cy="2145377"/>
+          </a:xfrm>
+          <a:prstGeom prst="rect">
+            <a:avLst/>
+          </a:prstGeom>
+        </p:spPr>
+      </p:pic>
+      <p:pic>
+        <p:nvPicPr>
+          <p:cNvPr id="5" name="Picture 4" descr="ridge_alpha_cv.png"/>
+          <p:cNvPicPr>
+            <a:picLocks noChangeAspect="1"/>
+          </p:cNvPicPr>
+          <p:nvPr/>
+        </p:nvPicPr>
+        <p:blipFill>
+          <a:blip r:embed="rId3"/>
+          <a:stretch>
+            <a:fillRect/>
+          </a:stretch>
+        </p:blipFill>
+        <p:spPr>
+          <a:xfrm>
+            <a:off x="8231517" y="3593592"/>
+            <a:ext cx="3105125" cy="2212848"/>
           </a:xfrm>
           <a:prstGeom prst="rect">
             <a:avLst/>
@@ -5458,7 +5529,7 @@
         <p:spPr>
           <a:xfrm>
             <a:off x="640080" y="1371600"/>
-            <a:ext cx="6858000" cy="3209544"/>
+            <a:ext cx="6583680" cy="3035807"/>
           </a:xfrm>
           <a:prstGeom prst="rect">
             <a:avLst/>
@@ -5643,8 +5714,8 @@
         </p:nvSpPr>
         <p:spPr>
           <a:xfrm>
-            <a:off x="640080" y="4690872"/>
-            <a:ext cx="6766560" cy="804672"/>
+            <a:off x="640080" y="4517136"/>
+            <a:ext cx="6492240" cy="978407"/>
           </a:xfrm>
           <a:prstGeom prst="rect">
             <a:avLst/>
@@ -5688,8 +5759,8 @@
         </p:nvSpPr>
         <p:spPr>
           <a:xfrm>
-            <a:off x="713231" y="4727448"/>
-            <a:ext cx="6620256" cy="731520"/>
+            <a:off x="713231" y="4553712"/>
+            <a:ext cx="6345936" cy="905255"/>
           </a:xfrm>
           <a:prstGeom prst="rect">
             <a:avLst/>
@@ -5714,7 +5785,7 @@
                 </a:solidFill>
                 <a:latin typeface="Consolas"/>
               </a:rPr>
-              <a:t>from sklearn.metrics import mean_absolute_error, r2_score</a:t>
+              <a:t>from sklearn.metrics import mean_absolute_error, mean_squared_error, r2_score</a:t>
             </a:r>
           </a:p>
           <a:p>
@@ -5746,7 +5817,7 @@
                 </a:solidFill>
                 <a:latin typeface="Consolas"/>
               </a:rPr>
-              <a:t>r2 = r2_score(y_te, y_pred)</a:t>
+              <a:t>rmse = mean_squared_error(y_te, y_pred, squared=False)</a:t>
             </a:r>
           </a:p>
           <a:p>
@@ -5762,7 +5833,23 @@
                 </a:solidFill>
                 <a:latin typeface="Consolas"/>
               </a:rPr>
-              <a:t>print(f'MAE={mae:.2f}, R²={r2:.3f}')</a:t>
+              <a:t>r2 = r2_score(y_te, y_pred)</a:t>
+            </a:r>
+          </a:p>
+          <a:p>
+            <a:pPr>
+              <a:spcAft>
+                <a:spcPts val="0"/>
+              </a:spcAft>
+            </a:pPr>
+            <a:r>
+              <a:rPr sz="1100">
+                <a:solidFill>
+                  <a:srgbClr val="000000"/>
+                </a:solidFill>
+                <a:latin typeface="Consolas"/>
+              </a:rPr>
+              <a:t>print(f'MAE={mae:.2f}, RMSE={rmse:.2f}, R²={r2:.3f}')</a:t>
             </a:r>
           </a:p>
         </p:txBody>
@@ -5775,8 +5862,8 @@
         </p:nvSpPr>
         <p:spPr>
           <a:xfrm>
-            <a:off x="640080" y="5550408"/>
-            <a:ext cx="6766560" cy="201168"/>
+            <a:off x="640080" y="5550407"/>
+            <a:ext cx="6492240" cy="201168"/>
           </a:xfrm>
           <a:prstGeom prst="rect">
             <a:avLst/>
@@ -5797,7 +5884,7 @@
               </a:defRPr>
             </a:pPr>
             <a:r>
-              <a:t>MAE и R²</a:t>
+              <a:t>MAE, RMSE и R²</a:t>
             </a:r>
           </a:p>
         </p:txBody>
@@ -5818,8 +5905,8 @@
         </p:blipFill>
         <p:spPr>
           <a:xfrm>
-            <a:off x="7635240" y="2073874"/>
-            <a:ext cx="4343400" cy="2984571"/>
+            <a:off x="7269480" y="1774146"/>
+            <a:ext cx="5029200" cy="3584028"/>
           </a:xfrm>
           <a:prstGeom prst="rect">
             <a:avLst/>
@@ -5886,7 +5973,7 @@
         <p:spPr>
           <a:xfrm>
             <a:off x="640080" y="1371600"/>
-            <a:ext cx="6858000" cy="1810512"/>
+            <a:ext cx="6583680" cy="1810512"/>
           </a:xfrm>
           <a:prstGeom prst="rect">
             <a:avLst/>
@@ -6030,8 +6117,8 @@
         </p:blipFill>
         <p:spPr>
           <a:xfrm>
-            <a:off x="7635240" y="2758695"/>
-            <a:ext cx="4343400" cy="1614929"/>
+            <a:off x="4572000" y="3731449"/>
+            <a:ext cx="7223760" cy="2504062"/>
           </a:xfrm>
           <a:prstGeom prst="rect">
             <a:avLst/>
@@ -6098,7 +6185,7 @@
         <p:spPr>
           <a:xfrm>
             <a:off x="640080" y="1371600"/>
-            <a:ext cx="6858000" cy="1810512"/>
+            <a:ext cx="6583680" cy="1810512"/>
           </a:xfrm>
           <a:prstGeom prst="rect">
             <a:avLst/>
@@ -6252,8 +6339,8 @@
         </p:blipFill>
         <p:spPr>
           <a:xfrm>
-            <a:off x="7635240" y="2073874"/>
-            <a:ext cx="4343400" cy="2984571"/>
+            <a:off x="7269480" y="1789462"/>
+            <a:ext cx="5029200" cy="3553395"/>
           </a:xfrm>
           <a:prstGeom prst="rect">
             <a:avLst/>
@@ -6320,7 +6407,7 @@
         <p:spPr>
           <a:xfrm>
             <a:off x="640080" y="1371600"/>
-            <a:ext cx="6858000" cy="2514599"/>
+            <a:ext cx="6583680" cy="2514599"/>
           </a:xfrm>
           <a:prstGeom prst="rect">
             <a:avLst/>
@@ -6419,7 +6506,7 @@
         <p:spPr>
           <a:xfrm>
             <a:off x="640080" y="3995927"/>
-            <a:ext cx="6766560" cy="1499616"/>
+            <a:ext cx="6492240" cy="1499616"/>
           </a:xfrm>
           <a:prstGeom prst="rect">
             <a:avLst/>
@@ -6464,7 +6551,7 @@
         <p:spPr>
           <a:xfrm>
             <a:off x="713231" y="4032503"/>
-            <a:ext cx="6620256" cy="1426464"/>
+            <a:ext cx="6345936" cy="1426464"/>
           </a:xfrm>
           <a:prstGeom prst="rect">
             <a:avLst/>
@@ -6615,7 +6702,7 @@
         <p:spPr>
           <a:xfrm>
             <a:off x="640080" y="5550407"/>
-            <a:ext cx="6766560" cy="201168"/>
+            <a:ext cx="6492240" cy="201168"/>
           </a:xfrm>
           <a:prstGeom prst="rect">
             <a:avLst/>
@@ -6657,8 +6744,8 @@
         </p:blipFill>
         <p:spPr>
           <a:xfrm>
-            <a:off x="7635240" y="2857963"/>
-            <a:ext cx="4343400" cy="1416392"/>
+            <a:off x="4627306" y="3703320"/>
+            <a:ext cx="7113147" cy="2560320"/>
           </a:xfrm>
           <a:prstGeom prst="rect">
             <a:avLst/>
@@ -6725,7 +6812,7 @@
         <p:spPr>
           <a:xfrm>
             <a:off x="640080" y="1371600"/>
-            <a:ext cx="6858000" cy="1810512"/>
+            <a:ext cx="6583680" cy="1810512"/>
           </a:xfrm>
           <a:prstGeom prst="rect">
             <a:avLst/>
@@ -6764,7 +6851,7 @@
                   <a:srgbClr val="000000"/>
                 </a:solidFill>
               </a:rPr>
-              <a:t>Сильное взаимодействие признаков без явных фичей (</a:t>
+              <a:t xml:space="preserve">Эффект одного признака зависит от другого, но в модели нет произведения </a:t>
             </a:r>
             <ns0:m xmlns:ns0="http://schemas.microsoft.com/office/drawing/2010/main">
               <m:oMath xmlns:m="http://schemas.openxmlformats.org/officeDocument/2006/math">
@@ -6803,7 +6890,7 @@
                   <a:srgbClr val="000000"/>
                 </a:solidFill>
               </a:rPr>
-              <a:t>)</a:t>
+              <a:t xml:space="preserve"> — линейная формула это не описывает</a:t>
             </a:r>
           </a:p>
           <a:p>
@@ -6869,8 +6956,8 @@
         </p:blipFill>
         <p:spPr>
           <a:xfrm>
-            <a:off x="7635240" y="2739840"/>
-            <a:ext cx="4343400" cy="1652640"/>
+            <a:off x="5103169" y="3703320"/>
+            <a:ext cx="6161420" cy="2560320"/>
           </a:xfrm>
           <a:prstGeom prst="rect">
             <a:avLst/>
@@ -7170,7 +7257,7 @@
                 </a:solidFill>
                 <a:hlinkClick r:id="rId2"/>
               </a:rPr>
-              <a:t>Hoerl A.E., Kennard R.W. (1970). Ridge Regression: Biased Estimation for Nonorthogonal Problems</a:t>
+              <a:t>Markov A.A. (1900). Least Squares Estimation of Linear Models</a:t>
             </a:r>
           </a:p>
         </p:txBody>
@@ -7217,7 +7304,7 @@
                 </a:solidFill>
                 <a:hlinkClick r:id="rId3"/>
               </a:rPr>
-              <a:t>Tibshirani R. (1996). Regression Shrinkage and Selection via the Lasso</a:t>
+              <a:t>Hoerl A.E., Kennard R.W. (1970). Ridge Regression: Biased Estimation for Nonorthogonal Problems</a:t>
             </a:r>
           </a:p>
         </p:txBody>
@@ -7264,7 +7351,7 @@
                 </a:solidFill>
                 <a:hlinkClick r:id="rId4"/>
               </a:rPr>
-              <a:t>Markov A.A. (1900). Least Squares Estimation of Linear Models</a:t>
+              <a:t>Tibshirani R. (1996). Regression Shrinkage and Selection via the Lasso</a:t>
             </a:r>
           </a:p>
         </p:txBody>
@@ -7566,7 +7653,7 @@
         <p:spPr>
           <a:xfrm>
             <a:off x="640080" y="1371600"/>
-            <a:ext cx="6858000" cy="1810512"/>
+            <a:ext cx="6583680" cy="1810512"/>
           </a:xfrm>
           <a:prstGeom prst="rect">
             <a:avLst/>
@@ -7701,8 +7788,8 @@
         </p:blipFill>
         <p:spPr>
           <a:xfrm>
-            <a:off x="7635240" y="2075955"/>
-            <a:ext cx="4343400" cy="2980408"/>
+            <a:off x="7269480" y="1774146"/>
+            <a:ext cx="5029200" cy="3584028"/>
           </a:xfrm>
           <a:prstGeom prst="rect">
             <a:avLst/>
@@ -7769,7 +7856,7 @@
         <p:spPr>
           <a:xfrm>
             <a:off x="640080" y="1371600"/>
-            <a:ext cx="6858000" cy="1810512"/>
+            <a:ext cx="6583680" cy="1810512"/>
           </a:xfrm>
           <a:prstGeom prst="rect">
             <a:avLst/>
@@ -7895,12 +7982,65 @@
               </a:spcAft>
             </a:pPr>
             <a:r>
+              <a:rPr lang="ru-RU" dirty="0" sz="2000" b="1">
+                <a:solidFill>
+                  <a:srgbClr val="000000"/>
+                </a:solidFill>
+              </a:rPr>
+              <a:t>Intercept</a:t>
+            </a:r>
+            <a:r>
               <a:rPr lang="ru-RU" dirty="0" sz="2000">
                 <a:solidFill>
                   <a:srgbClr val="000000"/>
                 </a:solidFill>
               </a:rPr>
-              <a:t>Хорошая модель: остатки симметрично разбросаны вокруг нуля, без систематического смещения</a:t>
+              <a:t xml:space="preserve"> (</a:t>
+            </a:r>
+            <ns0:m xmlns:ns0="http://schemas.microsoft.com/office/drawing/2010/main">
+              <m:oMath xmlns:m="http://schemas.openxmlformats.org/officeDocument/2006/math">
+                <m:r>
+                  <m:t>b</m:t>
+                </m:r>
+              </m:oMath>
+            </ns0:m>
+            <a:r>
+              <a:rPr lang="ru-RU" dirty="0" sz="2000">
+                <a:solidFill>
+                  <a:srgbClr val="000000"/>
+                </a:solidFill>
+              </a:rPr>
+              <a:t xml:space="preserve">): прогноз при </a:t>
+            </a:r>
+            <ns0:m xmlns:ns0="http://schemas.microsoft.com/office/drawing/2010/main">
+              <m:oMath xmlns:m="http://schemas.openxmlformats.org/officeDocument/2006/math">
+                <m:r>
+                  <m:t>x=0</m:t>
+                </m:r>
+              </m:oMath>
+            </ns0:m>
+            <a:r>
+              <a:rPr lang="ru-RU" dirty="0" sz="2000">
+                <a:solidFill>
+                  <a:srgbClr val="000000"/>
+                </a:solidFill>
+              </a:rPr>
+              <a:t xml:space="preserve">; в sklearn — параметр `fit_intercept=True` (смещение прямой по оси </a:t>
+            </a:r>
+            <ns0:m xmlns:ns0="http://schemas.microsoft.com/office/drawing/2010/main">
+              <m:oMath xmlns:m="http://schemas.openxmlformats.org/officeDocument/2006/math">
+                <m:r>
+                  <m:t>y</m:t>
+                </m:r>
+              </m:oMath>
+            </ns0:m>
+            <a:r>
+              <a:rPr lang="ru-RU" dirty="0" sz="2000">
+                <a:solidFill>
+                  <a:srgbClr val="000000"/>
+                </a:solidFill>
+              </a:rPr>
+              <a:t>)</a:t>
             </a:r>
           </a:p>
           <a:p>
@@ -7915,7 +8055,7 @@
                   <a:srgbClr val="000000"/>
                 </a:solidFill>
               </a:rPr>
-              <a:t>Сумма остатков на обучающей выборке при МНК равна нулю (для модели с intercept)</a:t>
+              <a:t>Хорошая модель: остатки симметрично разбросаны вокруг нуля, без систематического смещения</a:t>
             </a:r>
           </a:p>
         </p:txBody>
@@ -7936,8 +8076,8 @@
         </p:blipFill>
         <p:spPr>
           <a:xfrm>
-            <a:off x="8201192" y="1325880"/>
-            <a:ext cx="3211495" cy="2203704"/>
+            <a:off x="8231517" y="1325880"/>
+            <a:ext cx="3105125" cy="2212848"/>
           </a:xfrm>
           <a:prstGeom prst="rect">
             <a:avLst/>
@@ -7960,8 +8100,8 @@
         </p:blipFill>
         <p:spPr>
           <a:xfrm>
-            <a:off x="8203431" y="3602735"/>
-            <a:ext cx="3207016" cy="2203704"/>
+            <a:off x="8231517" y="3593592"/>
+            <a:ext cx="3105125" cy="2212848"/>
           </a:xfrm>
           <a:prstGeom prst="rect">
             <a:avLst/>
@@ -8028,7 +8168,7 @@
         <p:spPr>
           <a:xfrm>
             <a:off x="640080" y="1371600"/>
-            <a:ext cx="6858000" cy="2194560"/>
+            <a:ext cx="6583680" cy="2194560"/>
           </a:xfrm>
           <a:prstGeom prst="rect">
             <a:avLst/>
@@ -8160,7 +8300,85 @@
                   <a:srgbClr val="000000"/>
                 </a:solidFill>
               </a:rPr>
-              <a:t xml:space="preserve">Сумму без деления на </a:t>
+              <a:t xml:space="preserve">Минимизация </a:t>
+            </a:r>
+            <ns0:m xmlns:ns0="http://schemas.microsoft.com/office/drawing/2010/main">
+              <m:oMath xmlns:m="http://schemas.openxmlformats.org/officeDocument/2006/math">
+                <m:nary>
+                  <m:naryPr>
+                    <m:chr m:val="∑"/>
+                    <m:limLoc m:val="subSup"/>
+                    <m:grow m:val="1"/>
+                    <m:subHide m:val="off"/>
+                    <m:supHide m:val="on"/>
+                  </m:naryPr>
+                  <m:sub>
+                    <m:r>
+                      <m:t>i</m:t>
+                    </m:r>
+                  </m:sub>
+                  <m:sup/>
+                  <m:e>
+                    <m:r>
+                      <m:t>(</m:t>
+                    </m:r>
+                  </m:e>
+                </m:nary>
+                <m:sSub>
+                  <m:e>
+                    <m:r>
+                      <m:t>y</m:t>
+                    </m:r>
+                  </m:e>
+                  <m:sub>
+                    <m:r>
+                      <m:t>i</m:t>
+                    </m:r>
+                  </m:sub>
+                </m:sSub>
+                <m:r>
+                  <m:t>−</m:t>
+                </m:r>
+                <m:sSub>
+                  <m:e>
+                    <m:acc>
+                      <m:accPr>
+                        <m:chr m:val="̂"/>
+                      </m:accPr>
+                      <m:e>
+                        <m:r>
+                          <m:t>y</m:t>
+                        </m:r>
+                      </m:e>
+                    </m:acc>
+                  </m:e>
+                  <m:sub>
+                    <m:r>
+                      <m:t>i</m:t>
+                    </m:r>
+                  </m:sub>
+                </m:sSub>
+                <m:sSup>
+                  <m:e>
+                    <m:r>
+                      <m:t>)</m:t>
+                    </m:r>
+                  </m:e>
+                  <m:sup>
+                    <m:r>
+                      <m:t>2</m:t>
+                    </m:r>
+                  </m:sup>
+                </m:sSup>
+              </m:oMath>
+            </ns0:m>
+            <a:r>
+              <a:rPr lang="ru-RU" dirty="0" sz="2000">
+                <a:solidFill>
+                  <a:srgbClr val="000000"/>
+                </a:solidFill>
+              </a:rPr>
+              <a:t xml:space="preserve"> без деления на </a:t>
             </a:r>
             <ns0:m xmlns:ns0="http://schemas.microsoft.com/office/drawing/2010/main">
               <m:oMath xmlns:m="http://schemas.openxmlformats.org/officeDocument/2006/math">
@@ -8175,7 +8393,22 @@
                   <a:srgbClr val="000000"/>
                 </a:solidFill>
               </a:rPr>
-              <a:t xml:space="preserve"> минимизировать то же самое; деление нужно для сравнимости между выборками</a:t>
+              <a:t xml:space="preserve"> даёт те же оптимальные веса; деление на </a:t>
+            </a:r>
+            <ns0:m xmlns:ns0="http://schemas.microsoft.com/office/drawing/2010/main">
+              <m:oMath xmlns:m="http://schemas.openxmlformats.org/officeDocument/2006/math">
+                <m:r>
+                  <m:t>N</m:t>
+                </m:r>
+              </m:oMath>
+            </ns0:m>
+            <a:r>
+              <a:rPr lang="ru-RU" dirty="0" sz="2000">
+                <a:solidFill>
+                  <a:srgbClr val="000000"/>
+                </a:solidFill>
+              </a:rPr>
+              <a:t xml:space="preserve"> нужно для сравнимости между выборками</a:t>
             </a:r>
           </a:p>
           <a:p>
@@ -8287,7 +8520,7 @@
                   <a:srgbClr val="000000"/>
                 </a:solidFill>
               </a:rPr>
-              <a:t>MSE = MLE при гауссовских остатках; MAE = MLE при распределении Лапласа (например, медианный шум в задачах с редкими сбоями)</a:t>
+              <a:t>MSE = MLE при нормальных остатках; MAE = MLE, если ошибки распределены по Лапласу (редкие, но крупные сбои — например, катастрофические задержки доставки)</a:t>
             </a:r>
           </a:p>
         </p:txBody>
@@ -8308,8 +8541,8 @@
         </p:blipFill>
         <p:spPr>
           <a:xfrm>
-            <a:off x="7635240" y="2076907"/>
-            <a:ext cx="4343400" cy="2978505"/>
+            <a:off x="7269480" y="1791148"/>
+            <a:ext cx="5029200" cy="3550024"/>
           </a:xfrm>
           <a:prstGeom prst="rect">
             <a:avLst/>
@@ -8376,7 +8609,7 @@
         <p:spPr>
           <a:xfrm>
             <a:off x="640080" y="1371600"/>
-            <a:ext cx="6858000" cy="3209544"/>
+            <a:ext cx="6583680" cy="3383279"/>
           </a:xfrm>
           <a:prstGeom prst="rect">
             <a:avLst/>
@@ -8400,7 +8633,7 @@
                   <a:srgbClr val="000000"/>
                 </a:solidFill>
               </a:rPr>
-              <a:t xml:space="preserve">Аналитическое решение (МНК): производная по весам → система линейных уравнений → </a:t>
+              <a:t xml:space="preserve">Аналитическое решение (МНК): </a:t>
             </a:r>
             <ns0:m xmlns:ns0="http://schemas.microsoft.com/office/drawing/2010/main">
               <m:oMath xmlns:m="http://schemas.openxmlformats.org/officeDocument/2006/math">
@@ -8461,6 +8694,14 @@
                 </m:r>
               </m:oMath>
             </ns0:m>
+            <a:r>
+              <a:rPr lang="ru-RU" dirty="0" sz="2000">
+                <a:solidFill>
+                  <a:srgbClr val="000000"/>
+                </a:solidFill>
+              </a:rPr>
+              <a:t xml:space="preserve"> — быстро для умеренных матриц</a:t>
+            </a:r>
           </a:p>
           <a:p>
             <a:pPr>
@@ -8474,7 +8715,7 @@
                   <a:srgbClr val="000000"/>
                 </a:solidFill>
               </a:rPr>
-              <a:t>`LinearRegression` в sklearn по умолчанию решает так (solver `linalg`) — быстро и точно для умеренных матриц</a:t>
+              <a:t>`LinearRegression` в sklearn использует solver `linalg` без итераций</a:t>
             </a:r>
           </a:p>
           <a:p>
@@ -8489,22 +8730,7 @@
                   <a:srgbClr val="000000"/>
                 </a:solidFill>
               </a:rPr>
-              <a:t xml:space="preserve">При очень больших </a:t>
-            </a:r>
-            <ns0:m xmlns:ns0="http://schemas.microsoft.com/office/drawing/2010/main">
-              <m:oMath xmlns:m="http://schemas.openxmlformats.org/officeDocument/2006/math">
-                <m:r>
-                  <m:t>X</m:t>
-                </m:r>
-              </m:oMath>
-            </ns0:m>
-            <a:r>
-              <a:rPr lang="ru-RU" dirty="0" sz="2000">
-                <a:solidFill>
-                  <a:srgbClr val="000000"/>
-                </a:solidFill>
-              </a:rPr>
-              <a:t xml:space="preserve"> или нехватке памяти — итеративные методы: SGD, `sag`, `lsqr`</a:t>
+              <a:t>При огромных данных — итеративные методы: SGD, `SGDRegressor`</a:t>
             </a:r>
           </a:p>
           <a:p>
@@ -8519,22 +8745,7 @@
                   <a:srgbClr val="000000"/>
                 </a:solidFill>
               </a:rPr>
-              <a:t>Градиентный спуск: шаг против градиента функции потерь; `SGDRegressor` в sklearn</a:t>
-            </a:r>
-          </a:p>
-          <a:p>
-            <a:pPr>
-              <a:spcAft>
-                <a:spcPts val="800"/>
-              </a:spcAft>
-            </a:pPr>
-            <a:r>
-              <a:rPr lang="ru-RU" dirty="0" sz="2000">
-                <a:solidFill>
-                  <a:srgbClr val="000000"/>
-                </a:solidFill>
-              </a:rPr>
-              <a:t>На практике для линейной регрессии чаще используют не «чистый» SGD, а стабильные solver'ы (`lbfgs`, `sag` в Ridge/Lasso)</a:t>
+              <a:t>Градиентный спуск: шаг против градиента функции потерь</a:t>
             </a:r>
           </a:p>
         </p:txBody>
@@ -8547,8 +8758,8 @@
         </p:nvSpPr>
         <p:spPr>
           <a:xfrm>
-            <a:off x="640080" y="4690872"/>
-            <a:ext cx="6766560" cy="804672"/>
+            <a:off x="640080" y="4864607"/>
+            <a:ext cx="6492240" cy="630936"/>
           </a:xfrm>
           <a:prstGeom prst="rect">
             <a:avLst/>
@@ -8592,8 +8803,8 @@
         </p:nvSpPr>
         <p:spPr>
           <a:xfrm>
-            <a:off x="713231" y="4727448"/>
-            <a:ext cx="6620256" cy="731520"/>
+            <a:off x="713231" y="4901183"/>
+            <a:ext cx="6345936" cy="557784"/>
           </a:xfrm>
           <a:prstGeom prst="rect">
             <a:avLst/>
@@ -8634,7 +8845,7 @@
                 </a:solidFill>
                 <a:latin typeface="Consolas"/>
               </a:rPr>
-              <a:t>model = LinearRegression()  # solver='linalg' по умолчанию</a:t>
+              <a:t>model = LinearRegression().fit(X_train, y_train)</a:t>
             </a:r>
           </a:p>
           <a:p>
@@ -8650,22 +8861,6 @@
                 </a:solidFill>
                 <a:latin typeface="Consolas"/>
               </a:rPr>
-              <a:t>model.fit(X_train, y_train)</a:t>
-            </a:r>
-          </a:p>
-          <a:p>
-            <a:pPr>
-              <a:spcAft>
-                <a:spcPts val="0"/>
-              </a:spcAft>
-            </a:pPr>
-            <a:r>
-              <a:rPr sz="1100">
-                <a:solidFill>
-                  <a:srgbClr val="000000"/>
-                </a:solidFill>
-                <a:latin typeface="Consolas"/>
-              </a:rPr>
               <a:t>y_pred = model.predict(X_test)</a:t>
             </a:r>
           </a:p>
@@ -8679,8 +8874,8 @@
         </p:nvSpPr>
         <p:spPr>
           <a:xfrm>
-            <a:off x="640080" y="5550408"/>
-            <a:ext cx="6766560" cy="201168"/>
+            <a:off x="640080" y="5550407"/>
+            <a:ext cx="6492240" cy="201168"/>
           </a:xfrm>
           <a:prstGeom prst="rect">
             <a:avLst/>
@@ -8722,8 +8917,8 @@
         </p:blipFill>
         <p:spPr>
           <a:xfrm>
-            <a:off x="7635240" y="2073874"/>
-            <a:ext cx="4343400" cy="2984571"/>
+            <a:off x="7269480" y="1774146"/>
+            <a:ext cx="5029200" cy="3584028"/>
           </a:xfrm>
           <a:prstGeom prst="rect">
             <a:avLst/>
@@ -8790,7 +8985,7 @@
         <p:spPr>
           <a:xfrm>
             <a:off x="640080" y="1371600"/>
-            <a:ext cx="6858000" cy="1810512"/>
+            <a:ext cx="6583680" cy="1810512"/>
           </a:xfrm>
           <a:prstGeom prst="rect">
             <a:avLst/>
@@ -9019,8 +9214,8 @@
         </p:blipFill>
         <p:spPr>
           <a:xfrm>
-            <a:off x="7668306" y="1325880"/>
-            <a:ext cx="4277267" cy="4480559"/>
+            <a:off x="7632338" y="1325880"/>
+            <a:ext cx="4303483" cy="4480559"/>
           </a:xfrm>
           <a:prstGeom prst="rect">
             <a:avLst/>
@@ -9087,7 +9282,7 @@
         <p:spPr>
           <a:xfrm>
             <a:off x="640080" y="1371600"/>
-            <a:ext cx="6858000" cy="2688335"/>
+            <a:ext cx="6583680" cy="2688335"/>
           </a:xfrm>
           <a:prstGeom prst="rect">
             <a:avLst/>
@@ -9217,7 +9412,7 @@
         <p:spPr>
           <a:xfrm>
             <a:off x="640080" y="4169663"/>
-            <a:ext cx="6766560" cy="1325880"/>
+            <a:ext cx="6492240" cy="1325880"/>
           </a:xfrm>
           <a:prstGeom prst="rect">
             <a:avLst/>
@@ -9262,7 +9457,7 @@
         <p:spPr>
           <a:xfrm>
             <a:off x="713231" y="4206240"/>
-            <a:ext cx="6620256" cy="1252728"/>
+            <a:ext cx="6345936" cy="1252728"/>
           </a:xfrm>
           <a:prstGeom prst="rect">
             <a:avLst/>
@@ -9397,7 +9592,7 @@
         <p:spPr>
           <a:xfrm>
             <a:off x="640080" y="5550408"/>
-            <a:ext cx="6766560" cy="201168"/>
+            <a:ext cx="6492240" cy="201168"/>
           </a:xfrm>
           <a:prstGeom prst="rect">
             <a:avLst/>
@@ -9439,8 +9634,8 @@
         </p:blipFill>
         <p:spPr>
           <a:xfrm>
-            <a:off x="7635240" y="2727162"/>
-            <a:ext cx="4343400" cy="1677994"/>
+            <a:off x="5031801" y="3703320"/>
+            <a:ext cx="6304156" cy="2560320"/>
           </a:xfrm>
           <a:prstGeom prst="rect">
             <a:avLst/>
@@ -9507,7 +9702,7 @@
         <p:spPr>
           <a:xfrm>
             <a:off x="640080" y="1371600"/>
-            <a:ext cx="6858000" cy="1810512"/>
+            <a:ext cx="6583680" cy="1810512"/>
           </a:xfrm>
           <a:prstGeom prst="rect">
             <a:avLst/>
@@ -9546,7 +9741,30 @@
                   <a:srgbClr val="000000"/>
                 </a:solidFill>
               </a:rPr>
-              <a:t>: при MSE сильно тянет линию — решение: MAE (`HuberRegressor`), робастные методы или чистка</a:t>
+              <a:t>: при MSE сильно тянет линию — одна точка может заметно сдвинуть прямую</a:t>
+            </a:r>
+          </a:p>
+          <a:p>
+            <a:pPr>
+              <a:spcAft>
+                <a:spcPts val="800"/>
+              </a:spcAft>
+            </a:pPr>
+            <a:r>
+              <a:rPr lang="ru-RU" dirty="0" sz="2000" b="1">
+                <a:solidFill>
+                  <a:srgbClr val="000000"/>
+                </a:solidFill>
+              </a:rPr>
+              <a:t>Робастные</a:t>
+            </a:r>
+            <a:r>
+              <a:rPr lang="ru-RU" dirty="0" sz="2000">
+                <a:solidFill>
+                  <a:srgbClr val="000000"/>
+                </a:solidFill>
+              </a:rPr>
+              <a:t xml:space="preserve"> методы (MAE, `HuberRegressor`, RANSAC) меньше реагируют на выбросы, чем MSE</a:t>
             </a:r>
           </a:p>
           <a:p>
@@ -9598,7 +9816,7 @@
                   <a:srgbClr val="000000"/>
                 </a:solidFill>
               </a:rPr>
-              <a:t xml:space="preserve">Всегда стройте scatter «признак vs </a:t>
+              <a:t xml:space="preserve">Перед обучением: scatter «признак vs </a:t>
             </a:r>
             <ns0:m xmlns:ns0="http://schemas.microsoft.com/office/drawing/2010/main">
               <m:oMath xmlns:m="http://schemas.openxmlformats.org/officeDocument/2006/math">
@@ -9613,22 +9831,7 @@
                   <a:srgbClr val="000000"/>
                 </a:solidFill>
               </a:rPr>
-              <a:t>» и boxplot остатков перед обучением</a:t>
-            </a:r>
-          </a:p>
-          <a:p>
-            <a:pPr>
-              <a:spcAft>
-                <a:spcPts val="800"/>
-              </a:spcAft>
-            </a:pPr>
-            <a:r>
-              <a:rPr lang="ru-RU" dirty="0" sz="2000">
-                <a:solidFill>
-                  <a:srgbClr val="000000"/>
-                </a:solidFill>
-              </a:rPr>
-              <a:t>Влиятельные точки диагностируют через остатки и расстояние от центра признаков</a:t>
+              <a:t>» и boxplot остатков</a:t>
             </a:r>
           </a:p>
         </p:txBody>
@@ -9649,8 +9852,8 @@
         </p:blipFill>
         <p:spPr>
           <a:xfrm>
-            <a:off x="7635240" y="1604240"/>
-            <a:ext cx="4343400" cy="1646984"/>
+            <a:off x="7269480" y="1589656"/>
+            <a:ext cx="2487168" cy="1685294"/>
           </a:xfrm>
           <a:prstGeom prst="rect">
             <a:avLst/>
@@ -9673,8 +9876,32 @@
         </p:blipFill>
         <p:spPr>
           <a:xfrm>
-            <a:off x="7635240" y="3881659"/>
-            <a:ext cx="4343400" cy="1645857"/>
+            <a:off x="9811512" y="1927244"/>
+            <a:ext cx="2487168" cy="1010119"/>
+          </a:xfrm>
+          <a:prstGeom prst="rect">
+            <a:avLst/>
+          </a:prstGeom>
+        </p:spPr>
+      </p:pic>
+      <p:pic>
+        <p:nvPicPr>
+          <p:cNvPr id="6" name="Picture 5" descr="outlier_scatter_boxplot.png"/>
+          <p:cNvPicPr>
+            <a:picLocks noChangeAspect="1"/>
+          </p:cNvPicPr>
+          <p:nvPr/>
+        </p:nvPicPr>
+        <p:blipFill>
+          <a:blip r:embed="rId4"/>
+          <a:stretch>
+            <a:fillRect/>
+          </a:stretch>
+        </p:blipFill>
+        <p:spPr>
+          <a:xfrm>
+            <a:off x="7269480" y="3678756"/>
+            <a:ext cx="5029200" cy="2042519"/>
           </a:xfrm>
           <a:prstGeom prst="rect">
             <a:avLst/>
@@ -9741,7 +9968,7 @@
         <p:spPr>
           <a:xfrm>
             <a:off x="640080" y="1371600"/>
-            <a:ext cx="6858000" cy="1810512"/>
+            <a:ext cx="6583680" cy="1810512"/>
           </a:xfrm>
           <a:prstGeom prst="rect">
             <a:avLst/>
@@ -9855,8 +10082,8 @@
         </p:blipFill>
         <p:spPr>
           <a:xfrm>
-            <a:off x="7635240" y="2629149"/>
-            <a:ext cx="4343400" cy="1874021"/>
+            <a:off x="5031801" y="3703320"/>
+            <a:ext cx="6304156" cy="2560320"/>
           </a:xfrm>
           <a:prstGeom prst="rect">
             <a:avLst/>

--- a/lessons/lineynaya_regressiya/presentation.pptx
+++ b/lessons/lineynaya_regressiya/presentation.pptx
@@ -4845,7 +4845,7 @@
         <p:spPr>
           <a:xfrm>
             <a:off x="640080" y="1371600"/>
-            <a:ext cx="6583680" cy="3035807"/>
+            <a:ext cx="3108960" cy="969264"/>
           </a:xfrm>
           <a:prstGeom prst="rect">
             <a:avLst/>
@@ -4887,6 +4887,29 @@
               <a:t>Линейная модель с малым числом признаков переобучается реже деревьев, но шум в данных всё равно завышает метрики на train</a:t>
             </a:r>
           </a:p>
+        </p:txBody>
+      </p:sp>
+      <p:sp>
+        <p:nvSpPr>
+          <p:cNvPr id="4" name="TextBox 3"/>
+          <p:cNvSpPr txBox="1"/>
+          <p:nvPr/>
+        </p:nvSpPr>
+        <p:spPr>
+          <a:xfrm>
+            <a:off x="3886200" y="1371600"/>
+            <a:ext cx="3108960" cy="969264"/>
+          </a:xfrm>
+          <a:prstGeom prst="rect">
+            <a:avLst/>
+          </a:prstGeom>
+          <a:noFill/>
+        </p:spPr>
+        <p:txBody>
+          <a:bodyPr wrap="square">
+            <a:normAutofit/>
+          </a:bodyPr>
+          <a:lstStyle/>
           <a:p>
             <a:pPr>
               <a:spcAft>
@@ -4921,7 +4944,7 @@
       </p:sp>
       <p:sp>
         <p:nvSpPr>
-          <p:cNvPr id="4" name="Rectangle 3"/>
+          <p:cNvPr id="5" name="Rectangle 4"/>
           <p:cNvSpPr/>
           <p:nvPr/>
         </p:nvSpPr>
@@ -4966,7 +4989,7 @@
       </p:sp>
       <p:sp>
         <p:nvSpPr>
-          <p:cNvPr id="5" name="TextBox 4"/>
+          <p:cNvPr id="6" name="TextBox 5"/>
           <p:cNvSpPr txBox="1"/>
           <p:nvPr/>
         </p:nvSpPr>
@@ -5069,7 +5092,7 @@
       </p:sp>
       <p:sp>
         <p:nvSpPr>
-          <p:cNvPr id="6" name="TextBox 5"/>
+          <p:cNvPr id="7" name="TextBox 6"/>
           <p:cNvSpPr txBox="1"/>
           <p:nvPr/>
         </p:nvSpPr>
@@ -5104,7 +5127,7 @@
       </p:sp>
       <p:pic>
         <p:nvPicPr>
-          <p:cNvPr id="7" name="Picture 6" descr="train_test_split.png"/>
+          <p:cNvPr id="8" name="Picture 7" descr="train_test_split.png"/>
           <p:cNvPicPr>
             <a:picLocks noChangeAspect="1"/>
           </p:cNvPicPr>
@@ -5118,8 +5141,8 @@
         </p:blipFill>
         <p:spPr>
           <a:xfrm>
-            <a:off x="5037749" y="3703320"/>
-            <a:ext cx="6292261" cy="2560320"/>
+            <a:off x="3721937" y="2450592"/>
+            <a:ext cx="4809085" cy="1956816"/>
           </a:xfrm>
           <a:prstGeom prst="rect">
             <a:avLst/>
@@ -5186,7 +5209,7 @@
         <p:spPr>
           <a:xfrm>
             <a:off x="640080" y="1371600"/>
-            <a:ext cx="6583680" cy="2194560"/>
+            <a:ext cx="3108960" cy="969264"/>
           </a:xfrm>
           <a:prstGeom prst="rect">
             <a:avLst/>
@@ -5274,25 +5297,32 @@
                   <a:srgbClr val="000000"/>
                 </a:solidFill>
               </a:rPr>
-              <a:t xml:space="preserve"> — сжимает веса </a:t>
-            </a:r>
-            <a:r>
-              <a:rPr lang="ru-RU" dirty="0" sz="2000" b="1">
-                <a:solidFill>
-                  <a:srgbClr val="000000"/>
-                </a:solidFill>
-              </a:rPr>
-              <a:t>вместе</a:t>
-            </a:r>
-            <a:r>
-              <a:rPr lang="ru-RU" dirty="0" sz="2000">
-                <a:solidFill>
-                  <a:srgbClr val="000000"/>
-                </a:solidFill>
-              </a:rPr>
-              <a:t>, не обнуляя; стабилизирует при мультиколлинеарности</a:t>
-            </a:r>
-          </a:p>
+              <a:t xml:space="preserve"> — сжимает веса, помогает при мультиколлинеарности</a:t>
+            </a:r>
+          </a:p>
+        </p:txBody>
+      </p:sp>
+      <p:sp>
+        <p:nvSpPr>
+          <p:cNvPr id="4" name="TextBox 3"/>
+          <p:cNvSpPr txBox="1"/>
+          <p:nvPr/>
+        </p:nvSpPr>
+        <p:spPr>
+          <a:xfrm>
+            <a:off x="3886200" y="1371600"/>
+            <a:ext cx="3108960" cy="969264"/>
+          </a:xfrm>
+          <a:prstGeom prst="rect">
+            <a:avLst/>
+          </a:prstGeom>
+          <a:noFill/>
+        </p:spPr>
+        <p:txBody>
+          <a:bodyPr wrap="square">
+            <a:spAutoFit/>
+          </a:bodyPr>
+          <a:lstStyle/>
           <a:p>
             <a:pPr>
               <a:spcAft>
@@ -5355,38 +5385,7 @@
                   <a:srgbClr val="000000"/>
                 </a:solidFill>
               </a:rPr>
-              <a:t xml:space="preserve"> — обнуляет слабые признаки → отбор фич, но не лечит дублирующие столбцы</a:t>
-            </a:r>
-          </a:p>
-          <a:p>
-            <a:pPr>
-              <a:spcAft>
-                <a:spcPts val="800"/>
-              </a:spcAft>
-            </a:pPr>
-            <a:r>
-              <a:rPr lang="ru-RU" dirty="0" sz="2000">
-                <a:solidFill>
-                  <a:srgbClr val="000000"/>
-                </a:solidFill>
-              </a:rPr>
-              <a:t xml:space="preserve">При коррелированных признаках предпочтите </a:t>
-            </a:r>
-            <a:r>
-              <a:rPr lang="ru-RU" dirty="0" sz="2000" b="1">
-                <a:solidFill>
-                  <a:srgbClr val="000000"/>
-                </a:solidFill>
-              </a:rPr>
-              <a:t>Ridge</a:t>
-            </a:r>
-            <a:r>
-              <a:rPr lang="ru-RU" dirty="0" sz="2000">
-                <a:solidFill>
-                  <a:srgbClr val="000000"/>
-                </a:solidFill>
-              </a:rPr>
-              <a:t>; Lasso выберет один из дублей случайно</a:t>
+              <a:t xml:space="preserve"> — может обнулять веса → отбор признаков</a:t>
             </a:r>
           </a:p>
           <a:p>
@@ -5416,14 +5415,14 @@
                   <a:srgbClr val="000000"/>
                 </a:solidFill>
               </a:rPr>
-              <a:t xml:space="preserve"> подбирают по validation / cross-validation (см. график)</a:t>
+              <a:t xml:space="preserve"> подбирают по validation / cross-validation</a:t>
             </a:r>
           </a:p>
         </p:txBody>
       </p:sp>
       <p:pic>
         <p:nvPicPr>
-          <p:cNvPr id="4" name="Picture 3" descr="regularization_weights.png"/>
+          <p:cNvPr id="5" name="Picture 4" descr="regularization_weights.png"/>
           <p:cNvPicPr>
             <a:picLocks noChangeAspect="1"/>
           </p:cNvPicPr>
@@ -5437,32 +5436,8 @@
         </p:blipFill>
         <p:spPr>
           <a:xfrm>
-            <a:off x="7269480" y="1359615"/>
-            <a:ext cx="5029200" cy="2145377"/>
-          </a:xfrm>
-          <a:prstGeom prst="rect">
-            <a:avLst/>
-          </a:prstGeom>
-        </p:spPr>
-      </p:pic>
-      <p:pic>
-        <p:nvPicPr>
-          <p:cNvPr id="5" name="Picture 4" descr="ridge_alpha_cv.png"/>
-          <p:cNvPicPr>
-            <a:picLocks noChangeAspect="1"/>
-          </p:cNvPicPr>
-          <p:nvPr/>
-        </p:nvPicPr>
-        <p:blipFill>
-          <a:blip r:embed="rId3"/>
-          <a:stretch>
-            <a:fillRect/>
-          </a:stretch>
-        </p:blipFill>
-        <p:spPr>
-          <a:xfrm>
-            <a:off x="8231517" y="3593592"/>
-            <a:ext cx="3105125" cy="2212848"/>
+            <a:off x="3500644" y="2450592"/>
+            <a:ext cx="5251670" cy="2240280"/>
           </a:xfrm>
           <a:prstGeom prst="rect">
             <a:avLst/>
@@ -5529,7 +5504,7 @@
         <p:spPr>
           <a:xfrm>
             <a:off x="640080" y="1371600"/>
-            <a:ext cx="6583680" cy="3035807"/>
+            <a:ext cx="3108960" cy="969264"/>
           </a:xfrm>
           <a:prstGeom prst="rect">
             <a:avLst/>
@@ -5612,6 +5587,29 @@
               <a:t xml:space="preserve"> — сильнее штрафует крупные промахи</a:t>
             </a:r>
           </a:p>
+        </p:txBody>
+      </p:sp>
+      <p:sp>
+        <p:nvSpPr>
+          <p:cNvPr id="4" name="TextBox 3"/>
+          <p:cNvSpPr txBox="1"/>
+          <p:nvPr/>
+        </p:nvSpPr>
+        <p:spPr>
+          <a:xfrm>
+            <a:off x="3886200" y="1371600"/>
+            <a:ext cx="3108960" cy="969264"/>
+          </a:xfrm>
+          <a:prstGeom prst="rect">
+            <a:avLst/>
+          </a:prstGeom>
+          <a:noFill/>
+        </p:spPr>
+        <p:txBody>
+          <a:bodyPr wrap="square">
+            <a:normAutofit/>
+          </a:bodyPr>
+          <a:lstStyle/>
           <a:p>
             <a:pPr>
               <a:spcAft>
@@ -5708,14 +5706,14 @@
       </p:sp>
       <p:sp>
         <p:nvSpPr>
-          <p:cNvPr id="4" name="Rectangle 3"/>
+          <p:cNvPr id="5" name="Rectangle 4"/>
           <p:cNvSpPr/>
           <p:nvPr/>
         </p:nvSpPr>
         <p:spPr>
           <a:xfrm>
-            <a:off x="640080" y="4517136"/>
-            <a:ext cx="6492240" cy="978407"/>
+            <a:off x="640080" y="4690872"/>
+            <a:ext cx="6492240" cy="804672"/>
           </a:xfrm>
           <a:prstGeom prst="rect">
             <a:avLst/>
@@ -5753,14 +5751,14 @@
       </p:sp>
       <p:sp>
         <p:nvSpPr>
-          <p:cNvPr id="5" name="TextBox 4"/>
+          <p:cNvPr id="6" name="TextBox 5"/>
           <p:cNvSpPr txBox="1"/>
           <p:nvPr/>
         </p:nvSpPr>
         <p:spPr>
           <a:xfrm>
-            <a:off x="713231" y="4553712"/>
-            <a:ext cx="6345936" cy="905255"/>
+            <a:off x="713231" y="4727448"/>
+            <a:ext cx="6345936" cy="731520"/>
           </a:xfrm>
           <a:prstGeom prst="rect">
             <a:avLst/>
@@ -5785,7 +5783,7 @@
                 </a:solidFill>
                 <a:latin typeface="Consolas"/>
               </a:rPr>
-              <a:t>from sklearn.metrics import mean_absolute_error, mean_squared_error, r2_score</a:t>
+              <a:t>from sklearn.metrics import mean_absolute_error, r2_score</a:t>
             </a:r>
           </a:p>
           <a:p>
@@ -5817,7 +5815,7 @@
                 </a:solidFill>
                 <a:latin typeface="Consolas"/>
               </a:rPr>
-              <a:t>rmse = mean_squared_error(y_te, y_pred, squared=False)</a:t>
+              <a:t>r2 = r2_score(y_te, y_pred)</a:t>
             </a:r>
           </a:p>
           <a:p>
@@ -5833,36 +5831,20 @@
                 </a:solidFill>
                 <a:latin typeface="Consolas"/>
               </a:rPr>
-              <a:t>r2 = r2_score(y_te, y_pred)</a:t>
-            </a:r>
-          </a:p>
-          <a:p>
-            <a:pPr>
-              <a:spcAft>
-                <a:spcPts val="0"/>
-              </a:spcAft>
-            </a:pPr>
-            <a:r>
-              <a:rPr sz="1100">
-                <a:solidFill>
-                  <a:srgbClr val="000000"/>
-                </a:solidFill>
-                <a:latin typeface="Consolas"/>
-              </a:rPr>
-              <a:t>print(f'MAE={mae:.2f}, RMSE={rmse:.2f}, R²={r2:.3f}')</a:t>
-            </a:r>
-          </a:p>
-        </p:txBody>
-      </p:sp>
-      <p:sp>
-        <p:nvSpPr>
-          <p:cNvPr id="6" name="TextBox 5"/>
+              <a:t>print(f'MAE={mae:.2f}, R²={r2:.3f}')</a:t>
+            </a:r>
+          </a:p>
+        </p:txBody>
+      </p:sp>
+      <p:sp>
+        <p:nvSpPr>
+          <p:cNvPr id="7" name="TextBox 6"/>
           <p:cNvSpPr txBox="1"/>
           <p:nvPr/>
         </p:nvSpPr>
         <p:spPr>
           <a:xfrm>
-            <a:off x="640080" y="5550407"/>
+            <a:off x="640080" y="5550408"/>
             <a:ext cx="6492240" cy="201168"/>
           </a:xfrm>
           <a:prstGeom prst="rect">
@@ -5884,14 +5866,14 @@
               </a:defRPr>
             </a:pPr>
             <a:r>
-              <a:t>MAE, RMSE и R²</a:t>
+              <a:t>MAE и R²</a:t>
             </a:r>
           </a:p>
         </p:txBody>
       </p:sp>
       <p:pic>
         <p:nvPicPr>
-          <p:cNvPr id="7" name="Picture 6" descr="regression_metrics_bar.png"/>
+          <p:cNvPr id="8" name="Picture 7" descr="regression_metrics_bar.png"/>
           <p:cNvPicPr>
             <a:picLocks noChangeAspect="1"/>
           </p:cNvPicPr>
@@ -5905,8 +5887,8 @@
         </p:blipFill>
         <p:spPr>
           <a:xfrm>
-            <a:off x="7269480" y="1774146"/>
-            <a:ext cx="5029200" cy="3584028"/>
+            <a:off x="7500144" y="1325880"/>
+            <a:ext cx="4567870" cy="3255264"/>
           </a:xfrm>
           <a:prstGeom prst="rect">
             <a:avLst/>
@@ -5973,7 +5955,7 @@
         <p:spPr>
           <a:xfrm>
             <a:off x="640080" y="1371600"/>
-            <a:ext cx="6583680" cy="1810512"/>
+            <a:ext cx="3108960" cy="969264"/>
           </a:xfrm>
           <a:prstGeom prst="rect">
             <a:avLst/>
@@ -6054,6 +6036,29 @@
               <a:t>Хорошо: случайное облако вокруг нуля, без тренда (гомоскедастичность)</a:t>
             </a:r>
           </a:p>
+        </p:txBody>
+      </p:sp>
+      <p:sp>
+        <p:nvSpPr>
+          <p:cNvPr id="4" name="TextBox 3"/>
+          <p:cNvSpPr txBox="1"/>
+          <p:nvPr/>
+        </p:nvSpPr>
+        <p:spPr>
+          <a:xfrm>
+            <a:off x="3886200" y="1371600"/>
+            <a:ext cx="3108960" cy="969264"/>
+          </a:xfrm>
+          <a:prstGeom prst="rect">
+            <a:avLst/>
+          </a:prstGeom>
+          <a:noFill/>
+        </p:spPr>
+        <p:txBody>
+          <a:bodyPr wrap="square">
+            <a:spAutoFit/>
+          </a:bodyPr>
+          <a:lstStyle/>
           <a:p>
             <a:pPr>
               <a:spcAft>
@@ -6103,7 +6108,7 @@
       </p:sp>
       <p:pic>
         <p:nvPicPr>
-          <p:cNvPr id="4" name="Picture 3" descr="residual_diagnostics.png"/>
+          <p:cNvPr id="5" name="Picture 4" descr="residual_diagnostics.png"/>
           <p:cNvPicPr>
             <a:picLocks noChangeAspect="1"/>
           </p:cNvPicPr>
@@ -6117,8 +6122,8 @@
         </p:blipFill>
         <p:spPr>
           <a:xfrm>
-            <a:off x="4572000" y="3731449"/>
-            <a:ext cx="7223760" cy="2504062"/>
+            <a:off x="2895081" y="2450592"/>
+            <a:ext cx="6462797" cy="2240280"/>
           </a:xfrm>
           <a:prstGeom prst="rect">
             <a:avLst/>
@@ -6185,7 +6190,7 @@
         <p:spPr>
           <a:xfrm>
             <a:off x="640080" y="1371600"/>
-            <a:ext cx="6583680" cy="1810512"/>
+            <a:ext cx="3108960" cy="1645920"/>
           </a:xfrm>
           <a:prstGeom prst="rect">
             <a:avLst/>
@@ -6291,6 +6296,29 @@
               <a:t>Ceteris paribus — «при прочих равных»; в реальных данных признаки коррелированы</a:t>
             </a:r>
           </a:p>
+        </p:txBody>
+      </p:sp>
+      <p:sp>
+        <p:nvSpPr>
+          <p:cNvPr id="4" name="TextBox 3"/>
+          <p:cNvSpPr txBox="1"/>
+          <p:nvPr/>
+        </p:nvSpPr>
+        <p:spPr>
+          <a:xfrm>
+            <a:off x="3886200" y="1371600"/>
+            <a:ext cx="3108960" cy="1645920"/>
+          </a:xfrm>
+          <a:prstGeom prst="rect">
+            <a:avLst/>
+          </a:prstGeom>
+          <a:noFill/>
+        </p:spPr>
+        <p:txBody>
+          <a:bodyPr wrap="square">
+            <a:spAutoFit/>
+          </a:bodyPr>
+          <a:lstStyle/>
           <a:p>
             <a:pPr>
               <a:spcAft>
@@ -6325,7 +6353,7 @@
       </p:sp>
       <p:pic>
         <p:nvPicPr>
-          <p:cNvPr id="4" name="Picture 3" descr="standardized_weights.png"/>
+          <p:cNvPr id="5" name="Picture 4" descr="standardized_weights.png"/>
           <p:cNvPicPr>
             <a:picLocks noChangeAspect="1"/>
           </p:cNvPicPr>
@@ -6339,7 +6367,7 @@
         </p:blipFill>
         <p:spPr>
           <a:xfrm>
-            <a:off x="7269480" y="1789462"/>
+            <a:off x="7269480" y="1752886"/>
             <a:ext cx="5029200" cy="3553395"/>
           </a:xfrm>
           <a:prstGeom prst="rect">
@@ -6407,7 +6435,7 @@
         <p:spPr>
           <a:xfrm>
             <a:off x="640080" y="1371600"/>
-            <a:ext cx="6583680" cy="2514599"/>
+            <a:ext cx="3108960" cy="969264"/>
           </a:xfrm>
           <a:prstGeom prst="rect">
             <a:avLst/>
@@ -6465,6 +6493,29 @@
               <a:t xml:space="preserve"> split — статистики теста попадают в train</a:t>
             </a:r>
           </a:p>
+        </p:txBody>
+      </p:sp>
+      <p:sp>
+        <p:nvSpPr>
+          <p:cNvPr id="4" name="TextBox 3"/>
+          <p:cNvSpPr txBox="1"/>
+          <p:nvPr/>
+        </p:nvSpPr>
+        <p:spPr>
+          <a:xfrm>
+            <a:off x="3886200" y="1371600"/>
+            <a:ext cx="3108960" cy="969264"/>
+          </a:xfrm>
+          <a:prstGeom prst="rect">
+            <a:avLst/>
+          </a:prstGeom>
+          <a:noFill/>
+        </p:spPr>
+        <p:txBody>
+          <a:bodyPr wrap="square">
+            <a:normAutofit/>
+          </a:bodyPr>
+          <a:lstStyle/>
           <a:p>
             <a:pPr>
               <a:spcAft>
@@ -6499,7 +6550,7 @@
       </p:sp>
       <p:sp>
         <p:nvSpPr>
-          <p:cNvPr id="4" name="Rectangle 3"/>
+          <p:cNvPr id="5" name="Rectangle 4"/>
           <p:cNvSpPr/>
           <p:nvPr/>
         </p:nvSpPr>
@@ -6544,7 +6595,7 @@
       </p:sp>
       <p:sp>
         <p:nvSpPr>
-          <p:cNvPr id="5" name="TextBox 4"/>
+          <p:cNvPr id="6" name="TextBox 5"/>
           <p:cNvSpPr txBox="1"/>
           <p:nvPr/>
         </p:nvSpPr>
@@ -6695,7 +6746,7 @@
       </p:sp>
       <p:sp>
         <p:nvSpPr>
-          <p:cNvPr id="6" name="TextBox 5"/>
+          <p:cNvPr id="7" name="TextBox 6"/>
           <p:cNvSpPr txBox="1"/>
           <p:nvPr/>
         </p:nvSpPr>
@@ -6730,7 +6781,7 @@
       </p:sp>
       <p:pic>
         <p:nvPicPr>
-          <p:cNvPr id="7" name="Picture 6" descr="pipeline_leakage.png"/>
+          <p:cNvPr id="8" name="Picture 7" descr="pipeline_leakage.png"/>
           <p:cNvPicPr>
             <a:picLocks noChangeAspect="1"/>
           </p:cNvPicPr>
@@ -6744,8 +6795,8 @@
         </p:blipFill>
         <p:spPr>
           <a:xfrm>
-            <a:off x="4627306" y="3703320"/>
-            <a:ext cx="7113147" cy="2560320"/>
+            <a:off x="4132258" y="2450592"/>
+            <a:ext cx="3988443" cy="1435608"/>
           </a:xfrm>
           <a:prstGeom prst="rect">
             <a:avLst/>
@@ -6812,7 +6863,7 @@
         <p:spPr>
           <a:xfrm>
             <a:off x="640080" y="1371600"/>
-            <a:ext cx="6583680" cy="1810512"/>
+            <a:ext cx="3108960" cy="969264"/>
           </a:xfrm>
           <a:prstGeom prst="rect">
             <a:avLst/>
@@ -6851,7 +6902,7 @@
                   <a:srgbClr val="000000"/>
                 </a:solidFill>
               </a:rPr>
-              <a:t xml:space="preserve">Эффект одного признака зависит от другого, но в модели нет произведения </a:t>
+              <a:t>Сильное взаимодействие признаков без явных фичей (</a:t>
             </a:r>
             <ns0:m xmlns:ns0="http://schemas.microsoft.com/office/drawing/2010/main">
               <m:oMath xmlns:m="http://schemas.openxmlformats.org/officeDocument/2006/math">
@@ -6890,9 +6941,32 @@
                   <a:srgbClr val="000000"/>
                 </a:solidFill>
               </a:rPr>
-              <a:t xml:space="preserve"> — линейная формула это не описывает</a:t>
-            </a:r>
-          </a:p>
+              <a:t>)</a:t>
+            </a:r>
+          </a:p>
+        </p:txBody>
+      </p:sp>
+      <p:sp>
+        <p:nvSpPr>
+          <p:cNvPr id="4" name="TextBox 3"/>
+          <p:cNvSpPr txBox="1"/>
+          <p:nvPr/>
+        </p:nvSpPr>
+        <p:spPr>
+          <a:xfrm>
+            <a:off x="3886200" y="1371600"/>
+            <a:ext cx="3108960" cy="969264"/>
+          </a:xfrm>
+          <a:prstGeom prst="rect">
+            <a:avLst/>
+          </a:prstGeom>
+          <a:noFill/>
+        </p:spPr>
+        <p:txBody>
+          <a:bodyPr wrap="square">
+            <a:spAutoFit/>
+          </a:bodyPr>
+          <a:lstStyle/>
           <a:p>
             <a:pPr>
               <a:spcAft>
@@ -6942,7 +7016,7 @@
       </p:sp>
       <p:pic>
         <p:nvPicPr>
-          <p:cNvPr id="4" name="Picture 3" descr="nonlinear_vs_linear.png"/>
+          <p:cNvPr id="5" name="Picture 4" descr="nonlinear_vs_linear.png"/>
           <p:cNvPicPr>
             <a:picLocks noChangeAspect="1"/>
           </p:cNvPicPr>
@@ -6956,8 +7030,8 @@
         </p:blipFill>
         <p:spPr>
           <a:xfrm>
-            <a:off x="5103169" y="3703320"/>
-            <a:ext cx="6161420" cy="2560320"/>
+            <a:off x="3430858" y="2450592"/>
+            <a:ext cx="5391242" cy="2240280"/>
           </a:xfrm>
           <a:prstGeom prst="rect">
             <a:avLst/>
@@ -7257,7 +7331,7 @@
                 </a:solidFill>
                 <a:hlinkClick r:id="rId2"/>
               </a:rPr>
-              <a:t>Markov A.A. (1900). Least Squares Estimation of Linear Models</a:t>
+              <a:t>Hoerl A.E., Kennard R.W. (1970). Ridge Regression: Biased Estimation for Nonorthogonal Problems</a:t>
             </a:r>
           </a:p>
         </p:txBody>
@@ -7304,7 +7378,7 @@
                 </a:solidFill>
                 <a:hlinkClick r:id="rId3"/>
               </a:rPr>
-              <a:t>Hoerl A.E., Kennard R.W. (1970). Ridge Regression: Biased Estimation for Nonorthogonal Problems</a:t>
+              <a:t>Tibshirani R. (1996). Regression Shrinkage and Selection via the Lasso</a:t>
             </a:r>
           </a:p>
         </p:txBody>
@@ -7351,7 +7425,7 @@
                 </a:solidFill>
                 <a:hlinkClick r:id="rId4"/>
               </a:rPr>
-              <a:t>Tibshirani R. (1996). Regression Shrinkage and Selection via the Lasso</a:t>
+              <a:t>Markov A.A. (1900). Least Squares Estimation of Linear Models</a:t>
             </a:r>
           </a:p>
         </p:txBody>
@@ -7653,7 +7727,7 @@
         <p:spPr>
           <a:xfrm>
             <a:off x="640080" y="1371600"/>
-            <a:ext cx="6583680" cy="1810512"/>
+            <a:ext cx="3108960" cy="1645920"/>
           </a:xfrm>
           <a:prstGeom prst="rect">
             <a:avLst/>
@@ -7710,6 +7784,29 @@
               <a:t xml:space="preserve"> — прямая на плоскости «признак → ответ»</a:t>
             </a:r>
           </a:p>
+        </p:txBody>
+      </p:sp>
+      <p:sp>
+        <p:nvSpPr>
+          <p:cNvPr id="4" name="TextBox 3"/>
+          <p:cNvSpPr txBox="1"/>
+          <p:nvPr/>
+        </p:nvSpPr>
+        <p:spPr>
+          <a:xfrm>
+            <a:off x="3886200" y="1371600"/>
+            <a:ext cx="3108960" cy="1645920"/>
+          </a:xfrm>
+          <a:prstGeom prst="rect">
+            <a:avLst/>
+          </a:prstGeom>
+          <a:noFill/>
+        </p:spPr>
+        <p:txBody>
+          <a:bodyPr wrap="square">
+            <a:spAutoFit/>
+          </a:bodyPr>
+          <a:lstStyle/>
           <a:p>
             <a:pPr>
               <a:spcAft>
@@ -7774,7 +7871,7 @@
       </p:sp>
       <p:pic>
         <p:nvPicPr>
-          <p:cNvPr id="4" name="Picture 3" descr="intro_scatter_line.png"/>
+          <p:cNvPr id="5" name="Picture 4" descr="intro_scatter_line.png"/>
           <p:cNvPicPr>
             <a:picLocks noChangeAspect="1"/>
           </p:cNvPicPr>
@@ -7788,7 +7885,7 @@
         </p:blipFill>
         <p:spPr>
           <a:xfrm>
-            <a:off x="7269480" y="1774146"/>
+            <a:off x="7269480" y="1737570"/>
             <a:ext cx="5029200" cy="3584028"/>
           </a:xfrm>
           <a:prstGeom prst="rect">
@@ -7856,7 +7953,7 @@
         <p:spPr>
           <a:xfrm>
             <a:off x="640080" y="1371600"/>
-            <a:ext cx="6583680" cy="1810512"/>
+            <a:ext cx="3108960" cy="1645920"/>
           </a:xfrm>
           <a:prstGeom prst="rect">
             <a:avLst/>
@@ -7975,6 +8072,29 @@
               <a:t xml:space="preserve"> — разница между фактом и прогнозом</a:t>
             </a:r>
           </a:p>
+        </p:txBody>
+      </p:sp>
+      <p:sp>
+        <p:nvSpPr>
+          <p:cNvPr id="4" name="TextBox 3"/>
+          <p:cNvSpPr txBox="1"/>
+          <p:nvPr/>
+        </p:nvSpPr>
+        <p:spPr>
+          <a:xfrm>
+            <a:off x="3886200" y="1371600"/>
+            <a:ext cx="3108960" cy="1645920"/>
+          </a:xfrm>
+          <a:prstGeom prst="rect">
+            <a:avLst/>
+          </a:prstGeom>
+          <a:noFill/>
+        </p:spPr>
+        <p:txBody>
+          <a:bodyPr wrap="square">
+            <a:spAutoFit/>
+          </a:bodyPr>
+          <a:lstStyle/>
           <a:p>
             <a:pPr>
               <a:spcAft>
@@ -7982,65 +8102,12 @@
               </a:spcAft>
             </a:pPr>
             <a:r>
-              <a:rPr lang="ru-RU" dirty="0" sz="2000" b="1">
-                <a:solidFill>
-                  <a:srgbClr val="000000"/>
-                </a:solidFill>
-              </a:rPr>
-              <a:t>Intercept</a:t>
-            </a:r>
-            <a:r>
               <a:rPr lang="ru-RU" dirty="0" sz="2000">
                 <a:solidFill>
                   <a:srgbClr val="000000"/>
                 </a:solidFill>
               </a:rPr>
-              <a:t xml:space="preserve"> (</a:t>
-            </a:r>
-            <ns0:m xmlns:ns0="http://schemas.microsoft.com/office/drawing/2010/main">
-              <m:oMath xmlns:m="http://schemas.openxmlformats.org/officeDocument/2006/math">
-                <m:r>
-                  <m:t>b</m:t>
-                </m:r>
-              </m:oMath>
-            </ns0:m>
-            <a:r>
-              <a:rPr lang="ru-RU" dirty="0" sz="2000">
-                <a:solidFill>
-                  <a:srgbClr val="000000"/>
-                </a:solidFill>
-              </a:rPr>
-              <a:t xml:space="preserve">): прогноз при </a:t>
-            </a:r>
-            <ns0:m xmlns:ns0="http://schemas.microsoft.com/office/drawing/2010/main">
-              <m:oMath xmlns:m="http://schemas.openxmlformats.org/officeDocument/2006/math">
-                <m:r>
-                  <m:t>x=0</m:t>
-                </m:r>
-              </m:oMath>
-            </ns0:m>
-            <a:r>
-              <a:rPr lang="ru-RU" dirty="0" sz="2000">
-                <a:solidFill>
-                  <a:srgbClr val="000000"/>
-                </a:solidFill>
-              </a:rPr>
-              <a:t xml:space="preserve">; в sklearn — параметр `fit_intercept=True` (смещение прямой по оси </a:t>
-            </a:r>
-            <ns0:m xmlns:ns0="http://schemas.microsoft.com/office/drawing/2010/main">
-              <m:oMath xmlns:m="http://schemas.openxmlformats.org/officeDocument/2006/math">
-                <m:r>
-                  <m:t>y</m:t>
-                </m:r>
-              </m:oMath>
-            </ns0:m>
-            <a:r>
-              <a:rPr lang="ru-RU" dirty="0" sz="2000">
-                <a:solidFill>
-                  <a:srgbClr val="000000"/>
-                </a:solidFill>
-              </a:rPr>
-              <a:t>)</a:t>
+              <a:t>Хорошая модель: остатки симметрично разбросаны вокруг нуля, без систематического смещения</a:t>
             </a:r>
           </a:p>
           <a:p>
@@ -8055,14 +8122,14 @@
                   <a:srgbClr val="000000"/>
                 </a:solidFill>
               </a:rPr>
-              <a:t>Хорошая модель: остатки симметрично разбросаны вокруг нуля, без систематического смещения</a:t>
+              <a:t>Сумма остатков на обучающей выборке при МНК равна нулю (для модели с intercept)</a:t>
             </a:r>
           </a:p>
         </p:txBody>
       </p:sp>
       <p:pic>
         <p:nvPicPr>
-          <p:cNvPr id="4" name="Picture 3" descr="residuals_vertical.png"/>
+          <p:cNvPr id="5" name="Picture 4" descr="residuals_vertical.png"/>
           <p:cNvPicPr>
             <a:picLocks noChangeAspect="1"/>
           </p:cNvPicPr>
@@ -8086,7 +8153,7 @@
       </p:pic>
       <p:pic>
         <p:nvPicPr>
-          <p:cNvPr id="5" name="Picture 4" descr="residuals_histogram.png"/>
+          <p:cNvPr id="6" name="Picture 5" descr="residuals_histogram.png"/>
           <p:cNvPicPr>
             <a:picLocks noChangeAspect="1"/>
           </p:cNvPicPr>
@@ -8168,7 +8235,7 @@
         <p:spPr>
           <a:xfrm>
             <a:off x="640080" y="1371600"/>
-            <a:ext cx="6583680" cy="2194560"/>
+            <a:ext cx="3108960" cy="1645920"/>
           </a:xfrm>
           <a:prstGeom prst="rect">
             <a:avLst/>
@@ -8300,85 +8367,7 @@
                   <a:srgbClr val="000000"/>
                 </a:solidFill>
               </a:rPr>
-              <a:t xml:space="preserve">Минимизация </a:t>
-            </a:r>
-            <ns0:m xmlns:ns0="http://schemas.microsoft.com/office/drawing/2010/main">
-              <m:oMath xmlns:m="http://schemas.openxmlformats.org/officeDocument/2006/math">
-                <m:nary>
-                  <m:naryPr>
-                    <m:chr m:val="∑"/>
-                    <m:limLoc m:val="subSup"/>
-                    <m:grow m:val="1"/>
-                    <m:subHide m:val="off"/>
-                    <m:supHide m:val="on"/>
-                  </m:naryPr>
-                  <m:sub>
-                    <m:r>
-                      <m:t>i</m:t>
-                    </m:r>
-                  </m:sub>
-                  <m:sup/>
-                  <m:e>
-                    <m:r>
-                      <m:t>(</m:t>
-                    </m:r>
-                  </m:e>
-                </m:nary>
-                <m:sSub>
-                  <m:e>
-                    <m:r>
-                      <m:t>y</m:t>
-                    </m:r>
-                  </m:e>
-                  <m:sub>
-                    <m:r>
-                      <m:t>i</m:t>
-                    </m:r>
-                  </m:sub>
-                </m:sSub>
-                <m:r>
-                  <m:t>−</m:t>
-                </m:r>
-                <m:sSub>
-                  <m:e>
-                    <m:acc>
-                      <m:accPr>
-                        <m:chr m:val="̂"/>
-                      </m:accPr>
-                      <m:e>
-                        <m:r>
-                          <m:t>y</m:t>
-                        </m:r>
-                      </m:e>
-                    </m:acc>
-                  </m:e>
-                  <m:sub>
-                    <m:r>
-                      <m:t>i</m:t>
-                    </m:r>
-                  </m:sub>
-                </m:sSub>
-                <m:sSup>
-                  <m:e>
-                    <m:r>
-                      <m:t>)</m:t>
-                    </m:r>
-                  </m:e>
-                  <m:sup>
-                    <m:r>
-                      <m:t>2</m:t>
-                    </m:r>
-                  </m:sup>
-                </m:sSup>
-              </m:oMath>
-            </ns0:m>
-            <a:r>
-              <a:rPr lang="ru-RU" dirty="0" sz="2000">
-                <a:solidFill>
-                  <a:srgbClr val="000000"/>
-                </a:solidFill>
-              </a:rPr>
-              <a:t xml:space="preserve"> без деления на </a:t>
+              <a:t xml:space="preserve">Сумму без деления на </a:t>
             </a:r>
             <ns0:m xmlns:ns0="http://schemas.microsoft.com/office/drawing/2010/main">
               <m:oMath xmlns:m="http://schemas.openxmlformats.org/officeDocument/2006/math">
@@ -8393,22 +8382,7 @@
                   <a:srgbClr val="000000"/>
                 </a:solidFill>
               </a:rPr>
-              <a:t xml:space="preserve"> даёт те же оптимальные веса; деление на </a:t>
-            </a:r>
-            <ns0:m xmlns:ns0="http://schemas.microsoft.com/office/drawing/2010/main">
-              <m:oMath xmlns:m="http://schemas.openxmlformats.org/officeDocument/2006/math">
-                <m:r>
-                  <m:t>N</m:t>
-                </m:r>
-              </m:oMath>
-            </ns0:m>
-            <a:r>
-              <a:rPr lang="ru-RU" dirty="0" sz="2000">
-                <a:solidFill>
-                  <a:srgbClr val="000000"/>
-                </a:solidFill>
-              </a:rPr>
-              <a:t xml:space="preserve"> нужно для сравнимости между выборками</a:t>
+              <a:t xml:space="preserve"> минимизировать то же самое; деление нужно для сравнимости между выборками</a:t>
             </a:r>
           </a:p>
           <a:p>
@@ -8493,6 +8467,29 @@
               <a:t>) устойчивее к выбросам, но не гладкая в нуле</a:t>
             </a:r>
           </a:p>
+        </p:txBody>
+      </p:sp>
+      <p:sp>
+        <p:nvSpPr>
+          <p:cNvPr id="4" name="TextBox 3"/>
+          <p:cNvSpPr txBox="1"/>
+          <p:nvPr/>
+        </p:nvSpPr>
+        <p:spPr>
+          <a:xfrm>
+            <a:off x="3886200" y="1371600"/>
+            <a:ext cx="3108960" cy="1645920"/>
+          </a:xfrm>
+          <a:prstGeom prst="rect">
+            <a:avLst/>
+          </a:prstGeom>
+          <a:noFill/>
+        </p:spPr>
+        <p:txBody>
+          <a:bodyPr wrap="square">
+            <a:spAutoFit/>
+          </a:bodyPr>
+          <a:lstStyle/>
           <a:p>
             <a:pPr>
               <a:spcAft>
@@ -8520,14 +8517,14 @@
                   <a:srgbClr val="000000"/>
                 </a:solidFill>
               </a:rPr>
-              <a:t>MSE = MLE при нормальных остатках; MAE = MLE, если ошибки распределены по Лапласу (редкие, но крупные сбои — например, катастрофические задержки доставки)</a:t>
+              <a:t>MSE = MLE при гауссовских остатках; MAE = MLE при распределении Лапласа (например, медианный шум в задачах с редкими сбоями)</a:t>
             </a:r>
           </a:p>
         </p:txBody>
       </p:sp>
       <p:pic>
         <p:nvPicPr>
-          <p:cNvPr id="4" name="Picture 3" descr="mse_vs_mae_loss.png"/>
+          <p:cNvPr id="5" name="Picture 4" descr="mse_vs_mae_loss.png"/>
           <p:cNvPicPr>
             <a:picLocks noChangeAspect="1"/>
           </p:cNvPicPr>
@@ -8541,7 +8538,7 @@
         </p:blipFill>
         <p:spPr>
           <a:xfrm>
-            <a:off x="7269480" y="1791148"/>
+            <a:off x="7269480" y="1754572"/>
             <a:ext cx="5029200" cy="3550024"/>
           </a:xfrm>
           <a:prstGeom prst="rect">
@@ -8609,7 +8606,7 @@
         <p:spPr>
           <a:xfrm>
             <a:off x="640080" y="1371600"/>
-            <a:ext cx="6583680" cy="3383279"/>
+            <a:ext cx="3108960" cy="1316736"/>
           </a:xfrm>
           <a:prstGeom prst="rect">
             <a:avLst/>
@@ -8633,7 +8630,7 @@
                   <a:srgbClr val="000000"/>
                 </a:solidFill>
               </a:rPr>
-              <a:t xml:space="preserve">Аналитическое решение (МНК): </a:t>
+              <a:t xml:space="preserve">Аналитическое решение (МНК): производная по весам → система линейных уравнений → </a:t>
             </a:r>
             <ns0:m xmlns:ns0="http://schemas.microsoft.com/office/drawing/2010/main">
               <m:oMath xmlns:m="http://schemas.openxmlformats.org/officeDocument/2006/math">
@@ -8694,14 +8691,6 @@
                 </m:r>
               </m:oMath>
             </ns0:m>
-            <a:r>
-              <a:rPr lang="ru-RU" dirty="0" sz="2000">
-                <a:solidFill>
-                  <a:srgbClr val="000000"/>
-                </a:solidFill>
-              </a:rPr>
-              <a:t xml:space="preserve"> — быстро для умеренных матриц</a:t>
-            </a:r>
           </a:p>
           <a:p>
             <a:pPr>
@@ -8715,7 +8704,7 @@
                   <a:srgbClr val="000000"/>
                 </a:solidFill>
               </a:rPr>
-              <a:t>`LinearRegression` в sklearn использует solver `linalg` без итераций</a:t>
+              <a:t>`LinearRegression` в sklearn по умолчанию решает так (solver `linalg`) — быстро и точно для умеренных матриц</a:t>
             </a:r>
           </a:p>
           <a:p>
@@ -8730,9 +8719,47 @@
                   <a:srgbClr val="000000"/>
                 </a:solidFill>
               </a:rPr>
-              <a:t>При огромных данных — итеративные методы: SGD, `SGDRegressor`</a:t>
-            </a:r>
-          </a:p>
+              <a:t xml:space="preserve">При очень больших </a:t>
+            </a:r>
+            <ns0:m xmlns:ns0="http://schemas.microsoft.com/office/drawing/2010/main">
+              <m:oMath xmlns:m="http://schemas.openxmlformats.org/officeDocument/2006/math">
+                <m:r>
+                  <m:t>X</m:t>
+                </m:r>
+              </m:oMath>
+            </ns0:m>
+            <a:r>
+              <a:rPr lang="ru-RU" dirty="0" sz="2000">
+                <a:solidFill>
+                  <a:srgbClr val="000000"/>
+                </a:solidFill>
+              </a:rPr>
+              <a:t xml:space="preserve"> или нехватке памяти — итеративные методы: SGD, `sag`, `lsqr`</a:t>
+            </a:r>
+          </a:p>
+        </p:txBody>
+      </p:sp>
+      <p:sp>
+        <p:nvSpPr>
+          <p:cNvPr id="4" name="TextBox 3"/>
+          <p:cNvSpPr txBox="1"/>
+          <p:nvPr/>
+        </p:nvSpPr>
+        <p:spPr>
+          <a:xfrm>
+            <a:off x="3886200" y="1371600"/>
+            <a:ext cx="3108960" cy="1316736"/>
+          </a:xfrm>
+          <a:prstGeom prst="rect">
+            <a:avLst/>
+          </a:prstGeom>
+          <a:noFill/>
+        </p:spPr>
+        <p:txBody>
+          <a:bodyPr wrap="square">
+            <a:normAutofit/>
+          </a:bodyPr>
+          <a:lstStyle/>
           <a:p>
             <a:pPr>
               <a:spcAft>
@@ -8745,21 +8772,36 @@
                   <a:srgbClr val="000000"/>
                 </a:solidFill>
               </a:rPr>
-              <a:t>Градиентный спуск: шаг против градиента функции потерь</a:t>
-            </a:r>
-          </a:p>
-        </p:txBody>
-      </p:sp>
-      <p:sp>
-        <p:nvSpPr>
-          <p:cNvPr id="4" name="Rectangle 3"/>
+              <a:t>Градиентный спуск: шаг против градиента функции потерь; `SGDRegressor` в sklearn</a:t>
+            </a:r>
+          </a:p>
+          <a:p>
+            <a:pPr>
+              <a:spcAft>
+                <a:spcPts val="800"/>
+              </a:spcAft>
+            </a:pPr>
+            <a:r>
+              <a:rPr lang="ru-RU" dirty="0" sz="2000">
+                <a:solidFill>
+                  <a:srgbClr val="000000"/>
+                </a:solidFill>
+              </a:rPr>
+              <a:t>На практике для линейной регрессии чаще используют не «чистый» SGD, а стабильные solver'ы (`lbfgs`, `sag` в Ridge/Lasso)</a:t>
+            </a:r>
+          </a:p>
+        </p:txBody>
+      </p:sp>
+      <p:sp>
+        <p:nvSpPr>
+          <p:cNvPr id="5" name="Rectangle 4"/>
           <p:cNvSpPr/>
           <p:nvPr/>
         </p:nvSpPr>
         <p:spPr>
           <a:xfrm>
-            <a:off x="640080" y="4864607"/>
-            <a:ext cx="6492240" cy="630936"/>
+            <a:off x="640080" y="4690872"/>
+            <a:ext cx="6492240" cy="804672"/>
           </a:xfrm>
           <a:prstGeom prst="rect">
             <a:avLst/>
@@ -8797,14 +8839,14 @@
       </p:sp>
       <p:sp>
         <p:nvSpPr>
-          <p:cNvPr id="5" name="TextBox 4"/>
+          <p:cNvPr id="6" name="TextBox 5"/>
           <p:cNvSpPr txBox="1"/>
           <p:nvPr/>
         </p:nvSpPr>
         <p:spPr>
           <a:xfrm>
-            <a:off x="713231" y="4901183"/>
-            <a:ext cx="6345936" cy="557784"/>
+            <a:off x="713231" y="4727448"/>
+            <a:ext cx="6345936" cy="731520"/>
           </a:xfrm>
           <a:prstGeom prst="rect">
             <a:avLst/>
@@ -8845,7 +8887,7 @@
                 </a:solidFill>
                 <a:latin typeface="Consolas"/>
               </a:rPr>
-              <a:t>model = LinearRegression().fit(X_train, y_train)</a:t>
+              <a:t>model = LinearRegression()  # solver='linalg' по умолчанию</a:t>
             </a:r>
           </a:p>
           <a:p>
@@ -8861,6 +8903,22 @@
                 </a:solidFill>
                 <a:latin typeface="Consolas"/>
               </a:rPr>
+              <a:t>model.fit(X_train, y_train)</a:t>
+            </a:r>
+          </a:p>
+          <a:p>
+            <a:pPr>
+              <a:spcAft>
+                <a:spcPts val="0"/>
+              </a:spcAft>
+            </a:pPr>
+            <a:r>
+              <a:rPr sz="1100">
+                <a:solidFill>
+                  <a:srgbClr val="000000"/>
+                </a:solidFill>
+                <a:latin typeface="Consolas"/>
+              </a:rPr>
               <a:t>y_pred = model.predict(X_test)</a:t>
             </a:r>
           </a:p>
@@ -8868,13 +8926,13 @@
       </p:sp>
       <p:sp>
         <p:nvSpPr>
-          <p:cNvPr id="6" name="TextBox 5"/>
+          <p:cNvPr id="7" name="TextBox 6"/>
           <p:cNvSpPr txBox="1"/>
           <p:nvPr/>
         </p:nvSpPr>
         <p:spPr>
           <a:xfrm>
-            <a:off x="640080" y="5550407"/>
+            <a:off x="640080" y="5550408"/>
             <a:ext cx="6492240" cy="201168"/>
           </a:xfrm>
           <a:prstGeom prst="rect">
@@ -8903,7 +8961,7 @@
       </p:sp>
       <p:pic>
         <p:nvPicPr>
-          <p:cNvPr id="7" name="Picture 6" descr="gradient_descent_contour.png"/>
+          <p:cNvPr id="8" name="Picture 7" descr="gradient_descent_contour.png"/>
           <p:cNvPicPr>
             <a:picLocks noChangeAspect="1"/>
           </p:cNvPicPr>
@@ -8917,8 +8975,8 @@
         </p:blipFill>
         <p:spPr>
           <a:xfrm>
-            <a:off x="7269480" y="1774146"/>
-            <a:ext cx="5029200" cy="3584028"/>
+            <a:off x="7500144" y="1325880"/>
+            <a:ext cx="4567870" cy="3255264"/>
           </a:xfrm>
           <a:prstGeom prst="rect">
             <a:avLst/>
@@ -8985,7 +9043,7 @@
         <p:spPr>
           <a:xfrm>
             <a:off x="640080" y="1371600"/>
-            <a:ext cx="6583680" cy="1810512"/>
+            <a:ext cx="3108960" cy="1645920"/>
           </a:xfrm>
           <a:prstGeom prst="rect">
             <a:avLst/>
@@ -9151,6 +9209,29 @@
               </m:oMath>
             </ns0:m>
           </a:p>
+        </p:txBody>
+      </p:sp>
+      <p:sp>
+        <p:nvSpPr>
+          <p:cNvPr id="4" name="TextBox 3"/>
+          <p:cNvSpPr txBox="1"/>
+          <p:nvPr/>
+        </p:nvSpPr>
+        <p:spPr>
+          <a:xfrm>
+            <a:off x="3886200" y="1371600"/>
+            <a:ext cx="3108960" cy="1645920"/>
+          </a:xfrm>
+          <a:prstGeom prst="rect">
+            <a:avLst/>
+          </a:prstGeom>
+          <a:noFill/>
+        </p:spPr>
+        <p:txBody>
+          <a:bodyPr wrap="square">
+            <a:spAutoFit/>
+          </a:bodyPr>
+          <a:lstStyle/>
           <a:p>
             <a:pPr>
               <a:spcAft>
@@ -9200,7 +9281,7 @@
       </p:sp>
       <p:pic>
         <p:nvPicPr>
-          <p:cNvPr id="4" name="Picture 3" descr="hyperplane_3d.png"/>
+          <p:cNvPr id="5" name="Picture 4" descr="hyperplane_3d.png"/>
           <p:cNvPicPr>
             <a:picLocks noChangeAspect="1"/>
           </p:cNvPicPr>
@@ -9214,8 +9295,8 @@
         </p:blipFill>
         <p:spPr>
           <a:xfrm>
-            <a:off x="7632338" y="1325880"/>
-            <a:ext cx="4303483" cy="4480559"/>
+            <a:off x="7667468" y="1325880"/>
+            <a:ext cx="4233223" cy="4407408"/>
           </a:xfrm>
           <a:prstGeom prst="rect">
             <a:avLst/>
@@ -9282,7 +9363,7 @@
         <p:spPr>
           <a:xfrm>
             <a:off x="640080" y="1371600"/>
-            <a:ext cx="6583680" cy="2688335"/>
+            <a:ext cx="3108960" cy="969264"/>
           </a:xfrm>
           <a:prstGeom prst="rect">
             <a:avLst/>
@@ -9339,6 +9420,29 @@
               <a:t xml:space="preserve"> — для МНК качество прогноза на test часто не меняется</a:t>
             </a:r>
           </a:p>
+        </p:txBody>
+      </p:sp>
+      <p:sp>
+        <p:nvSpPr>
+          <p:cNvPr id="4" name="TextBox 3"/>
+          <p:cNvSpPr txBox="1"/>
+          <p:nvPr/>
+        </p:nvSpPr>
+        <p:spPr>
+          <a:xfrm>
+            <a:off x="3886200" y="1371600"/>
+            <a:ext cx="3108960" cy="969264"/>
+          </a:xfrm>
+          <a:prstGeom prst="rect">
+            <a:avLst/>
+          </a:prstGeom>
+          <a:noFill/>
+        </p:spPr>
+        <p:txBody>
+          <a:bodyPr wrap="square">
+            <a:normAutofit/>
+          </a:bodyPr>
+          <a:lstStyle/>
           <a:p>
             <a:pPr>
               <a:spcAft>
@@ -9405,7 +9509,7 @@
       </p:sp>
       <p:sp>
         <p:nvSpPr>
-          <p:cNvPr id="4" name="Rectangle 3"/>
+          <p:cNvPr id="5" name="Rectangle 4"/>
           <p:cNvSpPr/>
           <p:nvPr/>
         </p:nvSpPr>
@@ -9450,7 +9554,7 @@
       </p:sp>
       <p:sp>
         <p:nvSpPr>
-          <p:cNvPr id="5" name="TextBox 4"/>
+          <p:cNvPr id="6" name="TextBox 5"/>
           <p:cNvSpPr txBox="1"/>
           <p:nvPr/>
         </p:nvSpPr>
@@ -9585,7 +9689,7 @@
       </p:sp>
       <p:sp>
         <p:nvSpPr>
-          <p:cNvPr id="6" name="TextBox 5"/>
+          <p:cNvPr id="7" name="TextBox 6"/>
           <p:cNvSpPr txBox="1"/>
           <p:nvPr/>
         </p:nvSpPr>
@@ -9620,7 +9724,7 @@
       </p:sp>
       <p:pic>
         <p:nvPicPr>
-          <p:cNvPr id="7" name="Picture 6" descr="scaling_weights_compare.png"/>
+          <p:cNvPr id="8" name="Picture 7" descr="scaling_weights_compare.png"/>
           <p:cNvPicPr>
             <a:picLocks noChangeAspect="1"/>
           </p:cNvPicPr>
@@ -9634,8 +9738,8 @@
         </p:blipFill>
         <p:spPr>
           <a:xfrm>
-            <a:off x="5031801" y="3703320"/>
-            <a:ext cx="6304156" cy="2560320"/>
+            <a:off x="4145173" y="2450592"/>
+            <a:ext cx="3962612" cy="1609344"/>
           </a:xfrm>
           <a:prstGeom prst="rect">
             <a:avLst/>
@@ -9702,7 +9806,7 @@
         <p:spPr>
           <a:xfrm>
             <a:off x="640080" y="1371600"/>
-            <a:ext cx="6583680" cy="1810512"/>
+            <a:ext cx="3108960" cy="1645920"/>
           </a:xfrm>
           <a:prstGeom prst="rect">
             <a:avLst/>
@@ -9741,30 +9845,7 @@
                   <a:srgbClr val="000000"/>
                 </a:solidFill>
               </a:rPr>
-              <a:t>: при MSE сильно тянет линию — одна точка может заметно сдвинуть прямую</a:t>
-            </a:r>
-          </a:p>
-          <a:p>
-            <a:pPr>
-              <a:spcAft>
-                <a:spcPts val="800"/>
-              </a:spcAft>
-            </a:pPr>
-            <a:r>
-              <a:rPr lang="ru-RU" dirty="0" sz="2000" b="1">
-                <a:solidFill>
-                  <a:srgbClr val="000000"/>
-                </a:solidFill>
-              </a:rPr>
-              <a:t>Робастные</a:t>
-            </a:r>
-            <a:r>
-              <a:rPr lang="ru-RU" dirty="0" sz="2000">
-                <a:solidFill>
-                  <a:srgbClr val="000000"/>
-                </a:solidFill>
-              </a:rPr>
-              <a:t xml:space="preserve"> методы (MAE, `HuberRegressor`, RANSAC) меньше реагируют на выбросы, чем MSE</a:t>
+              <a:t>: при MSE сильно тянет линию — решение: MAE (`HuberRegressor`), робастные методы или чистка</a:t>
             </a:r>
           </a:p>
           <a:p>
@@ -9804,6 +9885,29 @@
               </m:oMath>
             </ns0:m>
           </a:p>
+        </p:txBody>
+      </p:sp>
+      <p:sp>
+        <p:nvSpPr>
+          <p:cNvPr id="4" name="TextBox 3"/>
+          <p:cNvSpPr txBox="1"/>
+          <p:nvPr/>
+        </p:nvSpPr>
+        <p:spPr>
+          <a:xfrm>
+            <a:off x="3886200" y="1371600"/>
+            <a:ext cx="3108960" cy="1645920"/>
+          </a:xfrm>
+          <a:prstGeom prst="rect">
+            <a:avLst/>
+          </a:prstGeom>
+          <a:noFill/>
+        </p:spPr>
+        <p:txBody>
+          <a:bodyPr wrap="square">
+            <a:spAutoFit/>
+          </a:bodyPr>
+          <a:lstStyle/>
           <a:p>
             <a:pPr>
               <a:spcAft>
@@ -9816,7 +9920,7 @@
                   <a:srgbClr val="000000"/>
                 </a:solidFill>
               </a:rPr>
-              <a:t xml:space="preserve">Перед обучением: scatter «признак vs </a:t>
+              <a:t xml:space="preserve">Всегда стройте scatter «признак vs </a:t>
             </a:r>
             <ns0:m xmlns:ns0="http://schemas.microsoft.com/office/drawing/2010/main">
               <m:oMath xmlns:m="http://schemas.openxmlformats.org/officeDocument/2006/math">
@@ -9831,14 +9935,29 @@
                   <a:srgbClr val="000000"/>
                 </a:solidFill>
               </a:rPr>
-              <a:t>» и boxplot остатков</a:t>
+              <a:t>» и boxplot остатков перед обучением</a:t>
+            </a:r>
+          </a:p>
+          <a:p>
+            <a:pPr>
+              <a:spcAft>
+                <a:spcPts val="800"/>
+              </a:spcAft>
+            </a:pPr>
+            <a:r>
+              <a:rPr lang="ru-RU" dirty="0" sz="2000">
+                <a:solidFill>
+                  <a:srgbClr val="000000"/>
+                </a:solidFill>
+              </a:rPr>
+              <a:t>Влиятельные точки диагностируют через остатки и расстояние от центра признаков</a:t>
             </a:r>
           </a:p>
         </p:txBody>
       </p:sp>
       <p:pic>
         <p:nvPicPr>
-          <p:cNvPr id="4" name="Picture 3" descr="outlier_y_effect.png"/>
+          <p:cNvPr id="5" name="Picture 4" descr="outlier_y_effect.png"/>
           <p:cNvPicPr>
             <a:picLocks noChangeAspect="1"/>
           </p:cNvPicPr>
@@ -9852,8 +9971,8 @@
         </p:blipFill>
         <p:spPr>
           <a:xfrm>
-            <a:off x="7269480" y="1589656"/>
-            <a:ext cx="2487168" cy="1685294"/>
+            <a:off x="8151212" y="1325880"/>
+            <a:ext cx="3265735" cy="2212848"/>
           </a:xfrm>
           <a:prstGeom prst="rect">
             <a:avLst/>
@@ -9862,7 +9981,7 @@
       </p:pic>
       <p:pic>
         <p:nvPicPr>
-          <p:cNvPr id="5" name="Picture 4" descr="outlier_leverage_x.png"/>
+          <p:cNvPr id="6" name="Picture 5" descr="outlier_leverage_x.png"/>
           <p:cNvPicPr>
             <a:picLocks noChangeAspect="1"/>
           </p:cNvPicPr>
@@ -9870,30 +9989,6 @@
         </p:nvPicPr>
         <p:blipFill>
           <a:blip r:embed="rId3"/>
-          <a:stretch>
-            <a:fillRect/>
-          </a:stretch>
-        </p:blipFill>
-        <p:spPr>
-          <a:xfrm>
-            <a:off x="9811512" y="1927244"/>
-            <a:ext cx="2487168" cy="1010119"/>
-          </a:xfrm>
-          <a:prstGeom prst="rect">
-            <a:avLst/>
-          </a:prstGeom>
-        </p:spPr>
-      </p:pic>
-      <p:pic>
-        <p:nvPicPr>
-          <p:cNvPr id="6" name="Picture 5" descr="outlier_scatter_boxplot.png"/>
-          <p:cNvPicPr>
-            <a:picLocks noChangeAspect="1"/>
-          </p:cNvPicPr>
-          <p:nvPr/>
-        </p:nvPicPr>
-        <p:blipFill>
-          <a:blip r:embed="rId4"/>
           <a:stretch>
             <a:fillRect/>
           </a:stretch>
@@ -9968,7 +10063,7 @@
         <p:spPr>
           <a:xfrm>
             <a:off x="640080" y="1371600"/>
-            <a:ext cx="6583680" cy="1810512"/>
+            <a:ext cx="3108960" cy="969264"/>
           </a:xfrm>
           <a:prstGeom prst="rect">
             <a:avLst/>
@@ -10034,6 +10129,29 @@
               <a:t xml:space="preserve"> нестабильны — большие, меняют знак</a:t>
             </a:r>
           </a:p>
+        </p:txBody>
+      </p:sp>
+      <p:sp>
+        <p:nvSpPr>
+          <p:cNvPr id="4" name="TextBox 3"/>
+          <p:cNvSpPr txBox="1"/>
+          <p:nvPr/>
+        </p:nvSpPr>
+        <p:spPr>
+          <a:xfrm>
+            <a:off x="3886200" y="1371600"/>
+            <a:ext cx="3108960" cy="969264"/>
+          </a:xfrm>
+          <a:prstGeom prst="rect">
+            <a:avLst/>
+          </a:prstGeom>
+          <a:noFill/>
+        </p:spPr>
+        <p:txBody>
+          <a:bodyPr wrap="square">
+            <a:spAutoFit/>
+          </a:bodyPr>
+          <a:lstStyle/>
           <a:p>
             <a:pPr>
               <a:spcAft>
@@ -10068,7 +10186,7 @@
       </p:sp>
       <p:pic>
         <p:nvPicPr>
-          <p:cNvPr id="4" name="Picture 3" descr="multicollinearity.png"/>
+          <p:cNvPr id="5" name="Picture 4" descr="multicollinearity.png"/>
           <p:cNvPicPr>
             <a:picLocks noChangeAspect="1"/>
           </p:cNvPicPr>
@@ -10082,8 +10200,8 @@
         </p:blipFill>
         <p:spPr>
           <a:xfrm>
-            <a:off x="5031801" y="3703320"/>
-            <a:ext cx="6304156" cy="2560320"/>
+            <a:off x="3368411" y="2450592"/>
+            <a:ext cx="5516136" cy="2240280"/>
           </a:xfrm>
           <a:prstGeom prst="rect">
             <a:avLst/>

--- a/lessons/lineynaya_regressiya/presentation.pptx
+++ b/lessons/lineynaya_regressiya/presentation.pptx
@@ -4845,7 +4845,7 @@
         <p:spPr>
           <a:xfrm>
             <a:off x="640080" y="1371600"/>
-            <a:ext cx="3108960" cy="969264"/>
+            <a:ext cx="6263640" cy="2788920"/>
           </a:xfrm>
           <a:prstGeom prst="rect">
             <a:avLst/>
@@ -4854,7 +4854,7 @@
         </p:spPr>
         <p:txBody>
           <a:bodyPr wrap="square">
-            <a:normAutofit/>
+            <a:spAutoFit/>
           </a:bodyPr>
           <a:lstStyle/>
           <a:p>
@@ -4869,7 +4869,7 @@
                   <a:srgbClr val="000000"/>
                 </a:solidFill>
               </a:rPr>
-              <a:t>Переобучение: модель подстраивается под шум обучающей выборки</a:t>
+              <a:t>• Переобучение: модель подстраивается под шум обучающей выборки</a:t>
             </a:r>
           </a:p>
           <a:p>
@@ -4884,32 +4884,9 @@
                   <a:srgbClr val="000000"/>
                 </a:solidFill>
               </a:rPr>
-              <a:t>Линейная модель с малым числом признаков переобучается реже деревьев, но шум в данных всё равно завышает метрики на train</a:t>
-            </a:r>
-          </a:p>
-        </p:txBody>
-      </p:sp>
-      <p:sp>
-        <p:nvSpPr>
-          <p:cNvPr id="4" name="TextBox 3"/>
-          <p:cNvSpPr txBox="1"/>
-          <p:nvPr/>
-        </p:nvSpPr>
-        <p:spPr>
-          <a:xfrm>
-            <a:off x="3886200" y="1371600"/>
-            <a:ext cx="3108960" cy="969264"/>
-          </a:xfrm>
-          <a:prstGeom prst="rect">
-            <a:avLst/>
-          </a:prstGeom>
-          <a:noFill/>
-        </p:spPr>
-        <p:txBody>
-          <a:bodyPr wrap="square">
-            <a:normAutofit/>
-          </a:bodyPr>
-          <a:lstStyle/>
+              <a:t>• Линейная модель с малым числом признаков переобучается реже деревьев, но шум в данных всё равно завышает метрики на train</a:t>
+            </a:r>
+          </a:p>
           <a:p>
             <a:pPr>
               <a:spcAft>
@@ -4922,7 +4899,7 @@
                   <a:srgbClr val="000000"/>
                 </a:solidFill>
               </a:rPr>
-              <a:t>Никогда не оценивайте качество на train — только на отложенной выборке</a:t>
+              <a:t>• Никогда не оценивайте качество на train — только на отложенной выборке</a:t>
             </a:r>
           </a:p>
           <a:p>
@@ -4937,21 +4914,21 @@
                   <a:srgbClr val="000000"/>
                 </a:solidFill>
               </a:rPr>
-              <a:t>`train_test_split`: train — подбор весов, test — финальная проверка</a:t>
-            </a:r>
-          </a:p>
-        </p:txBody>
-      </p:sp>
-      <p:sp>
-        <p:nvSpPr>
-          <p:cNvPr id="5" name="Rectangle 4"/>
+              <a:t>• `train_test_split`: train — подбор весов, test — финальная проверка</a:t>
+            </a:r>
+          </a:p>
+        </p:txBody>
+      </p:sp>
+      <p:sp>
+        <p:nvSpPr>
+          <p:cNvPr id="4" name="Rectangle 3"/>
           <p:cNvSpPr/>
           <p:nvPr/>
         </p:nvSpPr>
         <p:spPr>
           <a:xfrm>
-            <a:off x="640080" y="4517136"/>
-            <a:ext cx="6492240" cy="978407"/>
+            <a:off x="640080" y="4782312"/>
+            <a:ext cx="6172200" cy="713232"/>
           </a:xfrm>
           <a:prstGeom prst="rect">
             <a:avLst/>
@@ -4989,14 +4966,14 @@
       </p:sp>
       <p:sp>
         <p:nvSpPr>
-          <p:cNvPr id="6" name="TextBox 5"/>
+          <p:cNvPr id="5" name="TextBox 4"/>
           <p:cNvSpPr txBox="1"/>
           <p:nvPr/>
         </p:nvSpPr>
         <p:spPr>
           <a:xfrm>
-            <a:off x="713231" y="4553712"/>
-            <a:ext cx="6345936" cy="905255"/>
+            <a:off x="713231" y="4818888"/>
+            <a:ext cx="6025896" cy="640080"/>
           </a:xfrm>
           <a:prstGeom prst="rect">
             <a:avLst/>
@@ -5021,7 +4998,7 @@
                 </a:solidFill>
                 <a:latin typeface="Consolas"/>
               </a:rPr>
-              <a:t>from sklearn.model_selection import train_test_split</a:t>
+              <a:t>X_tr, X_te, y_tr, y_te = train_test_split(</a:t>
             </a:r>
           </a:p>
           <a:p>
@@ -5037,7 +5014,7 @@
                 </a:solidFill>
                 <a:latin typeface="Consolas"/>
               </a:rPr>
-              <a:t>X_tr, X_te, y_tr, y_te = train_test_split(</a:t>
+              <a:t>    X, y, test_size=0.2, random_state=42</a:t>
             </a:r>
           </a:p>
           <a:p>
@@ -5053,7 +5030,7 @@
                 </a:solidFill>
                 <a:latin typeface="Consolas"/>
               </a:rPr>
-              <a:t>    X, y, test_size=0.2, random_state=42</a:t>
+              <a:t>)</a:t>
             </a:r>
           </a:p>
           <a:p>
@@ -5069,22 +5046,6 @@
                 </a:solidFill>
                 <a:latin typeface="Consolas"/>
               </a:rPr>
-              <a:t>)</a:t>
-            </a:r>
-          </a:p>
-          <a:p>
-            <a:pPr>
-              <a:spcAft>
-                <a:spcPts val="0"/>
-              </a:spcAft>
-            </a:pPr>
-            <a:r>
-              <a:rPr sz="1100">
-                <a:solidFill>
-                  <a:srgbClr val="000000"/>
-                </a:solidFill>
-                <a:latin typeface="Consolas"/>
-              </a:rPr>
               <a:t>model.fit(X_tr, y_tr)  # метрики только на X_te</a:t>
             </a:r>
           </a:p>
@@ -5092,14 +5053,14 @@
       </p:sp>
       <p:sp>
         <p:nvSpPr>
-          <p:cNvPr id="7" name="TextBox 6"/>
+          <p:cNvPr id="6" name="TextBox 5"/>
           <p:cNvSpPr txBox="1"/>
           <p:nvPr/>
         </p:nvSpPr>
         <p:spPr>
           <a:xfrm>
             <a:off x="640080" y="5550407"/>
-            <a:ext cx="6492240" cy="201168"/>
+            <a:ext cx="6172200" cy="201168"/>
           </a:xfrm>
           <a:prstGeom prst="rect">
             <a:avLst/>
@@ -5127,7 +5088,7 @@
       </p:sp>
       <p:pic>
         <p:nvPicPr>
-          <p:cNvPr id="8" name="Picture 7" descr="train_test_split.png"/>
+          <p:cNvPr id="7" name="Picture 6" descr="train_test_split.png"/>
           <p:cNvPicPr>
             <a:picLocks noChangeAspect="1"/>
           </p:cNvPicPr>
@@ -5141,8 +5102,8 @@
         </p:blipFill>
         <p:spPr>
           <a:xfrm>
-            <a:off x="3721937" y="2450592"/>
-            <a:ext cx="4809085" cy="1956816"/>
+            <a:off x="7476962" y="1325880"/>
+            <a:ext cx="4050050" cy="4407407"/>
           </a:xfrm>
           <a:prstGeom prst="rect">
             <a:avLst/>
@@ -5209,7 +5170,7 @@
         <p:spPr>
           <a:xfrm>
             <a:off x="640080" y="1371600"/>
-            <a:ext cx="3108960" cy="969264"/>
+            <a:ext cx="6263640" cy="3337560"/>
           </a:xfrm>
           <a:prstGeom prst="rect">
             <a:avLst/>
@@ -5233,7 +5194,7 @@
                   <a:srgbClr val="000000"/>
                 </a:solidFill>
               </a:rPr>
-              <a:t>Добавляем штраф за большие веса к функции потерь</a:t>
+              <a:t>• Добавляем штраф за большие веса к функции потерь</a:t>
             </a:r>
           </a:p>
           <a:p>
@@ -5248,7 +5209,7 @@
                   <a:srgbClr val="000000"/>
                 </a:solidFill>
               </a:rPr>
-              <a:t xml:space="preserve">Ridge (L2): </a:t>
+              <a:t xml:space="preserve">• Ridge (L2): </a:t>
             </a:r>
             <ns0:m xmlns:ns0="http://schemas.microsoft.com/office/drawing/2010/main">
               <m:oMath xmlns:m="http://schemas.openxmlformats.org/officeDocument/2006/math">
@@ -5297,32 +5258,25 @@
                   <a:srgbClr val="000000"/>
                 </a:solidFill>
               </a:rPr>
-              <a:t xml:space="preserve"> — сжимает веса, помогает при мультиколлинеарности</a:t>
-            </a:r>
-          </a:p>
-        </p:txBody>
-      </p:sp>
-      <p:sp>
-        <p:nvSpPr>
-          <p:cNvPr id="4" name="TextBox 3"/>
-          <p:cNvSpPr txBox="1"/>
-          <p:nvPr/>
-        </p:nvSpPr>
-        <p:spPr>
-          <a:xfrm>
-            <a:off x="3886200" y="1371600"/>
-            <a:ext cx="3108960" cy="969264"/>
-          </a:xfrm>
-          <a:prstGeom prst="rect">
-            <a:avLst/>
-          </a:prstGeom>
-          <a:noFill/>
-        </p:spPr>
-        <p:txBody>
-          <a:bodyPr wrap="square">
-            <a:spAutoFit/>
-          </a:bodyPr>
-          <a:lstStyle/>
+              <a:t xml:space="preserve"> — сжимает веса </a:t>
+            </a:r>
+            <a:r>
+              <a:rPr lang="ru-RU" dirty="0" sz="2000" b="1">
+                <a:solidFill>
+                  <a:srgbClr val="000000"/>
+                </a:solidFill>
+              </a:rPr>
+              <a:t>вместе</a:t>
+            </a:r>
+            <a:r>
+              <a:rPr lang="ru-RU" dirty="0" sz="2000">
+                <a:solidFill>
+                  <a:srgbClr val="000000"/>
+                </a:solidFill>
+              </a:rPr>
+              <a:t>, не обнуляя; стабилизирует при мультиколлинеарности</a:t>
+            </a:r>
+          </a:p>
           <a:p>
             <a:pPr>
               <a:spcAft>
@@ -5335,7 +5289,7 @@
                   <a:srgbClr val="000000"/>
                 </a:solidFill>
               </a:rPr>
-              <a:t xml:space="preserve">Lasso (L1): </a:t>
+              <a:t xml:space="preserve">• Lasso (L1): </a:t>
             </a:r>
             <ns0:m xmlns:ns0="http://schemas.microsoft.com/office/drawing/2010/main">
               <m:oMath xmlns:m="http://schemas.openxmlformats.org/officeDocument/2006/math">
@@ -5385,7 +5339,7 @@
                   <a:srgbClr val="000000"/>
                 </a:solidFill>
               </a:rPr>
-              <a:t xml:space="preserve"> — может обнулять веса → отбор признаков</a:t>
+              <a:t xml:space="preserve"> — обнуляет слабые признаки → отбор фич, но не лечит дублирующие столбцы</a:t>
             </a:r>
           </a:p>
           <a:p>
@@ -5400,7 +5354,38 @@
                   <a:srgbClr val="000000"/>
                 </a:solidFill>
               </a:rPr>
-              <a:t xml:space="preserve">Гиперпараметр </a:t>
+              <a:t xml:space="preserve">• При коррелированных признаках предпочтите </a:t>
+            </a:r>
+            <a:r>
+              <a:rPr lang="ru-RU" dirty="0" sz="2000" b="1">
+                <a:solidFill>
+                  <a:srgbClr val="000000"/>
+                </a:solidFill>
+              </a:rPr>
+              <a:t>Ridge</a:t>
+            </a:r>
+            <a:r>
+              <a:rPr lang="ru-RU" dirty="0" sz="2000">
+                <a:solidFill>
+                  <a:srgbClr val="000000"/>
+                </a:solidFill>
+              </a:rPr>
+              <a:t>; Lasso выберет один из дублей случайно</a:t>
+            </a:r>
+          </a:p>
+          <a:p>
+            <a:pPr>
+              <a:spcAft>
+                <a:spcPts val="800"/>
+              </a:spcAft>
+            </a:pPr>
+            <a:r>
+              <a:rPr lang="ru-RU" dirty="0" sz="2000">
+                <a:solidFill>
+                  <a:srgbClr val="000000"/>
+                </a:solidFill>
+              </a:rPr>
+              <a:t xml:space="preserve">• Гиперпараметр </a:t>
             </a:r>
             <ns0:m xmlns:ns0="http://schemas.microsoft.com/office/drawing/2010/main">
               <m:oMath xmlns:m="http://schemas.openxmlformats.org/officeDocument/2006/math">
@@ -5415,14 +5400,14 @@
                   <a:srgbClr val="000000"/>
                 </a:solidFill>
               </a:rPr>
-              <a:t xml:space="preserve"> подбирают по validation / cross-validation</a:t>
+              <a:t xml:space="preserve"> подбирают по validation / cross-validation (см. график)</a:t>
             </a:r>
           </a:p>
         </p:txBody>
       </p:sp>
       <p:pic>
         <p:nvPicPr>
-          <p:cNvPr id="5" name="Picture 4" descr="regularization_weights.png"/>
+          <p:cNvPr id="4" name="Picture 3" descr="regularization_weights.png"/>
           <p:cNvPicPr>
             <a:picLocks noChangeAspect="1"/>
           </p:cNvPicPr>
@@ -5436,8 +5421,8 @@
         </p:blipFill>
         <p:spPr>
           <a:xfrm>
-            <a:off x="3500644" y="2450592"/>
-            <a:ext cx="5251670" cy="2240280"/>
+            <a:off x="7269480" y="1325880"/>
+            <a:ext cx="4465015" cy="4134686"/>
           </a:xfrm>
           <a:prstGeom prst="rect">
             <a:avLst/>
@@ -5504,7 +5489,7 @@
         <p:spPr>
           <a:xfrm>
             <a:off x="640080" y="1371600"/>
-            <a:ext cx="3108960" cy="969264"/>
+            <a:ext cx="6263640" cy="2907791"/>
           </a:xfrm>
           <a:prstGeom prst="rect">
             <a:avLst/>
@@ -5528,7 +5513,7 @@
                   <a:srgbClr val="000000"/>
                 </a:solidFill>
               </a:rPr>
-              <a:t xml:space="preserve">MAE — средняя ошибка в тех же единицах, что и </a:t>
+              <a:t xml:space="preserve">• MAE — средняя ошибка в тех же единицах, что и </a:t>
             </a:r>
             <ns0:m xmlns:ns0="http://schemas.microsoft.com/office/drawing/2010/main">
               <m:oMath xmlns:m="http://schemas.openxmlformats.org/officeDocument/2006/math">
@@ -5558,7 +5543,7 @@
                   <a:srgbClr val="000000"/>
                 </a:solidFill>
               </a:rPr>
-              <a:t xml:space="preserve">RMSE = </a:t>
+              <a:t xml:space="preserve">• RMSE = </a:t>
             </a:r>
             <ns0:m xmlns:ns0="http://schemas.microsoft.com/office/drawing/2010/main">
               <m:oMath xmlns:m="http://schemas.openxmlformats.org/officeDocument/2006/math">
@@ -5587,35 +5572,20 @@
               <a:t xml:space="preserve"> — сильнее штрафует крупные промахи</a:t>
             </a:r>
           </a:p>
-        </p:txBody>
-      </p:sp>
-      <p:sp>
-        <p:nvSpPr>
-          <p:cNvPr id="4" name="TextBox 3"/>
-          <p:cNvSpPr txBox="1"/>
-          <p:nvPr/>
-        </p:nvSpPr>
-        <p:spPr>
-          <a:xfrm>
-            <a:off x="3886200" y="1371600"/>
-            <a:ext cx="3108960" cy="969264"/>
-          </a:xfrm>
-          <a:prstGeom prst="rect">
-            <a:avLst/>
-          </a:prstGeom>
-          <a:noFill/>
-        </p:spPr>
-        <p:txBody>
-          <a:bodyPr wrap="square">
-            <a:normAutofit/>
-          </a:bodyPr>
-          <a:lstStyle/>
           <a:p>
             <a:pPr>
               <a:spcAft>
                 <a:spcPts val="800"/>
               </a:spcAft>
             </a:pPr>
+            <a:r>
+              <a:rPr lang="ru-RU" dirty="0" sz="2000">
+                <a:solidFill>
+                  <a:srgbClr val="000000"/>
+                </a:solidFill>
+              </a:rPr>
+              <a:t xml:space="preserve">• </a:t>
+            </a:r>
             <ns0:m xmlns:ns0="http://schemas.microsoft.com/office/drawing/2010/main">
               <m:oMath xmlns:m="http://schemas.openxmlformats.org/officeDocument/2006/math">
                 <m:sSup>
@@ -5699,21 +5669,80 @@
                   <a:srgbClr val="000000"/>
                 </a:solidFill>
               </a:rPr>
-              <a:t>Для сравнения моделей на одной задаче смотрите MAE и RMSE вместе</a:t>
-            </a:r>
-          </a:p>
-        </p:txBody>
-      </p:sp>
-      <p:sp>
-        <p:nvSpPr>
-          <p:cNvPr id="5" name="Rectangle 4"/>
+              <a:t xml:space="preserve">• Пример: ошибки </a:t>
+            </a:r>
+            <ns0:m xmlns:ns0="http://schemas.microsoft.com/office/drawing/2010/main">
+              <m:oMath xmlns:m="http://schemas.openxmlformats.org/officeDocument/2006/math">
+                <m:d>
+                  <m:dPr>
+                    <m:begChr m:val="["/>
+                    <m:sepChr m:val=","/>
+                    <m:endChr m:val="]"/>
+                  </m:dPr>
+                  <m:e>
+                    <m:r>
+                      <m:t>1</m:t>
+                    </m:r>
+                  </m:e>
+                  <m:e>
+                    <m:r>
+                      <m:t>1</m:t>
+                    </m:r>
+                  </m:e>
+                  <m:e>
+                    <m:r>
+                      <m:t>1</m:t>
+                    </m:r>
+                  </m:e>
+                  <m:e>
+                    <m:r>
+                      <m:t>8</m:t>
+                    </m:r>
+                  </m:e>
+                  <m:e>
+                    <m:r>
+                      <m:t>1</m:t>
+                    </m:r>
+                  </m:e>
+                </m:d>
+              </m:oMath>
+            </ns0:m>
+            <a:r>
+              <a:rPr lang="ru-RU" dirty="0" sz="2000">
+                <a:solidFill>
+                  <a:srgbClr val="000000"/>
+                </a:solidFill>
+              </a:rPr>
+              <a:t xml:space="preserve"> → MAE = 2.4, RMSE ≈ 3.3 (один промах 8 «тянет» RMSE)</a:t>
+            </a:r>
+          </a:p>
+          <a:p>
+            <a:pPr>
+              <a:spcAft>
+                <a:spcPts val="800"/>
+              </a:spcAft>
+            </a:pPr>
+            <a:r>
+              <a:rPr lang="ru-RU" dirty="0" sz="2000">
+                <a:solidFill>
+                  <a:srgbClr val="000000"/>
+                </a:solidFill>
+              </a:rPr>
+              <a:t>• Для сравнения моделей на одной задаче смотрите MAE и RMSE вместе</a:t>
+            </a:r>
+          </a:p>
+        </p:txBody>
+      </p:sp>
+      <p:sp>
+        <p:nvSpPr>
+          <p:cNvPr id="4" name="Rectangle 3"/>
           <p:cNvSpPr/>
           <p:nvPr/>
         </p:nvSpPr>
         <p:spPr>
           <a:xfrm>
-            <a:off x="640080" y="4690872"/>
-            <a:ext cx="6492240" cy="804672"/>
+            <a:off x="640080" y="4782312"/>
+            <a:ext cx="6172200" cy="713232"/>
           </a:xfrm>
           <a:prstGeom prst="rect">
             <a:avLst/>
@@ -5751,14 +5780,14 @@
       </p:sp>
       <p:sp>
         <p:nvSpPr>
-          <p:cNvPr id="6" name="TextBox 5"/>
+          <p:cNvPr id="5" name="TextBox 4"/>
           <p:cNvSpPr txBox="1"/>
           <p:nvPr/>
         </p:nvSpPr>
         <p:spPr>
           <a:xfrm>
-            <a:off x="713231" y="4727448"/>
-            <a:ext cx="6345936" cy="731520"/>
+            <a:off x="713231" y="4818888"/>
+            <a:ext cx="6025896" cy="640080"/>
           </a:xfrm>
           <a:prstGeom prst="rect">
             <a:avLst/>
@@ -5783,7 +5812,7 @@
                 </a:solidFill>
                 <a:latin typeface="Consolas"/>
               </a:rPr>
-              <a:t>from sklearn.metrics import mean_absolute_error, r2_score</a:t>
+              <a:t>mae = mean_absolute_error(y_te, y_pred)</a:t>
             </a:r>
           </a:p>
           <a:p>
@@ -5799,7 +5828,7 @@
                 </a:solidFill>
                 <a:latin typeface="Consolas"/>
               </a:rPr>
-              <a:t>mae = mean_absolute_error(y_te, y_pred)</a:t>
+              <a:t>rmse = mean_squared_error(y_te, y_pred, squared=False)</a:t>
             </a:r>
           </a:p>
           <a:p>
@@ -5831,21 +5860,21 @@
                 </a:solidFill>
                 <a:latin typeface="Consolas"/>
               </a:rPr>
-              <a:t>print(f'MAE={mae:.2f}, R²={r2:.3f}')</a:t>
-            </a:r>
-          </a:p>
-        </p:txBody>
-      </p:sp>
-      <p:sp>
-        <p:nvSpPr>
-          <p:cNvPr id="7" name="TextBox 6"/>
+              <a:t>print(f'MAE={mae:.2f}, RMSE={rmse:.2f}, R²={r2:.3f}')</a:t>
+            </a:r>
+          </a:p>
+        </p:txBody>
+      </p:sp>
+      <p:sp>
+        <p:nvSpPr>
+          <p:cNvPr id="6" name="TextBox 5"/>
           <p:cNvSpPr txBox="1"/>
           <p:nvPr/>
         </p:nvSpPr>
         <p:spPr>
           <a:xfrm>
-            <a:off x="640080" y="5550408"/>
-            <a:ext cx="6492240" cy="201168"/>
+            <a:off x="640080" y="5550407"/>
+            <a:ext cx="6172200" cy="201168"/>
           </a:xfrm>
           <a:prstGeom prst="rect">
             <a:avLst/>
@@ -5866,14 +5895,14 @@
               </a:defRPr>
             </a:pPr>
             <a:r>
-              <a:t>MAE и R²</a:t>
+              <a:t>MAE, RMSE и R²</a:t>
             </a:r>
           </a:p>
         </p:txBody>
       </p:sp>
       <p:pic>
         <p:nvPicPr>
-          <p:cNvPr id="8" name="Picture 7" descr="regression_metrics_bar.png"/>
+          <p:cNvPr id="7" name="Picture 6" descr="regression_metrics_bar.png"/>
           <p:cNvPicPr>
             <a:picLocks noChangeAspect="1"/>
           </p:cNvPicPr>
@@ -5887,8 +5916,8 @@
         </p:blipFill>
         <p:spPr>
           <a:xfrm>
-            <a:off x="7500144" y="1325880"/>
-            <a:ext cx="4567870" cy="3255264"/>
+            <a:off x="7269480" y="1325880"/>
+            <a:ext cx="4465015" cy="4167347"/>
           </a:xfrm>
           <a:prstGeom prst="rect">
             <a:avLst/>
@@ -5955,7 +5984,7 @@
         <p:spPr>
           <a:xfrm>
             <a:off x="640080" y="1371600"/>
-            <a:ext cx="3108960" cy="969264"/>
+            <a:ext cx="6263640" cy="2240280"/>
           </a:xfrm>
           <a:prstGeom prst="rect">
             <a:avLst/>
@@ -5979,7 +6008,7 @@
                   <a:srgbClr val="000000"/>
                 </a:solidFill>
               </a:rPr>
-              <a:t xml:space="preserve">График: по оси X — </a:t>
+              <a:t xml:space="preserve">• График: по оси X — </a:t>
             </a:r>
             <ns0:m xmlns:ns0="http://schemas.microsoft.com/office/drawing/2010/main">
               <m:oMath xmlns:m="http://schemas.openxmlformats.org/officeDocument/2006/math">
@@ -6033,32 +6062,9 @@
                   <a:srgbClr val="000000"/>
                 </a:solidFill>
               </a:rPr>
-              <a:t>Хорошо: случайное облако вокруг нуля, без тренда (гомоскедастичность)</a:t>
-            </a:r>
-          </a:p>
-        </p:txBody>
-      </p:sp>
-      <p:sp>
-        <p:nvSpPr>
-          <p:cNvPr id="4" name="TextBox 3"/>
-          <p:cNvSpPr txBox="1"/>
-          <p:nvPr/>
-        </p:nvSpPr>
-        <p:spPr>
-          <a:xfrm>
-            <a:off x="3886200" y="1371600"/>
-            <a:ext cx="3108960" cy="969264"/>
-          </a:xfrm>
-          <a:prstGeom prst="rect">
-            <a:avLst/>
-          </a:prstGeom>
-          <a:noFill/>
-        </p:spPr>
-        <p:txBody>
-          <a:bodyPr wrap="square">
-            <a:spAutoFit/>
-          </a:bodyPr>
-          <a:lstStyle/>
+              <a:t>• Хорошо: случайное облако вокруг нуля, без тренда (гомоскедастичность)</a:t>
+            </a:r>
+          </a:p>
           <a:p>
             <a:pPr>
               <a:spcAft>
@@ -6071,7 +6077,7 @@
                   <a:srgbClr val="000000"/>
                 </a:solidFill>
               </a:rPr>
-              <a:t xml:space="preserve">Плохо: «воронка» (дисперсия ошибки растёт) — нужна трансформация </a:t>
+              <a:t xml:space="preserve">• Плохо: «воронка» (дисперсия ошибки растёт) — нужна трансформация </a:t>
             </a:r>
             <ns0:m xmlns:ns0="http://schemas.microsoft.com/office/drawing/2010/main">
               <m:oMath xmlns:m="http://schemas.openxmlformats.org/officeDocument/2006/math">
@@ -6101,14 +6107,14 @@
                   <a:srgbClr val="000000"/>
                 </a:solidFill>
               </a:rPr>
-              <a:t>Плохо: U-образная форма — не учтена нелинейность</a:t>
+              <a:t>• Плохо: U-образная форма — не учтена нелинейность</a:t>
             </a:r>
           </a:p>
         </p:txBody>
       </p:sp>
       <p:pic>
         <p:nvPicPr>
-          <p:cNvPr id="5" name="Picture 4" descr="residual_diagnostics.png"/>
+          <p:cNvPr id="4" name="Picture 3" descr="residual_diagnostics.png"/>
           <p:cNvPicPr>
             <a:picLocks noChangeAspect="1"/>
           </p:cNvPicPr>
@@ -6122,8 +6128,8 @@
         </p:blipFill>
         <p:spPr>
           <a:xfrm>
-            <a:off x="2895081" y="2450592"/>
-            <a:ext cx="6462797" cy="2240280"/>
+            <a:off x="7345505" y="1325880"/>
+            <a:ext cx="4312963" cy="4407407"/>
           </a:xfrm>
           <a:prstGeom prst="rect">
             <a:avLst/>
@@ -6190,7 +6196,7 @@
         <p:spPr>
           <a:xfrm>
             <a:off x="640080" y="1371600"/>
-            <a:ext cx="3108960" cy="1645920"/>
+            <a:ext cx="6263640" cy="2514600"/>
           </a:xfrm>
           <a:prstGeom prst="rect">
             <a:avLst/>
@@ -6214,7 +6220,7 @@
                   <a:srgbClr val="000000"/>
                 </a:solidFill>
               </a:rPr>
-              <a:t xml:space="preserve">Вес </a:t>
+              <a:t xml:space="preserve">• Вес </a:t>
             </a:r>
             <ns0:m xmlns:ns0="http://schemas.microsoft.com/office/drawing/2010/main">
               <m:oMath xmlns:m="http://schemas.openxmlformats.org/officeDocument/2006/math">
@@ -6293,32 +6299,9 @@
                   <a:srgbClr val="000000"/>
                 </a:solidFill>
               </a:rPr>
-              <a:t>Ceteris paribus — «при прочих равных»; в реальных данных признаки коррелированы</a:t>
-            </a:r>
-          </a:p>
-        </p:txBody>
-      </p:sp>
-      <p:sp>
-        <p:nvSpPr>
-          <p:cNvPr id="4" name="TextBox 3"/>
-          <p:cNvSpPr txBox="1"/>
-          <p:nvPr/>
-        </p:nvSpPr>
-        <p:spPr>
-          <a:xfrm>
-            <a:off x="3886200" y="1371600"/>
-            <a:ext cx="3108960" cy="1645920"/>
-          </a:xfrm>
-          <a:prstGeom prst="rect">
-            <a:avLst/>
-          </a:prstGeom>
-          <a:noFill/>
-        </p:spPr>
-        <p:txBody>
-          <a:bodyPr wrap="square">
-            <a:spAutoFit/>
-          </a:bodyPr>
-          <a:lstStyle/>
+              <a:t>• Ceteris paribus — «при прочих равных»; в реальных данных признаки коррелированы</a:t>
+            </a:r>
+          </a:p>
           <a:p>
             <a:pPr>
               <a:spcAft>
@@ -6331,7 +6314,7 @@
                   <a:srgbClr val="000000"/>
                 </a:solidFill>
               </a:rPr>
-              <a:t>Большой вес не означает причинность — только ассоциацию при текущей модели</a:t>
+              <a:t>• Большой вес не означает причинность — только ассоциацию при текущей модели</a:t>
             </a:r>
           </a:p>
           <a:p>
@@ -6346,14 +6329,14 @@
                   <a:srgbClr val="000000"/>
                 </a:solidFill>
               </a:rPr>
-              <a:t>После StandardScaler веса сравнимы по «силе влияния»</a:t>
+              <a:t>• После StandardScaler веса сравнимы по «силе влияния»</a:t>
             </a:r>
           </a:p>
         </p:txBody>
       </p:sp>
       <p:pic>
         <p:nvPicPr>
-          <p:cNvPr id="5" name="Picture 4" descr="standardized_weights.png"/>
+          <p:cNvPr id="4" name="Picture 3" descr="standardized_weights.png"/>
           <p:cNvPicPr>
             <a:picLocks noChangeAspect="1"/>
           </p:cNvPicPr>
@@ -6367,8 +6350,8 @@
         </p:blipFill>
         <p:spPr>
           <a:xfrm>
-            <a:off x="7269480" y="1752886"/>
-            <a:ext cx="5029200" cy="3553395"/>
+            <a:off x="7269480" y="1325880"/>
+            <a:ext cx="4465015" cy="3142684"/>
           </a:xfrm>
           <a:prstGeom prst="rect">
             <a:avLst/>
@@ -6435,7 +6418,7 @@
         <p:spPr>
           <a:xfrm>
             <a:off x="640080" y="1371600"/>
-            <a:ext cx="3108960" cy="969264"/>
+            <a:ext cx="6263640" cy="2514600"/>
           </a:xfrm>
           <a:prstGeom prst="rect">
             <a:avLst/>
@@ -6444,7 +6427,7 @@
         </p:spPr>
         <p:txBody>
           <a:bodyPr wrap="square">
-            <a:normAutofit/>
+            <a:spAutoFit/>
           </a:bodyPr>
           <a:lstStyle/>
           <a:p>
@@ -6459,7 +6442,7 @@
                   <a:srgbClr val="000000"/>
                 </a:solidFill>
               </a:rPr>
-              <a:t>Базовый цикл: `model.fit(X_train, y_train)`, `model.predict(X_test)`</a:t>
+              <a:t>• Базовый цикл: `model.fit(X_train, y_train)`, `model.predict(X_test)`</a:t>
             </a:r>
           </a:p>
           <a:p>
@@ -6474,7 +6457,7 @@
                   <a:srgbClr val="000000"/>
                 </a:solidFill>
               </a:rPr>
-              <a:t xml:space="preserve">Data leakage: impute/scale </a:t>
+              <a:t xml:space="preserve">• Data leakage: impute/scale </a:t>
             </a:r>
             <a:r>
               <a:rPr lang="ru-RU" dirty="0" sz="2000" b="1">
@@ -6493,29 +6476,6 @@
               <a:t xml:space="preserve"> split — статистики теста попадают в train</a:t>
             </a:r>
           </a:p>
-        </p:txBody>
-      </p:sp>
-      <p:sp>
-        <p:nvSpPr>
-          <p:cNvPr id="4" name="TextBox 3"/>
-          <p:cNvSpPr txBox="1"/>
-          <p:nvPr/>
-        </p:nvSpPr>
-        <p:spPr>
-          <a:xfrm>
-            <a:off x="3886200" y="1371600"/>
-            <a:ext cx="3108960" cy="969264"/>
-          </a:xfrm>
-          <a:prstGeom prst="rect">
-            <a:avLst/>
-          </a:prstGeom>
-          <a:noFill/>
-        </p:spPr>
-        <p:txBody>
-          <a:bodyPr wrap="square">
-            <a:normAutofit/>
-          </a:bodyPr>
-          <a:lstStyle/>
           <a:p>
             <a:pPr>
               <a:spcAft>
@@ -6528,7 +6488,7 @@
                   <a:srgbClr val="000000"/>
                 </a:solidFill>
               </a:rPr>
-              <a:t>Решение: `Pipeline([('scaler', StandardScaler()), ('reg', LinearRegression())])`</a:t>
+              <a:t>• Решение: `Pipeline([('scaler', StandardScaler()), ('reg', LinearRegression())])`</a:t>
             </a:r>
           </a:p>
           <a:p>
@@ -6543,21 +6503,21 @@
                   <a:srgbClr val="000000"/>
                 </a:solidFill>
               </a:rPr>
-              <a:t>Pipeline.fit на train; transform+predict на test — без утечки</a:t>
-            </a:r>
-          </a:p>
-        </p:txBody>
-      </p:sp>
-      <p:sp>
-        <p:nvSpPr>
-          <p:cNvPr id="5" name="Rectangle 4"/>
+              <a:t>• Pipeline.fit на train; transform+predict на test — без утечки</a:t>
+            </a:r>
+          </a:p>
+        </p:txBody>
+      </p:sp>
+      <p:sp>
+        <p:nvSpPr>
+          <p:cNvPr id="4" name="Rectangle 3"/>
           <p:cNvSpPr/>
           <p:nvPr/>
         </p:nvSpPr>
         <p:spPr>
           <a:xfrm>
-            <a:off x="640080" y="3995927"/>
-            <a:ext cx="6492240" cy="1499616"/>
+            <a:off x="640080" y="5093207"/>
+            <a:ext cx="6172200" cy="402336"/>
           </a:xfrm>
           <a:prstGeom prst="rect">
             <a:avLst/>
@@ -6595,14 +6555,14 @@
       </p:sp>
       <p:sp>
         <p:nvSpPr>
-          <p:cNvPr id="6" name="TextBox 5"/>
+          <p:cNvPr id="5" name="TextBox 4"/>
           <p:cNvSpPr txBox="1"/>
           <p:nvPr/>
         </p:nvSpPr>
         <p:spPr>
           <a:xfrm>
-            <a:off x="713231" y="4032503"/>
-            <a:ext cx="6345936" cy="1426464"/>
+            <a:off x="713231" y="5129783"/>
+            <a:ext cx="6025896" cy="329184"/>
           </a:xfrm>
           <a:prstGeom prst="rect">
             <a:avLst/>
@@ -6627,7 +6587,7 @@
                 </a:solidFill>
                 <a:latin typeface="Consolas"/>
               </a:rPr>
-              <a:t>from sklearn.pipeline import Pipeline</a:t>
+              <a:t>pipe = Pipeline([('scaler', StandardScaler()), ('reg', LinearRegression())])</a:t>
             </a:r>
           </a:p>
           <a:p>
@@ -6643,102 +6603,6 @@
                 </a:solidFill>
                 <a:latin typeface="Consolas"/>
               </a:rPr>
-              <a:t>from sklearn.preprocessing import StandardScaler</a:t>
-            </a:r>
-          </a:p>
-          <a:p>
-            <a:pPr>
-              <a:spcAft>
-                <a:spcPts val="0"/>
-              </a:spcAft>
-            </a:pPr>
-            <a:r>
-              <a:rPr sz="1100">
-                <a:solidFill>
-                  <a:srgbClr val="000000"/>
-                </a:solidFill>
-                <a:latin typeface="Consolas"/>
-              </a:rPr>
-              <a:t>from sklearn.linear_model import LinearRegression</a:t>
-            </a:r>
-          </a:p>
-          <a:p>
-            <a:pPr>
-              <a:spcAft>
-                <a:spcPts val="0"/>
-              </a:spcAft>
-            </a:pPr>
-            <a:r>
-              <a:rPr sz="1100">
-                <a:solidFill>
-                  <a:srgbClr val="000000"/>
-                </a:solidFill>
-                <a:latin typeface="Consolas"/>
-              </a:rPr>
-              <a:t>pipe = Pipeline([</a:t>
-            </a:r>
-          </a:p>
-          <a:p>
-            <a:pPr>
-              <a:spcAft>
-                <a:spcPts val="0"/>
-              </a:spcAft>
-            </a:pPr>
-            <a:r>
-              <a:rPr sz="1100">
-                <a:solidFill>
-                  <a:srgbClr val="000000"/>
-                </a:solidFill>
-                <a:latin typeface="Consolas"/>
-              </a:rPr>
-              <a:t>    ('scaler', StandardScaler()),</a:t>
-            </a:r>
-          </a:p>
-          <a:p>
-            <a:pPr>
-              <a:spcAft>
-                <a:spcPts val="0"/>
-              </a:spcAft>
-            </a:pPr>
-            <a:r>
-              <a:rPr sz="1100">
-                <a:solidFill>
-                  <a:srgbClr val="000000"/>
-                </a:solidFill>
-                <a:latin typeface="Consolas"/>
-              </a:rPr>
-              <a:t>    ('reg', LinearRegression()),</a:t>
-            </a:r>
-          </a:p>
-          <a:p>
-            <a:pPr>
-              <a:spcAft>
-                <a:spcPts val="0"/>
-              </a:spcAft>
-            </a:pPr>
-            <a:r>
-              <a:rPr sz="1100">
-                <a:solidFill>
-                  <a:srgbClr val="000000"/>
-                </a:solidFill>
-                <a:latin typeface="Consolas"/>
-              </a:rPr>
-              <a:t>])</a:t>
-            </a:r>
-          </a:p>
-          <a:p>
-            <a:pPr>
-              <a:spcAft>
-                <a:spcPts val="0"/>
-              </a:spcAft>
-            </a:pPr>
-            <a:r>
-              <a:rPr sz="1100">
-                <a:solidFill>
-                  <a:srgbClr val="000000"/>
-                </a:solidFill>
-                <a:latin typeface="Consolas"/>
-              </a:rPr>
               <a:t>pipe.fit(X_train, y_train)</a:t>
             </a:r>
           </a:p>
@@ -6746,14 +6610,14 @@
       </p:sp>
       <p:sp>
         <p:nvSpPr>
-          <p:cNvPr id="7" name="TextBox 6"/>
+          <p:cNvPr id="6" name="TextBox 5"/>
           <p:cNvSpPr txBox="1"/>
           <p:nvPr/>
         </p:nvSpPr>
         <p:spPr>
           <a:xfrm>
             <a:off x="640080" y="5550407"/>
-            <a:ext cx="6492240" cy="201168"/>
+            <a:ext cx="6172200" cy="201168"/>
           </a:xfrm>
           <a:prstGeom prst="rect">
             <a:avLst/>
@@ -6781,7 +6645,7 @@
       </p:sp>
       <p:pic>
         <p:nvPicPr>
-          <p:cNvPr id="8" name="Picture 7" descr="pipeline_leakage.png"/>
+          <p:cNvPr id="7" name="Picture 6" descr="pipeline_leakage.png"/>
           <p:cNvPicPr>
             <a:picLocks noChangeAspect="1"/>
           </p:cNvPicPr>
@@ -6795,8 +6659,8 @@
         </p:blipFill>
         <p:spPr>
           <a:xfrm>
-            <a:off x="4132258" y="2450592"/>
-            <a:ext cx="3988443" cy="1435608"/>
+            <a:off x="7269480" y="1325880"/>
+            <a:ext cx="4465015" cy="4325483"/>
           </a:xfrm>
           <a:prstGeom prst="rect">
             <a:avLst/>
@@ -6863,7 +6727,7 @@
         <p:spPr>
           <a:xfrm>
             <a:off x="640080" y="1371600"/>
-            <a:ext cx="3108960" cy="969264"/>
+            <a:ext cx="6263640" cy="2788920"/>
           </a:xfrm>
           <a:prstGeom prst="rect">
             <a:avLst/>
@@ -6887,7 +6751,7 @@
                   <a:srgbClr val="000000"/>
                 </a:solidFill>
               </a:rPr>
-              <a:t>Зависимость нелинейная: парабола, периодика, пороги</a:t>
+              <a:t>• Зависимость нелинейная: парабола, периодика, пороги</a:t>
             </a:r>
           </a:p>
           <a:p>
@@ -6902,7 +6766,7 @@
                   <a:srgbClr val="000000"/>
                 </a:solidFill>
               </a:rPr>
-              <a:t>Сильное взаимодействие признаков без явных фичей (</a:t>
+              <a:t xml:space="preserve">• Эффект одного признака зависит от другого, но в модели нет произведения </a:t>
             </a:r>
             <ns0:m xmlns:ns0="http://schemas.microsoft.com/office/drawing/2010/main">
               <m:oMath xmlns:m="http://schemas.openxmlformats.org/officeDocument/2006/math">
@@ -6941,32 +6805,9 @@
                   <a:srgbClr val="000000"/>
                 </a:solidFill>
               </a:rPr>
-              <a:t>)</a:t>
-            </a:r>
-          </a:p>
-        </p:txBody>
-      </p:sp>
-      <p:sp>
-        <p:nvSpPr>
-          <p:cNvPr id="4" name="TextBox 3"/>
-          <p:cNvSpPr txBox="1"/>
-          <p:nvPr/>
-        </p:nvSpPr>
-        <p:spPr>
-          <a:xfrm>
-            <a:off x="3886200" y="1371600"/>
-            <a:ext cx="3108960" cy="969264"/>
-          </a:xfrm>
-          <a:prstGeom prst="rect">
-            <a:avLst/>
-          </a:prstGeom>
-          <a:noFill/>
-        </p:spPr>
-        <p:txBody>
-          <a:bodyPr wrap="square">
-            <a:spAutoFit/>
-          </a:bodyPr>
-          <a:lstStyle/>
+              <a:t xml:space="preserve"> — линейная формула это не описывает</a:t>
+            </a:r>
+          </a:p>
           <a:p>
             <a:pPr>
               <a:spcAft>
@@ -6979,7 +6820,7 @@
                   <a:srgbClr val="000000"/>
                 </a:solidFill>
               </a:rPr>
-              <a:t xml:space="preserve">Что попробовать: полиномиальные признаки (`PolynomialFeatures`), логарифм </a:t>
+              <a:t xml:space="preserve">• Что попробовать: полиномиальные признаки (`PolynomialFeatures`), логарифм </a:t>
             </a:r>
             <ns0:m xmlns:ns0="http://schemas.microsoft.com/office/drawing/2010/main">
               <m:oMath xmlns:m="http://schemas.openxmlformats.org/officeDocument/2006/math">
@@ -7009,14 +6850,14 @@
                   <a:srgbClr val="000000"/>
                 </a:solidFill>
               </a:rPr>
-              <a:t>Линейная модель — всё равно полезный baseline</a:t>
+              <a:t>• Линейная модель — всё равно полезный baseline</a:t>
             </a:r>
           </a:p>
         </p:txBody>
       </p:sp>
       <p:pic>
         <p:nvPicPr>
-          <p:cNvPr id="5" name="Picture 4" descr="nonlinear_vs_linear.png"/>
+          <p:cNvPr id="4" name="Picture 3" descr="nonlinear_vs_linear.png"/>
           <p:cNvPicPr>
             <a:picLocks noChangeAspect="1"/>
           </p:cNvPicPr>
@@ -7030,8 +6871,8 @@
         </p:blipFill>
         <p:spPr>
           <a:xfrm>
-            <a:off x="3430858" y="2450592"/>
-            <a:ext cx="5391242" cy="2240280"/>
+            <a:off x="7269480" y="1325880"/>
+            <a:ext cx="4465015" cy="3247284"/>
           </a:xfrm>
           <a:prstGeom prst="rect">
             <a:avLst/>
@@ -7098,7 +6939,7 @@
         <p:spPr>
           <a:xfrm>
             <a:off x="640080" y="1371600"/>
-            <a:ext cx="11247120" cy="2194560"/>
+            <a:ext cx="5532120" cy="1828800"/>
           </a:xfrm>
           <a:prstGeom prst="rect">
             <a:avLst/>
@@ -7122,7 +6963,7 @@
                   <a:srgbClr val="000000"/>
                 </a:solidFill>
               </a:rPr>
-              <a:t>Линейная регрессия — интерпретируемый baseline для числового прогноза</a:t>
+              <a:t>• Линейная регрессия — интерпретируемый baseline для числового прогноза</a:t>
             </a:r>
           </a:p>
           <a:p>
@@ -7137,7 +6978,7 @@
                   <a:srgbClr val="000000"/>
                 </a:solidFill>
               </a:rPr>
-              <a:t>Train/test split и Pipeline — обязательная гигиена</a:t>
+              <a:t>• Train/test split и Pipeline — обязательная гигиена</a:t>
             </a:r>
           </a:p>
           <a:p>
@@ -7152,7 +6993,7 @@
                   <a:srgbClr val="000000"/>
                 </a:solidFill>
               </a:rPr>
-              <a:t xml:space="preserve">Смотрите графики остатков, не только </a:t>
+              <a:t xml:space="preserve">• Смотрите графики остатков, не только </a:t>
             </a:r>
             <ns0:m xmlns:ns0="http://schemas.microsoft.com/office/drawing/2010/main">
               <m:oMath xmlns:m="http://schemas.openxmlformats.org/officeDocument/2006/math">
@@ -7171,6 +7012,29 @@
               </m:oMath>
             </ns0:m>
           </a:p>
+        </p:txBody>
+      </p:sp>
+      <p:sp>
+        <p:nvSpPr>
+          <p:cNvPr id="4" name="TextBox 3"/>
+          <p:cNvSpPr txBox="1"/>
+          <p:nvPr/>
+        </p:nvSpPr>
+        <p:spPr>
+          <a:xfrm>
+            <a:off x="6355080" y="1371600"/>
+            <a:ext cx="5532120" cy="1828800"/>
+          </a:xfrm>
+          <a:prstGeom prst="rect">
+            <a:avLst/>
+          </a:prstGeom>
+          <a:noFill/>
+        </p:spPr>
+        <p:txBody>
+          <a:bodyPr wrap="square">
+            <a:spAutoFit/>
+          </a:bodyPr>
+          <a:lstStyle/>
           <a:p>
             <a:pPr>
               <a:spcAft>
@@ -7183,7 +7047,7 @@
                   <a:srgbClr val="000000"/>
                 </a:solidFill>
               </a:rPr>
-              <a:t>Интерпретируйте веса с оговоркой ceteris paribus</a:t>
+              <a:t>• Интерпретируйте веса с оговоркой ceteris paribus</a:t>
             </a:r>
           </a:p>
           <a:p>
@@ -7198,7 +7062,7 @@
                   <a:srgbClr val="000000"/>
                 </a:solidFill>
               </a:rPr>
-              <a:t>Мультиколлинеарность → Ridge; отбор признаков → Lasso</a:t>
+              <a:t>• Мультиколлинеарность → Ridge; отбор признаков → Lasso</a:t>
             </a:r>
           </a:p>
         </p:txBody>
@@ -7331,7 +7195,7 @@
                 </a:solidFill>
                 <a:hlinkClick r:id="rId2"/>
               </a:rPr>
-              <a:t>Hoerl A.E., Kennard R.W. (1970). Ridge Regression: Biased Estimation for Nonorthogonal Problems</a:t>
+              <a:t>Markov A.A. (1900). Least Squares Estimation of Linear Models</a:t>
             </a:r>
           </a:p>
         </p:txBody>
@@ -7378,7 +7242,7 @@
                 </a:solidFill>
                 <a:hlinkClick r:id="rId3"/>
               </a:rPr>
-              <a:t>Tibshirani R. (1996). Regression Shrinkage and Selection via the Lasso</a:t>
+              <a:t>Hoerl A.E., Kennard R.W. (1970). Ridge Regression: Biased Estimation for Nonorthogonal Problems</a:t>
             </a:r>
           </a:p>
         </p:txBody>
@@ -7425,7 +7289,7 @@
                 </a:solidFill>
                 <a:hlinkClick r:id="rId4"/>
               </a:rPr>
-              <a:t>Markov A.A. (1900). Least Squares Estimation of Linear Models</a:t>
+              <a:t>Tibshirani R. (1996). Regression Shrinkage and Selection via the Lasso</a:t>
             </a:r>
           </a:p>
         </p:txBody>
@@ -7727,7 +7591,7 @@
         <p:spPr>
           <a:xfrm>
             <a:off x="640080" y="1371600"/>
-            <a:ext cx="3108960" cy="1645920"/>
+            <a:ext cx="6263640" cy="2514600"/>
           </a:xfrm>
           <a:prstGeom prst="rect">
             <a:avLst/>
@@ -7751,7 +7615,7 @@
                   <a:srgbClr val="000000"/>
                 </a:solidFill>
               </a:rPr>
-              <a:t>Регрессия — предсказание числа по признакам: цена квартиры, время доставки, спрос</a:t>
+              <a:t>• Регрессия — предсказание числа по признакам: цена квартиры, время доставки, спрос</a:t>
             </a:r>
           </a:p>
           <a:p>
@@ -7766,7 +7630,7 @@
                   <a:srgbClr val="000000"/>
                 </a:solidFill>
               </a:rPr>
-              <a:t xml:space="preserve">Простейшая модель: </a:t>
+              <a:t xml:space="preserve">• Простейшая модель: </a:t>
             </a:r>
             <ns0:m xmlns:ns0="http://schemas.microsoft.com/office/drawing/2010/main">
               <m:oMath xmlns:m="http://schemas.openxmlformats.org/officeDocument/2006/math">
@@ -7784,29 +7648,6 @@
               <a:t xml:space="preserve"> — прямая на плоскости «признак → ответ»</a:t>
             </a:r>
           </a:p>
-        </p:txBody>
-      </p:sp>
-      <p:sp>
-        <p:nvSpPr>
-          <p:cNvPr id="4" name="TextBox 3"/>
-          <p:cNvSpPr txBox="1"/>
-          <p:nvPr/>
-        </p:nvSpPr>
-        <p:spPr>
-          <a:xfrm>
-            <a:off x="3886200" y="1371600"/>
-            <a:ext cx="3108960" cy="1645920"/>
-          </a:xfrm>
-          <a:prstGeom prst="rect">
-            <a:avLst/>
-          </a:prstGeom>
-          <a:noFill/>
-        </p:spPr>
-        <p:txBody>
-          <a:bodyPr wrap="square">
-            <a:spAutoFit/>
-          </a:bodyPr>
-          <a:lstStyle/>
           <a:p>
             <a:pPr>
               <a:spcAft>
@@ -7819,7 +7660,7 @@
                   <a:srgbClr val="000000"/>
                 </a:solidFill>
               </a:rPr>
-              <a:t xml:space="preserve">Обучение: подобрать </a:t>
+              <a:t xml:space="preserve">• Обучение: подобрать </a:t>
             </a:r>
             <ns0:m xmlns:ns0="http://schemas.microsoft.com/office/drawing/2010/main">
               <m:oMath xmlns:m="http://schemas.openxmlformats.org/officeDocument/2006/math">
@@ -7864,14 +7705,14 @@
                   <a:srgbClr val="000000"/>
                 </a:solidFill>
               </a:rPr>
-              <a:t>Визуально — найти прямую, которая «лучше всего» проходит через облако точек</a:t>
+              <a:t>• Визуально — найти прямую, которая «лучше всего» проходит через облако точек</a:t>
             </a:r>
           </a:p>
         </p:txBody>
       </p:sp>
       <p:pic>
         <p:nvPicPr>
-          <p:cNvPr id="5" name="Picture 4" descr="intro_scatter_line.png"/>
+          <p:cNvPr id="4" name="Picture 3" descr="intro_scatter_line.png"/>
           <p:cNvPicPr>
             <a:picLocks noChangeAspect="1"/>
           </p:cNvPicPr>
@@ -7885,8 +7726,8 @@
         </p:blipFill>
         <p:spPr>
           <a:xfrm>
-            <a:off x="7269480" y="1737570"/>
-            <a:ext cx="5029200" cy="3584028"/>
+            <a:off x="7269480" y="1325880"/>
+            <a:ext cx="4465015" cy="3167046"/>
           </a:xfrm>
           <a:prstGeom prst="rect">
             <a:avLst/>
@@ -7953,7 +7794,7 @@
         <p:spPr>
           <a:xfrm>
             <a:off x="640080" y="1371600"/>
-            <a:ext cx="3108960" cy="1645920"/>
+            <a:ext cx="6263640" cy="2788920"/>
           </a:xfrm>
           <a:prstGeom prst="rect">
             <a:avLst/>
@@ -7977,7 +7818,7 @@
                   <a:srgbClr val="000000"/>
                 </a:solidFill>
               </a:rPr>
-              <a:t xml:space="preserve">Минимизируем </a:t>
+              <a:t xml:space="preserve">• Минимизируем </a:t>
             </a:r>
             <a:r>
               <a:rPr lang="ru-RU" dirty="0" sz="2000" b="1">
@@ -8008,7 +7849,7 @@
                   <a:srgbClr val="000000"/>
                 </a:solidFill>
               </a:rPr>
-              <a:t xml:space="preserve">Остаток: </a:t>
+              <a:t xml:space="preserve">• Остаток: </a:t>
             </a:r>
             <ns0:m xmlns:ns0="http://schemas.microsoft.com/office/drawing/2010/main">
               <m:oMath xmlns:m="http://schemas.openxmlformats.org/officeDocument/2006/math">
@@ -8072,29 +7913,6 @@
               <a:t xml:space="preserve"> — разница между фактом и прогнозом</a:t>
             </a:r>
           </a:p>
-        </p:txBody>
-      </p:sp>
-      <p:sp>
-        <p:nvSpPr>
-          <p:cNvPr id="4" name="TextBox 3"/>
-          <p:cNvSpPr txBox="1"/>
-          <p:nvPr/>
-        </p:nvSpPr>
-        <p:spPr>
-          <a:xfrm>
-            <a:off x="3886200" y="1371600"/>
-            <a:ext cx="3108960" cy="1645920"/>
-          </a:xfrm>
-          <a:prstGeom prst="rect">
-            <a:avLst/>
-          </a:prstGeom>
-          <a:noFill/>
-        </p:spPr>
-        <p:txBody>
-          <a:bodyPr wrap="square">
-            <a:spAutoFit/>
-          </a:bodyPr>
-          <a:lstStyle/>
           <a:p>
             <a:pPr>
               <a:spcAft>
@@ -8107,7 +7925,68 @@
                   <a:srgbClr val="000000"/>
                 </a:solidFill>
               </a:rPr>
-              <a:t>Хорошая модель: остатки симметрично разбросаны вокруг нуля, без систематического смещения</a:t>
+              <a:t xml:space="preserve">• </a:t>
+            </a:r>
+            <a:r>
+              <a:rPr lang="ru-RU" dirty="0" sz="2000" b="1">
+                <a:solidFill>
+                  <a:srgbClr val="000000"/>
+                </a:solidFill>
+              </a:rPr>
+              <a:t>Intercept</a:t>
+            </a:r>
+            <a:r>
+              <a:rPr lang="ru-RU" dirty="0" sz="2000">
+                <a:solidFill>
+                  <a:srgbClr val="000000"/>
+                </a:solidFill>
+              </a:rPr>
+              <a:t xml:space="preserve"> (</a:t>
+            </a:r>
+            <ns0:m xmlns:ns0="http://schemas.microsoft.com/office/drawing/2010/main">
+              <m:oMath xmlns:m="http://schemas.openxmlformats.org/officeDocument/2006/math">
+                <m:r>
+                  <m:t>b</m:t>
+                </m:r>
+              </m:oMath>
+            </ns0:m>
+            <a:r>
+              <a:rPr lang="ru-RU" dirty="0" sz="2000">
+                <a:solidFill>
+                  <a:srgbClr val="000000"/>
+                </a:solidFill>
+              </a:rPr>
+              <a:t xml:space="preserve">): прогноз при </a:t>
+            </a:r>
+            <ns0:m xmlns:ns0="http://schemas.microsoft.com/office/drawing/2010/main">
+              <m:oMath xmlns:m="http://schemas.openxmlformats.org/officeDocument/2006/math">
+                <m:r>
+                  <m:t>x=0</m:t>
+                </m:r>
+              </m:oMath>
+            </ns0:m>
+            <a:r>
+              <a:rPr lang="ru-RU" dirty="0" sz="2000">
+                <a:solidFill>
+                  <a:srgbClr val="000000"/>
+                </a:solidFill>
+              </a:rPr>
+              <a:t xml:space="preserve">; в sklearn — параметр `fit_intercept=True` (смещение прямой по оси </a:t>
+            </a:r>
+            <ns0:m xmlns:ns0="http://schemas.microsoft.com/office/drawing/2010/main">
+              <m:oMath xmlns:m="http://schemas.openxmlformats.org/officeDocument/2006/math">
+                <m:r>
+                  <m:t>y</m:t>
+                </m:r>
+              </m:oMath>
+            </ns0:m>
+            <a:r>
+              <a:rPr lang="ru-RU" dirty="0" sz="2000">
+                <a:solidFill>
+                  <a:srgbClr val="000000"/>
+                </a:solidFill>
+              </a:rPr>
+              <a:t>)</a:t>
             </a:r>
           </a:p>
           <a:p>
@@ -8122,14 +8001,14 @@
                   <a:srgbClr val="000000"/>
                 </a:solidFill>
               </a:rPr>
-              <a:t>Сумма остатков на обучающей выборке при МНК равна нулю (для модели с intercept)</a:t>
+              <a:t>• Хорошая модель: остатки симметрично разбросаны вокруг нуля, без систематического смещения</a:t>
             </a:r>
           </a:p>
         </p:txBody>
       </p:sp>
       <p:pic>
         <p:nvPicPr>
-          <p:cNvPr id="5" name="Picture 4" descr="residuals_vertical.png"/>
+          <p:cNvPr id="4" name="Picture 3" descr="residuals_geometry.png"/>
           <p:cNvPicPr>
             <a:picLocks noChangeAspect="1"/>
           </p:cNvPicPr>
@@ -8143,32 +8022,8 @@
         </p:blipFill>
         <p:spPr>
           <a:xfrm>
-            <a:off x="8231517" y="1325880"/>
-            <a:ext cx="3105125" cy="2212848"/>
-          </a:xfrm>
-          <a:prstGeom prst="rect">
-            <a:avLst/>
-          </a:prstGeom>
-        </p:spPr>
-      </p:pic>
-      <p:pic>
-        <p:nvPicPr>
-          <p:cNvPr id="6" name="Picture 5" descr="residuals_histogram.png"/>
-          <p:cNvPicPr>
-            <a:picLocks noChangeAspect="1"/>
-          </p:cNvPicPr>
-          <p:nvPr/>
-        </p:nvPicPr>
-        <p:blipFill>
-          <a:blip r:embed="rId3"/>
-          <a:stretch>
-            <a:fillRect/>
-          </a:stretch>
-        </p:blipFill>
-        <p:spPr>
-          <a:xfrm>
-            <a:off x="8231517" y="3593592"/>
-            <a:ext cx="3105125" cy="2212848"/>
+            <a:off x="7473307" y="1325880"/>
+            <a:ext cx="4057361" cy="4407408"/>
           </a:xfrm>
           <a:prstGeom prst="rect">
             <a:avLst/>
@@ -8235,7 +8090,7 @@
         <p:spPr>
           <a:xfrm>
             <a:off x="640080" y="1371600"/>
-            <a:ext cx="3108960" cy="1645920"/>
+            <a:ext cx="6263640" cy="3886200"/>
           </a:xfrm>
           <a:prstGeom prst="rect">
             <a:avLst/>
@@ -8259,7 +8114,7 @@
                   <a:srgbClr val="000000"/>
                 </a:solidFill>
               </a:rPr>
-              <a:t xml:space="preserve">MSE: </a:t>
+              <a:t xml:space="preserve">• MSE: </a:t>
             </a:r>
             <ns0:m xmlns:ns0="http://schemas.microsoft.com/office/drawing/2010/main">
               <m:oMath xmlns:m="http://schemas.openxmlformats.org/officeDocument/2006/math">
@@ -8367,7 +8222,85 @@
                   <a:srgbClr val="000000"/>
                 </a:solidFill>
               </a:rPr>
-              <a:t xml:space="preserve">Сумму без деления на </a:t>
+              <a:t xml:space="preserve">• Минимизация </a:t>
+            </a:r>
+            <ns0:m xmlns:ns0="http://schemas.microsoft.com/office/drawing/2010/main">
+              <m:oMath xmlns:m="http://schemas.openxmlformats.org/officeDocument/2006/math">
+                <m:nary>
+                  <m:naryPr>
+                    <m:chr m:val="∑"/>
+                    <m:limLoc m:val="subSup"/>
+                    <m:grow m:val="1"/>
+                    <m:subHide m:val="off"/>
+                    <m:supHide m:val="on"/>
+                  </m:naryPr>
+                  <m:sub>
+                    <m:r>
+                      <m:t>i</m:t>
+                    </m:r>
+                  </m:sub>
+                  <m:sup/>
+                  <m:e>
+                    <m:r>
+                      <m:t>(</m:t>
+                    </m:r>
+                  </m:e>
+                </m:nary>
+                <m:sSub>
+                  <m:e>
+                    <m:r>
+                      <m:t>y</m:t>
+                    </m:r>
+                  </m:e>
+                  <m:sub>
+                    <m:r>
+                      <m:t>i</m:t>
+                    </m:r>
+                  </m:sub>
+                </m:sSub>
+                <m:r>
+                  <m:t>−</m:t>
+                </m:r>
+                <m:sSub>
+                  <m:e>
+                    <m:acc>
+                      <m:accPr>
+                        <m:chr m:val="̂"/>
+                      </m:accPr>
+                      <m:e>
+                        <m:r>
+                          <m:t>y</m:t>
+                        </m:r>
+                      </m:e>
+                    </m:acc>
+                  </m:e>
+                  <m:sub>
+                    <m:r>
+                      <m:t>i</m:t>
+                    </m:r>
+                  </m:sub>
+                </m:sSub>
+                <m:sSup>
+                  <m:e>
+                    <m:r>
+                      <m:t>)</m:t>
+                    </m:r>
+                  </m:e>
+                  <m:sup>
+                    <m:r>
+                      <m:t>2</m:t>
+                    </m:r>
+                  </m:sup>
+                </m:sSup>
+              </m:oMath>
+            </ns0:m>
+            <a:r>
+              <a:rPr lang="ru-RU" dirty="0" sz="2000">
+                <a:solidFill>
+                  <a:srgbClr val="000000"/>
+                </a:solidFill>
+              </a:rPr>
+              <a:t xml:space="preserve"> без деления на </a:t>
             </a:r>
             <ns0:m xmlns:ns0="http://schemas.microsoft.com/office/drawing/2010/main">
               <m:oMath xmlns:m="http://schemas.openxmlformats.org/officeDocument/2006/math">
@@ -8382,7 +8315,22 @@
                   <a:srgbClr val="000000"/>
                 </a:solidFill>
               </a:rPr>
-              <a:t xml:space="preserve"> минимизировать то же самое; деление нужно для сравнимости между выборками</a:t>
+              <a:t xml:space="preserve"> даёт те же оптимальные веса; деление на </a:t>
+            </a:r>
+            <ns0:m xmlns:ns0="http://schemas.microsoft.com/office/drawing/2010/main">
+              <m:oMath xmlns:m="http://schemas.openxmlformats.org/officeDocument/2006/math">
+                <m:r>
+                  <m:t>N</m:t>
+                </m:r>
+              </m:oMath>
+            </ns0:m>
+            <a:r>
+              <a:rPr lang="ru-RU" dirty="0" sz="2000">
+                <a:solidFill>
+                  <a:srgbClr val="000000"/>
+                </a:solidFill>
+              </a:rPr>
+              <a:t xml:space="preserve"> нужно для сравнимости между выборками</a:t>
             </a:r>
           </a:p>
           <a:p>
@@ -8397,7 +8345,7 @@
                   <a:srgbClr val="000000"/>
                 </a:solidFill>
               </a:rPr>
-              <a:t>MAE (</a:t>
+              <a:t>• MAE (</a:t>
             </a:r>
             <ns0:m xmlns:ns0="http://schemas.microsoft.com/office/drawing/2010/main">
               <m:oMath xmlns:m="http://schemas.openxmlformats.org/officeDocument/2006/math">
@@ -8467,29 +8415,6 @@
               <a:t>) устойчивее к выбросам, но не гладкая в нуле</a:t>
             </a:r>
           </a:p>
-        </p:txBody>
-      </p:sp>
-      <p:sp>
-        <p:nvSpPr>
-          <p:cNvPr id="4" name="TextBox 3"/>
-          <p:cNvSpPr txBox="1"/>
-          <p:nvPr/>
-        </p:nvSpPr>
-        <p:spPr>
-          <a:xfrm>
-            <a:off x="3886200" y="1371600"/>
-            <a:ext cx="3108960" cy="1645920"/>
-          </a:xfrm>
-          <a:prstGeom prst="rect">
-            <a:avLst/>
-          </a:prstGeom>
-          <a:noFill/>
-        </p:spPr>
-        <p:txBody>
-          <a:bodyPr wrap="square">
-            <a:spAutoFit/>
-          </a:bodyPr>
-          <a:lstStyle/>
           <a:p>
             <a:pPr>
               <a:spcAft>
@@ -8502,7 +8427,7 @@
                   <a:srgbClr val="000000"/>
                 </a:solidFill>
               </a:rPr>
-              <a:t>MSE гладкая везде — удобно для производной и градиентного спуска</a:t>
+              <a:t>• MSE гладкая везде — удобно для производной и градиентного спуска</a:t>
             </a:r>
           </a:p>
           <a:p>
@@ -8517,14 +8442,14 @@
                   <a:srgbClr val="000000"/>
                 </a:solidFill>
               </a:rPr>
-              <a:t>MSE = MLE при гауссовских остатках; MAE = MLE при распределении Лапласа (например, медианный шум в задачах с редкими сбоями)</a:t>
+              <a:t>• MSE = MLE при нормальных остатках; MAE = MLE, если ошибки распределены по Лапласу (редкие, но крупные сбои — например, катастрофические задержки доставки)</a:t>
             </a:r>
           </a:p>
         </p:txBody>
       </p:sp>
       <p:pic>
         <p:nvPicPr>
-          <p:cNvPr id="5" name="Picture 4" descr="mse_vs_mae_loss.png"/>
+          <p:cNvPr id="4" name="Picture 3" descr="mse_vs_mae_loss.png"/>
           <p:cNvPicPr>
             <a:picLocks noChangeAspect="1"/>
           </p:cNvPicPr>
@@ -8538,8 +8463,8 @@
         </p:blipFill>
         <p:spPr>
           <a:xfrm>
-            <a:off x="7269480" y="1754572"/>
-            <a:ext cx="5029200" cy="3550024"/>
+            <a:off x="7269480" y="1325880"/>
+            <a:ext cx="4465015" cy="2926044"/>
           </a:xfrm>
           <a:prstGeom prst="rect">
             <a:avLst/>
@@ -8606,7 +8531,7 @@
         <p:spPr>
           <a:xfrm>
             <a:off x="640080" y="1371600"/>
-            <a:ext cx="3108960" cy="1316736"/>
+            <a:ext cx="6263640" cy="2514600"/>
           </a:xfrm>
           <a:prstGeom prst="rect">
             <a:avLst/>
@@ -8615,7 +8540,7 @@
         </p:spPr>
         <p:txBody>
           <a:bodyPr wrap="square">
-            <a:normAutofit/>
+            <a:spAutoFit/>
           </a:bodyPr>
           <a:lstStyle/>
           <a:p>
@@ -8630,7 +8555,7 @@
                   <a:srgbClr val="000000"/>
                 </a:solidFill>
               </a:rPr>
-              <a:t xml:space="preserve">Аналитическое решение (МНК): производная по весам → система линейных уравнений → </a:t>
+              <a:t xml:space="preserve">• Аналитическое решение (МНК): </a:t>
             </a:r>
             <ns0:m xmlns:ns0="http://schemas.microsoft.com/office/drawing/2010/main">
               <m:oMath xmlns:m="http://schemas.openxmlformats.org/officeDocument/2006/math">
@@ -8691,6 +8616,14 @@
                 </m:r>
               </m:oMath>
             </ns0:m>
+            <a:r>
+              <a:rPr lang="ru-RU" dirty="0" sz="2000">
+                <a:solidFill>
+                  <a:srgbClr val="000000"/>
+                </a:solidFill>
+              </a:rPr>
+              <a:t xml:space="preserve"> — быстро для умеренных матриц</a:t>
+            </a:r>
           </a:p>
           <a:p>
             <a:pPr>
@@ -8704,7 +8637,7 @@
                   <a:srgbClr val="000000"/>
                 </a:solidFill>
               </a:rPr>
-              <a:t>`LinearRegression` в sklearn по умолчанию решает так (solver `linalg`) — быстро и точно для умеренных матриц</a:t>
+              <a:t>• `LinearRegression` в sklearn использует solver `linalg` без итераций</a:t>
             </a:r>
           </a:p>
           <a:p>
@@ -8719,47 +8652,9 @@
                   <a:srgbClr val="000000"/>
                 </a:solidFill>
               </a:rPr>
-              <a:t xml:space="preserve">При очень больших </a:t>
-            </a:r>
-            <ns0:m xmlns:ns0="http://schemas.microsoft.com/office/drawing/2010/main">
-              <m:oMath xmlns:m="http://schemas.openxmlformats.org/officeDocument/2006/math">
-                <m:r>
-                  <m:t>X</m:t>
-                </m:r>
-              </m:oMath>
-            </ns0:m>
-            <a:r>
-              <a:rPr lang="ru-RU" dirty="0" sz="2000">
-                <a:solidFill>
-                  <a:srgbClr val="000000"/>
-                </a:solidFill>
-              </a:rPr>
-              <a:t xml:space="preserve"> или нехватке памяти — итеративные методы: SGD, `sag`, `lsqr`</a:t>
-            </a:r>
-          </a:p>
-        </p:txBody>
-      </p:sp>
-      <p:sp>
-        <p:nvSpPr>
-          <p:cNvPr id="4" name="TextBox 3"/>
-          <p:cNvSpPr txBox="1"/>
-          <p:nvPr/>
-        </p:nvSpPr>
-        <p:spPr>
-          <a:xfrm>
-            <a:off x="3886200" y="1371600"/>
-            <a:ext cx="3108960" cy="1316736"/>
-          </a:xfrm>
-          <a:prstGeom prst="rect">
-            <a:avLst/>
-          </a:prstGeom>
-          <a:noFill/>
-        </p:spPr>
-        <p:txBody>
-          <a:bodyPr wrap="square">
-            <a:normAutofit/>
-          </a:bodyPr>
-          <a:lstStyle/>
+              <a:t>• При огромных данных — итеративные методы: SGD, `SGDRegressor`</a:t>
+            </a:r>
+          </a:p>
           <a:p>
             <a:pPr>
               <a:spcAft>
@@ -8772,36 +8667,21 @@
                   <a:srgbClr val="000000"/>
                 </a:solidFill>
               </a:rPr>
-              <a:t>Градиентный спуск: шаг против градиента функции потерь; `SGDRegressor` в sklearn</a:t>
-            </a:r>
-          </a:p>
-          <a:p>
-            <a:pPr>
-              <a:spcAft>
-                <a:spcPts val="800"/>
-              </a:spcAft>
-            </a:pPr>
-            <a:r>
-              <a:rPr lang="ru-RU" dirty="0" sz="2000">
-                <a:solidFill>
-                  <a:srgbClr val="000000"/>
-                </a:solidFill>
-              </a:rPr>
-              <a:t>На практике для линейной регрессии чаще используют не «чистый» SGD, а стабильные solver'ы (`lbfgs`, `sag` в Ridge/Lasso)</a:t>
-            </a:r>
-          </a:p>
-        </p:txBody>
-      </p:sp>
-      <p:sp>
-        <p:nvSpPr>
-          <p:cNvPr id="5" name="Rectangle 4"/>
+              <a:t>• Градиентный спуск: шаг против градиента функции потерь</a:t>
+            </a:r>
+          </a:p>
+        </p:txBody>
+      </p:sp>
+      <p:sp>
+        <p:nvSpPr>
+          <p:cNvPr id="4" name="Rectangle 3"/>
           <p:cNvSpPr/>
           <p:nvPr/>
         </p:nvSpPr>
         <p:spPr>
           <a:xfrm>
-            <a:off x="640080" y="4690872"/>
-            <a:ext cx="6492240" cy="804672"/>
+            <a:off x="640080" y="4937759"/>
+            <a:ext cx="6172200" cy="557784"/>
           </a:xfrm>
           <a:prstGeom prst="rect">
             <a:avLst/>
@@ -8839,14 +8719,14 @@
       </p:sp>
       <p:sp>
         <p:nvSpPr>
-          <p:cNvPr id="6" name="TextBox 5"/>
+          <p:cNvPr id="5" name="TextBox 4"/>
           <p:cNvSpPr txBox="1"/>
           <p:nvPr/>
         </p:nvSpPr>
         <p:spPr>
           <a:xfrm>
-            <a:off x="713231" y="4727448"/>
-            <a:ext cx="6345936" cy="731520"/>
+            <a:off x="713231" y="4974336"/>
+            <a:ext cx="6025896" cy="484632"/>
           </a:xfrm>
           <a:prstGeom prst="rect">
             <a:avLst/>
@@ -8887,7 +8767,7 @@
                 </a:solidFill>
                 <a:latin typeface="Consolas"/>
               </a:rPr>
-              <a:t>model = LinearRegression()  # solver='linalg' по умолчанию</a:t>
+              <a:t>model = LinearRegression().fit(X_train, y_train)</a:t>
             </a:r>
           </a:p>
           <a:p>
@@ -8903,22 +8783,6 @@
                 </a:solidFill>
                 <a:latin typeface="Consolas"/>
               </a:rPr>
-              <a:t>model.fit(X_train, y_train)</a:t>
-            </a:r>
-          </a:p>
-          <a:p>
-            <a:pPr>
-              <a:spcAft>
-                <a:spcPts val="0"/>
-              </a:spcAft>
-            </a:pPr>
-            <a:r>
-              <a:rPr sz="1100">
-                <a:solidFill>
-                  <a:srgbClr val="000000"/>
-                </a:solidFill>
-                <a:latin typeface="Consolas"/>
-              </a:rPr>
               <a:t>y_pred = model.predict(X_test)</a:t>
             </a:r>
           </a:p>
@@ -8926,14 +8790,14 @@
       </p:sp>
       <p:sp>
         <p:nvSpPr>
-          <p:cNvPr id="7" name="TextBox 6"/>
+          <p:cNvPr id="6" name="TextBox 5"/>
           <p:cNvSpPr txBox="1"/>
           <p:nvPr/>
         </p:nvSpPr>
         <p:spPr>
           <a:xfrm>
-            <a:off x="640080" y="5550408"/>
-            <a:ext cx="6492240" cy="201168"/>
+            <a:off x="640080" y="5550407"/>
+            <a:ext cx="6172200" cy="201168"/>
           </a:xfrm>
           <a:prstGeom prst="rect">
             <a:avLst/>
@@ -8961,7 +8825,7 @@
       </p:sp>
       <p:pic>
         <p:nvPicPr>
-          <p:cNvPr id="8" name="Picture 7" descr="gradient_descent_contour.png"/>
+          <p:cNvPr id="7" name="Picture 6" descr="gradient_descent_contour.png"/>
           <p:cNvPicPr>
             <a:picLocks noChangeAspect="1"/>
           </p:cNvPicPr>
@@ -8975,8 +8839,8 @@
         </p:blipFill>
         <p:spPr>
           <a:xfrm>
-            <a:off x="7500144" y="1325880"/>
-            <a:ext cx="4567870" cy="3255264"/>
+            <a:off x="7269480" y="1325880"/>
+            <a:ext cx="4465015" cy="3121672"/>
           </a:xfrm>
           <a:prstGeom prst="rect">
             <a:avLst/>
@@ -9043,7 +8907,7 @@
         <p:spPr>
           <a:xfrm>
             <a:off x="640080" y="1371600"/>
-            <a:ext cx="3108960" cy="1645920"/>
+            <a:ext cx="6263640" cy="2514600"/>
           </a:xfrm>
           <a:prstGeom prst="rect">
             <a:avLst/>
@@ -9067,7 +8931,7 @@
                   <a:srgbClr val="000000"/>
                 </a:solidFill>
               </a:rPr>
-              <a:t xml:space="preserve">Несколько признаков: </a:t>
+              <a:t xml:space="preserve">• Несколько признаков: </a:t>
             </a:r>
             <ns0:m xmlns:ns0="http://schemas.microsoft.com/office/drawing/2010/main">
               <m:oMath xmlns:m="http://schemas.openxmlformats.org/officeDocument/2006/math">
@@ -9153,7 +9017,7 @@
                   <a:srgbClr val="000000"/>
                 </a:solidFill>
               </a:rPr>
-              <a:t xml:space="preserve">Векторная форма: </a:t>
+              <a:t xml:space="preserve">• Векторная форма: </a:t>
             </a:r>
             <ns0:m xmlns:ns0="http://schemas.microsoft.com/office/drawing/2010/main">
               <m:oMath xmlns:m="http://schemas.openxmlformats.org/officeDocument/2006/math">
@@ -9209,29 +9073,6 @@
               </m:oMath>
             </ns0:m>
           </a:p>
-        </p:txBody>
-      </p:sp>
-      <p:sp>
-        <p:nvSpPr>
-          <p:cNvPr id="4" name="TextBox 3"/>
-          <p:cNvSpPr txBox="1"/>
-          <p:nvPr/>
-        </p:nvSpPr>
-        <p:spPr>
-          <a:xfrm>
-            <a:off x="3886200" y="1371600"/>
-            <a:ext cx="3108960" cy="1645920"/>
-          </a:xfrm>
-          <a:prstGeom prst="rect">
-            <a:avLst/>
-          </a:prstGeom>
-          <a:noFill/>
-        </p:spPr>
-        <p:txBody>
-          <a:bodyPr wrap="square">
-            <a:spAutoFit/>
-          </a:bodyPr>
-          <a:lstStyle/>
           <a:p>
             <a:pPr>
               <a:spcAft>
@@ -9244,7 +9085,7 @@
                   <a:srgbClr val="000000"/>
                 </a:solidFill>
               </a:rPr>
-              <a:t>Геометрически — гиперплоскость в пространстве признаков</a:t>
+              <a:t>• Геометрически — гиперплоскость в пространстве признаков</a:t>
             </a:r>
           </a:p>
           <a:p>
@@ -9259,7 +9100,7 @@
                   <a:srgbClr val="000000"/>
                 </a:solidFill>
               </a:rPr>
-              <a:t xml:space="preserve">МНК и градиентный спуск обобщаются на </a:t>
+              <a:t xml:space="preserve">• МНК и градиентный спуск обобщаются на </a:t>
             </a:r>
             <ns0:m xmlns:ns0="http://schemas.microsoft.com/office/drawing/2010/main">
               <m:oMath xmlns:m="http://schemas.openxmlformats.org/officeDocument/2006/math">
@@ -9281,7 +9122,7 @@
       </p:sp>
       <p:pic>
         <p:nvPicPr>
-          <p:cNvPr id="5" name="Picture 4" descr="hyperplane_3d.png"/>
+          <p:cNvPr id="4" name="Picture 3" descr="hyperplane_3d.png"/>
           <p:cNvPicPr>
             <a:picLocks noChangeAspect="1"/>
           </p:cNvPicPr>
@@ -9295,8 +9136,8 @@
         </p:blipFill>
         <p:spPr>
           <a:xfrm>
-            <a:off x="7667468" y="1325880"/>
-            <a:ext cx="4233223" cy="4407408"/>
+            <a:off x="7489334" y="1325880"/>
+            <a:ext cx="4025306" cy="4407407"/>
           </a:xfrm>
           <a:prstGeom prst="rect">
             <a:avLst/>
@@ -9363,7 +9204,7 @@
         <p:spPr>
           <a:xfrm>
             <a:off x="640080" y="1371600"/>
-            <a:ext cx="3108960" cy="969264"/>
+            <a:ext cx="6263640" cy="2907791"/>
           </a:xfrm>
           <a:prstGeom prst="rect">
             <a:avLst/>
@@ -9387,7 +9228,7 @@
                   <a:srgbClr val="000000"/>
                 </a:solidFill>
               </a:rPr>
-              <a:t>Категории: One-Hot Encoding (столбцы 0/1); порядковое кодирование 0,1,2 искажает расстояния между уровнями</a:t>
+              <a:t>• Категории: One-Hot Encoding (столбцы 0/1); порядковое кодирование 0,1,2 искажает расстояния между уровнями</a:t>
             </a:r>
           </a:p>
           <a:p>
@@ -9402,7 +9243,7 @@
                   <a:srgbClr val="000000"/>
                 </a:solidFill>
               </a:rPr>
-              <a:t xml:space="preserve">StandardScaler: </a:t>
+              <a:t xml:space="preserve">• StandardScaler: </a:t>
             </a:r>
             <ns0:m xmlns:ns0="http://schemas.microsoft.com/office/drawing/2010/main">
               <m:oMath xmlns:m="http://schemas.openxmlformats.org/officeDocument/2006/math">
@@ -9420,29 +9261,6 @@
               <a:t xml:space="preserve"> — для МНК качество прогноза на test часто не меняется</a:t>
             </a:r>
           </a:p>
-        </p:txBody>
-      </p:sp>
-      <p:sp>
-        <p:nvSpPr>
-          <p:cNvPr id="4" name="TextBox 3"/>
-          <p:cNvSpPr txBox="1"/>
-          <p:nvPr/>
-        </p:nvSpPr>
-        <p:spPr>
-          <a:xfrm>
-            <a:off x="3886200" y="1371600"/>
-            <a:ext cx="3108960" cy="969264"/>
-          </a:xfrm>
-          <a:prstGeom prst="rect">
-            <a:avLst/>
-          </a:prstGeom>
-          <a:noFill/>
-        </p:spPr>
-        <p:txBody>
-          <a:bodyPr wrap="square">
-            <a:normAutofit/>
-          </a:bodyPr>
-          <a:lstStyle/>
           <a:p>
             <a:pPr>
               <a:spcAft>
@@ -9455,7 +9273,7 @@
                   <a:srgbClr val="000000"/>
                 </a:solidFill>
               </a:rPr>
-              <a:t xml:space="preserve">Масштабирование нужно для </a:t>
+              <a:t xml:space="preserve">• Масштабирование нужно для </a:t>
             </a:r>
             <a:r>
               <a:rPr lang="ru-RU" dirty="0" sz="2000" b="1">
@@ -9486,7 +9304,7 @@
                   <a:srgbClr val="000000"/>
                 </a:solidFill>
               </a:rPr>
-              <a:t xml:space="preserve">Для градиентного спуска и регуляризации масштабирование </a:t>
+              <a:t xml:space="preserve">• Для градиентного спуска и регуляризации масштабирование </a:t>
             </a:r>
             <a:r>
               <a:rPr lang="ru-RU" dirty="0" sz="2000" b="1">
@@ -9509,14 +9327,14 @@
       </p:sp>
       <p:sp>
         <p:nvSpPr>
-          <p:cNvPr id="5" name="Rectangle 4"/>
+          <p:cNvPr id="4" name="Rectangle 3"/>
           <p:cNvSpPr/>
           <p:nvPr/>
         </p:nvSpPr>
         <p:spPr>
           <a:xfrm>
-            <a:off x="640080" y="4169663"/>
-            <a:ext cx="6492240" cy="1325880"/>
+            <a:off x="640080" y="4782312"/>
+            <a:ext cx="6172200" cy="713232"/>
           </a:xfrm>
           <a:prstGeom prst="rect">
             <a:avLst/>
@@ -9554,14 +9372,14 @@
       </p:sp>
       <p:sp>
         <p:nvSpPr>
-          <p:cNvPr id="6" name="TextBox 5"/>
+          <p:cNvPr id="5" name="TextBox 4"/>
           <p:cNvSpPr txBox="1"/>
           <p:nvPr/>
         </p:nvSpPr>
         <p:spPr>
           <a:xfrm>
-            <a:off x="713231" y="4206240"/>
-            <a:ext cx="6345936" cy="1252728"/>
+            <a:off x="713231" y="4818888"/>
+            <a:ext cx="6025896" cy="640080"/>
           </a:xfrm>
           <a:prstGeom prst="rect">
             <a:avLst/>
@@ -9586,7 +9404,7 @@
                 </a:solidFill>
                 <a:latin typeface="Consolas"/>
               </a:rPr>
-              <a:t>from sklearn.preprocessing import StandardScaler, OneHotEncoder</a:t>
+              <a:t>prep = ColumnTransformer([</a:t>
             </a:r>
           </a:p>
           <a:p>
@@ -9602,7 +9420,7 @@
                 </a:solidFill>
                 <a:latin typeface="Consolas"/>
               </a:rPr>
-              <a:t>from sklearn.compose import ColumnTransformer</a:t>
+              <a:t>    ('num', StandardScaler(), num_cols),</a:t>
             </a:r>
           </a:p>
           <a:p>
@@ -9618,7 +9436,7 @@
                 </a:solidFill>
                 <a:latin typeface="Consolas"/>
               </a:rPr>
-              <a:t>prep = ColumnTransformer([</a:t>
+              <a:t>    ('cat', OneHotEncoder(), cat_cols)])</a:t>
             </a:r>
           </a:p>
           <a:p>
@@ -9634,54 +9452,6 @@
                 </a:solidFill>
                 <a:latin typeface="Consolas"/>
               </a:rPr>
-              <a:t>    ('num', StandardScaler(), num_cols),</a:t>
-            </a:r>
-          </a:p>
-          <a:p>
-            <a:pPr>
-              <a:spcAft>
-                <a:spcPts val="0"/>
-              </a:spcAft>
-            </a:pPr>
-            <a:r>
-              <a:rPr sz="1100">
-                <a:solidFill>
-                  <a:srgbClr val="000000"/>
-                </a:solidFill>
-                <a:latin typeface="Consolas"/>
-              </a:rPr>
-              <a:t>    ('cat', OneHotEncoder(), cat_cols),</a:t>
-            </a:r>
-          </a:p>
-          <a:p>
-            <a:pPr>
-              <a:spcAft>
-                <a:spcPts val="0"/>
-              </a:spcAft>
-            </a:pPr>
-            <a:r>
-              <a:rPr sz="1100">
-                <a:solidFill>
-                  <a:srgbClr val="000000"/>
-                </a:solidFill>
-                <a:latin typeface="Consolas"/>
-              </a:rPr>
-              <a:t>])</a:t>
-            </a:r>
-          </a:p>
-          <a:p>
-            <a:pPr>
-              <a:spcAft>
-                <a:spcPts val="0"/>
-              </a:spcAft>
-            </a:pPr>
-            <a:r>
-              <a:rPr sz="1100">
-                <a:solidFill>
-                  <a:srgbClr val="000000"/>
-                </a:solidFill>
-                <a:latin typeface="Consolas"/>
-              </a:rPr>
               <a:t>X_scaled = prep.fit_transform(X_train)</a:t>
             </a:r>
           </a:p>
@@ -9689,14 +9459,14 @@
       </p:sp>
       <p:sp>
         <p:nvSpPr>
-          <p:cNvPr id="7" name="TextBox 6"/>
+          <p:cNvPr id="6" name="TextBox 5"/>
           <p:cNvSpPr txBox="1"/>
           <p:nvPr/>
         </p:nvSpPr>
         <p:spPr>
           <a:xfrm>
-            <a:off x="640080" y="5550408"/>
-            <a:ext cx="6492240" cy="201168"/>
+            <a:off x="640080" y="5550407"/>
+            <a:ext cx="6172200" cy="201168"/>
           </a:xfrm>
           <a:prstGeom prst="rect">
             <a:avLst/>
@@ -9724,7 +9494,7 @@
       </p:sp>
       <p:pic>
         <p:nvPicPr>
-          <p:cNvPr id="8" name="Picture 7" descr="scaling_weights_compare.png"/>
+          <p:cNvPr id="7" name="Picture 6" descr="scaling_weights_compare.png"/>
           <p:cNvPicPr>
             <a:picLocks noChangeAspect="1"/>
           </p:cNvPicPr>
@@ -9738,8 +9508,8 @@
         </p:blipFill>
         <p:spPr>
           <a:xfrm>
-            <a:off x="4145173" y="2450592"/>
-            <a:ext cx="3962612" cy="1609344"/>
+            <a:off x="7306686" y="1325880"/>
+            <a:ext cx="4390601" cy="4407407"/>
           </a:xfrm>
           <a:prstGeom prst="rect">
             <a:avLst/>
@@ -9806,7 +9576,7 @@
         <p:spPr>
           <a:xfrm>
             <a:off x="640080" y="1371600"/>
-            <a:ext cx="3108960" cy="1645920"/>
+            <a:ext cx="6263640" cy="2788920"/>
           </a:xfrm>
           <a:prstGeom prst="rect">
             <a:avLst/>
@@ -9830,7 +9600,7 @@
                   <a:srgbClr val="000000"/>
                 </a:solidFill>
               </a:rPr>
-              <a:t xml:space="preserve">Выброс в </a:t>
+              <a:t xml:space="preserve">• Выброс в </a:t>
             </a:r>
             <ns0:m xmlns:ns0="http://schemas.microsoft.com/office/drawing/2010/main">
               <m:oMath xmlns:m="http://schemas.openxmlformats.org/officeDocument/2006/math">
@@ -9845,7 +9615,7 @@
                   <a:srgbClr val="000000"/>
                 </a:solidFill>
               </a:rPr>
-              <a:t>: при MSE сильно тянет линию — решение: MAE (`HuberRegressor`), робастные методы или чистка</a:t>
+              <a:t>: при MSE сильно тянет линию — одна точка может заметно сдвинуть прямую</a:t>
             </a:r>
           </a:p>
           <a:p>
@@ -9860,7 +9630,38 @@
                   <a:srgbClr val="000000"/>
                 </a:solidFill>
               </a:rPr>
-              <a:t xml:space="preserve">Выброс в </a:t>
+              <a:t xml:space="preserve">• </a:t>
+            </a:r>
+            <a:r>
+              <a:rPr lang="ru-RU" dirty="0" sz="2000" b="1">
+                <a:solidFill>
+                  <a:srgbClr val="000000"/>
+                </a:solidFill>
+              </a:rPr>
+              <a:t>Робастные</a:t>
+            </a:r>
+            <a:r>
+              <a:rPr lang="ru-RU" dirty="0" sz="2000">
+                <a:solidFill>
+                  <a:srgbClr val="000000"/>
+                </a:solidFill>
+              </a:rPr>
+              <a:t xml:space="preserve"> методы (MAE, `HuberRegressor`, RANSAC) меньше реагируют на выбросы, чем MSE</a:t>
+            </a:r>
+          </a:p>
+          <a:p>
+            <a:pPr>
+              <a:spcAft>
+                <a:spcPts val="800"/>
+              </a:spcAft>
+            </a:pPr>
+            <a:r>
+              <a:rPr lang="ru-RU" dirty="0" sz="2000">
+                <a:solidFill>
+                  <a:srgbClr val="000000"/>
+                </a:solidFill>
+              </a:rPr>
+              <a:t xml:space="preserve">• Выброс в </a:t>
             </a:r>
             <ns0:m xmlns:ns0="http://schemas.microsoft.com/office/drawing/2010/main">
               <m:oMath xmlns:m="http://schemas.openxmlformats.org/officeDocument/2006/math">
@@ -9885,29 +9686,6 @@
               </m:oMath>
             </ns0:m>
           </a:p>
-        </p:txBody>
-      </p:sp>
-      <p:sp>
-        <p:nvSpPr>
-          <p:cNvPr id="4" name="TextBox 3"/>
-          <p:cNvSpPr txBox="1"/>
-          <p:nvPr/>
-        </p:nvSpPr>
-        <p:spPr>
-          <a:xfrm>
-            <a:off x="3886200" y="1371600"/>
-            <a:ext cx="3108960" cy="1645920"/>
-          </a:xfrm>
-          <a:prstGeom prst="rect">
-            <a:avLst/>
-          </a:prstGeom>
-          <a:noFill/>
-        </p:spPr>
-        <p:txBody>
-          <a:bodyPr wrap="square">
-            <a:spAutoFit/>
-          </a:bodyPr>
-          <a:lstStyle/>
           <a:p>
             <a:pPr>
               <a:spcAft>
@@ -9920,7 +9698,7 @@
                   <a:srgbClr val="000000"/>
                 </a:solidFill>
               </a:rPr>
-              <a:t xml:space="preserve">Всегда стройте scatter «признак vs </a:t>
+              <a:t xml:space="preserve">• Перед обучением: scatter «признак vs </a:t>
             </a:r>
             <ns0:m xmlns:ns0="http://schemas.microsoft.com/office/drawing/2010/main">
               <m:oMath xmlns:m="http://schemas.openxmlformats.org/officeDocument/2006/math">
@@ -9935,29 +9713,14 @@
                   <a:srgbClr val="000000"/>
                 </a:solidFill>
               </a:rPr>
-              <a:t>» и boxplot остатков перед обучением</a:t>
-            </a:r>
-          </a:p>
-          <a:p>
-            <a:pPr>
-              <a:spcAft>
-                <a:spcPts val="800"/>
-              </a:spcAft>
-            </a:pPr>
-            <a:r>
-              <a:rPr lang="ru-RU" dirty="0" sz="2000">
-                <a:solidFill>
-                  <a:srgbClr val="000000"/>
-                </a:solidFill>
-              </a:rPr>
-              <a:t>Влиятельные точки диагностируют через остатки и расстояние от центра признаков</a:t>
+              <a:t>» и boxplot остатков</a:t>
             </a:r>
           </a:p>
         </p:txBody>
       </p:sp>
       <p:pic>
         <p:nvPicPr>
-          <p:cNvPr id="5" name="Picture 4" descr="outlier_y_effect.png"/>
+          <p:cNvPr id="4" name="Picture 3" descr="outlier_effects.png"/>
           <p:cNvPicPr>
             <a:picLocks noChangeAspect="1"/>
           </p:cNvPicPr>
@@ -9971,32 +9734,8 @@
         </p:blipFill>
         <p:spPr>
           <a:xfrm>
-            <a:off x="8151212" y="1325880"/>
-            <a:ext cx="3265735" cy="2212848"/>
-          </a:xfrm>
-          <a:prstGeom prst="rect">
-            <a:avLst/>
-          </a:prstGeom>
-        </p:spPr>
-      </p:pic>
-      <p:pic>
-        <p:nvPicPr>
-          <p:cNvPr id="6" name="Picture 5" descr="outlier_leverage_x.png"/>
-          <p:cNvPicPr>
-            <a:picLocks noChangeAspect="1"/>
-          </p:cNvPicPr>
-          <p:nvPr/>
-        </p:nvPicPr>
-        <p:blipFill>
-          <a:blip r:embed="rId3"/>
-          <a:stretch>
-            <a:fillRect/>
-          </a:stretch>
-        </p:blipFill>
-        <p:spPr>
-          <a:xfrm>
-            <a:off x="7269480" y="3678756"/>
-            <a:ext cx="5029200" cy="2042519"/>
+            <a:off x="7353822" y="1325880"/>
+            <a:ext cx="4296330" cy="4407408"/>
           </a:xfrm>
           <a:prstGeom prst="rect">
             <a:avLst/>
@@ -10063,7 +9802,7 @@
         <p:spPr>
           <a:xfrm>
             <a:off x="640080" y="1371600"/>
-            <a:ext cx="3108960" cy="969264"/>
+            <a:ext cx="6263640" cy="2514600"/>
           </a:xfrm>
           <a:prstGeom prst="rect">
             <a:avLst/>
@@ -10087,7 +9826,7 @@
                   <a:srgbClr val="000000"/>
                 </a:solidFill>
               </a:rPr>
-              <a:t>Сильная корреляция признаков: «площадь м²» и «площадь ft²», «зарплата» и «налоги»</a:t>
+              <a:t>• Сильная корреляция признаков: «площадь м²» и «площадь ft²», «зарплата» и «налоги»</a:t>
             </a:r>
           </a:p>
           <a:p>
@@ -10102,7 +9841,7 @@
                   <a:srgbClr val="000000"/>
                 </a:solidFill>
               </a:rPr>
-              <a:t xml:space="preserve">Прогнозы часто остаются точными, но веса </a:t>
+              <a:t xml:space="preserve">• Прогнозы часто остаются точными, но веса </a:t>
             </a:r>
             <ns0:m xmlns:ns0="http://schemas.microsoft.com/office/drawing/2010/main">
               <m:oMath xmlns:m="http://schemas.openxmlformats.org/officeDocument/2006/math">
@@ -10129,29 +9868,6 @@
               <a:t xml:space="preserve"> нестабильны — большие, меняют знак</a:t>
             </a:r>
           </a:p>
-        </p:txBody>
-      </p:sp>
-      <p:sp>
-        <p:nvSpPr>
-          <p:cNvPr id="4" name="TextBox 3"/>
-          <p:cNvSpPr txBox="1"/>
-          <p:nvPr/>
-        </p:nvSpPr>
-        <p:spPr>
-          <a:xfrm>
-            <a:off x="3886200" y="1371600"/>
-            <a:ext cx="3108960" cy="969264"/>
-          </a:xfrm>
-          <a:prstGeom prst="rect">
-            <a:avLst/>
-          </a:prstGeom>
-          <a:noFill/>
-        </p:spPr>
-        <p:txBody>
-          <a:bodyPr wrap="square">
-            <a:spAutoFit/>
-          </a:bodyPr>
-          <a:lstStyle/>
           <a:p>
             <a:pPr>
               <a:spcAft>
@@ -10164,7 +9880,7 @@
                   <a:srgbClr val="000000"/>
                 </a:solidFill>
               </a:rPr>
-              <a:t>Интерпретация «вклад признака» становится бессмысленной</a:t>
+              <a:t>• Интерпретация «вклад признака» становится бессмысленной</a:t>
             </a:r>
           </a:p>
           <a:p>
@@ -10179,14 +9895,14 @@
                   <a:srgbClr val="000000"/>
                 </a:solidFill>
               </a:rPr>
-              <a:t>Решения: удалить дубликаты, PCA, Ridge (L2), или собрать один составной признак</a:t>
+              <a:t>• Решения: удалить дубликаты, PCA, Ridge (L2), или собрать один составной признак</a:t>
             </a:r>
           </a:p>
         </p:txBody>
       </p:sp>
       <p:pic>
         <p:nvPicPr>
-          <p:cNvPr id="5" name="Picture 4" descr="multicollinearity.png"/>
+          <p:cNvPr id="4" name="Picture 3" descr="multicollinearity.png"/>
           <p:cNvPicPr>
             <a:picLocks noChangeAspect="1"/>
           </p:cNvPicPr>
@@ -10200,8 +9916,8 @@
         </p:blipFill>
         <p:spPr>
           <a:xfrm>
-            <a:off x="3368411" y="2450592"/>
-            <a:ext cx="5516136" cy="2240280"/>
+            <a:off x="7269480" y="1325880"/>
+            <a:ext cx="4465015" cy="3659219"/>
           </a:xfrm>
           <a:prstGeom prst="rect">
             <a:avLst/>

--- a/lessons/lineynaya_regressiya/presentation.pptx
+++ b/lessons/lineynaya_regressiya/presentation.pptx
@@ -4914,7 +4914,26 @@
                   <a:srgbClr val="000000"/>
                 </a:solidFill>
               </a:rPr>
-              <a:t>• `train_test_split`: train — подбор весов, test — финальная проверка</a:t>
+              <a:t xml:space="preserve">• </a:t>
+            </a:r>
+            <a:r>
+              <a:rPr lang="ru-RU" dirty="0" sz="2000">
+                <a:latin typeface="Consolas"/>
+                <a:cs typeface="Consolas"/>
+                <a:ea typeface="Consolas"/>
+                <a:solidFill>
+                  <a:srgbClr val="000000"/>
+                </a:solidFill>
+              </a:rPr>
+              <a:t>train_test_split</a:t>
+            </a:r>
+            <a:r>
+              <a:rPr lang="ru-RU" dirty="0" sz="2000">
+                <a:solidFill>
+                  <a:srgbClr val="000000"/>
+                </a:solidFill>
+              </a:rPr>
+              <a:t>: train — подбор весов, test — финальная проверка</a:t>
             </a:r>
           </a:p>
         </p:txBody>
@@ -4927,8 +4946,8 @@
         </p:nvSpPr>
         <p:spPr>
           <a:xfrm>
-            <a:off x="640080" y="4782312"/>
-            <a:ext cx="6172200" cy="713232"/>
+            <a:off x="640080" y="5134355"/>
+            <a:ext cx="6172200" cy="1303020"/>
           </a:xfrm>
           <a:prstGeom prst="rect">
             <a:avLst/>
@@ -4972,53 +4991,281 @@
         </p:nvSpPr>
         <p:spPr>
           <a:xfrm>
-            <a:off x="713231" y="4818888"/>
-            <a:ext cx="6025896" cy="640080"/>
+            <a:off x="713231" y="5180075"/>
+            <a:ext cx="6025896" cy="139700"/>
           </a:xfrm>
           <a:prstGeom prst="rect">
             <a:avLst/>
           </a:prstGeom>
           <a:noFill/>
+          <a:ln>
+            <a:noFill/>
+          </a:ln>
         </p:spPr>
         <p:txBody>
-          <a:bodyPr wrap="none">
+          <a:bodyPr wrap="none" anchor="t" lIns="0" rIns="0" tIns="0" bIns="0">
             <a:noAutofit/>
           </a:bodyPr>
           <a:lstStyle/>
           <a:p>
             <a:pPr>
+              <a:spcBef>
+                <a:spcPts val="0"/>
+              </a:spcBef>
               <a:spcAft>
                 <a:spcPts val="0"/>
               </a:spcAft>
             </a:pPr>
             <a:r>
-              <a:rPr sz="1100">
-                <a:solidFill>
-                  <a:srgbClr val="000000"/>
-                </a:solidFill>
-                <a:latin typeface="Consolas"/>
-              </a:rPr>
-              <a:t>X_tr, X_te, y_tr, y_te = train_test_split(</a:t>
-            </a:r>
-          </a:p>
+              <a:rPr sz="1100" b="1">
+                <a:solidFill>
+                  <a:srgbClr val="007020"/>
+                </a:solidFill>
+                <a:latin typeface="Consolas"/>
+              </a:rPr>
+              <a:t>from</a:t>
+            </a:r>
+            <a:r>
+              <a:rPr sz="1100">
+                <a:solidFill>
+                  <a:srgbClr val="BBBBBB"/>
+                </a:solidFill>
+                <a:latin typeface="Consolas"/>
+              </a:rPr>
+              <a:t> </a:t>
+            </a:r>
+            <a:r>
+              <a:rPr sz="1100" b="1">
+                <a:solidFill>
+                  <a:srgbClr val="0E84B5"/>
+                </a:solidFill>
+                <a:latin typeface="Consolas"/>
+              </a:rPr>
+              <a:t>sklearn</a:t>
+            </a:r>
+            <a:r>
+              <a:rPr sz="1100" b="1">
+                <a:solidFill>
+                  <a:srgbClr val="0E84B5"/>
+                </a:solidFill>
+                <a:latin typeface="Consolas"/>
+              </a:rPr>
+              <a:t>.</a:t>
+            </a:r>
+            <a:r>
+              <a:rPr sz="1100" b="1">
+                <a:solidFill>
+                  <a:srgbClr val="0E84B5"/>
+                </a:solidFill>
+                <a:latin typeface="Consolas"/>
+              </a:rPr>
+              <a:t>model_selection</a:t>
+            </a:r>
+            <a:r>
+              <a:rPr sz="1100">
+                <a:solidFill>
+                  <a:srgbClr val="BBBBBB"/>
+                </a:solidFill>
+                <a:latin typeface="Consolas"/>
+              </a:rPr>
+              <a:t> </a:t>
+            </a:r>
+            <a:r>
+              <a:rPr sz="1100" b="1">
+                <a:solidFill>
+                  <a:srgbClr val="007020"/>
+                </a:solidFill>
+                <a:latin typeface="Consolas"/>
+              </a:rPr>
+              <a:t>import</a:t>
+            </a:r>
+            <a:r>
+              <a:rPr sz="1100">
+                <a:solidFill>
+                  <a:srgbClr val="000000"/>
+                </a:solidFill>
+                <a:latin typeface="Consolas"/>
+              </a:rPr>
+              <a:t> </a:t>
+            </a:r>
+            <a:r>
+              <a:rPr sz="1100">
+                <a:solidFill>
+                  <a:srgbClr val="000000"/>
+                </a:solidFill>
+                <a:latin typeface="Consolas"/>
+              </a:rPr>
+              <a:t>train_test_split</a:t>
+            </a:r>
+            <a:r>
+              <a:rPr sz="1100">
+                <a:solidFill>
+                  <a:srgbClr val="BBBBBB"/>
+                </a:solidFill>
+                <a:latin typeface="Consolas"/>
+              </a:rPr>
+              <a:t>
+</a:t>
+            </a:r>
+          </a:p>
+        </p:txBody>
+      </p:sp>
+      <p:sp>
+        <p:nvSpPr>
+          <p:cNvPr id="6" name="TextBox 5"/>
+          <p:cNvSpPr txBox="1"/>
+          <p:nvPr/>
+        </p:nvSpPr>
+        <p:spPr>
+          <a:xfrm>
+            <a:off x="713231" y="5319775"/>
+            <a:ext cx="6025896" cy="139700"/>
+          </a:xfrm>
+          <a:prstGeom prst="rect">
+            <a:avLst/>
+          </a:prstGeom>
+          <a:noFill/>
+          <a:ln>
+            <a:noFill/>
+          </a:ln>
+        </p:spPr>
+        <p:txBody>
+          <a:bodyPr wrap="none" anchor="t" lIns="0" rIns="0" tIns="0" bIns="0">
+            <a:noAutofit/>
+          </a:bodyPr>
+          <a:lstStyle/>
           <a:p>
             <a:pPr>
+              <a:spcBef>
+                <a:spcPts val="0"/>
+              </a:spcBef>
               <a:spcAft>
                 <a:spcPts val="0"/>
               </a:spcAft>
             </a:pPr>
             <a:r>
-              <a:rPr sz="1100">
-                <a:solidFill>
-                  <a:srgbClr val="000000"/>
-                </a:solidFill>
-                <a:latin typeface="Consolas"/>
-              </a:rPr>
-              <a:t>    X, y, test_size=0.2, random_state=42</a:t>
-            </a:r>
-          </a:p>
+              <a:rPr sz="1100" b="1">
+                <a:solidFill>
+                  <a:srgbClr val="007020"/>
+                </a:solidFill>
+                <a:latin typeface="Consolas"/>
+              </a:rPr>
+              <a:t>from</a:t>
+            </a:r>
+            <a:r>
+              <a:rPr sz="1100">
+                <a:solidFill>
+                  <a:srgbClr val="BBBBBB"/>
+                </a:solidFill>
+                <a:latin typeface="Consolas"/>
+              </a:rPr>
+              <a:t> </a:t>
+            </a:r>
+            <a:r>
+              <a:rPr sz="1100" b="1">
+                <a:solidFill>
+                  <a:srgbClr val="0E84B5"/>
+                </a:solidFill>
+                <a:latin typeface="Consolas"/>
+              </a:rPr>
+              <a:t>sklearn</a:t>
+            </a:r>
+            <a:r>
+              <a:rPr sz="1100" b="1">
+                <a:solidFill>
+                  <a:srgbClr val="0E84B5"/>
+                </a:solidFill>
+                <a:latin typeface="Consolas"/>
+              </a:rPr>
+              <a:t>.</a:t>
+            </a:r>
+            <a:r>
+              <a:rPr sz="1100" b="1">
+                <a:solidFill>
+                  <a:srgbClr val="0E84B5"/>
+                </a:solidFill>
+                <a:latin typeface="Consolas"/>
+              </a:rPr>
+              <a:t>linear_model</a:t>
+            </a:r>
+            <a:r>
+              <a:rPr sz="1100">
+                <a:solidFill>
+                  <a:srgbClr val="BBBBBB"/>
+                </a:solidFill>
+                <a:latin typeface="Consolas"/>
+              </a:rPr>
+              <a:t> </a:t>
+            </a:r>
+            <a:r>
+              <a:rPr sz="1100" b="1">
+                <a:solidFill>
+                  <a:srgbClr val="007020"/>
+                </a:solidFill>
+                <a:latin typeface="Consolas"/>
+              </a:rPr>
+              <a:t>import</a:t>
+            </a:r>
+            <a:r>
+              <a:rPr sz="1100">
+                <a:solidFill>
+                  <a:srgbClr val="000000"/>
+                </a:solidFill>
+                <a:latin typeface="Consolas"/>
+              </a:rPr>
+              <a:t> </a:t>
+            </a:r>
+            <a:r>
+              <a:rPr sz="1100">
+                <a:solidFill>
+                  <a:srgbClr val="000000"/>
+                </a:solidFill>
+                <a:latin typeface="Consolas"/>
+              </a:rPr>
+              <a:t>LinearRegression</a:t>
+            </a:r>
+            <a:r>
+              <a:rPr sz="1100">
+                <a:solidFill>
+                  <a:srgbClr val="BBBBBB"/>
+                </a:solidFill>
+                <a:latin typeface="Consolas"/>
+              </a:rPr>
+              <a:t>
+</a:t>
+            </a:r>
+          </a:p>
+        </p:txBody>
+      </p:sp>
+      <p:sp>
+        <p:nvSpPr>
+          <p:cNvPr id="7" name="TextBox 6"/>
+          <p:cNvSpPr txBox="1"/>
+          <p:nvPr/>
+        </p:nvSpPr>
+        <p:spPr>
+          <a:xfrm>
+            <a:off x="713231" y="5459475"/>
+            <a:ext cx="6025896" cy="139700"/>
+          </a:xfrm>
+          <a:prstGeom prst="rect">
+            <a:avLst/>
+          </a:prstGeom>
+          <a:noFill/>
+          <a:ln>
+            <a:noFill/>
+          </a:ln>
+        </p:spPr>
+        <p:txBody>
+          <a:bodyPr wrap="none" anchor="t" lIns="0" rIns="0" tIns="0" bIns="0">
+            <a:noAutofit/>
+          </a:bodyPr>
+          <a:lstStyle/>
           <a:p>
             <a:pPr>
+              <a:spcBef>
+                <a:spcPts val="0"/>
+              </a:spcBef>
               <a:spcAft>
                 <a:spcPts val="0"/>
               </a:spcAft>
@@ -5030,11 +5277,176 @@
                 </a:solidFill>
                 <a:latin typeface="Consolas"/>
               </a:rPr>
-              <a:t>)</a:t>
-            </a:r>
-          </a:p>
+              <a:t>X_tr</a:t>
+            </a:r>
+            <a:r>
+              <a:rPr sz="1100">
+                <a:solidFill>
+                  <a:srgbClr val="000000"/>
+                </a:solidFill>
+                <a:latin typeface="Consolas"/>
+              </a:rPr>
+              <a:t>,</a:t>
+            </a:r>
+            <a:r>
+              <a:rPr sz="1100">
+                <a:solidFill>
+                  <a:srgbClr val="000000"/>
+                </a:solidFill>
+                <a:latin typeface="Consolas"/>
+              </a:rPr>
+              <a:t> </a:t>
+            </a:r>
+            <a:r>
+              <a:rPr sz="1100">
+                <a:solidFill>
+                  <a:srgbClr val="000000"/>
+                </a:solidFill>
+                <a:latin typeface="Consolas"/>
+              </a:rPr>
+              <a:t>X_te</a:t>
+            </a:r>
+            <a:r>
+              <a:rPr sz="1100">
+                <a:solidFill>
+                  <a:srgbClr val="000000"/>
+                </a:solidFill>
+                <a:latin typeface="Consolas"/>
+              </a:rPr>
+              <a:t>,</a:t>
+            </a:r>
+            <a:r>
+              <a:rPr sz="1100">
+                <a:solidFill>
+                  <a:srgbClr val="000000"/>
+                </a:solidFill>
+                <a:latin typeface="Consolas"/>
+              </a:rPr>
+              <a:t> </a:t>
+            </a:r>
+            <a:r>
+              <a:rPr sz="1100">
+                <a:solidFill>
+                  <a:srgbClr val="000000"/>
+                </a:solidFill>
+                <a:latin typeface="Consolas"/>
+              </a:rPr>
+              <a:t>y_tr</a:t>
+            </a:r>
+            <a:r>
+              <a:rPr sz="1100">
+                <a:solidFill>
+                  <a:srgbClr val="000000"/>
+                </a:solidFill>
+                <a:latin typeface="Consolas"/>
+              </a:rPr>
+              <a:t>,</a:t>
+            </a:r>
+            <a:r>
+              <a:rPr sz="1100">
+                <a:solidFill>
+                  <a:srgbClr val="000000"/>
+                </a:solidFill>
+                <a:latin typeface="Consolas"/>
+              </a:rPr>
+              <a:t> </a:t>
+            </a:r>
+            <a:r>
+              <a:rPr sz="1100">
+                <a:solidFill>
+                  <a:srgbClr val="000000"/>
+                </a:solidFill>
+                <a:latin typeface="Consolas"/>
+              </a:rPr>
+              <a:t>y_te</a:t>
+            </a:r>
+            <a:r>
+              <a:rPr sz="1100">
+                <a:solidFill>
+                  <a:srgbClr val="000000"/>
+                </a:solidFill>
+                <a:latin typeface="Consolas"/>
+              </a:rPr>
+              <a:t> </a:t>
+            </a:r>
+            <a:r>
+              <a:rPr sz="1100">
+                <a:solidFill>
+                  <a:srgbClr val="666666"/>
+                </a:solidFill>
+                <a:latin typeface="Consolas"/>
+              </a:rPr>
+              <a:t>=</a:t>
+            </a:r>
+            <a:r>
+              <a:rPr sz="1100">
+                <a:solidFill>
+                  <a:srgbClr val="000000"/>
+                </a:solidFill>
+                <a:latin typeface="Consolas"/>
+              </a:rPr>
+              <a:t> </a:t>
+            </a:r>
+            <a:r>
+              <a:rPr sz="1100">
+                <a:solidFill>
+                  <a:srgbClr val="000000"/>
+                </a:solidFill>
+                <a:latin typeface="Consolas"/>
+              </a:rPr>
+              <a:t>train_test_split</a:t>
+            </a:r>
+            <a:r>
+              <a:rPr sz="1100">
+                <a:solidFill>
+                  <a:srgbClr val="000000"/>
+                </a:solidFill>
+                <a:latin typeface="Consolas"/>
+              </a:rPr>
+              <a:t>(</a:t>
+            </a:r>
+            <a:r>
+              <a:rPr sz="1100">
+                <a:solidFill>
+                  <a:srgbClr val="BBBBBB"/>
+                </a:solidFill>
+                <a:latin typeface="Consolas"/>
+              </a:rPr>
+              <a:t>
+</a:t>
+            </a:r>
+          </a:p>
+        </p:txBody>
+      </p:sp>
+      <p:sp>
+        <p:nvSpPr>
+          <p:cNvPr id="8" name="TextBox 7"/>
+          <p:cNvSpPr txBox="1"/>
+          <p:nvPr/>
+        </p:nvSpPr>
+        <p:spPr>
+          <a:xfrm>
+            <a:off x="713231" y="5599175"/>
+            <a:ext cx="6025896" cy="139700"/>
+          </a:xfrm>
+          <a:prstGeom prst="rect">
+            <a:avLst/>
+          </a:prstGeom>
+          <a:noFill/>
+          <a:ln>
+            <a:noFill/>
+          </a:ln>
+        </p:spPr>
+        <p:txBody>
+          <a:bodyPr wrap="none" anchor="t" lIns="0" rIns="0" tIns="0" bIns="0">
+            <a:noAutofit/>
+          </a:bodyPr>
+          <a:lstStyle/>
           <a:p>
             <a:pPr>
+              <a:spcBef>
+                <a:spcPts val="0"/>
+              </a:spcBef>
               <a:spcAft>
                 <a:spcPts val="0"/>
               </a:spcAft>
@@ -5046,20 +5458,466 @@
                 </a:solidFill>
                 <a:latin typeface="Consolas"/>
               </a:rPr>
-              <a:t>model.fit(X_tr, y_tr)  # метрики только на X_te</a:t>
-            </a:r>
-          </a:p>
-        </p:txBody>
-      </p:sp>
-      <p:sp>
-        <p:nvSpPr>
-          <p:cNvPr id="6" name="TextBox 5"/>
+              <a:t>    </a:t>
+            </a:r>
+            <a:r>
+              <a:rPr sz="1100">
+                <a:solidFill>
+                  <a:srgbClr val="000000"/>
+                </a:solidFill>
+                <a:latin typeface="Consolas"/>
+              </a:rPr>
+              <a:t>X</a:t>
+            </a:r>
+            <a:r>
+              <a:rPr sz="1100">
+                <a:solidFill>
+                  <a:srgbClr val="000000"/>
+                </a:solidFill>
+                <a:latin typeface="Consolas"/>
+              </a:rPr>
+              <a:t>,</a:t>
+            </a:r>
+            <a:r>
+              <a:rPr sz="1100">
+                <a:solidFill>
+                  <a:srgbClr val="BBBBBB"/>
+                </a:solidFill>
+                <a:latin typeface="Consolas"/>
+              </a:rPr>
+              <a:t>
+</a:t>
+            </a:r>
+          </a:p>
+        </p:txBody>
+      </p:sp>
+      <p:sp>
+        <p:nvSpPr>
+          <p:cNvPr id="9" name="TextBox 8"/>
           <p:cNvSpPr txBox="1"/>
           <p:nvPr/>
         </p:nvSpPr>
         <p:spPr>
           <a:xfrm>
-            <a:off x="640080" y="5550407"/>
+            <a:off x="713231" y="5738875"/>
+            <a:ext cx="6025896" cy="139700"/>
+          </a:xfrm>
+          <a:prstGeom prst="rect">
+            <a:avLst/>
+          </a:prstGeom>
+          <a:noFill/>
+          <a:ln>
+            <a:noFill/>
+          </a:ln>
+        </p:spPr>
+        <p:txBody>
+          <a:bodyPr wrap="none" anchor="t" lIns="0" rIns="0" tIns="0" bIns="0">
+            <a:noAutofit/>
+          </a:bodyPr>
+          <a:lstStyle/>
+          <a:p>
+            <a:pPr>
+              <a:spcBef>
+                <a:spcPts val="0"/>
+              </a:spcBef>
+              <a:spcAft>
+                <a:spcPts val="0"/>
+              </a:spcAft>
+            </a:pPr>
+            <a:r>
+              <a:rPr sz="1100">
+                <a:solidFill>
+                  <a:srgbClr val="000000"/>
+                </a:solidFill>
+                <a:latin typeface="Consolas"/>
+              </a:rPr>
+              <a:t>    </a:t>
+            </a:r>
+            <a:r>
+              <a:rPr sz="1100">
+                <a:solidFill>
+                  <a:srgbClr val="000000"/>
+                </a:solidFill>
+                <a:latin typeface="Consolas"/>
+              </a:rPr>
+              <a:t>y</a:t>
+            </a:r>
+            <a:r>
+              <a:rPr sz="1100">
+                <a:solidFill>
+                  <a:srgbClr val="000000"/>
+                </a:solidFill>
+                <a:latin typeface="Consolas"/>
+              </a:rPr>
+              <a:t>,</a:t>
+            </a:r>
+            <a:r>
+              <a:rPr sz="1100">
+                <a:solidFill>
+                  <a:srgbClr val="BBBBBB"/>
+                </a:solidFill>
+                <a:latin typeface="Consolas"/>
+              </a:rPr>
+              <a:t>
+</a:t>
+            </a:r>
+          </a:p>
+        </p:txBody>
+      </p:sp>
+      <p:sp>
+        <p:nvSpPr>
+          <p:cNvPr id="10" name="TextBox 9"/>
+          <p:cNvSpPr txBox="1"/>
+          <p:nvPr/>
+        </p:nvSpPr>
+        <p:spPr>
+          <a:xfrm>
+            <a:off x="713231" y="5878576"/>
+            <a:ext cx="6025896" cy="139700"/>
+          </a:xfrm>
+          <a:prstGeom prst="rect">
+            <a:avLst/>
+          </a:prstGeom>
+          <a:noFill/>
+          <a:ln>
+            <a:noFill/>
+          </a:ln>
+        </p:spPr>
+        <p:txBody>
+          <a:bodyPr wrap="none" anchor="t" lIns="0" rIns="0" tIns="0" bIns="0">
+            <a:noAutofit/>
+          </a:bodyPr>
+          <a:lstStyle/>
+          <a:p>
+            <a:pPr>
+              <a:spcBef>
+                <a:spcPts val="0"/>
+              </a:spcBef>
+              <a:spcAft>
+                <a:spcPts val="0"/>
+              </a:spcAft>
+            </a:pPr>
+            <a:r>
+              <a:rPr sz="1100">
+                <a:solidFill>
+                  <a:srgbClr val="000000"/>
+                </a:solidFill>
+                <a:latin typeface="Consolas"/>
+              </a:rPr>
+              <a:t>    </a:t>
+            </a:r>
+            <a:r>
+              <a:rPr sz="1100">
+                <a:solidFill>
+                  <a:srgbClr val="000000"/>
+                </a:solidFill>
+                <a:latin typeface="Consolas"/>
+              </a:rPr>
+              <a:t>test_size</a:t>
+            </a:r>
+            <a:r>
+              <a:rPr sz="1100">
+                <a:solidFill>
+                  <a:srgbClr val="666666"/>
+                </a:solidFill>
+                <a:latin typeface="Consolas"/>
+              </a:rPr>
+              <a:t>=</a:t>
+            </a:r>
+            <a:r>
+              <a:rPr sz="1100">
+                <a:solidFill>
+                  <a:srgbClr val="40A070"/>
+                </a:solidFill>
+                <a:latin typeface="Consolas"/>
+              </a:rPr>
+              <a:t>0.2</a:t>
+            </a:r>
+            <a:r>
+              <a:rPr sz="1100">
+                <a:solidFill>
+                  <a:srgbClr val="000000"/>
+                </a:solidFill>
+                <a:latin typeface="Consolas"/>
+              </a:rPr>
+              <a:t>,</a:t>
+            </a:r>
+            <a:r>
+              <a:rPr sz="1100">
+                <a:solidFill>
+                  <a:srgbClr val="BBBBBB"/>
+                </a:solidFill>
+                <a:latin typeface="Consolas"/>
+              </a:rPr>
+              <a:t>
+</a:t>
+            </a:r>
+          </a:p>
+        </p:txBody>
+      </p:sp>
+      <p:sp>
+        <p:nvSpPr>
+          <p:cNvPr id="11" name="TextBox 10"/>
+          <p:cNvSpPr txBox="1"/>
+          <p:nvPr/>
+        </p:nvSpPr>
+        <p:spPr>
+          <a:xfrm>
+            <a:off x="713231" y="6018275"/>
+            <a:ext cx="6025896" cy="139700"/>
+          </a:xfrm>
+          <a:prstGeom prst="rect">
+            <a:avLst/>
+          </a:prstGeom>
+          <a:noFill/>
+          <a:ln>
+            <a:noFill/>
+          </a:ln>
+        </p:spPr>
+        <p:txBody>
+          <a:bodyPr wrap="none" anchor="t" lIns="0" rIns="0" tIns="0" bIns="0">
+            <a:noAutofit/>
+          </a:bodyPr>
+          <a:lstStyle/>
+          <a:p>
+            <a:pPr>
+              <a:spcBef>
+                <a:spcPts val="0"/>
+              </a:spcBef>
+              <a:spcAft>
+                <a:spcPts val="0"/>
+              </a:spcAft>
+            </a:pPr>
+            <a:r>
+              <a:rPr sz="1100">
+                <a:solidFill>
+                  <a:srgbClr val="000000"/>
+                </a:solidFill>
+                <a:latin typeface="Consolas"/>
+              </a:rPr>
+              <a:t>    </a:t>
+            </a:r>
+            <a:r>
+              <a:rPr sz="1100">
+                <a:solidFill>
+                  <a:srgbClr val="000000"/>
+                </a:solidFill>
+                <a:latin typeface="Consolas"/>
+              </a:rPr>
+              <a:t>random_state</a:t>
+            </a:r>
+            <a:r>
+              <a:rPr sz="1100">
+                <a:solidFill>
+                  <a:srgbClr val="666666"/>
+                </a:solidFill>
+                <a:latin typeface="Consolas"/>
+              </a:rPr>
+              <a:t>=</a:t>
+            </a:r>
+            <a:r>
+              <a:rPr sz="1100">
+                <a:solidFill>
+                  <a:srgbClr val="40A070"/>
+                </a:solidFill>
+                <a:latin typeface="Consolas"/>
+              </a:rPr>
+              <a:t>42</a:t>
+            </a:r>
+            <a:r>
+              <a:rPr sz="1100">
+                <a:solidFill>
+                  <a:srgbClr val="000000"/>
+                </a:solidFill>
+                <a:latin typeface="Consolas"/>
+              </a:rPr>
+              <a:t>)</a:t>
+            </a:r>
+            <a:r>
+              <a:rPr sz="1100">
+                <a:solidFill>
+                  <a:srgbClr val="BBBBBB"/>
+                </a:solidFill>
+                <a:latin typeface="Consolas"/>
+              </a:rPr>
+              <a:t>
+</a:t>
+            </a:r>
+          </a:p>
+        </p:txBody>
+      </p:sp>
+      <p:sp>
+        <p:nvSpPr>
+          <p:cNvPr id="12" name="TextBox 11"/>
+          <p:cNvSpPr txBox="1"/>
+          <p:nvPr/>
+        </p:nvSpPr>
+        <p:spPr>
+          <a:xfrm>
+            <a:off x="713231" y="6157975"/>
+            <a:ext cx="6025896" cy="139700"/>
+          </a:xfrm>
+          <a:prstGeom prst="rect">
+            <a:avLst/>
+          </a:prstGeom>
+          <a:noFill/>
+          <a:ln>
+            <a:noFill/>
+          </a:ln>
+        </p:spPr>
+        <p:txBody>
+          <a:bodyPr wrap="none" anchor="t" lIns="0" rIns="0" tIns="0" bIns="0">
+            <a:noAutofit/>
+          </a:bodyPr>
+          <a:lstStyle/>
+          <a:p>
+            <a:pPr>
+              <a:spcBef>
+                <a:spcPts val="0"/>
+              </a:spcBef>
+              <a:spcAft>
+                <a:spcPts val="0"/>
+              </a:spcAft>
+            </a:pPr>
+            <a:r>
+              <a:rPr sz="1100">
+                <a:solidFill>
+                  <a:srgbClr val="000000"/>
+                </a:solidFill>
+                <a:latin typeface="Consolas"/>
+              </a:rPr>
+              <a:t>LinearRegression</a:t>
+            </a:r>
+            <a:r>
+              <a:rPr sz="1100">
+                <a:solidFill>
+                  <a:srgbClr val="000000"/>
+                </a:solidFill>
+                <a:latin typeface="Consolas"/>
+              </a:rPr>
+              <a:t>(</a:t>
+            </a:r>
+            <a:r>
+              <a:rPr sz="1100">
+                <a:solidFill>
+                  <a:srgbClr val="000000"/>
+                </a:solidFill>
+                <a:latin typeface="Consolas"/>
+              </a:rPr>
+              <a:t>)</a:t>
+            </a:r>
+            <a:r>
+              <a:rPr sz="1100">
+                <a:solidFill>
+                  <a:srgbClr val="666666"/>
+                </a:solidFill>
+                <a:latin typeface="Consolas"/>
+              </a:rPr>
+              <a:t>.</a:t>
+            </a:r>
+            <a:r>
+              <a:rPr sz="1100">
+                <a:solidFill>
+                  <a:srgbClr val="000000"/>
+                </a:solidFill>
+                <a:latin typeface="Consolas"/>
+              </a:rPr>
+              <a:t>fit</a:t>
+            </a:r>
+            <a:r>
+              <a:rPr sz="1100">
+                <a:solidFill>
+                  <a:srgbClr val="000000"/>
+                </a:solidFill>
+                <a:latin typeface="Consolas"/>
+              </a:rPr>
+              <a:t>(</a:t>
+            </a:r>
+            <a:r>
+              <a:rPr sz="1100">
+                <a:solidFill>
+                  <a:srgbClr val="000000"/>
+                </a:solidFill>
+                <a:latin typeface="Consolas"/>
+              </a:rPr>
+              <a:t>X_tr</a:t>
+            </a:r>
+            <a:r>
+              <a:rPr sz="1100">
+                <a:solidFill>
+                  <a:srgbClr val="000000"/>
+                </a:solidFill>
+                <a:latin typeface="Consolas"/>
+              </a:rPr>
+              <a:t>,</a:t>
+            </a:r>
+            <a:r>
+              <a:rPr sz="1100">
+                <a:solidFill>
+                  <a:srgbClr val="000000"/>
+                </a:solidFill>
+                <a:latin typeface="Consolas"/>
+              </a:rPr>
+              <a:t> </a:t>
+            </a:r>
+            <a:r>
+              <a:rPr sz="1100">
+                <a:solidFill>
+                  <a:srgbClr val="000000"/>
+                </a:solidFill>
+                <a:latin typeface="Consolas"/>
+              </a:rPr>
+              <a:t>y_tr</a:t>
+            </a:r>
+            <a:r>
+              <a:rPr sz="1100">
+                <a:solidFill>
+                  <a:srgbClr val="000000"/>
+                </a:solidFill>
+                <a:latin typeface="Consolas"/>
+              </a:rPr>
+              <a:t>)</a:t>
+            </a:r>
+            <a:r>
+              <a:rPr sz="1100">
+                <a:solidFill>
+                  <a:srgbClr val="000000"/>
+                </a:solidFill>
+                <a:latin typeface="Consolas"/>
+              </a:rPr>
+              <a:t>  </a:t>
+            </a:r>
+            <a:r>
+              <a:rPr sz="1100" i="1">
+                <a:solidFill>
+                  <a:srgbClr val="60A0B0"/>
+                </a:solidFill>
+                <a:latin typeface="Consolas"/>
+              </a:rPr>
+              <a:t># метрики только на X_te</a:t>
+            </a:r>
+            <a:r>
+              <a:rPr sz="1100">
+                <a:solidFill>
+                  <a:srgbClr val="BBBBBB"/>
+                </a:solidFill>
+                <a:latin typeface="Consolas"/>
+              </a:rPr>
+              <a:t>
+</a:t>
+            </a:r>
+          </a:p>
+        </p:txBody>
+      </p:sp>
+      <p:sp>
+        <p:nvSpPr>
+          <p:cNvPr id="13" name="TextBox 12"/>
+          <p:cNvSpPr txBox="1"/>
+          <p:nvPr/>
+        </p:nvSpPr>
+        <p:spPr>
+          <a:xfrm>
+            <a:off x="640080" y="6492240"/>
             <a:ext cx="6172200" cy="201168"/>
           </a:xfrm>
           <a:prstGeom prst="rect">
@@ -5088,7 +5946,7 @@
       </p:sp>
       <p:pic>
         <p:nvPicPr>
-          <p:cNvPr id="7" name="Picture 6" descr="train_test_split.png"/>
+          <p:cNvPr id="14" name="Picture 13" descr="train_test_split.png"/>
           <p:cNvPicPr>
             <a:picLocks noChangeAspect="1"/>
           </p:cNvPicPr>
@@ -5102,8 +5960,8 @@
         </p:blipFill>
         <p:spPr>
           <a:xfrm>
-            <a:off x="7476962" y="1325880"/>
-            <a:ext cx="4050050" cy="4407407"/>
+            <a:off x="7522997" y="1371600"/>
+            <a:ext cx="3957980" cy="3598164"/>
           </a:xfrm>
           <a:prstGeom prst="rect">
             <a:avLst/>
@@ -5421,8 +6279,8 @@
         </p:blipFill>
         <p:spPr>
           <a:xfrm>
-            <a:off x="7269480" y="1325880"/>
-            <a:ext cx="4465015" cy="4134686"/>
+            <a:off x="7269480" y="1371600"/>
+            <a:ext cx="4465015" cy="4059105"/>
           </a:xfrm>
           <a:prstGeom prst="rect">
             <a:avLst/>
@@ -5489,7 +6347,7 @@
         <p:spPr>
           <a:xfrm>
             <a:off x="640080" y="1371600"/>
-            <a:ext cx="6263640" cy="2907791"/>
+            <a:ext cx="6263640" cy="3063240"/>
           </a:xfrm>
           <a:prstGeom prst="rect">
             <a:avLst/>
@@ -5498,7 +6356,7 @@
         </p:spPr>
         <p:txBody>
           <a:bodyPr wrap="square">
-            <a:normAutofit/>
+            <a:spAutoFit/>
           </a:bodyPr>
           <a:lstStyle/>
           <a:p>
@@ -5741,8 +6599,8 @@
         </p:nvSpPr>
         <p:spPr>
           <a:xfrm>
-            <a:off x="640080" y="4782312"/>
-            <a:ext cx="6172200" cy="713232"/>
+            <a:off x="640080" y="5134355"/>
+            <a:ext cx="6172200" cy="1303020"/>
           </a:xfrm>
           <a:prstGeom prst="rect">
             <a:avLst/>
@@ -5786,37 +6644,154 @@
         </p:nvSpPr>
         <p:spPr>
           <a:xfrm>
-            <a:off x="713231" y="4818888"/>
-            <a:ext cx="6025896" cy="640080"/>
+            <a:off x="713231" y="5180075"/>
+            <a:ext cx="6025896" cy="139700"/>
           </a:xfrm>
           <a:prstGeom prst="rect">
             <a:avLst/>
           </a:prstGeom>
           <a:noFill/>
+          <a:ln>
+            <a:noFill/>
+          </a:ln>
         </p:spPr>
         <p:txBody>
-          <a:bodyPr wrap="none">
+          <a:bodyPr wrap="none" anchor="t" lIns="0" rIns="0" tIns="0" bIns="0">
             <a:noAutofit/>
           </a:bodyPr>
           <a:lstStyle/>
           <a:p>
             <a:pPr>
+              <a:spcBef>
+                <a:spcPts val="0"/>
+              </a:spcBef>
               <a:spcAft>
                 <a:spcPts val="0"/>
               </a:spcAft>
             </a:pPr>
             <a:r>
-              <a:rPr sz="1100">
-                <a:solidFill>
-                  <a:srgbClr val="000000"/>
-                </a:solidFill>
-                <a:latin typeface="Consolas"/>
-              </a:rPr>
-              <a:t>mae = mean_absolute_error(y_te, y_pred)</a:t>
-            </a:r>
-          </a:p>
+              <a:rPr sz="1100" b="1">
+                <a:solidFill>
+                  <a:srgbClr val="007020"/>
+                </a:solidFill>
+                <a:latin typeface="Consolas"/>
+              </a:rPr>
+              <a:t>from</a:t>
+            </a:r>
+            <a:r>
+              <a:rPr sz="1100">
+                <a:solidFill>
+                  <a:srgbClr val="BBBBBB"/>
+                </a:solidFill>
+                <a:latin typeface="Consolas"/>
+              </a:rPr>
+              <a:t> </a:t>
+            </a:r>
+            <a:r>
+              <a:rPr sz="1100" b="1">
+                <a:solidFill>
+                  <a:srgbClr val="0E84B5"/>
+                </a:solidFill>
+                <a:latin typeface="Consolas"/>
+              </a:rPr>
+              <a:t>sklearn</a:t>
+            </a:r>
+            <a:r>
+              <a:rPr sz="1100" b="1">
+                <a:solidFill>
+                  <a:srgbClr val="0E84B5"/>
+                </a:solidFill>
+                <a:latin typeface="Consolas"/>
+              </a:rPr>
+              <a:t>.</a:t>
+            </a:r>
+            <a:r>
+              <a:rPr sz="1100" b="1">
+                <a:solidFill>
+                  <a:srgbClr val="0E84B5"/>
+                </a:solidFill>
+                <a:latin typeface="Consolas"/>
+              </a:rPr>
+              <a:t>metrics</a:t>
+            </a:r>
+            <a:r>
+              <a:rPr sz="1100">
+                <a:solidFill>
+                  <a:srgbClr val="BBBBBB"/>
+                </a:solidFill>
+                <a:latin typeface="Consolas"/>
+              </a:rPr>
+              <a:t> </a:t>
+            </a:r>
+            <a:r>
+              <a:rPr sz="1100" b="1">
+                <a:solidFill>
+                  <a:srgbClr val="007020"/>
+                </a:solidFill>
+                <a:latin typeface="Consolas"/>
+              </a:rPr>
+              <a:t>import</a:t>
+            </a:r>
+            <a:r>
+              <a:rPr sz="1100">
+                <a:solidFill>
+                  <a:srgbClr val="000000"/>
+                </a:solidFill>
+                <a:latin typeface="Consolas"/>
+              </a:rPr>
+              <a:t> </a:t>
+            </a:r>
+            <a:r>
+              <a:rPr sz="1100">
+                <a:solidFill>
+                  <a:srgbClr val="000000"/>
+                </a:solidFill>
+                <a:latin typeface="Consolas"/>
+              </a:rPr>
+              <a:t>(</a:t>
+            </a:r>
+            <a:r>
+              <a:rPr sz="1100">
+                <a:solidFill>
+                  <a:srgbClr val="BBBBBB"/>
+                </a:solidFill>
+                <a:latin typeface="Consolas"/>
+              </a:rPr>
+              <a:t>
+</a:t>
+            </a:r>
+          </a:p>
+        </p:txBody>
+      </p:sp>
+      <p:sp>
+        <p:nvSpPr>
+          <p:cNvPr id="6" name="TextBox 5"/>
+          <p:cNvSpPr txBox="1"/>
+          <p:nvPr/>
+        </p:nvSpPr>
+        <p:spPr>
+          <a:xfrm>
+            <a:off x="713231" y="5319775"/>
+            <a:ext cx="6025896" cy="139700"/>
+          </a:xfrm>
+          <a:prstGeom prst="rect">
+            <a:avLst/>
+          </a:prstGeom>
+          <a:noFill/>
+          <a:ln>
+            <a:noFill/>
+          </a:ln>
+        </p:spPr>
+        <p:txBody>
+          <a:bodyPr wrap="none" anchor="t" lIns="0" rIns="0" tIns="0" bIns="0">
+            <a:noAutofit/>
+          </a:bodyPr>
+          <a:lstStyle/>
           <a:p>
             <a:pPr>
+              <a:spcBef>
+                <a:spcPts val="0"/>
+              </a:spcBef>
               <a:spcAft>
                 <a:spcPts val="0"/>
               </a:spcAft>
@@ -5828,11 +6803,68 @@
                 </a:solidFill>
                 <a:latin typeface="Consolas"/>
               </a:rPr>
-              <a:t>rmse = mean_squared_error(y_te, y_pred, squared=False)</a:t>
-            </a:r>
-          </a:p>
+              <a:t>    </a:t>
+            </a:r>
+            <a:r>
+              <a:rPr sz="1100">
+                <a:solidFill>
+                  <a:srgbClr val="000000"/>
+                </a:solidFill>
+                <a:latin typeface="Consolas"/>
+              </a:rPr>
+              <a:t>mean_absolute_error</a:t>
+            </a:r>
+            <a:r>
+              <a:rPr sz="1100">
+                <a:solidFill>
+                  <a:srgbClr val="000000"/>
+                </a:solidFill>
+                <a:latin typeface="Consolas"/>
+              </a:rPr>
+              <a:t>,</a:t>
+            </a:r>
+            <a:r>
+              <a:rPr sz="1100">
+                <a:solidFill>
+                  <a:srgbClr val="BBBBBB"/>
+                </a:solidFill>
+                <a:latin typeface="Consolas"/>
+              </a:rPr>
+              <a:t>
+</a:t>
+            </a:r>
+          </a:p>
+        </p:txBody>
+      </p:sp>
+      <p:sp>
+        <p:nvSpPr>
+          <p:cNvPr id="7" name="TextBox 6"/>
+          <p:cNvSpPr txBox="1"/>
+          <p:nvPr/>
+        </p:nvSpPr>
+        <p:spPr>
+          <a:xfrm>
+            <a:off x="713231" y="5459475"/>
+            <a:ext cx="6025896" cy="139700"/>
+          </a:xfrm>
+          <a:prstGeom prst="rect">
+            <a:avLst/>
+          </a:prstGeom>
+          <a:noFill/>
+          <a:ln>
+            <a:noFill/>
+          </a:ln>
+        </p:spPr>
+        <p:txBody>
+          <a:bodyPr wrap="none" anchor="t" lIns="0" rIns="0" tIns="0" bIns="0">
+            <a:noAutofit/>
+          </a:bodyPr>
+          <a:lstStyle/>
           <a:p>
             <a:pPr>
+              <a:spcBef>
+                <a:spcPts val="0"/>
+              </a:spcBef>
               <a:spcAft>
                 <a:spcPts val="0"/>
               </a:spcAft>
@@ -5844,11 +6876,68 @@
                 </a:solidFill>
                 <a:latin typeface="Consolas"/>
               </a:rPr>
-              <a:t>r2 = r2_score(y_te, y_pred)</a:t>
-            </a:r>
-          </a:p>
+              <a:t>    </a:t>
+            </a:r>
+            <a:r>
+              <a:rPr sz="1100">
+                <a:solidFill>
+                  <a:srgbClr val="000000"/>
+                </a:solidFill>
+                <a:latin typeface="Consolas"/>
+              </a:rPr>
+              <a:t>mean_squared_error</a:t>
+            </a:r>
+            <a:r>
+              <a:rPr sz="1100">
+                <a:solidFill>
+                  <a:srgbClr val="000000"/>
+                </a:solidFill>
+                <a:latin typeface="Consolas"/>
+              </a:rPr>
+              <a:t>,</a:t>
+            </a:r>
+            <a:r>
+              <a:rPr sz="1100">
+                <a:solidFill>
+                  <a:srgbClr val="BBBBBB"/>
+                </a:solidFill>
+                <a:latin typeface="Consolas"/>
+              </a:rPr>
+              <a:t>
+</a:t>
+            </a:r>
+          </a:p>
+        </p:txBody>
+      </p:sp>
+      <p:sp>
+        <p:nvSpPr>
+          <p:cNvPr id="8" name="TextBox 7"/>
+          <p:cNvSpPr txBox="1"/>
+          <p:nvPr/>
+        </p:nvSpPr>
+        <p:spPr>
+          <a:xfrm>
+            <a:off x="713231" y="5599175"/>
+            <a:ext cx="6025896" cy="139700"/>
+          </a:xfrm>
+          <a:prstGeom prst="rect">
+            <a:avLst/>
+          </a:prstGeom>
+          <a:noFill/>
+          <a:ln>
+            <a:noFill/>
+          </a:ln>
+        </p:spPr>
+        <p:txBody>
+          <a:bodyPr wrap="none" anchor="t" lIns="0" rIns="0" tIns="0" bIns="0">
+            <a:noAutofit/>
+          </a:bodyPr>
+          <a:lstStyle/>
           <a:p>
             <a:pPr>
+              <a:spcBef>
+                <a:spcPts val="0"/>
+              </a:spcBef>
               <a:spcAft>
                 <a:spcPts val="0"/>
               </a:spcAft>
@@ -5860,20 +6949,790 @@
                 </a:solidFill>
                 <a:latin typeface="Consolas"/>
               </a:rPr>
-              <a:t>print(f'MAE={mae:.2f}, RMSE={rmse:.2f}, R²={r2:.3f}')</a:t>
-            </a:r>
-          </a:p>
-        </p:txBody>
-      </p:sp>
-      <p:sp>
-        <p:nvSpPr>
-          <p:cNvPr id="6" name="TextBox 5"/>
+              <a:t>    </a:t>
+            </a:r>
+            <a:r>
+              <a:rPr sz="1100">
+                <a:solidFill>
+                  <a:srgbClr val="000000"/>
+                </a:solidFill>
+                <a:latin typeface="Consolas"/>
+              </a:rPr>
+              <a:t>r2_score</a:t>
+            </a:r>
+            <a:r>
+              <a:rPr sz="1100">
+                <a:solidFill>
+                  <a:srgbClr val="000000"/>
+                </a:solidFill>
+                <a:latin typeface="Consolas"/>
+              </a:rPr>
+              <a:t>)</a:t>
+            </a:r>
+            <a:r>
+              <a:rPr sz="1100">
+                <a:solidFill>
+                  <a:srgbClr val="BBBBBB"/>
+                </a:solidFill>
+                <a:latin typeface="Consolas"/>
+              </a:rPr>
+              <a:t>
+</a:t>
+            </a:r>
+          </a:p>
+        </p:txBody>
+      </p:sp>
+      <p:sp>
+        <p:nvSpPr>
+          <p:cNvPr id="9" name="TextBox 8"/>
           <p:cNvSpPr txBox="1"/>
           <p:nvPr/>
         </p:nvSpPr>
         <p:spPr>
           <a:xfrm>
-            <a:off x="640080" y="5550407"/>
+            <a:off x="713231" y="5738875"/>
+            <a:ext cx="6025896" cy="139700"/>
+          </a:xfrm>
+          <a:prstGeom prst="rect">
+            <a:avLst/>
+          </a:prstGeom>
+          <a:noFill/>
+          <a:ln>
+            <a:noFill/>
+          </a:ln>
+        </p:spPr>
+        <p:txBody>
+          <a:bodyPr wrap="none" anchor="t" lIns="0" rIns="0" tIns="0" bIns="0">
+            <a:noAutofit/>
+          </a:bodyPr>
+          <a:lstStyle/>
+          <a:p>
+            <a:pPr>
+              <a:spcBef>
+                <a:spcPts val="0"/>
+              </a:spcBef>
+              <a:spcAft>
+                <a:spcPts val="0"/>
+              </a:spcAft>
+            </a:pPr>
+            <a:r>
+              <a:rPr sz="1100">
+                <a:solidFill>
+                  <a:srgbClr val="000000"/>
+                </a:solidFill>
+                <a:latin typeface="Consolas"/>
+              </a:rPr>
+              <a:t>mae</a:t>
+            </a:r>
+            <a:r>
+              <a:rPr sz="1100">
+                <a:solidFill>
+                  <a:srgbClr val="000000"/>
+                </a:solidFill>
+                <a:latin typeface="Consolas"/>
+              </a:rPr>
+              <a:t> </a:t>
+            </a:r>
+            <a:r>
+              <a:rPr sz="1100">
+                <a:solidFill>
+                  <a:srgbClr val="666666"/>
+                </a:solidFill>
+                <a:latin typeface="Consolas"/>
+              </a:rPr>
+              <a:t>=</a:t>
+            </a:r>
+            <a:r>
+              <a:rPr sz="1100">
+                <a:solidFill>
+                  <a:srgbClr val="000000"/>
+                </a:solidFill>
+                <a:latin typeface="Consolas"/>
+              </a:rPr>
+              <a:t> </a:t>
+            </a:r>
+            <a:r>
+              <a:rPr sz="1100">
+                <a:solidFill>
+                  <a:srgbClr val="000000"/>
+                </a:solidFill>
+                <a:latin typeface="Consolas"/>
+              </a:rPr>
+              <a:t>mean_absolute_error</a:t>
+            </a:r>
+            <a:r>
+              <a:rPr sz="1100">
+                <a:solidFill>
+                  <a:srgbClr val="000000"/>
+                </a:solidFill>
+                <a:latin typeface="Consolas"/>
+              </a:rPr>
+              <a:t>(</a:t>
+            </a:r>
+            <a:r>
+              <a:rPr sz="1100">
+                <a:solidFill>
+                  <a:srgbClr val="000000"/>
+                </a:solidFill>
+                <a:latin typeface="Consolas"/>
+              </a:rPr>
+              <a:t>y_te</a:t>
+            </a:r>
+            <a:r>
+              <a:rPr sz="1100">
+                <a:solidFill>
+                  <a:srgbClr val="000000"/>
+                </a:solidFill>
+                <a:latin typeface="Consolas"/>
+              </a:rPr>
+              <a:t>,</a:t>
+            </a:r>
+            <a:r>
+              <a:rPr sz="1100">
+                <a:solidFill>
+                  <a:srgbClr val="000000"/>
+                </a:solidFill>
+                <a:latin typeface="Consolas"/>
+              </a:rPr>
+              <a:t> </a:t>
+            </a:r>
+            <a:r>
+              <a:rPr sz="1100">
+                <a:solidFill>
+                  <a:srgbClr val="000000"/>
+                </a:solidFill>
+                <a:latin typeface="Consolas"/>
+              </a:rPr>
+              <a:t>y_pred</a:t>
+            </a:r>
+            <a:r>
+              <a:rPr sz="1100">
+                <a:solidFill>
+                  <a:srgbClr val="000000"/>
+                </a:solidFill>
+                <a:latin typeface="Consolas"/>
+              </a:rPr>
+              <a:t>)</a:t>
+            </a:r>
+            <a:r>
+              <a:rPr sz="1100">
+                <a:solidFill>
+                  <a:srgbClr val="BBBBBB"/>
+                </a:solidFill>
+                <a:latin typeface="Consolas"/>
+              </a:rPr>
+              <a:t>
+</a:t>
+            </a:r>
+          </a:p>
+        </p:txBody>
+      </p:sp>
+      <p:sp>
+        <p:nvSpPr>
+          <p:cNvPr id="10" name="TextBox 9"/>
+          <p:cNvSpPr txBox="1"/>
+          <p:nvPr/>
+        </p:nvSpPr>
+        <p:spPr>
+          <a:xfrm>
+            <a:off x="713231" y="5878576"/>
+            <a:ext cx="6025896" cy="139700"/>
+          </a:xfrm>
+          <a:prstGeom prst="rect">
+            <a:avLst/>
+          </a:prstGeom>
+          <a:noFill/>
+          <a:ln>
+            <a:noFill/>
+          </a:ln>
+        </p:spPr>
+        <p:txBody>
+          <a:bodyPr wrap="none" anchor="t" lIns="0" rIns="0" tIns="0" bIns="0">
+            <a:noAutofit/>
+          </a:bodyPr>
+          <a:lstStyle/>
+          <a:p>
+            <a:pPr>
+              <a:spcBef>
+                <a:spcPts val="0"/>
+              </a:spcBef>
+              <a:spcAft>
+                <a:spcPts val="0"/>
+              </a:spcAft>
+            </a:pPr>
+            <a:r>
+              <a:rPr sz="1100">
+                <a:solidFill>
+                  <a:srgbClr val="000000"/>
+                </a:solidFill>
+                <a:latin typeface="Consolas"/>
+              </a:rPr>
+              <a:t>rmse</a:t>
+            </a:r>
+            <a:r>
+              <a:rPr sz="1100">
+                <a:solidFill>
+                  <a:srgbClr val="000000"/>
+                </a:solidFill>
+                <a:latin typeface="Consolas"/>
+              </a:rPr>
+              <a:t> </a:t>
+            </a:r>
+            <a:r>
+              <a:rPr sz="1100">
+                <a:solidFill>
+                  <a:srgbClr val="666666"/>
+                </a:solidFill>
+                <a:latin typeface="Consolas"/>
+              </a:rPr>
+              <a:t>=</a:t>
+            </a:r>
+            <a:r>
+              <a:rPr sz="1100">
+                <a:solidFill>
+                  <a:srgbClr val="000000"/>
+                </a:solidFill>
+                <a:latin typeface="Consolas"/>
+              </a:rPr>
+              <a:t> </a:t>
+            </a:r>
+            <a:r>
+              <a:rPr sz="1100">
+                <a:solidFill>
+                  <a:srgbClr val="000000"/>
+                </a:solidFill>
+                <a:latin typeface="Consolas"/>
+              </a:rPr>
+              <a:t>mean_squared_error</a:t>
+            </a:r>
+            <a:r>
+              <a:rPr sz="1100">
+                <a:solidFill>
+                  <a:srgbClr val="000000"/>
+                </a:solidFill>
+                <a:latin typeface="Consolas"/>
+              </a:rPr>
+              <a:t>(</a:t>
+            </a:r>
+            <a:r>
+              <a:rPr sz="1100">
+                <a:solidFill>
+                  <a:srgbClr val="000000"/>
+                </a:solidFill>
+                <a:latin typeface="Consolas"/>
+              </a:rPr>
+              <a:t>y_te</a:t>
+            </a:r>
+            <a:r>
+              <a:rPr sz="1100">
+                <a:solidFill>
+                  <a:srgbClr val="000000"/>
+                </a:solidFill>
+                <a:latin typeface="Consolas"/>
+              </a:rPr>
+              <a:t>,</a:t>
+            </a:r>
+            <a:r>
+              <a:rPr sz="1100">
+                <a:solidFill>
+                  <a:srgbClr val="000000"/>
+                </a:solidFill>
+                <a:latin typeface="Consolas"/>
+              </a:rPr>
+              <a:t> </a:t>
+            </a:r>
+            <a:r>
+              <a:rPr sz="1100">
+                <a:solidFill>
+                  <a:srgbClr val="000000"/>
+                </a:solidFill>
+                <a:latin typeface="Consolas"/>
+              </a:rPr>
+              <a:t>y_pred</a:t>
+            </a:r>
+            <a:r>
+              <a:rPr sz="1100">
+                <a:solidFill>
+                  <a:srgbClr val="000000"/>
+                </a:solidFill>
+                <a:latin typeface="Consolas"/>
+              </a:rPr>
+              <a:t>,</a:t>
+            </a:r>
+            <a:r>
+              <a:rPr sz="1100">
+                <a:solidFill>
+                  <a:srgbClr val="000000"/>
+                </a:solidFill>
+                <a:latin typeface="Consolas"/>
+              </a:rPr>
+              <a:t> </a:t>
+            </a:r>
+            <a:r>
+              <a:rPr sz="1100">
+                <a:solidFill>
+                  <a:srgbClr val="000000"/>
+                </a:solidFill>
+                <a:latin typeface="Consolas"/>
+              </a:rPr>
+              <a:t>squared</a:t>
+            </a:r>
+            <a:r>
+              <a:rPr sz="1100">
+                <a:solidFill>
+                  <a:srgbClr val="666666"/>
+                </a:solidFill>
+                <a:latin typeface="Consolas"/>
+              </a:rPr>
+              <a:t>=</a:t>
+            </a:r>
+            <a:r>
+              <a:rPr sz="1100" b="1">
+                <a:solidFill>
+                  <a:srgbClr val="007020"/>
+                </a:solidFill>
+                <a:latin typeface="Consolas"/>
+              </a:rPr>
+              <a:t>False</a:t>
+            </a:r>
+            <a:r>
+              <a:rPr sz="1100">
+                <a:solidFill>
+                  <a:srgbClr val="000000"/>
+                </a:solidFill>
+                <a:latin typeface="Consolas"/>
+              </a:rPr>
+              <a:t>)</a:t>
+            </a:r>
+            <a:r>
+              <a:rPr sz="1100">
+                <a:solidFill>
+                  <a:srgbClr val="BBBBBB"/>
+                </a:solidFill>
+                <a:latin typeface="Consolas"/>
+              </a:rPr>
+              <a:t>
+</a:t>
+            </a:r>
+          </a:p>
+        </p:txBody>
+      </p:sp>
+      <p:sp>
+        <p:nvSpPr>
+          <p:cNvPr id="11" name="TextBox 10"/>
+          <p:cNvSpPr txBox="1"/>
+          <p:nvPr/>
+        </p:nvSpPr>
+        <p:spPr>
+          <a:xfrm>
+            <a:off x="713231" y="6018275"/>
+            <a:ext cx="6025896" cy="139700"/>
+          </a:xfrm>
+          <a:prstGeom prst="rect">
+            <a:avLst/>
+          </a:prstGeom>
+          <a:noFill/>
+          <a:ln>
+            <a:noFill/>
+          </a:ln>
+        </p:spPr>
+        <p:txBody>
+          <a:bodyPr wrap="none" anchor="t" lIns="0" rIns="0" tIns="0" bIns="0">
+            <a:noAutofit/>
+          </a:bodyPr>
+          <a:lstStyle/>
+          <a:p>
+            <a:pPr>
+              <a:spcBef>
+                <a:spcPts val="0"/>
+              </a:spcBef>
+              <a:spcAft>
+                <a:spcPts val="0"/>
+              </a:spcAft>
+            </a:pPr>
+            <a:r>
+              <a:rPr sz="1100">
+                <a:solidFill>
+                  <a:srgbClr val="000000"/>
+                </a:solidFill>
+                <a:latin typeface="Consolas"/>
+              </a:rPr>
+              <a:t>r2</a:t>
+            </a:r>
+            <a:r>
+              <a:rPr sz="1100">
+                <a:solidFill>
+                  <a:srgbClr val="000000"/>
+                </a:solidFill>
+                <a:latin typeface="Consolas"/>
+              </a:rPr>
+              <a:t> </a:t>
+            </a:r>
+            <a:r>
+              <a:rPr sz="1100">
+                <a:solidFill>
+                  <a:srgbClr val="666666"/>
+                </a:solidFill>
+                <a:latin typeface="Consolas"/>
+              </a:rPr>
+              <a:t>=</a:t>
+            </a:r>
+            <a:r>
+              <a:rPr sz="1100">
+                <a:solidFill>
+                  <a:srgbClr val="000000"/>
+                </a:solidFill>
+                <a:latin typeface="Consolas"/>
+              </a:rPr>
+              <a:t> </a:t>
+            </a:r>
+            <a:r>
+              <a:rPr sz="1100">
+                <a:solidFill>
+                  <a:srgbClr val="000000"/>
+                </a:solidFill>
+                <a:latin typeface="Consolas"/>
+              </a:rPr>
+              <a:t>r2_score</a:t>
+            </a:r>
+            <a:r>
+              <a:rPr sz="1100">
+                <a:solidFill>
+                  <a:srgbClr val="000000"/>
+                </a:solidFill>
+                <a:latin typeface="Consolas"/>
+              </a:rPr>
+              <a:t>(</a:t>
+            </a:r>
+            <a:r>
+              <a:rPr sz="1100">
+                <a:solidFill>
+                  <a:srgbClr val="000000"/>
+                </a:solidFill>
+                <a:latin typeface="Consolas"/>
+              </a:rPr>
+              <a:t>y_te</a:t>
+            </a:r>
+            <a:r>
+              <a:rPr sz="1100">
+                <a:solidFill>
+                  <a:srgbClr val="000000"/>
+                </a:solidFill>
+                <a:latin typeface="Consolas"/>
+              </a:rPr>
+              <a:t>,</a:t>
+            </a:r>
+            <a:r>
+              <a:rPr sz="1100">
+                <a:solidFill>
+                  <a:srgbClr val="000000"/>
+                </a:solidFill>
+                <a:latin typeface="Consolas"/>
+              </a:rPr>
+              <a:t> </a:t>
+            </a:r>
+            <a:r>
+              <a:rPr sz="1100">
+                <a:solidFill>
+                  <a:srgbClr val="000000"/>
+                </a:solidFill>
+                <a:latin typeface="Consolas"/>
+              </a:rPr>
+              <a:t>y_pred</a:t>
+            </a:r>
+            <a:r>
+              <a:rPr sz="1100">
+                <a:solidFill>
+                  <a:srgbClr val="000000"/>
+                </a:solidFill>
+                <a:latin typeface="Consolas"/>
+              </a:rPr>
+              <a:t>)</a:t>
+            </a:r>
+            <a:r>
+              <a:rPr sz="1100">
+                <a:solidFill>
+                  <a:srgbClr val="BBBBBB"/>
+                </a:solidFill>
+                <a:latin typeface="Consolas"/>
+              </a:rPr>
+              <a:t>
+</a:t>
+            </a:r>
+          </a:p>
+        </p:txBody>
+      </p:sp>
+      <p:sp>
+        <p:nvSpPr>
+          <p:cNvPr id="12" name="TextBox 11"/>
+          <p:cNvSpPr txBox="1"/>
+          <p:nvPr/>
+        </p:nvSpPr>
+        <p:spPr>
+          <a:xfrm>
+            <a:off x="713231" y="6157975"/>
+            <a:ext cx="6025896" cy="139700"/>
+          </a:xfrm>
+          <a:prstGeom prst="rect">
+            <a:avLst/>
+          </a:prstGeom>
+          <a:noFill/>
+          <a:ln>
+            <a:noFill/>
+          </a:ln>
+        </p:spPr>
+        <p:txBody>
+          <a:bodyPr wrap="none" anchor="t" lIns="0" rIns="0" tIns="0" bIns="0">
+            <a:noAutofit/>
+          </a:bodyPr>
+          <a:lstStyle/>
+          <a:p>
+            <a:pPr>
+              <a:spcBef>
+                <a:spcPts val="0"/>
+              </a:spcBef>
+              <a:spcAft>
+                <a:spcPts val="0"/>
+              </a:spcAft>
+            </a:pPr>
+            <a:r>
+              <a:rPr sz="1100">
+                <a:solidFill>
+                  <a:srgbClr val="007020"/>
+                </a:solidFill>
+                <a:latin typeface="Consolas"/>
+              </a:rPr>
+              <a:t>print</a:t>
+            </a:r>
+            <a:r>
+              <a:rPr sz="1100">
+                <a:solidFill>
+                  <a:srgbClr val="000000"/>
+                </a:solidFill>
+                <a:latin typeface="Consolas"/>
+              </a:rPr>
+              <a:t>(</a:t>
+            </a:r>
+            <a:r>
+              <a:rPr sz="1100">
+                <a:solidFill>
+                  <a:srgbClr val="4070A0"/>
+                </a:solidFill>
+                <a:latin typeface="Consolas"/>
+              </a:rPr>
+              <a:t>f</a:t>
+            </a:r>
+            <a:r>
+              <a:rPr sz="1100">
+                <a:solidFill>
+                  <a:srgbClr val="4070A0"/>
+                </a:solidFill>
+                <a:latin typeface="Consolas"/>
+              </a:rPr>
+              <a:t>'</a:t>
+            </a:r>
+            <a:r>
+              <a:rPr sz="1100">
+                <a:solidFill>
+                  <a:srgbClr val="4070A0"/>
+                </a:solidFill>
+                <a:latin typeface="Consolas"/>
+              </a:rPr>
+              <a:t>MAE=</a:t>
+            </a:r>
+            <a:r>
+              <a:rPr sz="1100" i="1">
+                <a:solidFill>
+                  <a:srgbClr val="70A0D0"/>
+                </a:solidFill>
+                <a:latin typeface="Consolas"/>
+              </a:rPr>
+              <a:t>{</a:t>
+            </a:r>
+            <a:r>
+              <a:rPr sz="1100">
+                <a:solidFill>
+                  <a:srgbClr val="000000"/>
+                </a:solidFill>
+                <a:latin typeface="Consolas"/>
+              </a:rPr>
+              <a:t>mae</a:t>
+            </a:r>
+            <a:r>
+              <a:rPr sz="1100" i="1">
+                <a:solidFill>
+                  <a:srgbClr val="70A0D0"/>
+                </a:solidFill>
+                <a:latin typeface="Consolas"/>
+              </a:rPr>
+              <a:t>:</a:t>
+            </a:r>
+            <a:r>
+              <a:rPr sz="1100">
+                <a:solidFill>
+                  <a:srgbClr val="4070A0"/>
+                </a:solidFill>
+                <a:latin typeface="Consolas"/>
+              </a:rPr>
+              <a:t>.2f</a:t>
+            </a:r>
+            <a:r>
+              <a:rPr sz="1100" i="1">
+                <a:solidFill>
+                  <a:srgbClr val="70A0D0"/>
+                </a:solidFill>
+                <a:latin typeface="Consolas"/>
+              </a:rPr>
+              <a:t>}</a:t>
+            </a:r>
+            <a:r>
+              <a:rPr sz="1100">
+                <a:solidFill>
+                  <a:srgbClr val="4070A0"/>
+                </a:solidFill>
+                <a:latin typeface="Consolas"/>
+              </a:rPr>
+              <a:t>, RMSE=</a:t>
+            </a:r>
+            <a:r>
+              <a:rPr sz="1100" i="1">
+                <a:solidFill>
+                  <a:srgbClr val="70A0D0"/>
+                </a:solidFill>
+                <a:latin typeface="Consolas"/>
+              </a:rPr>
+              <a:t>{</a:t>
+            </a:r>
+            <a:r>
+              <a:rPr sz="1100">
+                <a:solidFill>
+                  <a:srgbClr val="000000"/>
+                </a:solidFill>
+                <a:latin typeface="Consolas"/>
+              </a:rPr>
+              <a:t>rmse</a:t>
+            </a:r>
+            <a:r>
+              <a:rPr sz="1100" i="1">
+                <a:solidFill>
+                  <a:srgbClr val="70A0D0"/>
+                </a:solidFill>
+                <a:latin typeface="Consolas"/>
+              </a:rPr>
+              <a:t>:</a:t>
+            </a:r>
+            <a:r>
+              <a:rPr sz="1100">
+                <a:solidFill>
+                  <a:srgbClr val="4070A0"/>
+                </a:solidFill>
+                <a:latin typeface="Consolas"/>
+              </a:rPr>
+              <a:t>.2f</a:t>
+            </a:r>
+            <a:r>
+              <a:rPr sz="1100" i="1">
+                <a:solidFill>
+                  <a:srgbClr val="70A0D0"/>
+                </a:solidFill>
+                <a:latin typeface="Consolas"/>
+              </a:rPr>
+              <a:t>}</a:t>
+            </a:r>
+            <a:r>
+              <a:rPr sz="1100">
+                <a:solidFill>
+                  <a:srgbClr val="4070A0"/>
+                </a:solidFill>
+                <a:latin typeface="Consolas"/>
+              </a:rPr>
+              <a:t>, R²=</a:t>
+            </a:r>
+            <a:r>
+              <a:rPr sz="1100" i="1">
+                <a:solidFill>
+                  <a:srgbClr val="70A0D0"/>
+                </a:solidFill>
+                <a:latin typeface="Consolas"/>
+              </a:rPr>
+              <a:t>{</a:t>
+            </a:r>
+            <a:r>
+              <a:rPr sz="1100">
+                <a:solidFill>
+                  <a:srgbClr val="000000"/>
+                </a:solidFill>
+                <a:latin typeface="Consolas"/>
+              </a:rPr>
+              <a:t>r2</a:t>
+            </a:r>
+            <a:r>
+              <a:rPr sz="1100" i="1">
+                <a:solidFill>
+                  <a:srgbClr val="70A0D0"/>
+                </a:solidFill>
+                <a:latin typeface="Consolas"/>
+              </a:rPr>
+              <a:t>:</a:t>
+            </a:r>
+            <a:r>
+              <a:rPr sz="1100">
+                <a:solidFill>
+                  <a:srgbClr val="4070A0"/>
+                </a:solidFill>
+                <a:latin typeface="Consolas"/>
+              </a:rPr>
+              <a:t>.3f</a:t>
+            </a:r>
+            <a:r>
+              <a:rPr sz="1100" i="1">
+                <a:solidFill>
+                  <a:srgbClr val="70A0D0"/>
+                </a:solidFill>
+                <a:latin typeface="Consolas"/>
+              </a:rPr>
+              <a:t>}</a:t>
+            </a:r>
+            <a:r>
+              <a:rPr sz="1100">
+                <a:solidFill>
+                  <a:srgbClr val="4070A0"/>
+                </a:solidFill>
+                <a:latin typeface="Consolas"/>
+              </a:rPr>
+              <a:t>'</a:t>
+            </a:r>
+            <a:r>
+              <a:rPr sz="1100">
+                <a:solidFill>
+                  <a:srgbClr val="000000"/>
+                </a:solidFill>
+                <a:latin typeface="Consolas"/>
+              </a:rPr>
+              <a:t>)</a:t>
+            </a:r>
+            <a:r>
+              <a:rPr sz="1100">
+                <a:solidFill>
+                  <a:srgbClr val="BBBBBB"/>
+                </a:solidFill>
+                <a:latin typeface="Consolas"/>
+              </a:rPr>
+              <a:t>
+</a:t>
+            </a:r>
+          </a:p>
+        </p:txBody>
+      </p:sp>
+      <p:sp>
+        <p:nvSpPr>
+          <p:cNvPr id="13" name="TextBox 12"/>
+          <p:cNvSpPr txBox="1"/>
+          <p:nvPr/>
+        </p:nvSpPr>
+        <p:spPr>
+          <a:xfrm>
+            <a:off x="640080" y="6492240"/>
             <a:ext cx="6172200" cy="201168"/>
           </a:xfrm>
           <a:prstGeom prst="rect">
@@ -5902,7 +7761,7 @@
       </p:sp>
       <p:pic>
         <p:nvPicPr>
-          <p:cNvPr id="7" name="Picture 6" descr="regression_metrics_bar.png"/>
+          <p:cNvPr id="14" name="Picture 13" descr="regression_metrics_bar.png"/>
           <p:cNvPicPr>
             <a:picLocks noChangeAspect="1"/>
           </p:cNvPicPr>
@@ -5916,8 +7775,8 @@
         </p:blipFill>
         <p:spPr>
           <a:xfrm>
-            <a:off x="7269480" y="1325880"/>
-            <a:ext cx="4465015" cy="4167347"/>
+            <a:off x="7522997" y="1371600"/>
+            <a:ext cx="3957980" cy="3598164"/>
           </a:xfrm>
           <a:prstGeom prst="rect">
             <a:avLst/>
@@ -6128,8 +7987,8 @@
         </p:blipFill>
         <p:spPr>
           <a:xfrm>
-            <a:off x="7345505" y="1325880"/>
-            <a:ext cx="4312963" cy="4407407"/>
+            <a:off x="7269480" y="1371600"/>
+            <a:ext cx="4465015" cy="4059105"/>
           </a:xfrm>
           <a:prstGeom prst="rect">
             <a:avLst/>
@@ -6350,8 +8209,8 @@
         </p:blipFill>
         <p:spPr>
           <a:xfrm>
-            <a:off x="7269480" y="1325880"/>
-            <a:ext cx="4465015" cy="3142684"/>
+            <a:off x="7269480" y="1371600"/>
+            <a:ext cx="4465015" cy="3896740"/>
           </a:xfrm>
           <a:prstGeom prst="rect">
             <a:avLst/>
@@ -6442,7 +8301,37 @@
                   <a:srgbClr val="000000"/>
                 </a:solidFill>
               </a:rPr>
-              <a:t>• Базовый цикл: `model.fit(X_train, y_train)`, `model.predict(X_test)`</a:t>
+              <a:t xml:space="preserve">• Базовый цикл: </a:t>
+            </a:r>
+            <a:r>
+              <a:rPr lang="ru-RU" dirty="0" sz="2000">
+                <a:latin typeface="Consolas"/>
+                <a:cs typeface="Consolas"/>
+                <a:ea typeface="Consolas"/>
+                <a:solidFill>
+                  <a:srgbClr val="000000"/>
+                </a:solidFill>
+              </a:rPr>
+              <a:t>model.fit(X_train, y_train)</a:t>
+            </a:r>
+            <a:r>
+              <a:rPr lang="ru-RU" dirty="0" sz="2000">
+                <a:solidFill>
+                  <a:srgbClr val="000000"/>
+                </a:solidFill>
+              </a:rPr>
+              <a:t xml:space="preserve">, </a:t>
+            </a:r>
+            <a:r>
+              <a:rPr lang="ru-RU" dirty="0" sz="2000">
+                <a:latin typeface="Consolas"/>
+                <a:cs typeface="Consolas"/>
+                <a:ea typeface="Consolas"/>
+                <a:solidFill>
+                  <a:srgbClr val="000000"/>
+                </a:solidFill>
+              </a:rPr>
+              <a:t>model.predict(X_test)</a:t>
             </a:r>
           </a:p>
           <a:p>
@@ -6488,7 +8377,18 @@
                   <a:srgbClr val="000000"/>
                 </a:solidFill>
               </a:rPr>
-              <a:t>• Решение: `Pipeline([('scaler', StandardScaler()), ('reg', LinearRegression())])`</a:t>
+              <a:t xml:space="preserve">• Решение: </a:t>
+            </a:r>
+            <a:r>
+              <a:rPr lang="ru-RU" dirty="0" sz="2000">
+                <a:latin typeface="Consolas"/>
+                <a:cs typeface="Consolas"/>
+                <a:ea typeface="Consolas"/>
+                <a:solidFill>
+                  <a:srgbClr val="000000"/>
+                </a:solidFill>
+              </a:rPr>
+              <a:t>Pipeline([('scaler', StandardScaler()), ('reg', LinearRegression())])</a:t>
             </a:r>
           </a:p>
           <a:p>
@@ -6516,8 +8416,8 @@
         </p:nvSpPr>
         <p:spPr>
           <a:xfrm>
-            <a:off x="640080" y="5093207"/>
-            <a:ext cx="6172200" cy="402336"/>
+            <a:off x="640080" y="5274055"/>
+            <a:ext cx="6172200" cy="1163320"/>
           </a:xfrm>
           <a:prstGeom prst="rect">
             <a:avLst/>
@@ -6561,62 +8461,941 @@
         </p:nvSpPr>
         <p:spPr>
           <a:xfrm>
-            <a:off x="713231" y="5129783"/>
-            <a:ext cx="6025896" cy="329184"/>
+            <a:off x="713231" y="5319775"/>
+            <a:ext cx="6025896" cy="139700"/>
           </a:xfrm>
           <a:prstGeom prst="rect">
             <a:avLst/>
           </a:prstGeom>
           <a:noFill/>
+          <a:ln>
+            <a:noFill/>
+          </a:ln>
         </p:spPr>
         <p:txBody>
-          <a:bodyPr wrap="none">
+          <a:bodyPr wrap="none" anchor="t" lIns="0" rIns="0" tIns="0" bIns="0">
             <a:noAutofit/>
           </a:bodyPr>
           <a:lstStyle/>
           <a:p>
             <a:pPr>
+              <a:spcBef>
+                <a:spcPts val="0"/>
+              </a:spcBef>
               <a:spcAft>
                 <a:spcPts val="0"/>
               </a:spcAft>
             </a:pPr>
             <a:r>
-              <a:rPr sz="1100">
-                <a:solidFill>
-                  <a:srgbClr val="000000"/>
-                </a:solidFill>
-                <a:latin typeface="Consolas"/>
-              </a:rPr>
-              <a:t>pipe = Pipeline([('scaler', StandardScaler()), ('reg', LinearRegression())])</a:t>
-            </a:r>
-          </a:p>
+              <a:rPr sz="1100" b="1">
+                <a:solidFill>
+                  <a:srgbClr val="007020"/>
+                </a:solidFill>
+                <a:latin typeface="Consolas"/>
+              </a:rPr>
+              <a:t>from</a:t>
+            </a:r>
+            <a:r>
+              <a:rPr sz="1100">
+                <a:solidFill>
+                  <a:srgbClr val="BBBBBB"/>
+                </a:solidFill>
+                <a:latin typeface="Consolas"/>
+              </a:rPr>
+              <a:t> </a:t>
+            </a:r>
+            <a:r>
+              <a:rPr sz="1100" b="1">
+                <a:solidFill>
+                  <a:srgbClr val="0E84B5"/>
+                </a:solidFill>
+                <a:latin typeface="Consolas"/>
+              </a:rPr>
+              <a:t>sklearn</a:t>
+            </a:r>
+            <a:r>
+              <a:rPr sz="1100" b="1">
+                <a:solidFill>
+                  <a:srgbClr val="0E84B5"/>
+                </a:solidFill>
+                <a:latin typeface="Consolas"/>
+              </a:rPr>
+              <a:t>.</a:t>
+            </a:r>
+            <a:r>
+              <a:rPr sz="1100" b="1">
+                <a:solidFill>
+                  <a:srgbClr val="0E84B5"/>
+                </a:solidFill>
+                <a:latin typeface="Consolas"/>
+              </a:rPr>
+              <a:t>pipeline</a:t>
+            </a:r>
+            <a:r>
+              <a:rPr sz="1100">
+                <a:solidFill>
+                  <a:srgbClr val="BBBBBB"/>
+                </a:solidFill>
+                <a:latin typeface="Consolas"/>
+              </a:rPr>
+              <a:t> </a:t>
+            </a:r>
+            <a:r>
+              <a:rPr sz="1100" b="1">
+                <a:solidFill>
+                  <a:srgbClr val="007020"/>
+                </a:solidFill>
+                <a:latin typeface="Consolas"/>
+              </a:rPr>
+              <a:t>import</a:t>
+            </a:r>
+            <a:r>
+              <a:rPr sz="1100">
+                <a:solidFill>
+                  <a:srgbClr val="000000"/>
+                </a:solidFill>
+                <a:latin typeface="Consolas"/>
+              </a:rPr>
+              <a:t> </a:t>
+            </a:r>
+            <a:r>
+              <a:rPr sz="1100">
+                <a:solidFill>
+                  <a:srgbClr val="000000"/>
+                </a:solidFill>
+                <a:latin typeface="Consolas"/>
+              </a:rPr>
+              <a:t>Pipeline</a:t>
+            </a:r>
+            <a:r>
+              <a:rPr sz="1100">
+                <a:solidFill>
+                  <a:srgbClr val="BBBBBB"/>
+                </a:solidFill>
+                <a:latin typeface="Consolas"/>
+              </a:rPr>
+              <a:t>
+</a:t>
+            </a:r>
+          </a:p>
+        </p:txBody>
+      </p:sp>
+      <p:sp>
+        <p:nvSpPr>
+          <p:cNvPr id="6" name="TextBox 5"/>
+          <p:cNvSpPr txBox="1"/>
+          <p:nvPr/>
+        </p:nvSpPr>
+        <p:spPr>
+          <a:xfrm>
+            <a:off x="713231" y="5459475"/>
+            <a:ext cx="6025896" cy="139700"/>
+          </a:xfrm>
+          <a:prstGeom prst="rect">
+            <a:avLst/>
+          </a:prstGeom>
+          <a:noFill/>
+          <a:ln>
+            <a:noFill/>
+          </a:ln>
+        </p:spPr>
+        <p:txBody>
+          <a:bodyPr wrap="none" anchor="t" lIns="0" rIns="0" tIns="0" bIns="0">
+            <a:noAutofit/>
+          </a:bodyPr>
+          <a:lstStyle/>
           <a:p>
             <a:pPr>
+              <a:spcBef>
+                <a:spcPts val="0"/>
+              </a:spcBef>
               <a:spcAft>
                 <a:spcPts val="0"/>
               </a:spcAft>
             </a:pPr>
             <a:r>
-              <a:rPr sz="1100">
-                <a:solidFill>
-                  <a:srgbClr val="000000"/>
-                </a:solidFill>
-                <a:latin typeface="Consolas"/>
-              </a:rPr>
-              <a:t>pipe.fit(X_train, y_train)</a:t>
-            </a:r>
-          </a:p>
-        </p:txBody>
-      </p:sp>
-      <p:sp>
-        <p:nvSpPr>
-          <p:cNvPr id="6" name="TextBox 5"/>
+              <a:rPr sz="1100" b="1">
+                <a:solidFill>
+                  <a:srgbClr val="007020"/>
+                </a:solidFill>
+                <a:latin typeface="Consolas"/>
+              </a:rPr>
+              <a:t>from</a:t>
+            </a:r>
+            <a:r>
+              <a:rPr sz="1100">
+                <a:solidFill>
+                  <a:srgbClr val="BBBBBB"/>
+                </a:solidFill>
+                <a:latin typeface="Consolas"/>
+              </a:rPr>
+              <a:t> </a:t>
+            </a:r>
+            <a:r>
+              <a:rPr sz="1100" b="1">
+                <a:solidFill>
+                  <a:srgbClr val="0E84B5"/>
+                </a:solidFill>
+                <a:latin typeface="Consolas"/>
+              </a:rPr>
+              <a:t>sklearn</a:t>
+            </a:r>
+            <a:r>
+              <a:rPr sz="1100" b="1">
+                <a:solidFill>
+                  <a:srgbClr val="0E84B5"/>
+                </a:solidFill>
+                <a:latin typeface="Consolas"/>
+              </a:rPr>
+              <a:t>.</a:t>
+            </a:r>
+            <a:r>
+              <a:rPr sz="1100" b="1">
+                <a:solidFill>
+                  <a:srgbClr val="0E84B5"/>
+                </a:solidFill>
+                <a:latin typeface="Consolas"/>
+              </a:rPr>
+              <a:t>preprocessing</a:t>
+            </a:r>
+            <a:r>
+              <a:rPr sz="1100">
+                <a:solidFill>
+                  <a:srgbClr val="BBBBBB"/>
+                </a:solidFill>
+                <a:latin typeface="Consolas"/>
+              </a:rPr>
+              <a:t> </a:t>
+            </a:r>
+            <a:r>
+              <a:rPr sz="1100" b="1">
+                <a:solidFill>
+                  <a:srgbClr val="007020"/>
+                </a:solidFill>
+                <a:latin typeface="Consolas"/>
+              </a:rPr>
+              <a:t>import</a:t>
+            </a:r>
+            <a:r>
+              <a:rPr sz="1100">
+                <a:solidFill>
+                  <a:srgbClr val="000000"/>
+                </a:solidFill>
+                <a:latin typeface="Consolas"/>
+              </a:rPr>
+              <a:t> </a:t>
+            </a:r>
+            <a:r>
+              <a:rPr sz="1100">
+                <a:solidFill>
+                  <a:srgbClr val="000000"/>
+                </a:solidFill>
+                <a:latin typeface="Consolas"/>
+              </a:rPr>
+              <a:t>StandardScaler</a:t>
+            </a:r>
+            <a:r>
+              <a:rPr sz="1100">
+                <a:solidFill>
+                  <a:srgbClr val="BBBBBB"/>
+                </a:solidFill>
+                <a:latin typeface="Consolas"/>
+              </a:rPr>
+              <a:t>
+</a:t>
+            </a:r>
+          </a:p>
+        </p:txBody>
+      </p:sp>
+      <p:sp>
+        <p:nvSpPr>
+          <p:cNvPr id="7" name="TextBox 6"/>
           <p:cNvSpPr txBox="1"/>
           <p:nvPr/>
         </p:nvSpPr>
         <p:spPr>
           <a:xfrm>
-            <a:off x="640080" y="5550407"/>
+            <a:off x="713231" y="5599175"/>
+            <a:ext cx="6025896" cy="139700"/>
+          </a:xfrm>
+          <a:prstGeom prst="rect">
+            <a:avLst/>
+          </a:prstGeom>
+          <a:noFill/>
+          <a:ln>
+            <a:noFill/>
+          </a:ln>
+        </p:spPr>
+        <p:txBody>
+          <a:bodyPr wrap="none" anchor="t" lIns="0" rIns="0" tIns="0" bIns="0">
+            <a:noAutofit/>
+          </a:bodyPr>
+          <a:lstStyle/>
+          <a:p>
+            <a:pPr>
+              <a:spcBef>
+                <a:spcPts val="0"/>
+              </a:spcBef>
+              <a:spcAft>
+                <a:spcPts val="0"/>
+              </a:spcAft>
+            </a:pPr>
+            <a:r>
+              <a:rPr sz="1100" b="1">
+                <a:solidFill>
+                  <a:srgbClr val="007020"/>
+                </a:solidFill>
+                <a:latin typeface="Consolas"/>
+              </a:rPr>
+              <a:t>from</a:t>
+            </a:r>
+            <a:r>
+              <a:rPr sz="1100">
+                <a:solidFill>
+                  <a:srgbClr val="BBBBBB"/>
+                </a:solidFill>
+                <a:latin typeface="Consolas"/>
+              </a:rPr>
+              <a:t> </a:t>
+            </a:r>
+            <a:r>
+              <a:rPr sz="1100" b="1">
+                <a:solidFill>
+                  <a:srgbClr val="0E84B5"/>
+                </a:solidFill>
+                <a:latin typeface="Consolas"/>
+              </a:rPr>
+              <a:t>sklearn</a:t>
+            </a:r>
+            <a:r>
+              <a:rPr sz="1100" b="1">
+                <a:solidFill>
+                  <a:srgbClr val="0E84B5"/>
+                </a:solidFill>
+                <a:latin typeface="Consolas"/>
+              </a:rPr>
+              <a:t>.</a:t>
+            </a:r>
+            <a:r>
+              <a:rPr sz="1100" b="1">
+                <a:solidFill>
+                  <a:srgbClr val="0E84B5"/>
+                </a:solidFill>
+                <a:latin typeface="Consolas"/>
+              </a:rPr>
+              <a:t>linear_model</a:t>
+            </a:r>
+            <a:r>
+              <a:rPr sz="1100">
+                <a:solidFill>
+                  <a:srgbClr val="BBBBBB"/>
+                </a:solidFill>
+                <a:latin typeface="Consolas"/>
+              </a:rPr>
+              <a:t> </a:t>
+            </a:r>
+            <a:r>
+              <a:rPr sz="1100" b="1">
+                <a:solidFill>
+                  <a:srgbClr val="007020"/>
+                </a:solidFill>
+                <a:latin typeface="Consolas"/>
+              </a:rPr>
+              <a:t>import</a:t>
+            </a:r>
+            <a:r>
+              <a:rPr sz="1100">
+                <a:solidFill>
+                  <a:srgbClr val="000000"/>
+                </a:solidFill>
+                <a:latin typeface="Consolas"/>
+              </a:rPr>
+              <a:t> </a:t>
+            </a:r>
+            <a:r>
+              <a:rPr sz="1100">
+                <a:solidFill>
+                  <a:srgbClr val="000000"/>
+                </a:solidFill>
+                <a:latin typeface="Consolas"/>
+              </a:rPr>
+              <a:t>LinearRegression</a:t>
+            </a:r>
+            <a:r>
+              <a:rPr sz="1100">
+                <a:solidFill>
+                  <a:srgbClr val="BBBBBB"/>
+                </a:solidFill>
+                <a:latin typeface="Consolas"/>
+              </a:rPr>
+              <a:t>
+</a:t>
+            </a:r>
+          </a:p>
+        </p:txBody>
+      </p:sp>
+      <p:sp>
+        <p:nvSpPr>
+          <p:cNvPr id="8" name="TextBox 7"/>
+          <p:cNvSpPr txBox="1"/>
+          <p:nvPr/>
+        </p:nvSpPr>
+        <p:spPr>
+          <a:xfrm>
+            <a:off x="713231" y="5738875"/>
+            <a:ext cx="6025896" cy="139700"/>
+          </a:xfrm>
+          <a:prstGeom prst="rect">
+            <a:avLst/>
+          </a:prstGeom>
+          <a:noFill/>
+          <a:ln>
+            <a:noFill/>
+          </a:ln>
+        </p:spPr>
+        <p:txBody>
+          <a:bodyPr wrap="none" anchor="t" lIns="0" rIns="0" tIns="0" bIns="0">
+            <a:noAutofit/>
+          </a:bodyPr>
+          <a:lstStyle/>
+          <a:p>
+            <a:pPr>
+              <a:spcBef>
+                <a:spcPts val="0"/>
+              </a:spcBef>
+              <a:spcAft>
+                <a:spcPts val="0"/>
+              </a:spcAft>
+            </a:pPr>
+            <a:r>
+              <a:rPr sz="1100">
+                <a:solidFill>
+                  <a:srgbClr val="000000"/>
+                </a:solidFill>
+                <a:latin typeface="Consolas"/>
+              </a:rPr>
+              <a:t>pipe</a:t>
+            </a:r>
+            <a:r>
+              <a:rPr sz="1100">
+                <a:solidFill>
+                  <a:srgbClr val="000000"/>
+                </a:solidFill>
+                <a:latin typeface="Consolas"/>
+              </a:rPr>
+              <a:t> </a:t>
+            </a:r>
+            <a:r>
+              <a:rPr sz="1100">
+                <a:solidFill>
+                  <a:srgbClr val="666666"/>
+                </a:solidFill>
+                <a:latin typeface="Consolas"/>
+              </a:rPr>
+              <a:t>=</a:t>
+            </a:r>
+            <a:r>
+              <a:rPr sz="1100">
+                <a:solidFill>
+                  <a:srgbClr val="000000"/>
+                </a:solidFill>
+                <a:latin typeface="Consolas"/>
+              </a:rPr>
+              <a:t> </a:t>
+            </a:r>
+            <a:r>
+              <a:rPr sz="1100">
+                <a:solidFill>
+                  <a:srgbClr val="000000"/>
+                </a:solidFill>
+                <a:latin typeface="Consolas"/>
+              </a:rPr>
+              <a:t>Pipeline</a:t>
+            </a:r>
+            <a:r>
+              <a:rPr sz="1100">
+                <a:solidFill>
+                  <a:srgbClr val="000000"/>
+                </a:solidFill>
+                <a:latin typeface="Consolas"/>
+              </a:rPr>
+              <a:t>(</a:t>
+            </a:r>
+            <a:r>
+              <a:rPr sz="1100">
+                <a:solidFill>
+                  <a:srgbClr val="000000"/>
+                </a:solidFill>
+                <a:latin typeface="Consolas"/>
+              </a:rPr>
+              <a:t>[</a:t>
+            </a:r>
+            <a:r>
+              <a:rPr sz="1100">
+                <a:solidFill>
+                  <a:srgbClr val="BBBBBB"/>
+                </a:solidFill>
+                <a:latin typeface="Consolas"/>
+              </a:rPr>
+              <a:t>
+</a:t>
+            </a:r>
+          </a:p>
+        </p:txBody>
+      </p:sp>
+      <p:sp>
+        <p:nvSpPr>
+          <p:cNvPr id="9" name="TextBox 8"/>
+          <p:cNvSpPr txBox="1"/>
+          <p:nvPr/>
+        </p:nvSpPr>
+        <p:spPr>
+          <a:xfrm>
+            <a:off x="713231" y="5878576"/>
+            <a:ext cx="6025896" cy="139700"/>
+          </a:xfrm>
+          <a:prstGeom prst="rect">
+            <a:avLst/>
+          </a:prstGeom>
+          <a:noFill/>
+          <a:ln>
+            <a:noFill/>
+          </a:ln>
+        </p:spPr>
+        <p:txBody>
+          <a:bodyPr wrap="none" anchor="t" lIns="0" rIns="0" tIns="0" bIns="0">
+            <a:noAutofit/>
+          </a:bodyPr>
+          <a:lstStyle/>
+          <a:p>
+            <a:pPr>
+              <a:spcBef>
+                <a:spcPts val="0"/>
+              </a:spcBef>
+              <a:spcAft>
+                <a:spcPts val="0"/>
+              </a:spcAft>
+            </a:pPr>
+            <a:r>
+              <a:rPr sz="1100">
+                <a:solidFill>
+                  <a:srgbClr val="000000"/>
+                </a:solidFill>
+                <a:latin typeface="Consolas"/>
+              </a:rPr>
+              <a:t>    </a:t>
+            </a:r>
+            <a:r>
+              <a:rPr sz="1100">
+                <a:solidFill>
+                  <a:srgbClr val="000000"/>
+                </a:solidFill>
+                <a:latin typeface="Consolas"/>
+              </a:rPr>
+              <a:t>(</a:t>
+            </a:r>
+            <a:r>
+              <a:rPr sz="1100">
+                <a:solidFill>
+                  <a:srgbClr val="4070A0"/>
+                </a:solidFill>
+                <a:latin typeface="Consolas"/>
+              </a:rPr>
+              <a:t>'</a:t>
+            </a:r>
+            <a:r>
+              <a:rPr sz="1100">
+                <a:solidFill>
+                  <a:srgbClr val="4070A0"/>
+                </a:solidFill>
+                <a:latin typeface="Consolas"/>
+              </a:rPr>
+              <a:t>scaler</a:t>
+            </a:r>
+            <a:r>
+              <a:rPr sz="1100">
+                <a:solidFill>
+                  <a:srgbClr val="4070A0"/>
+                </a:solidFill>
+                <a:latin typeface="Consolas"/>
+              </a:rPr>
+              <a:t>'</a:t>
+            </a:r>
+            <a:r>
+              <a:rPr sz="1100">
+                <a:solidFill>
+                  <a:srgbClr val="000000"/>
+                </a:solidFill>
+                <a:latin typeface="Consolas"/>
+              </a:rPr>
+              <a:t>,</a:t>
+            </a:r>
+            <a:r>
+              <a:rPr sz="1100">
+                <a:solidFill>
+                  <a:srgbClr val="000000"/>
+                </a:solidFill>
+                <a:latin typeface="Consolas"/>
+              </a:rPr>
+              <a:t> </a:t>
+            </a:r>
+            <a:r>
+              <a:rPr sz="1100">
+                <a:solidFill>
+                  <a:srgbClr val="000000"/>
+                </a:solidFill>
+                <a:latin typeface="Consolas"/>
+              </a:rPr>
+              <a:t>StandardScaler</a:t>
+            </a:r>
+            <a:r>
+              <a:rPr sz="1100">
+                <a:solidFill>
+                  <a:srgbClr val="000000"/>
+                </a:solidFill>
+                <a:latin typeface="Consolas"/>
+              </a:rPr>
+              <a:t>(</a:t>
+            </a:r>
+            <a:r>
+              <a:rPr sz="1100">
+                <a:solidFill>
+                  <a:srgbClr val="000000"/>
+                </a:solidFill>
+                <a:latin typeface="Consolas"/>
+              </a:rPr>
+              <a:t>)</a:t>
+            </a:r>
+            <a:r>
+              <a:rPr sz="1100">
+                <a:solidFill>
+                  <a:srgbClr val="000000"/>
+                </a:solidFill>
+                <a:latin typeface="Consolas"/>
+              </a:rPr>
+              <a:t>)</a:t>
+            </a:r>
+            <a:r>
+              <a:rPr sz="1100">
+                <a:solidFill>
+                  <a:srgbClr val="000000"/>
+                </a:solidFill>
+                <a:latin typeface="Consolas"/>
+              </a:rPr>
+              <a:t>,</a:t>
+            </a:r>
+            <a:r>
+              <a:rPr sz="1100">
+                <a:solidFill>
+                  <a:srgbClr val="BBBBBB"/>
+                </a:solidFill>
+                <a:latin typeface="Consolas"/>
+              </a:rPr>
+              <a:t>
+</a:t>
+            </a:r>
+          </a:p>
+        </p:txBody>
+      </p:sp>
+      <p:sp>
+        <p:nvSpPr>
+          <p:cNvPr id="10" name="TextBox 9"/>
+          <p:cNvSpPr txBox="1"/>
+          <p:nvPr/>
+        </p:nvSpPr>
+        <p:spPr>
+          <a:xfrm>
+            <a:off x="713231" y="6018275"/>
+            <a:ext cx="6025896" cy="139700"/>
+          </a:xfrm>
+          <a:prstGeom prst="rect">
+            <a:avLst/>
+          </a:prstGeom>
+          <a:noFill/>
+          <a:ln>
+            <a:noFill/>
+          </a:ln>
+        </p:spPr>
+        <p:txBody>
+          <a:bodyPr wrap="none" anchor="t" lIns="0" rIns="0" tIns="0" bIns="0">
+            <a:noAutofit/>
+          </a:bodyPr>
+          <a:lstStyle/>
+          <a:p>
+            <a:pPr>
+              <a:spcBef>
+                <a:spcPts val="0"/>
+              </a:spcBef>
+              <a:spcAft>
+                <a:spcPts val="0"/>
+              </a:spcAft>
+            </a:pPr>
+            <a:r>
+              <a:rPr sz="1100">
+                <a:solidFill>
+                  <a:srgbClr val="000000"/>
+                </a:solidFill>
+                <a:latin typeface="Consolas"/>
+              </a:rPr>
+              <a:t>    </a:t>
+            </a:r>
+            <a:r>
+              <a:rPr sz="1100">
+                <a:solidFill>
+                  <a:srgbClr val="000000"/>
+                </a:solidFill>
+                <a:latin typeface="Consolas"/>
+              </a:rPr>
+              <a:t>(</a:t>
+            </a:r>
+            <a:r>
+              <a:rPr sz="1100">
+                <a:solidFill>
+                  <a:srgbClr val="4070A0"/>
+                </a:solidFill>
+                <a:latin typeface="Consolas"/>
+              </a:rPr>
+              <a:t>'</a:t>
+            </a:r>
+            <a:r>
+              <a:rPr sz="1100">
+                <a:solidFill>
+                  <a:srgbClr val="4070A0"/>
+                </a:solidFill>
+                <a:latin typeface="Consolas"/>
+              </a:rPr>
+              <a:t>reg</a:t>
+            </a:r>
+            <a:r>
+              <a:rPr sz="1100">
+                <a:solidFill>
+                  <a:srgbClr val="4070A0"/>
+                </a:solidFill>
+                <a:latin typeface="Consolas"/>
+              </a:rPr>
+              <a:t>'</a:t>
+            </a:r>
+            <a:r>
+              <a:rPr sz="1100">
+                <a:solidFill>
+                  <a:srgbClr val="000000"/>
+                </a:solidFill>
+                <a:latin typeface="Consolas"/>
+              </a:rPr>
+              <a:t>,</a:t>
+            </a:r>
+            <a:r>
+              <a:rPr sz="1100">
+                <a:solidFill>
+                  <a:srgbClr val="000000"/>
+                </a:solidFill>
+                <a:latin typeface="Consolas"/>
+              </a:rPr>
+              <a:t> </a:t>
+            </a:r>
+            <a:r>
+              <a:rPr sz="1100">
+                <a:solidFill>
+                  <a:srgbClr val="000000"/>
+                </a:solidFill>
+                <a:latin typeface="Consolas"/>
+              </a:rPr>
+              <a:t>LinearRegression</a:t>
+            </a:r>
+            <a:r>
+              <a:rPr sz="1100">
+                <a:solidFill>
+                  <a:srgbClr val="000000"/>
+                </a:solidFill>
+                <a:latin typeface="Consolas"/>
+              </a:rPr>
+              <a:t>(</a:t>
+            </a:r>
+            <a:r>
+              <a:rPr sz="1100">
+                <a:solidFill>
+                  <a:srgbClr val="000000"/>
+                </a:solidFill>
+                <a:latin typeface="Consolas"/>
+              </a:rPr>
+              <a:t>)</a:t>
+            </a:r>
+            <a:r>
+              <a:rPr sz="1100">
+                <a:solidFill>
+                  <a:srgbClr val="000000"/>
+                </a:solidFill>
+                <a:latin typeface="Consolas"/>
+              </a:rPr>
+              <a:t>)</a:t>
+            </a:r>
+            <a:r>
+              <a:rPr sz="1100">
+                <a:solidFill>
+                  <a:srgbClr val="000000"/>
+                </a:solidFill>
+                <a:latin typeface="Consolas"/>
+              </a:rPr>
+              <a:t>]</a:t>
+            </a:r>
+            <a:r>
+              <a:rPr sz="1100">
+                <a:solidFill>
+                  <a:srgbClr val="000000"/>
+                </a:solidFill>
+                <a:latin typeface="Consolas"/>
+              </a:rPr>
+              <a:t>)</a:t>
+            </a:r>
+            <a:r>
+              <a:rPr sz="1100">
+                <a:solidFill>
+                  <a:srgbClr val="BBBBBB"/>
+                </a:solidFill>
+                <a:latin typeface="Consolas"/>
+              </a:rPr>
+              <a:t>
+</a:t>
+            </a:r>
+          </a:p>
+        </p:txBody>
+      </p:sp>
+      <p:sp>
+        <p:nvSpPr>
+          <p:cNvPr id="11" name="TextBox 10"/>
+          <p:cNvSpPr txBox="1"/>
+          <p:nvPr/>
+        </p:nvSpPr>
+        <p:spPr>
+          <a:xfrm>
+            <a:off x="713231" y="6157975"/>
+            <a:ext cx="6025896" cy="139700"/>
+          </a:xfrm>
+          <a:prstGeom prst="rect">
+            <a:avLst/>
+          </a:prstGeom>
+          <a:noFill/>
+          <a:ln>
+            <a:noFill/>
+          </a:ln>
+        </p:spPr>
+        <p:txBody>
+          <a:bodyPr wrap="none" anchor="t" lIns="0" rIns="0" tIns="0" bIns="0">
+            <a:noAutofit/>
+          </a:bodyPr>
+          <a:lstStyle/>
+          <a:p>
+            <a:pPr>
+              <a:spcBef>
+                <a:spcPts val="0"/>
+              </a:spcBef>
+              <a:spcAft>
+                <a:spcPts val="0"/>
+              </a:spcAft>
+            </a:pPr>
+            <a:r>
+              <a:rPr sz="1100">
+                <a:solidFill>
+                  <a:srgbClr val="000000"/>
+                </a:solidFill>
+                <a:latin typeface="Consolas"/>
+              </a:rPr>
+              <a:t>pipe</a:t>
+            </a:r>
+            <a:r>
+              <a:rPr sz="1100">
+                <a:solidFill>
+                  <a:srgbClr val="666666"/>
+                </a:solidFill>
+                <a:latin typeface="Consolas"/>
+              </a:rPr>
+              <a:t>.</a:t>
+            </a:r>
+            <a:r>
+              <a:rPr sz="1100">
+                <a:solidFill>
+                  <a:srgbClr val="000000"/>
+                </a:solidFill>
+                <a:latin typeface="Consolas"/>
+              </a:rPr>
+              <a:t>fit</a:t>
+            </a:r>
+            <a:r>
+              <a:rPr sz="1100">
+                <a:solidFill>
+                  <a:srgbClr val="000000"/>
+                </a:solidFill>
+                <a:latin typeface="Consolas"/>
+              </a:rPr>
+              <a:t>(</a:t>
+            </a:r>
+            <a:r>
+              <a:rPr sz="1100">
+                <a:solidFill>
+                  <a:srgbClr val="000000"/>
+                </a:solidFill>
+                <a:latin typeface="Consolas"/>
+              </a:rPr>
+              <a:t>X_train</a:t>
+            </a:r>
+            <a:r>
+              <a:rPr sz="1100">
+                <a:solidFill>
+                  <a:srgbClr val="000000"/>
+                </a:solidFill>
+                <a:latin typeface="Consolas"/>
+              </a:rPr>
+              <a:t>,</a:t>
+            </a:r>
+            <a:r>
+              <a:rPr sz="1100">
+                <a:solidFill>
+                  <a:srgbClr val="000000"/>
+                </a:solidFill>
+                <a:latin typeface="Consolas"/>
+              </a:rPr>
+              <a:t> </a:t>
+            </a:r>
+            <a:r>
+              <a:rPr sz="1100">
+                <a:solidFill>
+                  <a:srgbClr val="000000"/>
+                </a:solidFill>
+                <a:latin typeface="Consolas"/>
+              </a:rPr>
+              <a:t>y_train</a:t>
+            </a:r>
+            <a:r>
+              <a:rPr sz="1100">
+                <a:solidFill>
+                  <a:srgbClr val="000000"/>
+                </a:solidFill>
+                <a:latin typeface="Consolas"/>
+              </a:rPr>
+              <a:t>)</a:t>
+            </a:r>
+            <a:r>
+              <a:rPr sz="1100">
+                <a:solidFill>
+                  <a:srgbClr val="BBBBBB"/>
+                </a:solidFill>
+                <a:latin typeface="Consolas"/>
+              </a:rPr>
+              <a:t>
+</a:t>
+            </a:r>
+          </a:p>
+        </p:txBody>
+      </p:sp>
+      <p:sp>
+        <p:nvSpPr>
+          <p:cNvPr id="12" name="TextBox 11"/>
+          <p:cNvSpPr txBox="1"/>
+          <p:nvPr/>
+        </p:nvSpPr>
+        <p:spPr>
+          <a:xfrm>
+            <a:off x="640080" y="6492240"/>
             <a:ext cx="6172200" cy="201168"/>
           </a:xfrm>
           <a:prstGeom prst="rect">
@@ -6645,7 +9424,7 @@
       </p:sp>
       <p:pic>
         <p:nvPicPr>
-          <p:cNvPr id="7" name="Picture 6" descr="pipeline_leakage.png"/>
+          <p:cNvPr id="13" name="Picture 12" descr="pipeline_leakage.png"/>
           <p:cNvPicPr>
             <a:picLocks noChangeAspect="1"/>
           </p:cNvPicPr>
@@ -6659,8 +9438,8 @@
         </p:blipFill>
         <p:spPr>
           <a:xfrm>
-            <a:off x="7269480" y="1325880"/>
-            <a:ext cx="4465015" cy="4325483"/>
+            <a:off x="7446162" y="1371600"/>
+            <a:ext cx="4111650" cy="3737864"/>
           </a:xfrm>
           <a:prstGeom prst="rect">
             <a:avLst/>
@@ -6820,7 +9599,26 @@
                   <a:srgbClr val="000000"/>
                 </a:solidFill>
               </a:rPr>
-              <a:t xml:space="preserve">• Что попробовать: полиномиальные признаки (`PolynomialFeatures`), логарифм </a:t>
+              <a:t>• Что попробовать: полиномиальные признаки (</a:t>
+            </a:r>
+            <a:r>
+              <a:rPr lang="ru-RU" dirty="0" sz="2000">
+                <a:latin typeface="Consolas"/>
+                <a:cs typeface="Consolas"/>
+                <a:ea typeface="Consolas"/>
+                <a:solidFill>
+                  <a:srgbClr val="000000"/>
+                </a:solidFill>
+              </a:rPr>
+              <a:t>PolynomialFeatures</a:t>
+            </a:r>
+            <a:r>
+              <a:rPr lang="ru-RU" dirty="0" sz="2000">
+                <a:solidFill>
+                  <a:srgbClr val="000000"/>
+                </a:solidFill>
+              </a:rPr>
+              <a:t xml:space="preserve">), логарифм </a:t>
             </a:r>
             <ns0:m xmlns:ns0="http://schemas.microsoft.com/office/drawing/2010/main">
               <m:oMath xmlns:m="http://schemas.openxmlformats.org/officeDocument/2006/math">
@@ -6871,8 +9669,8 @@
         </p:blipFill>
         <p:spPr>
           <a:xfrm>
-            <a:off x="7269480" y="1325880"/>
-            <a:ext cx="4465015" cy="3247284"/>
+            <a:off x="7269480" y="1371600"/>
+            <a:ext cx="4465015" cy="3503007"/>
           </a:xfrm>
           <a:prstGeom prst="rect">
             <a:avLst/>
@@ -7726,8 +10524,8 @@
         </p:blipFill>
         <p:spPr>
           <a:xfrm>
-            <a:off x="7269480" y="1325880"/>
-            <a:ext cx="4465015" cy="3167046"/>
+            <a:off x="7269480" y="1371600"/>
+            <a:ext cx="4465015" cy="3494889"/>
           </a:xfrm>
           <a:prstGeom prst="rect">
             <a:avLst/>
@@ -7971,7 +10769,26 @@
                   <a:srgbClr val="000000"/>
                 </a:solidFill>
               </a:rPr>
-              <a:t xml:space="preserve">; в sklearn — параметр `fit_intercept=True` (смещение прямой по оси </a:t>
+              <a:t xml:space="preserve">; в sklearn — параметр </a:t>
+            </a:r>
+            <a:r>
+              <a:rPr lang="ru-RU" dirty="0" sz="2000">
+                <a:latin typeface="Consolas"/>
+                <a:cs typeface="Consolas"/>
+                <a:ea typeface="Consolas"/>
+                <a:solidFill>
+                  <a:srgbClr val="000000"/>
+                </a:solidFill>
+              </a:rPr>
+              <a:t>fit_intercept=True</a:t>
+            </a:r>
+            <a:r>
+              <a:rPr lang="ru-RU" dirty="0" sz="2000">
+                <a:solidFill>
+                  <a:srgbClr val="000000"/>
+                </a:solidFill>
+              </a:rPr>
+              <a:t xml:space="preserve"> (смещение прямой по оси </a:t>
             </a:r>
             <ns0:m xmlns:ns0="http://schemas.microsoft.com/office/drawing/2010/main">
               <m:oMath xmlns:m="http://schemas.openxmlformats.org/officeDocument/2006/math">
@@ -8022,8 +10839,8 @@
         </p:blipFill>
         <p:spPr>
           <a:xfrm>
-            <a:off x="7473307" y="1325880"/>
-            <a:ext cx="4057361" cy="4407408"/>
+            <a:off x="7269480" y="1371600"/>
+            <a:ext cx="4465015" cy="4059105"/>
           </a:xfrm>
           <a:prstGeom prst="rect">
             <a:avLst/>
@@ -8463,8 +11280,8 @@
         </p:blipFill>
         <p:spPr>
           <a:xfrm>
-            <a:off x="7269480" y="1325880"/>
-            <a:ext cx="4465015" cy="2926044"/>
+            <a:off x="7269480" y="1371600"/>
+            <a:ext cx="4465015" cy="3490830"/>
           </a:xfrm>
           <a:prstGeom prst="rect">
             <a:avLst/>
@@ -8637,7 +11454,45 @@
                   <a:srgbClr val="000000"/>
                 </a:solidFill>
               </a:rPr>
-              <a:t>• `LinearRegression` в sklearn использует solver `linalg` без итераций</a:t>
+              <a:t xml:space="preserve">• </a:t>
+            </a:r>
+            <a:r>
+              <a:rPr lang="ru-RU" dirty="0" sz="2000">
+                <a:latin typeface="Consolas"/>
+                <a:cs typeface="Consolas"/>
+                <a:ea typeface="Consolas"/>
+                <a:solidFill>
+                  <a:srgbClr val="000000"/>
+                </a:solidFill>
+              </a:rPr>
+              <a:t>LinearRegression</a:t>
+            </a:r>
+            <a:r>
+              <a:rPr lang="ru-RU" dirty="0" sz="2000">
+                <a:solidFill>
+                  <a:srgbClr val="000000"/>
+                </a:solidFill>
+              </a:rPr>
+              <a:t xml:space="preserve"> в sklearn использует solver </a:t>
+            </a:r>
+            <a:r>
+              <a:rPr lang="ru-RU" dirty="0" sz="2000">
+                <a:latin typeface="Consolas"/>
+                <a:cs typeface="Consolas"/>
+                <a:ea typeface="Consolas"/>
+                <a:solidFill>
+                  <a:srgbClr val="000000"/>
+                </a:solidFill>
+              </a:rPr>
+              <a:t>linalg</a:t>
+            </a:r>
+            <a:r>
+              <a:rPr lang="ru-RU" dirty="0" sz="2000">
+                <a:solidFill>
+                  <a:srgbClr val="000000"/>
+                </a:solidFill>
+              </a:rPr>
+              <a:t xml:space="preserve"> без итераций</a:t>
             </a:r>
           </a:p>
           <a:p>
@@ -8652,7 +11507,18 @@
                   <a:srgbClr val="000000"/>
                 </a:solidFill>
               </a:rPr>
-              <a:t>• При огромных данных — итеративные методы: SGD, `SGDRegressor`</a:t>
+              <a:t xml:space="preserve">• При огромных данных — итеративные методы: SGD, </a:t>
+            </a:r>
+            <a:r>
+              <a:rPr lang="ru-RU" dirty="0" sz="2000">
+                <a:latin typeface="Consolas"/>
+                <a:cs typeface="Consolas"/>
+                <a:ea typeface="Consolas"/>
+                <a:solidFill>
+                  <a:srgbClr val="000000"/>
+                </a:solidFill>
+              </a:rPr>
+              <a:t>SGDRegressor</a:t>
             </a:r>
           </a:p>
           <a:p>
@@ -8680,8 +11546,8 @@
         </p:nvSpPr>
         <p:spPr>
           <a:xfrm>
-            <a:off x="640080" y="4937759"/>
-            <a:ext cx="6172200" cy="557784"/>
+            <a:off x="640080" y="5832856"/>
+            <a:ext cx="6172200" cy="604520"/>
           </a:xfrm>
           <a:prstGeom prst="rect">
             <a:avLst/>
@@ -8725,37 +11591,154 @@
         </p:nvSpPr>
         <p:spPr>
           <a:xfrm>
-            <a:off x="713231" y="4974336"/>
-            <a:ext cx="6025896" cy="484632"/>
+            <a:off x="713231" y="5878576"/>
+            <a:ext cx="6025896" cy="139700"/>
           </a:xfrm>
           <a:prstGeom prst="rect">
             <a:avLst/>
           </a:prstGeom>
           <a:noFill/>
+          <a:ln>
+            <a:noFill/>
+          </a:ln>
         </p:spPr>
         <p:txBody>
-          <a:bodyPr wrap="none">
+          <a:bodyPr wrap="none" anchor="t" lIns="0" rIns="0" tIns="0" bIns="0">
             <a:noAutofit/>
           </a:bodyPr>
           <a:lstStyle/>
           <a:p>
             <a:pPr>
+              <a:spcBef>
+                <a:spcPts val="0"/>
+              </a:spcBef>
               <a:spcAft>
                 <a:spcPts val="0"/>
               </a:spcAft>
             </a:pPr>
             <a:r>
-              <a:rPr sz="1100">
-                <a:solidFill>
-                  <a:srgbClr val="000000"/>
-                </a:solidFill>
-                <a:latin typeface="Consolas"/>
-              </a:rPr>
-              <a:t>from sklearn.linear_model import LinearRegression</a:t>
-            </a:r>
-          </a:p>
+              <a:rPr sz="1100" b="1">
+                <a:solidFill>
+                  <a:srgbClr val="007020"/>
+                </a:solidFill>
+                <a:latin typeface="Consolas"/>
+              </a:rPr>
+              <a:t>from</a:t>
+            </a:r>
+            <a:r>
+              <a:rPr sz="1100">
+                <a:solidFill>
+                  <a:srgbClr val="BBBBBB"/>
+                </a:solidFill>
+                <a:latin typeface="Consolas"/>
+              </a:rPr>
+              <a:t> </a:t>
+            </a:r>
+            <a:r>
+              <a:rPr sz="1100" b="1">
+                <a:solidFill>
+                  <a:srgbClr val="0E84B5"/>
+                </a:solidFill>
+                <a:latin typeface="Consolas"/>
+              </a:rPr>
+              <a:t>sklearn</a:t>
+            </a:r>
+            <a:r>
+              <a:rPr sz="1100" b="1">
+                <a:solidFill>
+                  <a:srgbClr val="0E84B5"/>
+                </a:solidFill>
+                <a:latin typeface="Consolas"/>
+              </a:rPr>
+              <a:t>.</a:t>
+            </a:r>
+            <a:r>
+              <a:rPr sz="1100" b="1">
+                <a:solidFill>
+                  <a:srgbClr val="0E84B5"/>
+                </a:solidFill>
+                <a:latin typeface="Consolas"/>
+              </a:rPr>
+              <a:t>linear_model</a:t>
+            </a:r>
+            <a:r>
+              <a:rPr sz="1100">
+                <a:solidFill>
+                  <a:srgbClr val="BBBBBB"/>
+                </a:solidFill>
+                <a:latin typeface="Consolas"/>
+              </a:rPr>
+              <a:t> </a:t>
+            </a:r>
+            <a:r>
+              <a:rPr sz="1100" b="1">
+                <a:solidFill>
+                  <a:srgbClr val="007020"/>
+                </a:solidFill>
+                <a:latin typeface="Consolas"/>
+              </a:rPr>
+              <a:t>import</a:t>
+            </a:r>
+            <a:r>
+              <a:rPr sz="1100">
+                <a:solidFill>
+                  <a:srgbClr val="000000"/>
+                </a:solidFill>
+                <a:latin typeface="Consolas"/>
+              </a:rPr>
+              <a:t> </a:t>
+            </a:r>
+            <a:r>
+              <a:rPr sz="1100">
+                <a:solidFill>
+                  <a:srgbClr val="000000"/>
+                </a:solidFill>
+                <a:latin typeface="Consolas"/>
+              </a:rPr>
+              <a:t>LinearRegression</a:t>
+            </a:r>
+            <a:r>
+              <a:rPr sz="1100">
+                <a:solidFill>
+                  <a:srgbClr val="BBBBBB"/>
+                </a:solidFill>
+                <a:latin typeface="Consolas"/>
+              </a:rPr>
+              <a:t>
+</a:t>
+            </a:r>
+          </a:p>
+        </p:txBody>
+      </p:sp>
+      <p:sp>
+        <p:nvSpPr>
+          <p:cNvPr id="6" name="TextBox 5"/>
+          <p:cNvSpPr txBox="1"/>
+          <p:nvPr/>
+        </p:nvSpPr>
+        <p:spPr>
+          <a:xfrm>
+            <a:off x="713231" y="6018275"/>
+            <a:ext cx="6025896" cy="139700"/>
+          </a:xfrm>
+          <a:prstGeom prst="rect">
+            <a:avLst/>
+          </a:prstGeom>
+          <a:noFill/>
+          <a:ln>
+            <a:noFill/>
+          </a:ln>
+        </p:spPr>
+        <p:txBody>
+          <a:bodyPr wrap="none" anchor="t" lIns="0" rIns="0" tIns="0" bIns="0">
+            <a:noAutofit/>
+          </a:bodyPr>
+          <a:lstStyle/>
           <a:p>
             <a:pPr>
+              <a:spcBef>
+                <a:spcPts val="0"/>
+              </a:spcBef>
               <a:spcAft>
                 <a:spcPts val="0"/>
               </a:spcAft>
@@ -8767,11 +11750,176 @@
                 </a:solidFill>
                 <a:latin typeface="Consolas"/>
               </a:rPr>
-              <a:t>model = LinearRegression().fit(X_train, y_train)</a:t>
-            </a:r>
-          </a:p>
+              <a:t>model</a:t>
+            </a:r>
+            <a:r>
+              <a:rPr sz="1100">
+                <a:solidFill>
+                  <a:srgbClr val="000000"/>
+                </a:solidFill>
+                <a:latin typeface="Consolas"/>
+              </a:rPr>
+              <a:t> </a:t>
+            </a:r>
+            <a:r>
+              <a:rPr sz="1100">
+                <a:solidFill>
+                  <a:srgbClr val="666666"/>
+                </a:solidFill>
+                <a:latin typeface="Consolas"/>
+              </a:rPr>
+              <a:t>=</a:t>
+            </a:r>
+            <a:r>
+              <a:rPr sz="1100">
+                <a:solidFill>
+                  <a:srgbClr val="000000"/>
+                </a:solidFill>
+                <a:latin typeface="Consolas"/>
+              </a:rPr>
+              <a:t> </a:t>
+            </a:r>
+            <a:r>
+              <a:rPr sz="1100">
+                <a:solidFill>
+                  <a:srgbClr val="000000"/>
+                </a:solidFill>
+                <a:latin typeface="Consolas"/>
+              </a:rPr>
+              <a:t>LinearRegression</a:t>
+            </a:r>
+            <a:r>
+              <a:rPr sz="1100">
+                <a:solidFill>
+                  <a:srgbClr val="000000"/>
+                </a:solidFill>
+                <a:latin typeface="Consolas"/>
+              </a:rPr>
+              <a:t>(</a:t>
+            </a:r>
+            <a:r>
+              <a:rPr sz="1100">
+                <a:solidFill>
+                  <a:srgbClr val="000000"/>
+                </a:solidFill>
+                <a:latin typeface="Consolas"/>
+              </a:rPr>
+              <a:t>)</a:t>
+            </a:r>
+            <a:r>
+              <a:rPr sz="1100">
+                <a:solidFill>
+                  <a:srgbClr val="666666"/>
+                </a:solidFill>
+                <a:latin typeface="Consolas"/>
+              </a:rPr>
+              <a:t>.</a:t>
+            </a:r>
+            <a:r>
+              <a:rPr sz="1100">
+                <a:solidFill>
+                  <a:srgbClr val="000000"/>
+                </a:solidFill>
+                <a:latin typeface="Consolas"/>
+              </a:rPr>
+              <a:t>fit</a:t>
+            </a:r>
+            <a:r>
+              <a:rPr sz="1100">
+                <a:solidFill>
+                  <a:srgbClr val="000000"/>
+                </a:solidFill>
+                <a:latin typeface="Consolas"/>
+              </a:rPr>
+              <a:t>(</a:t>
+            </a:r>
+            <a:r>
+              <a:rPr sz="1100">
+                <a:solidFill>
+                  <a:srgbClr val="000000"/>
+                </a:solidFill>
+                <a:latin typeface="Consolas"/>
+              </a:rPr>
+              <a:t>X_train</a:t>
+            </a:r>
+            <a:r>
+              <a:rPr sz="1100">
+                <a:solidFill>
+                  <a:srgbClr val="000000"/>
+                </a:solidFill>
+                <a:latin typeface="Consolas"/>
+              </a:rPr>
+              <a:t>,</a:t>
+            </a:r>
+            <a:r>
+              <a:rPr sz="1100">
+                <a:solidFill>
+                  <a:srgbClr val="000000"/>
+                </a:solidFill>
+                <a:latin typeface="Consolas"/>
+              </a:rPr>
+              <a:t> </a:t>
+            </a:r>
+            <a:r>
+              <a:rPr sz="1100">
+                <a:solidFill>
+                  <a:srgbClr val="000000"/>
+                </a:solidFill>
+                <a:latin typeface="Consolas"/>
+              </a:rPr>
+              <a:t>y_train</a:t>
+            </a:r>
+            <a:r>
+              <a:rPr sz="1100">
+                <a:solidFill>
+                  <a:srgbClr val="000000"/>
+                </a:solidFill>
+                <a:latin typeface="Consolas"/>
+              </a:rPr>
+              <a:t>)</a:t>
+            </a:r>
+            <a:r>
+              <a:rPr sz="1100">
+                <a:solidFill>
+                  <a:srgbClr val="BBBBBB"/>
+                </a:solidFill>
+                <a:latin typeface="Consolas"/>
+              </a:rPr>
+              <a:t>
+</a:t>
+            </a:r>
+          </a:p>
+        </p:txBody>
+      </p:sp>
+      <p:sp>
+        <p:nvSpPr>
+          <p:cNvPr id="7" name="TextBox 6"/>
+          <p:cNvSpPr txBox="1"/>
+          <p:nvPr/>
+        </p:nvSpPr>
+        <p:spPr>
+          <a:xfrm>
+            <a:off x="713231" y="6157975"/>
+            <a:ext cx="6025896" cy="139700"/>
+          </a:xfrm>
+          <a:prstGeom prst="rect">
+            <a:avLst/>
+          </a:prstGeom>
+          <a:noFill/>
+          <a:ln>
+            <a:noFill/>
+          </a:ln>
+        </p:spPr>
+        <p:txBody>
+          <a:bodyPr wrap="none" anchor="t" lIns="0" rIns="0" tIns="0" bIns="0">
+            <a:noAutofit/>
+          </a:bodyPr>
+          <a:lstStyle/>
           <a:p>
             <a:pPr>
+              <a:spcBef>
+                <a:spcPts val="0"/>
+              </a:spcBef>
               <a:spcAft>
                 <a:spcPts val="0"/>
               </a:spcAft>
@@ -8783,20 +11931,111 @@
                 </a:solidFill>
                 <a:latin typeface="Consolas"/>
               </a:rPr>
-              <a:t>y_pred = model.predict(X_test)</a:t>
-            </a:r>
-          </a:p>
-        </p:txBody>
-      </p:sp>
-      <p:sp>
-        <p:nvSpPr>
-          <p:cNvPr id="6" name="TextBox 5"/>
+              <a:t>y_pred</a:t>
+            </a:r>
+            <a:r>
+              <a:rPr sz="1100">
+                <a:solidFill>
+                  <a:srgbClr val="000000"/>
+                </a:solidFill>
+                <a:latin typeface="Consolas"/>
+              </a:rPr>
+              <a:t> </a:t>
+            </a:r>
+            <a:r>
+              <a:rPr sz="1100">
+                <a:solidFill>
+                  <a:srgbClr val="666666"/>
+                </a:solidFill>
+                <a:latin typeface="Consolas"/>
+              </a:rPr>
+              <a:t>=</a:t>
+            </a:r>
+            <a:r>
+              <a:rPr sz="1100">
+                <a:solidFill>
+                  <a:srgbClr val="000000"/>
+                </a:solidFill>
+                <a:latin typeface="Consolas"/>
+              </a:rPr>
+              <a:t> </a:t>
+            </a:r>
+            <a:r>
+              <a:rPr sz="1100">
+                <a:solidFill>
+                  <a:srgbClr val="000000"/>
+                </a:solidFill>
+                <a:latin typeface="Consolas"/>
+              </a:rPr>
+              <a:t>model</a:t>
+            </a:r>
+            <a:r>
+              <a:rPr sz="1100">
+                <a:solidFill>
+                  <a:srgbClr val="666666"/>
+                </a:solidFill>
+                <a:latin typeface="Consolas"/>
+              </a:rPr>
+              <a:t>.</a:t>
+            </a:r>
+            <a:r>
+              <a:rPr sz="1100">
+                <a:solidFill>
+                  <a:srgbClr val="000000"/>
+                </a:solidFill>
+                <a:latin typeface="Consolas"/>
+              </a:rPr>
+              <a:t>predict</a:t>
+            </a:r>
+            <a:r>
+              <a:rPr sz="1100">
+                <a:solidFill>
+                  <a:srgbClr val="000000"/>
+                </a:solidFill>
+                <a:latin typeface="Consolas"/>
+              </a:rPr>
+              <a:t>(</a:t>
+            </a:r>
+            <a:r>
+              <a:rPr sz="1100">
+                <a:solidFill>
+                  <a:srgbClr val="000000"/>
+                </a:solidFill>
+                <a:latin typeface="Consolas"/>
+              </a:rPr>
+              <a:t>X_test</a:t>
+            </a:r>
+            <a:r>
+              <a:rPr sz="1100">
+                <a:solidFill>
+                  <a:srgbClr val="000000"/>
+                </a:solidFill>
+                <a:latin typeface="Consolas"/>
+              </a:rPr>
+              <a:t>)</a:t>
+            </a:r>
+            <a:r>
+              <a:rPr sz="1100">
+                <a:solidFill>
+                  <a:srgbClr val="BBBBBB"/>
+                </a:solidFill>
+                <a:latin typeface="Consolas"/>
+              </a:rPr>
+              <a:t>
+</a:t>
+            </a:r>
+          </a:p>
+        </p:txBody>
+      </p:sp>
+      <p:sp>
+        <p:nvSpPr>
+          <p:cNvPr id="8" name="TextBox 7"/>
           <p:cNvSpPr txBox="1"/>
           <p:nvPr/>
         </p:nvSpPr>
         <p:spPr>
           <a:xfrm>
-            <a:off x="640080" y="5550407"/>
+            <a:off x="640080" y="6492240"/>
             <a:ext cx="6172200" cy="201168"/>
           </a:xfrm>
           <a:prstGeom prst="rect">
@@ -8825,7 +12064,7 @@
       </p:sp>
       <p:pic>
         <p:nvPicPr>
-          <p:cNvPr id="7" name="Picture 6" descr="gradient_descent_contour.png"/>
+          <p:cNvPr id="9" name="Picture 8" descr="gradient_descent_contour.png"/>
           <p:cNvPicPr>
             <a:picLocks noChangeAspect="1"/>
           </p:cNvPicPr>
@@ -8839,8 +12078,8 @@
         </p:blipFill>
         <p:spPr>
           <a:xfrm>
-            <a:off x="7269480" y="1325880"/>
-            <a:ext cx="4465015" cy="3121672"/>
+            <a:off x="7269480" y="1371600"/>
+            <a:ext cx="4465015" cy="3494889"/>
           </a:xfrm>
           <a:prstGeom prst="rect">
             <a:avLst/>
@@ -9136,8 +12375,8 @@
         </p:blipFill>
         <p:spPr>
           <a:xfrm>
-            <a:off x="7489334" y="1325880"/>
-            <a:ext cx="4025306" cy="4407407"/>
+            <a:off x="7269480" y="1371600"/>
+            <a:ext cx="4465015" cy="4059105"/>
           </a:xfrm>
           <a:prstGeom prst="rect">
             <a:avLst/>
@@ -9204,7 +12443,7 @@
         <p:spPr>
           <a:xfrm>
             <a:off x="640080" y="1371600"/>
-            <a:ext cx="6263640" cy="2907791"/>
+            <a:ext cx="6263640" cy="3063240"/>
           </a:xfrm>
           <a:prstGeom prst="rect">
             <a:avLst/>
@@ -9213,7 +12452,7 @@
         </p:spPr>
         <p:txBody>
           <a:bodyPr wrap="square">
-            <a:normAutofit/>
+            <a:spAutoFit/>
           </a:bodyPr>
           <a:lstStyle/>
           <a:p>
@@ -9333,8 +12572,8 @@
         </p:nvSpPr>
         <p:spPr>
           <a:xfrm>
-            <a:off x="640080" y="4782312"/>
-            <a:ext cx="6172200" cy="713232"/>
+            <a:off x="640080" y="4994655"/>
+            <a:ext cx="6172200" cy="1442720"/>
           </a:xfrm>
           <a:prstGeom prst="rect">
             <a:avLst/>
@@ -9378,53 +12617,281 @@
         </p:nvSpPr>
         <p:spPr>
           <a:xfrm>
-            <a:off x="713231" y="4818888"/>
-            <a:ext cx="6025896" cy="640080"/>
+            <a:off x="713231" y="5040375"/>
+            <a:ext cx="6025896" cy="139700"/>
           </a:xfrm>
           <a:prstGeom prst="rect">
             <a:avLst/>
           </a:prstGeom>
           <a:noFill/>
+          <a:ln>
+            <a:noFill/>
+          </a:ln>
         </p:spPr>
         <p:txBody>
-          <a:bodyPr wrap="none">
+          <a:bodyPr wrap="none" anchor="t" lIns="0" rIns="0" tIns="0" bIns="0">
             <a:noAutofit/>
           </a:bodyPr>
           <a:lstStyle/>
           <a:p>
             <a:pPr>
+              <a:spcBef>
+                <a:spcPts val="0"/>
+              </a:spcBef>
               <a:spcAft>
                 <a:spcPts val="0"/>
               </a:spcAft>
             </a:pPr>
             <a:r>
-              <a:rPr sz="1100">
-                <a:solidFill>
-                  <a:srgbClr val="000000"/>
-                </a:solidFill>
-                <a:latin typeface="Consolas"/>
-              </a:rPr>
-              <a:t>prep = ColumnTransformer([</a:t>
-            </a:r>
-          </a:p>
+              <a:rPr sz="1100" b="1">
+                <a:solidFill>
+                  <a:srgbClr val="007020"/>
+                </a:solidFill>
+                <a:latin typeface="Consolas"/>
+              </a:rPr>
+              <a:t>from</a:t>
+            </a:r>
+            <a:r>
+              <a:rPr sz="1100">
+                <a:solidFill>
+                  <a:srgbClr val="BBBBBB"/>
+                </a:solidFill>
+                <a:latin typeface="Consolas"/>
+              </a:rPr>
+              <a:t> </a:t>
+            </a:r>
+            <a:r>
+              <a:rPr sz="1100" b="1">
+                <a:solidFill>
+                  <a:srgbClr val="0E84B5"/>
+                </a:solidFill>
+                <a:latin typeface="Consolas"/>
+              </a:rPr>
+              <a:t>sklearn</a:t>
+            </a:r>
+            <a:r>
+              <a:rPr sz="1100" b="1">
+                <a:solidFill>
+                  <a:srgbClr val="0E84B5"/>
+                </a:solidFill>
+                <a:latin typeface="Consolas"/>
+              </a:rPr>
+              <a:t>.</a:t>
+            </a:r>
+            <a:r>
+              <a:rPr sz="1100" b="1">
+                <a:solidFill>
+                  <a:srgbClr val="0E84B5"/>
+                </a:solidFill>
+                <a:latin typeface="Consolas"/>
+              </a:rPr>
+              <a:t>compose</a:t>
+            </a:r>
+            <a:r>
+              <a:rPr sz="1100">
+                <a:solidFill>
+                  <a:srgbClr val="BBBBBB"/>
+                </a:solidFill>
+                <a:latin typeface="Consolas"/>
+              </a:rPr>
+              <a:t> </a:t>
+            </a:r>
+            <a:r>
+              <a:rPr sz="1100" b="1">
+                <a:solidFill>
+                  <a:srgbClr val="007020"/>
+                </a:solidFill>
+                <a:latin typeface="Consolas"/>
+              </a:rPr>
+              <a:t>import</a:t>
+            </a:r>
+            <a:r>
+              <a:rPr sz="1100">
+                <a:solidFill>
+                  <a:srgbClr val="000000"/>
+                </a:solidFill>
+                <a:latin typeface="Consolas"/>
+              </a:rPr>
+              <a:t> </a:t>
+            </a:r>
+            <a:r>
+              <a:rPr sz="1100">
+                <a:solidFill>
+                  <a:srgbClr val="000000"/>
+                </a:solidFill>
+                <a:latin typeface="Consolas"/>
+              </a:rPr>
+              <a:t>ColumnTransformer</a:t>
+            </a:r>
+            <a:r>
+              <a:rPr sz="1100">
+                <a:solidFill>
+                  <a:srgbClr val="BBBBBB"/>
+                </a:solidFill>
+                <a:latin typeface="Consolas"/>
+              </a:rPr>
+              <a:t>
+</a:t>
+            </a:r>
+          </a:p>
+        </p:txBody>
+      </p:sp>
+      <p:sp>
+        <p:nvSpPr>
+          <p:cNvPr id="6" name="TextBox 5"/>
+          <p:cNvSpPr txBox="1"/>
+          <p:nvPr/>
+        </p:nvSpPr>
+        <p:spPr>
+          <a:xfrm>
+            <a:off x="713231" y="5180075"/>
+            <a:ext cx="6025896" cy="139700"/>
+          </a:xfrm>
+          <a:prstGeom prst="rect">
+            <a:avLst/>
+          </a:prstGeom>
+          <a:noFill/>
+          <a:ln>
+            <a:noFill/>
+          </a:ln>
+        </p:spPr>
+        <p:txBody>
+          <a:bodyPr wrap="none" anchor="t" lIns="0" rIns="0" tIns="0" bIns="0">
+            <a:noAutofit/>
+          </a:bodyPr>
+          <a:lstStyle/>
           <a:p>
             <a:pPr>
+              <a:spcBef>
+                <a:spcPts val="0"/>
+              </a:spcBef>
               <a:spcAft>
                 <a:spcPts val="0"/>
               </a:spcAft>
             </a:pPr>
             <a:r>
-              <a:rPr sz="1100">
-                <a:solidFill>
-                  <a:srgbClr val="000000"/>
-                </a:solidFill>
-                <a:latin typeface="Consolas"/>
-              </a:rPr>
-              <a:t>    ('num', StandardScaler(), num_cols),</a:t>
-            </a:r>
-          </a:p>
+              <a:rPr sz="1100" b="1">
+                <a:solidFill>
+                  <a:srgbClr val="007020"/>
+                </a:solidFill>
+                <a:latin typeface="Consolas"/>
+              </a:rPr>
+              <a:t>from</a:t>
+            </a:r>
+            <a:r>
+              <a:rPr sz="1100">
+                <a:solidFill>
+                  <a:srgbClr val="BBBBBB"/>
+                </a:solidFill>
+                <a:latin typeface="Consolas"/>
+              </a:rPr>
+              <a:t> </a:t>
+            </a:r>
+            <a:r>
+              <a:rPr sz="1100" b="1">
+                <a:solidFill>
+                  <a:srgbClr val="0E84B5"/>
+                </a:solidFill>
+                <a:latin typeface="Consolas"/>
+              </a:rPr>
+              <a:t>sklearn</a:t>
+            </a:r>
+            <a:r>
+              <a:rPr sz="1100" b="1">
+                <a:solidFill>
+                  <a:srgbClr val="0E84B5"/>
+                </a:solidFill>
+                <a:latin typeface="Consolas"/>
+              </a:rPr>
+              <a:t>.</a:t>
+            </a:r>
+            <a:r>
+              <a:rPr sz="1100" b="1">
+                <a:solidFill>
+                  <a:srgbClr val="0E84B5"/>
+                </a:solidFill>
+                <a:latin typeface="Consolas"/>
+              </a:rPr>
+              <a:t>preprocessing</a:t>
+            </a:r>
+            <a:r>
+              <a:rPr sz="1100">
+                <a:solidFill>
+                  <a:srgbClr val="BBBBBB"/>
+                </a:solidFill>
+                <a:latin typeface="Consolas"/>
+              </a:rPr>
+              <a:t> </a:t>
+            </a:r>
+            <a:r>
+              <a:rPr sz="1100" b="1">
+                <a:solidFill>
+                  <a:srgbClr val="007020"/>
+                </a:solidFill>
+                <a:latin typeface="Consolas"/>
+              </a:rPr>
+              <a:t>import</a:t>
+            </a:r>
+            <a:r>
+              <a:rPr sz="1100">
+                <a:solidFill>
+                  <a:srgbClr val="000000"/>
+                </a:solidFill>
+                <a:latin typeface="Consolas"/>
+              </a:rPr>
+              <a:t> </a:t>
+            </a:r>
+            <a:r>
+              <a:rPr sz="1100">
+                <a:solidFill>
+                  <a:srgbClr val="000000"/>
+                </a:solidFill>
+                <a:latin typeface="Consolas"/>
+              </a:rPr>
+              <a:t>(</a:t>
+            </a:r>
+            <a:r>
+              <a:rPr sz="1100">
+                <a:solidFill>
+                  <a:srgbClr val="BBBBBB"/>
+                </a:solidFill>
+                <a:latin typeface="Consolas"/>
+              </a:rPr>
+              <a:t>
+</a:t>
+            </a:r>
+          </a:p>
+        </p:txBody>
+      </p:sp>
+      <p:sp>
+        <p:nvSpPr>
+          <p:cNvPr id="7" name="TextBox 6"/>
+          <p:cNvSpPr txBox="1"/>
+          <p:nvPr/>
+        </p:nvSpPr>
+        <p:spPr>
+          <a:xfrm>
+            <a:off x="713231" y="5319775"/>
+            <a:ext cx="6025896" cy="139700"/>
+          </a:xfrm>
+          <a:prstGeom prst="rect">
+            <a:avLst/>
+          </a:prstGeom>
+          <a:noFill/>
+          <a:ln>
+            <a:noFill/>
+          </a:ln>
+        </p:spPr>
+        <p:txBody>
+          <a:bodyPr wrap="none" anchor="t" lIns="0" rIns="0" tIns="0" bIns="0">
+            <a:noAutofit/>
+          </a:bodyPr>
+          <a:lstStyle/>
           <a:p>
             <a:pPr>
+              <a:spcBef>
+                <a:spcPts val="0"/>
+              </a:spcBef>
               <a:spcAft>
                 <a:spcPts val="0"/>
               </a:spcAft>
@@ -9436,11 +12903,68 @@
                 </a:solidFill>
                 <a:latin typeface="Consolas"/>
               </a:rPr>
-              <a:t>    ('cat', OneHotEncoder(), cat_cols)])</a:t>
-            </a:r>
-          </a:p>
+              <a:t>    </a:t>
+            </a:r>
+            <a:r>
+              <a:rPr sz="1100">
+                <a:solidFill>
+                  <a:srgbClr val="000000"/>
+                </a:solidFill>
+                <a:latin typeface="Consolas"/>
+              </a:rPr>
+              <a:t>StandardScaler</a:t>
+            </a:r>
+            <a:r>
+              <a:rPr sz="1100">
+                <a:solidFill>
+                  <a:srgbClr val="000000"/>
+                </a:solidFill>
+                <a:latin typeface="Consolas"/>
+              </a:rPr>
+              <a:t>,</a:t>
+            </a:r>
+            <a:r>
+              <a:rPr sz="1100">
+                <a:solidFill>
+                  <a:srgbClr val="BBBBBB"/>
+                </a:solidFill>
+                <a:latin typeface="Consolas"/>
+              </a:rPr>
+              <a:t>
+</a:t>
+            </a:r>
+          </a:p>
+        </p:txBody>
+      </p:sp>
+      <p:sp>
+        <p:nvSpPr>
+          <p:cNvPr id="8" name="TextBox 7"/>
+          <p:cNvSpPr txBox="1"/>
+          <p:nvPr/>
+        </p:nvSpPr>
+        <p:spPr>
+          <a:xfrm>
+            <a:off x="713231" y="5459475"/>
+            <a:ext cx="6025896" cy="139700"/>
+          </a:xfrm>
+          <a:prstGeom prst="rect">
+            <a:avLst/>
+          </a:prstGeom>
+          <a:noFill/>
+          <a:ln>
+            <a:noFill/>
+          </a:ln>
+        </p:spPr>
+        <p:txBody>
+          <a:bodyPr wrap="none" anchor="t" lIns="0" rIns="0" tIns="0" bIns="0">
+            <a:noAutofit/>
+          </a:bodyPr>
+          <a:lstStyle/>
           <a:p>
             <a:pPr>
+              <a:spcBef>
+                <a:spcPts val="0"/>
+              </a:spcBef>
               <a:spcAft>
                 <a:spcPts val="0"/>
               </a:spcAft>
@@ -9452,20 +12976,719 @@
                 </a:solidFill>
                 <a:latin typeface="Consolas"/>
               </a:rPr>
-              <a:t>X_scaled = prep.fit_transform(X_train)</a:t>
-            </a:r>
-          </a:p>
-        </p:txBody>
-      </p:sp>
-      <p:sp>
-        <p:nvSpPr>
-          <p:cNvPr id="6" name="TextBox 5"/>
+              <a:t>    </a:t>
+            </a:r>
+            <a:r>
+              <a:rPr sz="1100">
+                <a:solidFill>
+                  <a:srgbClr val="000000"/>
+                </a:solidFill>
+                <a:latin typeface="Consolas"/>
+              </a:rPr>
+              <a:t>OneHotEncoder</a:t>
+            </a:r>
+            <a:r>
+              <a:rPr sz="1100">
+                <a:solidFill>
+                  <a:srgbClr val="000000"/>
+                </a:solidFill>
+                <a:latin typeface="Consolas"/>
+              </a:rPr>
+              <a:t>)</a:t>
+            </a:r>
+            <a:r>
+              <a:rPr sz="1100">
+                <a:solidFill>
+                  <a:srgbClr val="BBBBBB"/>
+                </a:solidFill>
+                <a:latin typeface="Consolas"/>
+              </a:rPr>
+              <a:t>
+</a:t>
+            </a:r>
+          </a:p>
+        </p:txBody>
+      </p:sp>
+      <p:sp>
+        <p:nvSpPr>
+          <p:cNvPr id="9" name="TextBox 8"/>
           <p:cNvSpPr txBox="1"/>
           <p:nvPr/>
         </p:nvSpPr>
         <p:spPr>
           <a:xfrm>
-            <a:off x="640080" y="5550407"/>
+            <a:off x="713231" y="5599176"/>
+            <a:ext cx="6025896" cy="139700"/>
+          </a:xfrm>
+          <a:prstGeom prst="rect">
+            <a:avLst/>
+          </a:prstGeom>
+          <a:noFill/>
+          <a:ln>
+            <a:noFill/>
+          </a:ln>
+        </p:spPr>
+        <p:txBody>
+          <a:bodyPr wrap="none" anchor="t" lIns="0" rIns="0" tIns="0" bIns="0">
+            <a:noAutofit/>
+          </a:bodyPr>
+          <a:lstStyle/>
+          <a:p>
+            <a:pPr>
+              <a:spcBef>
+                <a:spcPts val="0"/>
+              </a:spcBef>
+              <a:spcAft>
+                <a:spcPts val="0"/>
+              </a:spcAft>
+            </a:pPr>
+            <a:r>
+              <a:rPr sz="1100">
+                <a:solidFill>
+                  <a:srgbClr val="000000"/>
+                </a:solidFill>
+                <a:latin typeface="Consolas"/>
+              </a:rPr>
+              <a:t>prep</a:t>
+            </a:r>
+            <a:r>
+              <a:rPr sz="1100">
+                <a:solidFill>
+                  <a:srgbClr val="000000"/>
+                </a:solidFill>
+                <a:latin typeface="Consolas"/>
+              </a:rPr>
+              <a:t> </a:t>
+            </a:r>
+            <a:r>
+              <a:rPr sz="1100">
+                <a:solidFill>
+                  <a:srgbClr val="666666"/>
+                </a:solidFill>
+                <a:latin typeface="Consolas"/>
+              </a:rPr>
+              <a:t>=</a:t>
+            </a:r>
+            <a:r>
+              <a:rPr sz="1100">
+                <a:solidFill>
+                  <a:srgbClr val="000000"/>
+                </a:solidFill>
+                <a:latin typeface="Consolas"/>
+              </a:rPr>
+              <a:t> </a:t>
+            </a:r>
+            <a:r>
+              <a:rPr sz="1100">
+                <a:solidFill>
+                  <a:srgbClr val="000000"/>
+                </a:solidFill>
+                <a:latin typeface="Consolas"/>
+              </a:rPr>
+              <a:t>ColumnTransformer</a:t>
+            </a:r>
+            <a:r>
+              <a:rPr sz="1100">
+                <a:solidFill>
+                  <a:srgbClr val="000000"/>
+                </a:solidFill>
+                <a:latin typeface="Consolas"/>
+              </a:rPr>
+              <a:t>(</a:t>
+            </a:r>
+            <a:r>
+              <a:rPr sz="1100">
+                <a:solidFill>
+                  <a:srgbClr val="000000"/>
+                </a:solidFill>
+                <a:latin typeface="Consolas"/>
+              </a:rPr>
+              <a:t>[</a:t>
+            </a:r>
+            <a:r>
+              <a:rPr sz="1100">
+                <a:solidFill>
+                  <a:srgbClr val="BBBBBB"/>
+                </a:solidFill>
+                <a:latin typeface="Consolas"/>
+              </a:rPr>
+              <a:t>
+</a:t>
+            </a:r>
+          </a:p>
+        </p:txBody>
+      </p:sp>
+      <p:sp>
+        <p:nvSpPr>
+          <p:cNvPr id="10" name="TextBox 9"/>
+          <p:cNvSpPr txBox="1"/>
+          <p:nvPr/>
+        </p:nvSpPr>
+        <p:spPr>
+          <a:xfrm>
+            <a:off x="713231" y="5738876"/>
+            <a:ext cx="6025896" cy="139700"/>
+          </a:xfrm>
+          <a:prstGeom prst="rect">
+            <a:avLst/>
+          </a:prstGeom>
+          <a:noFill/>
+          <a:ln>
+            <a:noFill/>
+          </a:ln>
+        </p:spPr>
+        <p:txBody>
+          <a:bodyPr wrap="none" anchor="t" lIns="0" rIns="0" tIns="0" bIns="0">
+            <a:noAutofit/>
+          </a:bodyPr>
+          <a:lstStyle/>
+          <a:p>
+            <a:pPr>
+              <a:spcBef>
+                <a:spcPts val="0"/>
+              </a:spcBef>
+              <a:spcAft>
+                <a:spcPts val="0"/>
+              </a:spcAft>
+            </a:pPr>
+            <a:r>
+              <a:rPr sz="1100">
+                <a:solidFill>
+                  <a:srgbClr val="000000"/>
+                </a:solidFill>
+                <a:latin typeface="Consolas"/>
+              </a:rPr>
+              <a:t>    </a:t>
+            </a:r>
+            <a:r>
+              <a:rPr sz="1100">
+                <a:solidFill>
+                  <a:srgbClr val="000000"/>
+                </a:solidFill>
+                <a:latin typeface="Consolas"/>
+              </a:rPr>
+              <a:t>(</a:t>
+            </a:r>
+            <a:r>
+              <a:rPr sz="1100">
+                <a:solidFill>
+                  <a:srgbClr val="4070A0"/>
+                </a:solidFill>
+                <a:latin typeface="Consolas"/>
+              </a:rPr>
+              <a:t>'</a:t>
+            </a:r>
+            <a:r>
+              <a:rPr sz="1100">
+                <a:solidFill>
+                  <a:srgbClr val="4070A0"/>
+                </a:solidFill>
+                <a:latin typeface="Consolas"/>
+              </a:rPr>
+              <a:t>num</a:t>
+            </a:r>
+            <a:r>
+              <a:rPr sz="1100">
+                <a:solidFill>
+                  <a:srgbClr val="4070A0"/>
+                </a:solidFill>
+                <a:latin typeface="Consolas"/>
+              </a:rPr>
+              <a:t>'</a:t>
+            </a:r>
+            <a:r>
+              <a:rPr sz="1100">
+                <a:solidFill>
+                  <a:srgbClr val="000000"/>
+                </a:solidFill>
+                <a:latin typeface="Consolas"/>
+              </a:rPr>
+              <a:t>,</a:t>
+            </a:r>
+            <a:r>
+              <a:rPr sz="1100">
+                <a:solidFill>
+                  <a:srgbClr val="000000"/>
+                </a:solidFill>
+                <a:latin typeface="Consolas"/>
+              </a:rPr>
+              <a:t> </a:t>
+            </a:r>
+            <a:r>
+              <a:rPr sz="1100">
+                <a:solidFill>
+                  <a:srgbClr val="000000"/>
+                </a:solidFill>
+                <a:latin typeface="Consolas"/>
+              </a:rPr>
+              <a:t>StandardScaler</a:t>
+            </a:r>
+            <a:r>
+              <a:rPr sz="1100">
+                <a:solidFill>
+                  <a:srgbClr val="000000"/>
+                </a:solidFill>
+                <a:latin typeface="Consolas"/>
+              </a:rPr>
+              <a:t>(</a:t>
+            </a:r>
+            <a:r>
+              <a:rPr sz="1100">
+                <a:solidFill>
+                  <a:srgbClr val="000000"/>
+                </a:solidFill>
+                <a:latin typeface="Consolas"/>
+              </a:rPr>
+              <a:t>)</a:t>
+            </a:r>
+            <a:r>
+              <a:rPr sz="1100">
+                <a:solidFill>
+                  <a:srgbClr val="000000"/>
+                </a:solidFill>
+                <a:latin typeface="Consolas"/>
+              </a:rPr>
+              <a:t>,</a:t>
+            </a:r>
+            <a:r>
+              <a:rPr sz="1100">
+                <a:solidFill>
+                  <a:srgbClr val="000000"/>
+                </a:solidFill>
+                <a:latin typeface="Consolas"/>
+              </a:rPr>
+              <a:t> </a:t>
+            </a:r>
+            <a:r>
+              <a:rPr sz="1100">
+                <a:solidFill>
+                  <a:srgbClr val="000000"/>
+                </a:solidFill>
+                <a:latin typeface="Consolas"/>
+              </a:rPr>
+              <a:t>num_cols</a:t>
+            </a:r>
+            <a:r>
+              <a:rPr sz="1100">
+                <a:solidFill>
+                  <a:srgbClr val="000000"/>
+                </a:solidFill>
+                <a:latin typeface="Consolas"/>
+              </a:rPr>
+              <a:t>)</a:t>
+            </a:r>
+            <a:r>
+              <a:rPr sz="1100">
+                <a:solidFill>
+                  <a:srgbClr val="000000"/>
+                </a:solidFill>
+                <a:latin typeface="Consolas"/>
+              </a:rPr>
+              <a:t>,</a:t>
+            </a:r>
+            <a:r>
+              <a:rPr sz="1100">
+                <a:solidFill>
+                  <a:srgbClr val="BBBBBB"/>
+                </a:solidFill>
+                <a:latin typeface="Consolas"/>
+              </a:rPr>
+              <a:t>
+</a:t>
+            </a:r>
+          </a:p>
+        </p:txBody>
+      </p:sp>
+      <p:sp>
+        <p:nvSpPr>
+          <p:cNvPr id="11" name="TextBox 10"/>
+          <p:cNvSpPr txBox="1"/>
+          <p:nvPr/>
+        </p:nvSpPr>
+        <p:spPr>
+          <a:xfrm>
+            <a:off x="713231" y="5878576"/>
+            <a:ext cx="6025896" cy="139700"/>
+          </a:xfrm>
+          <a:prstGeom prst="rect">
+            <a:avLst/>
+          </a:prstGeom>
+          <a:noFill/>
+          <a:ln>
+            <a:noFill/>
+          </a:ln>
+        </p:spPr>
+        <p:txBody>
+          <a:bodyPr wrap="none" anchor="t" lIns="0" rIns="0" tIns="0" bIns="0">
+            <a:noAutofit/>
+          </a:bodyPr>
+          <a:lstStyle/>
+          <a:p>
+            <a:pPr>
+              <a:spcBef>
+                <a:spcPts val="0"/>
+              </a:spcBef>
+              <a:spcAft>
+                <a:spcPts val="0"/>
+              </a:spcAft>
+            </a:pPr>
+            <a:r>
+              <a:rPr sz="1100">
+                <a:solidFill>
+                  <a:srgbClr val="000000"/>
+                </a:solidFill>
+                <a:latin typeface="Consolas"/>
+              </a:rPr>
+              <a:t>    </a:t>
+            </a:r>
+            <a:r>
+              <a:rPr sz="1100">
+                <a:solidFill>
+                  <a:srgbClr val="000000"/>
+                </a:solidFill>
+                <a:latin typeface="Consolas"/>
+              </a:rPr>
+              <a:t>(</a:t>
+            </a:r>
+            <a:r>
+              <a:rPr sz="1100">
+                <a:solidFill>
+                  <a:srgbClr val="4070A0"/>
+                </a:solidFill>
+                <a:latin typeface="Consolas"/>
+              </a:rPr>
+              <a:t>'</a:t>
+            </a:r>
+            <a:r>
+              <a:rPr sz="1100">
+                <a:solidFill>
+                  <a:srgbClr val="4070A0"/>
+                </a:solidFill>
+                <a:latin typeface="Consolas"/>
+              </a:rPr>
+              <a:t>cat</a:t>
+            </a:r>
+            <a:r>
+              <a:rPr sz="1100">
+                <a:solidFill>
+                  <a:srgbClr val="4070A0"/>
+                </a:solidFill>
+                <a:latin typeface="Consolas"/>
+              </a:rPr>
+              <a:t>'</a:t>
+            </a:r>
+            <a:r>
+              <a:rPr sz="1100">
+                <a:solidFill>
+                  <a:srgbClr val="000000"/>
+                </a:solidFill>
+                <a:latin typeface="Consolas"/>
+              </a:rPr>
+              <a:t>,</a:t>
+            </a:r>
+            <a:r>
+              <a:rPr sz="1100">
+                <a:solidFill>
+                  <a:srgbClr val="000000"/>
+                </a:solidFill>
+                <a:latin typeface="Consolas"/>
+              </a:rPr>
+              <a:t> </a:t>
+            </a:r>
+            <a:r>
+              <a:rPr sz="1100">
+                <a:solidFill>
+                  <a:srgbClr val="000000"/>
+                </a:solidFill>
+                <a:latin typeface="Consolas"/>
+              </a:rPr>
+              <a:t>OneHotEncoder</a:t>
+            </a:r>
+            <a:r>
+              <a:rPr sz="1100">
+                <a:solidFill>
+                  <a:srgbClr val="000000"/>
+                </a:solidFill>
+                <a:latin typeface="Consolas"/>
+              </a:rPr>
+              <a:t>(</a:t>
+            </a:r>
+            <a:r>
+              <a:rPr sz="1100">
+                <a:solidFill>
+                  <a:srgbClr val="000000"/>
+                </a:solidFill>
+                <a:latin typeface="Consolas"/>
+              </a:rPr>
+              <a:t>)</a:t>
+            </a:r>
+            <a:r>
+              <a:rPr sz="1100">
+                <a:solidFill>
+                  <a:srgbClr val="000000"/>
+                </a:solidFill>
+                <a:latin typeface="Consolas"/>
+              </a:rPr>
+              <a:t>,</a:t>
+            </a:r>
+            <a:r>
+              <a:rPr sz="1100">
+                <a:solidFill>
+                  <a:srgbClr val="000000"/>
+                </a:solidFill>
+                <a:latin typeface="Consolas"/>
+              </a:rPr>
+              <a:t> </a:t>
+            </a:r>
+            <a:r>
+              <a:rPr sz="1100">
+                <a:solidFill>
+                  <a:srgbClr val="000000"/>
+                </a:solidFill>
+                <a:latin typeface="Consolas"/>
+              </a:rPr>
+              <a:t>cat_cols</a:t>
+            </a:r>
+            <a:r>
+              <a:rPr sz="1100">
+                <a:solidFill>
+                  <a:srgbClr val="000000"/>
+                </a:solidFill>
+                <a:latin typeface="Consolas"/>
+              </a:rPr>
+              <a:t>)</a:t>
+            </a:r>
+            <a:r>
+              <a:rPr sz="1100">
+                <a:solidFill>
+                  <a:srgbClr val="000000"/>
+                </a:solidFill>
+                <a:latin typeface="Consolas"/>
+              </a:rPr>
+              <a:t>,</a:t>
+            </a:r>
+            <a:r>
+              <a:rPr sz="1100">
+                <a:solidFill>
+                  <a:srgbClr val="BBBBBB"/>
+                </a:solidFill>
+                <a:latin typeface="Consolas"/>
+              </a:rPr>
+              <a:t>
+</a:t>
+            </a:r>
+          </a:p>
+        </p:txBody>
+      </p:sp>
+      <p:sp>
+        <p:nvSpPr>
+          <p:cNvPr id="12" name="TextBox 11"/>
+          <p:cNvSpPr txBox="1"/>
+          <p:nvPr/>
+        </p:nvSpPr>
+        <p:spPr>
+          <a:xfrm>
+            <a:off x="713231" y="6018275"/>
+            <a:ext cx="6025896" cy="139700"/>
+          </a:xfrm>
+          <a:prstGeom prst="rect">
+            <a:avLst/>
+          </a:prstGeom>
+          <a:noFill/>
+          <a:ln>
+            <a:noFill/>
+          </a:ln>
+        </p:spPr>
+        <p:txBody>
+          <a:bodyPr wrap="none" anchor="t" lIns="0" rIns="0" tIns="0" bIns="0">
+            <a:noAutofit/>
+          </a:bodyPr>
+          <a:lstStyle/>
+          <a:p>
+            <a:pPr>
+              <a:spcBef>
+                <a:spcPts val="0"/>
+              </a:spcBef>
+              <a:spcAft>
+                <a:spcPts val="0"/>
+              </a:spcAft>
+            </a:pPr>
+            <a:r>
+              <a:rPr sz="1100">
+                <a:solidFill>
+                  <a:srgbClr val="000000"/>
+                </a:solidFill>
+                <a:latin typeface="Consolas"/>
+              </a:rPr>
+              <a:t>]</a:t>
+            </a:r>
+            <a:r>
+              <a:rPr sz="1100">
+                <a:solidFill>
+                  <a:srgbClr val="000000"/>
+                </a:solidFill>
+                <a:latin typeface="Consolas"/>
+              </a:rPr>
+              <a:t>)</a:t>
+            </a:r>
+            <a:r>
+              <a:rPr sz="1100">
+                <a:solidFill>
+                  <a:srgbClr val="BBBBBB"/>
+                </a:solidFill>
+                <a:latin typeface="Consolas"/>
+              </a:rPr>
+              <a:t>
+</a:t>
+            </a:r>
+          </a:p>
+        </p:txBody>
+      </p:sp>
+      <p:sp>
+        <p:nvSpPr>
+          <p:cNvPr id="13" name="TextBox 12"/>
+          <p:cNvSpPr txBox="1"/>
+          <p:nvPr/>
+        </p:nvSpPr>
+        <p:spPr>
+          <a:xfrm>
+            <a:off x="713231" y="6157975"/>
+            <a:ext cx="6025896" cy="139700"/>
+          </a:xfrm>
+          <a:prstGeom prst="rect">
+            <a:avLst/>
+          </a:prstGeom>
+          <a:noFill/>
+          <a:ln>
+            <a:noFill/>
+          </a:ln>
+        </p:spPr>
+        <p:txBody>
+          <a:bodyPr wrap="none" anchor="t" lIns="0" rIns="0" tIns="0" bIns="0">
+            <a:noAutofit/>
+          </a:bodyPr>
+          <a:lstStyle/>
+          <a:p>
+            <a:pPr>
+              <a:spcBef>
+                <a:spcPts val="0"/>
+              </a:spcBef>
+              <a:spcAft>
+                <a:spcPts val="0"/>
+              </a:spcAft>
+            </a:pPr>
+            <a:r>
+              <a:rPr sz="1100">
+                <a:solidFill>
+                  <a:srgbClr val="000000"/>
+                </a:solidFill>
+                <a:latin typeface="Consolas"/>
+              </a:rPr>
+              <a:t>X_scaled</a:t>
+            </a:r>
+            <a:r>
+              <a:rPr sz="1100">
+                <a:solidFill>
+                  <a:srgbClr val="000000"/>
+                </a:solidFill>
+                <a:latin typeface="Consolas"/>
+              </a:rPr>
+              <a:t> </a:t>
+            </a:r>
+            <a:r>
+              <a:rPr sz="1100">
+                <a:solidFill>
+                  <a:srgbClr val="666666"/>
+                </a:solidFill>
+                <a:latin typeface="Consolas"/>
+              </a:rPr>
+              <a:t>=</a:t>
+            </a:r>
+            <a:r>
+              <a:rPr sz="1100">
+                <a:solidFill>
+                  <a:srgbClr val="000000"/>
+                </a:solidFill>
+                <a:latin typeface="Consolas"/>
+              </a:rPr>
+              <a:t> </a:t>
+            </a:r>
+            <a:r>
+              <a:rPr sz="1100">
+                <a:solidFill>
+                  <a:srgbClr val="000000"/>
+                </a:solidFill>
+                <a:latin typeface="Consolas"/>
+              </a:rPr>
+              <a:t>prep</a:t>
+            </a:r>
+            <a:r>
+              <a:rPr sz="1100">
+                <a:solidFill>
+                  <a:srgbClr val="666666"/>
+                </a:solidFill>
+                <a:latin typeface="Consolas"/>
+              </a:rPr>
+              <a:t>.</a:t>
+            </a:r>
+            <a:r>
+              <a:rPr sz="1100">
+                <a:solidFill>
+                  <a:srgbClr val="000000"/>
+                </a:solidFill>
+                <a:latin typeface="Consolas"/>
+              </a:rPr>
+              <a:t>fit_transform</a:t>
+            </a:r>
+            <a:r>
+              <a:rPr sz="1100">
+                <a:solidFill>
+                  <a:srgbClr val="000000"/>
+                </a:solidFill>
+                <a:latin typeface="Consolas"/>
+              </a:rPr>
+              <a:t>(</a:t>
+            </a:r>
+            <a:r>
+              <a:rPr sz="1100">
+                <a:solidFill>
+                  <a:srgbClr val="000000"/>
+                </a:solidFill>
+                <a:latin typeface="Consolas"/>
+              </a:rPr>
+              <a:t>X_train</a:t>
+            </a:r>
+            <a:r>
+              <a:rPr sz="1100">
+                <a:solidFill>
+                  <a:srgbClr val="000000"/>
+                </a:solidFill>
+                <a:latin typeface="Consolas"/>
+              </a:rPr>
+              <a:t>)</a:t>
+            </a:r>
+            <a:r>
+              <a:rPr sz="1100">
+                <a:solidFill>
+                  <a:srgbClr val="BBBBBB"/>
+                </a:solidFill>
+                <a:latin typeface="Consolas"/>
+              </a:rPr>
+              <a:t>
+</a:t>
+            </a:r>
+          </a:p>
+        </p:txBody>
+      </p:sp>
+      <p:sp>
+        <p:nvSpPr>
+          <p:cNvPr id="14" name="TextBox 13"/>
+          <p:cNvSpPr txBox="1"/>
+          <p:nvPr/>
+        </p:nvSpPr>
+        <p:spPr>
+          <a:xfrm>
+            <a:off x="640080" y="6492240"/>
             <a:ext cx="6172200" cy="201168"/>
           </a:xfrm>
           <a:prstGeom prst="rect">
@@ -9494,7 +13717,7 @@
       </p:sp>
       <p:pic>
         <p:nvPicPr>
-          <p:cNvPr id="7" name="Picture 6" descr="scaling_weights_compare.png"/>
+          <p:cNvPr id="15" name="Picture 14" descr="scaling_weights_compare.png"/>
           <p:cNvPicPr>
             <a:picLocks noChangeAspect="1"/>
           </p:cNvPicPr>
@@ -9508,8 +13731,8 @@
         </p:blipFill>
         <p:spPr>
           <a:xfrm>
-            <a:off x="7306686" y="1325880"/>
-            <a:ext cx="4390601" cy="4407407"/>
+            <a:off x="7599832" y="1371600"/>
+            <a:ext cx="3804310" cy="3458464"/>
           </a:xfrm>
           <a:prstGeom prst="rect">
             <a:avLst/>
@@ -9646,7 +13869,26 @@
                   <a:srgbClr val="000000"/>
                 </a:solidFill>
               </a:rPr>
-              <a:t xml:space="preserve"> методы (MAE, `HuberRegressor`, RANSAC) меньше реагируют на выбросы, чем MSE</a:t>
+              <a:t xml:space="preserve"> методы (MAE, </a:t>
+            </a:r>
+            <a:r>
+              <a:rPr lang="ru-RU" dirty="0" sz="2000">
+                <a:latin typeface="Consolas"/>
+                <a:cs typeface="Consolas"/>
+                <a:ea typeface="Consolas"/>
+                <a:solidFill>
+                  <a:srgbClr val="000000"/>
+                </a:solidFill>
+              </a:rPr>
+              <a:t>HuberRegressor</a:t>
+            </a:r>
+            <a:r>
+              <a:rPr lang="ru-RU" dirty="0" sz="2000">
+                <a:solidFill>
+                  <a:srgbClr val="000000"/>
+                </a:solidFill>
+              </a:rPr>
+              <a:t>, RANSAC) меньше реагируют на выбросы, чем MSE</a:t>
             </a:r>
           </a:p>
           <a:p>
@@ -9734,8 +13976,8 @@
         </p:blipFill>
         <p:spPr>
           <a:xfrm>
-            <a:off x="7353822" y="1325880"/>
-            <a:ext cx="4296330" cy="4407408"/>
+            <a:off x="7269480" y="1371600"/>
+            <a:ext cx="4465015" cy="4059105"/>
           </a:xfrm>
           <a:prstGeom prst="rect">
             <a:avLst/>
@@ -9916,8 +14158,8 @@
         </p:blipFill>
         <p:spPr>
           <a:xfrm>
-            <a:off x="7269480" y="1325880"/>
-            <a:ext cx="4465015" cy="3659219"/>
+            <a:off x="7269480" y="1371600"/>
+            <a:ext cx="4465015" cy="4059105"/>
           </a:xfrm>
           <a:prstGeom prst="rect">
             <a:avLst/>
